--- a/FIM_BookJ5_Synthese_Simulations_V6-01062026SHY-TE.pptx
+++ b/FIM_BookJ5_Synthese_Simulations_V6-01062026SHY-TE.pptx
@@ -3143,13 +3143,13 @@
         <p:spPr>
           <a:xfrm>
             <a:off x="0" y="0"/>
-            <a:ext cx="12188952" cy="2377440"/>
-          </a:xfrm>
-          <a:prstGeom prst="rect">
-            <a:avLst/>
-          </a:prstGeom>
-          <a:solidFill>
-            <a:srgbClr val="005050"/>
+            <a:ext cx="12188952" cy="2286000"/>
+          </a:xfrm>
+          <a:prstGeom prst="rect">
+            <a:avLst/>
+          </a:prstGeom>
+          <a:solidFill>
+            <a:srgbClr val="005555"/>
           </a:solidFill>
           <a:ln>
             <a:noFill/>
@@ -3185,14 +3185,14 @@
         </p:nvSpPr>
         <p:spPr>
           <a:xfrm>
-            <a:off x="0" y="2331720"/>
-            <a:ext cx="12188952" cy="91440"/>
-          </a:xfrm>
-          <a:prstGeom prst="rect">
-            <a:avLst/>
-          </a:prstGeom>
-          <a:solidFill>
-            <a:srgbClr val="C9A84C"/>
+            <a:off x="0" y="2267712"/>
+            <a:ext cx="12188952" cy="73152"/>
+          </a:xfrm>
+          <a:prstGeom prst="rect">
+            <a:avLst/>
+          </a:prstGeom>
+          <a:solidFill>
+            <a:srgbClr val="FF0000"/>
           </a:solidFill>
           <a:ln>
             <a:noFill/>
@@ -3222,14 +3222,57 @@
       </p:sp>
       <p:sp>
         <p:nvSpPr>
-          <p:cNvPr id="5" name="TextBox 4"/>
+          <p:cNvPr id="5" name="Rectangle 4"/>
+          <p:cNvSpPr/>
+          <p:nvPr/>
+        </p:nvSpPr>
+        <p:spPr>
+          <a:xfrm>
+            <a:off x="274320" y="109728"/>
+            <a:ext cx="2926080" cy="822960"/>
+          </a:xfrm>
+          <a:prstGeom prst="rect">
+            <a:avLst/>
+          </a:prstGeom>
+          <a:solidFill>
+            <a:srgbClr val="008080"/>
+          </a:solidFill>
+          <a:ln>
+            <a:noFill/>
+          </a:ln>
+        </p:spPr>
+        <p:style>
+          <a:lnRef idx="1">
+            <a:schemeClr val="accent1"/>
+          </a:lnRef>
+          <a:fillRef idx="3">
+            <a:schemeClr val="accent1"/>
+          </a:fillRef>
+          <a:effectRef idx="2">
+            <a:schemeClr val="accent1"/>
+          </a:effectRef>
+          <a:fontRef idx="minor">
+            <a:schemeClr val="lt1"/>
+          </a:fontRef>
+        </p:style>
+        <p:txBody>
+          <a:bodyPr rtlCol="0" anchor="ctr"/>
+          <a:lstStyle/>
+          <a:p>
+            <a:pPr algn="ctr"/>
+          </a:p>
+        </p:txBody>
+      </p:sp>
+      <p:sp>
+        <p:nvSpPr>
+          <p:cNvPr id="6" name="TextBox 5"/>
           <p:cNvSpPr txBox="1"/>
           <p:nvPr/>
         </p:nvSpPr>
         <p:spPr>
           <a:xfrm>
-            <a:off x="365760" y="182880"/>
-            <a:ext cx="3657600" cy="365760"/>
+            <a:off x="320040" y="118872"/>
+            <a:ext cx="1097280" cy="804672"/>
           </a:xfrm>
           <a:prstGeom prst="rect">
             <a:avLst/>
@@ -3244,26 +3287,26 @@
           <a:p>
             <a:pPr algn="l"/>
             <a:r>
-              <a:rPr sz="1000" b="1" i="0">
-                <a:solidFill>
-                  <a:srgbClr val="C9A84C"/>
+              <a:rPr sz="3600" b="1" i="0">
+                <a:solidFill>
+                  <a:srgbClr val="FFFFFF"/>
                 </a:solidFill>
               </a:rPr>
-              <a:t>BOOK J5 · Journée 5 — Certification</a:t>
-            </a:r>
-          </a:p>
-        </p:txBody>
-      </p:sp>
-      <p:sp>
-        <p:nvSpPr>
-          <p:cNvPr id="6" name="TextBox 5"/>
+              <a:t>SHY</a:t>
+            </a:r>
+          </a:p>
+        </p:txBody>
+      </p:sp>
+      <p:sp>
+        <p:nvSpPr>
+          <p:cNvPr id="7" name="TextBox 6"/>
           <p:cNvSpPr txBox="1"/>
           <p:nvPr/>
         </p:nvSpPr>
         <p:spPr>
           <a:xfrm>
-            <a:off x="457200" y="502920"/>
-            <a:ext cx="11247120" cy="1371600"/>
+            <a:off x="1371600" y="347472"/>
+            <a:ext cx="1828800" cy="411480"/>
           </a:xfrm>
           <a:prstGeom prst="rect">
             <a:avLst/>
@@ -3278,26 +3321,69 @@
           <a:p>
             <a:pPr algn="l"/>
             <a:r>
-              <a:rPr sz="3000" b="1" i="0">
+              <a:rPr sz="1400" b="1" i="0">
                 <a:solidFill>
                   <a:srgbClr val="FFFFFF"/>
                 </a:solidFill>
               </a:rPr>
-              <a:t>Synthèse &amp; Simulations</a:t>
-            </a:r>
-          </a:p>
-        </p:txBody>
-      </p:sp>
-      <p:sp>
-        <p:nvSpPr>
-          <p:cNvPr id="7" name="TextBox 6"/>
+              <a:t>Performance</a:t>
+            </a:r>
+          </a:p>
+        </p:txBody>
+      </p:sp>
+      <p:sp>
+        <p:nvSpPr>
+          <p:cNvPr id="8" name="Rectangle 7"/>
+          <p:cNvSpPr/>
+          <p:nvPr/>
+        </p:nvSpPr>
+        <p:spPr>
+          <a:xfrm>
+            <a:off x="3337560" y="164592"/>
+            <a:ext cx="36576" cy="658368"/>
+          </a:xfrm>
+          <a:prstGeom prst="rect">
+            <a:avLst/>
+          </a:prstGeom>
+          <a:solidFill>
+            <a:srgbClr val="FF0000"/>
+          </a:solidFill>
+          <a:ln>
+            <a:noFill/>
+          </a:ln>
+        </p:spPr>
+        <p:style>
+          <a:lnRef idx="1">
+            <a:schemeClr val="accent1"/>
+          </a:lnRef>
+          <a:fillRef idx="3">
+            <a:schemeClr val="accent1"/>
+          </a:fillRef>
+          <a:effectRef idx="2">
+            <a:schemeClr val="accent1"/>
+          </a:effectRef>
+          <a:fontRef idx="minor">
+            <a:schemeClr val="lt1"/>
+          </a:fontRef>
+        </p:style>
+        <p:txBody>
+          <a:bodyPr rtlCol="0" anchor="ctr"/>
+          <a:lstStyle/>
+          <a:p>
+            <a:pPr algn="ctr"/>
+          </a:p>
+        </p:txBody>
+      </p:sp>
+      <p:sp>
+        <p:nvSpPr>
+          <p:cNvPr id="9" name="TextBox 8"/>
           <p:cNvSpPr txBox="1"/>
           <p:nvPr/>
         </p:nvSpPr>
         <p:spPr>
           <a:xfrm>
-            <a:off x="457200" y="1828800"/>
-            <a:ext cx="11247120" cy="502920"/>
+            <a:off x="3474720" y="164592"/>
+            <a:ext cx="8503920" cy="347472"/>
           </a:xfrm>
           <a:prstGeom prst="rect">
             <a:avLst/>
@@ -3312,26 +3398,26 @@
           <a:p>
             <a:pPr algn="l"/>
             <a:r>
-              <a:rPr sz="1300" b="0" i="1">
-                <a:solidFill>
-                  <a:srgbClr val="DDEEEE"/>
+              <a:rPr sz="900" b="1" i="0">
+                <a:solidFill>
+                  <a:srgbClr val="BBEEEE"/>
                 </a:solidFill>
               </a:rPr>
-              <a:t>Certification opérationnelle · Grille 28 pts · Plan d'Action Personnel (PAP)</a:t>
-            </a:r>
-          </a:p>
-        </p:txBody>
-      </p:sp>
-      <p:sp>
-        <p:nvSpPr>
-          <p:cNvPr id="8" name="TextBox 7"/>
+              <a:t>BOOK J5  ·  Journée 5  ·  Certification FIM</a:t>
+            </a:r>
+          </a:p>
+        </p:txBody>
+      </p:sp>
+      <p:sp>
+        <p:nvSpPr>
+          <p:cNvPr id="10" name="TextBox 9"/>
           <p:cNvSpPr txBox="1"/>
           <p:nvPr/>
         </p:nvSpPr>
         <p:spPr>
           <a:xfrm>
-            <a:off x="0" y="6492240"/>
-            <a:ext cx="12188952" cy="365760"/>
+            <a:off x="320040" y="960120"/>
+            <a:ext cx="11521440" cy="1143000"/>
           </a:xfrm>
           <a:prstGeom prst="rect">
             <a:avLst/>
@@ -3344,14 +3430,161 @@
           </a:bodyPr>
           <a:lstStyle/>
           <a:p>
+            <a:pPr algn="l"/>
+            <a:r>
+              <a:rPr sz="3000" b="1" i="0">
+                <a:solidFill>
+                  <a:srgbClr val="FFFFFF"/>
+                </a:solidFill>
+              </a:rPr>
+              <a:t>Votre Certification FIM</a:t>
+            </a:r>
+          </a:p>
+        </p:txBody>
+      </p:sp>
+      <p:sp>
+        <p:nvSpPr>
+          <p:cNvPr id="11" name="TextBox 10"/>
+          <p:cNvSpPr txBox="1"/>
+          <p:nvPr/>
+        </p:nvSpPr>
+        <p:spPr>
+          <a:xfrm>
+            <a:off x="320040" y="1920240"/>
+            <a:ext cx="11521440" cy="347472"/>
+          </a:xfrm>
+          <a:prstGeom prst="rect">
+            <a:avLst/>
+          </a:prstGeom>
+          <a:noFill/>
+        </p:spPr>
+        <p:txBody>
+          <a:bodyPr wrap="square">
+            <a:spAutoFit/>
+          </a:bodyPr>
+          <a:lstStyle/>
+          <a:p>
+            <a:pPr algn="l"/>
+            <a:r>
+              <a:rPr sz="1200" b="0" i="1">
+                <a:solidFill>
+                  <a:srgbClr val="CCEEEE"/>
+                </a:solidFill>
+              </a:rPr>
+              <a:t>Synthèse · Simulations · Plan d'action · Vous êtes prêt(e) pour le terrain</a:t>
+            </a:r>
+          </a:p>
+        </p:txBody>
+      </p:sp>
+      <p:sp>
+        <p:nvSpPr>
+          <p:cNvPr id="12" name="Rectangle 11"/>
+          <p:cNvSpPr/>
+          <p:nvPr/>
+        </p:nvSpPr>
+        <p:spPr>
+          <a:xfrm>
+            <a:off x="0" y="6492240"/>
+            <a:ext cx="12188952" cy="365760"/>
+          </a:xfrm>
+          <a:prstGeom prst="rect">
+            <a:avLst/>
+          </a:prstGeom>
+          <a:solidFill>
+            <a:srgbClr val="005555"/>
+          </a:solidFill>
+          <a:ln>
+            <a:noFill/>
+          </a:ln>
+        </p:spPr>
+        <p:style>
+          <a:lnRef idx="1">
+            <a:schemeClr val="accent1"/>
+          </a:lnRef>
+          <a:fillRef idx="3">
+            <a:schemeClr val="accent1"/>
+          </a:fillRef>
+          <a:effectRef idx="2">
+            <a:schemeClr val="accent1"/>
+          </a:effectRef>
+          <a:fontRef idx="minor">
+            <a:schemeClr val="lt1"/>
+          </a:fontRef>
+        </p:style>
+        <p:txBody>
+          <a:bodyPr rtlCol="0" anchor="ctr"/>
+          <a:lstStyle/>
+          <a:p>
+            <a:pPr algn="ctr"/>
+          </a:p>
+        </p:txBody>
+      </p:sp>
+      <p:sp>
+        <p:nvSpPr>
+          <p:cNvPr id="13" name="TextBox 12"/>
+          <p:cNvSpPr txBox="1"/>
+          <p:nvPr/>
+        </p:nvSpPr>
+        <p:spPr>
+          <a:xfrm>
+            <a:off x="0" y="6519672"/>
+            <a:ext cx="12188952" cy="274320"/>
+          </a:xfrm>
+          <a:prstGeom prst="rect">
+            <a:avLst/>
+          </a:prstGeom>
+          <a:noFill/>
+        </p:spPr>
+        <p:txBody>
+          <a:bodyPr wrap="square">
+            <a:spAutoFit/>
+          </a:bodyPr>
+          <a:lstStyle/>
+          <a:p>
             <a:pPr algn="ctr"/>
             <a:r>
               <a:rPr sz="900" b="0" i="0">
                 <a:solidFill>
-                  <a:srgbClr val="888888"/>
+                  <a:srgbClr val="FFFFFF"/>
                 </a:solidFill>
               </a:rPr>
-              <a:t>SHY-Performance · V6-01062026SHY-TE · Référentiel UM6P/CMC 2025</a:t>
+              <a:t>SHY-Performance  ·  Formation FIM  ·  V6-01062026SHY-TE</a:t>
+            </a:r>
+          </a:p>
+        </p:txBody>
+      </p:sp>
+      <p:sp>
+        <p:nvSpPr>
+          <p:cNvPr id="14" name="TextBox 13"/>
+          <p:cNvSpPr txBox="1"/>
+          <p:nvPr/>
+        </p:nvSpPr>
+        <p:spPr>
+          <a:xfrm>
+            <a:off x="457200" y="2514600"/>
+            <a:ext cx="11247120" cy="1051560"/>
+          </a:xfrm>
+          <a:prstGeom prst="rect">
+            <a:avLst/>
+          </a:prstGeom>
+          <a:noFill/>
+        </p:spPr>
+        <p:txBody>
+          <a:bodyPr wrap="square">
+            <a:spAutoFit/>
+          </a:bodyPr>
+          <a:lstStyle/>
+          <a:p>
+            <a:pPr algn="l"/>
+            <a:r>
+              <a:rPr sz="1400" b="0" i="0">
+                <a:solidFill>
+                  <a:srgbClr val="1A1A1A"/>
+                </a:solidFill>
+              </a:rPr>
+              <a:t>Aujourd'hui c'est votre jour.
+Vous allez montrer ce que vous savez faire — pas dans un examen théorique,
+mais en situation réelle simulée, face à un passant avec toute sa complexité.</a:t>
             </a:r>
           </a:p>
         </p:txBody>
@@ -3426,13 +3659,13 @@
         <p:spPr>
           <a:xfrm>
             <a:off x="0" y="0"/>
-            <a:ext cx="12188952" cy="685800"/>
-          </a:xfrm>
-          <a:prstGeom prst="rect">
-            <a:avLst/>
-          </a:prstGeom>
-          <a:solidFill>
-            <a:srgbClr val="005050"/>
+            <a:ext cx="12188952" cy="658368"/>
+          </a:xfrm>
+          <a:prstGeom prst="rect">
+            <a:avLst/>
+          </a:prstGeom>
+          <a:solidFill>
+            <a:srgbClr val="005555"/>
           </a:solidFill>
           <a:ln>
             <a:noFill/>
@@ -3468,14 +3701,14 @@
         </p:nvSpPr>
         <p:spPr>
           <a:xfrm>
-            <a:off x="0" y="667512"/>
-            <a:ext cx="12188952" cy="36576"/>
-          </a:xfrm>
-          <a:prstGeom prst="rect">
-            <a:avLst/>
-          </a:prstGeom>
-          <a:solidFill>
-            <a:srgbClr val="C9A84C"/>
+            <a:off x="0" y="640080"/>
+            <a:ext cx="12188952" cy="54864"/>
+          </a:xfrm>
+          <a:prstGeom prst="rect">
+            <a:avLst/>
+          </a:prstGeom>
+          <a:solidFill>
+            <a:srgbClr val="FF0000"/>
           </a:solidFill>
           <a:ln>
             <a:noFill/>
@@ -3511,8 +3744,8 @@
         </p:nvSpPr>
         <p:spPr>
           <a:xfrm>
-            <a:off x="274320" y="73152"/>
-            <a:ext cx="11612880" cy="566928"/>
+            <a:off x="164592" y="64008"/>
+            <a:ext cx="685800" cy="530352"/>
           </a:xfrm>
           <a:prstGeom prst="rect">
             <a:avLst/>
@@ -3527,12 +3760,12 @@
           <a:p>
             <a:pPr algn="l"/>
             <a:r>
-              <a:rPr sz="1800" b="1" i="0">
+              <a:rPr sz="2000" b="1" i="0">
                 <a:solidFill>
                   <a:srgbClr val="FFFFFF"/>
                 </a:solidFill>
               </a:rPr>
-              <a:t>Programme Journée 5 — Certification FIM V6</a:t>
+              <a:t>SHY</a:t>
             </a:r>
           </a:p>
         </p:txBody>
@@ -3545,14 +3778,14 @@
         </p:nvSpPr>
         <p:spPr>
           <a:xfrm>
-            <a:off x="274320" y="822960"/>
-            <a:ext cx="1371600" cy="685800"/>
-          </a:xfrm>
-          <a:prstGeom prst="rect">
-            <a:avLst/>
-          </a:prstGeom>
-          <a:solidFill>
-            <a:srgbClr val="007A7A"/>
+            <a:off x="914400" y="91440"/>
+            <a:ext cx="36576" cy="475488"/>
+          </a:xfrm>
+          <a:prstGeom prst="rect">
+            <a:avLst/>
+          </a:prstGeom>
+          <a:solidFill>
+            <a:srgbClr val="FF0000"/>
           </a:solidFill>
           <a:ln>
             <a:noFill/>
@@ -3588,8 +3821,8 @@
         </p:nvSpPr>
         <p:spPr>
           <a:xfrm>
-            <a:off x="292608" y="896112"/>
-            <a:ext cx="1335024" cy="548640"/>
+            <a:off x="1024128" y="91440"/>
+            <a:ext cx="10881360" cy="475488"/>
           </a:xfrm>
           <a:prstGeom prst="rect">
             <a:avLst/>
@@ -3602,15 +3835,14 @@
           </a:bodyPr>
           <a:lstStyle/>
           <a:p>
-            <a:pPr algn="ctr"/>
-            <a:r>
-              <a:rPr sz="1100" b="1" i="0">
+            <a:pPr algn="l"/>
+            <a:r>
+              <a:rPr sz="1700" b="1" i="0">
                 <a:solidFill>
                   <a:srgbClr val="FFFFFF"/>
                 </a:solidFill>
               </a:rPr>
-              <a:t>08h30
-09h00</a:t>
+              <a:t>Votre Journée 5 — Étape par Étape</a:t>
             </a:r>
           </a:p>
         </p:txBody>
@@ -3623,14 +3855,14 @@
         </p:nvSpPr>
         <p:spPr>
           <a:xfrm>
-            <a:off x="1664208" y="822960"/>
-            <a:ext cx="2560320" cy="685800"/>
-          </a:xfrm>
-          <a:prstGeom prst="rect">
-            <a:avLst/>
-          </a:prstGeom>
-          <a:solidFill>
-            <a:srgbClr val="005050"/>
+            <a:off x="0" y="6492240"/>
+            <a:ext cx="12188952" cy="365760"/>
+          </a:xfrm>
+          <a:prstGeom prst="rect">
+            <a:avLst/>
+          </a:prstGeom>
+          <a:solidFill>
+            <a:srgbClr val="005555"/>
           </a:solidFill>
           <a:ln>
             <a:noFill/>
@@ -3666,8 +3898,8 @@
         </p:nvSpPr>
         <p:spPr>
           <a:xfrm>
-            <a:off x="1737360" y="987552"/>
-            <a:ext cx="2423160" cy="384048"/>
+            <a:off x="0" y="6519672"/>
+            <a:ext cx="12188952" cy="274320"/>
           </a:xfrm>
           <a:prstGeom prst="rect">
             <a:avLst/>
@@ -3680,14 +3912,14 @@
           </a:bodyPr>
           <a:lstStyle/>
           <a:p>
-            <a:pPr algn="l"/>
-            <a:r>
-              <a:rPr sz="1200" b="1" i="0">
+            <a:pPr algn="ctr"/>
+            <a:r>
+              <a:rPr sz="900" b="0" i="0">
                 <a:solidFill>
                   <a:srgbClr val="FFFFFF"/>
                 </a:solidFill>
               </a:rPr>
-              <a:t>Révision flash</a:t>
+              <a:t>SHY-Performance  ·  Formation FIM  ·  V6-01062026SHY-TE</a:t>
             </a:r>
           </a:p>
         </p:txBody>
@@ -3700,19 +3932,17 @@
         </p:nvSpPr>
         <p:spPr>
           <a:xfrm>
-            <a:off x="4242816" y="822960"/>
-            <a:ext cx="7863840" cy="685800"/>
-          </a:xfrm>
-          <a:prstGeom prst="rect">
-            <a:avLst/>
-          </a:prstGeom>
-          <a:solidFill>
-            <a:srgbClr val="FFFFFF"/>
-          </a:solidFill>
-          <a:ln w="10160">
-            <a:solidFill>
-              <a:srgbClr val="007A7A"/>
-            </a:solidFill>
+            <a:off x="274320" y="804672"/>
+            <a:ext cx="1325880" cy="658368"/>
+          </a:xfrm>
+          <a:prstGeom prst="rect">
+            <a:avLst/>
+          </a:prstGeom>
+          <a:solidFill>
+            <a:srgbClr val="FF0000"/>
+          </a:solidFill>
+          <a:ln>
+            <a:noFill/>
           </a:ln>
         </p:spPr>
         <p:style>
@@ -3745,8 +3975,8 @@
         </p:nvSpPr>
         <p:spPr>
           <a:xfrm>
-            <a:off x="4334256" y="877824"/>
-            <a:ext cx="7680960" cy="594360"/>
+            <a:off x="292608" y="877824"/>
+            <a:ext cx="1289304" cy="530352"/>
           </a:xfrm>
           <a:prstGeom prst="rect">
             <a:avLst/>
@@ -3759,14 +3989,15 @@
           </a:bodyPr>
           <a:lstStyle/>
           <a:p>
-            <a:pPr algn="l"/>
-            <a:r>
-              <a:rPr sz="900" b="0" i="0">
-                <a:solidFill>
-                  <a:srgbClr val="1A1A1A"/>
+            <a:pPr algn="ctr"/>
+            <a:r>
+              <a:rPr sz="1100" b="1" i="0">
+                <a:solidFill>
+                  <a:srgbClr val="FFFFFF"/>
                 </a:solidFill>
               </a:rPr>
-              <a:t>Quiz 7 compétences C1–C7 · rappel des seuils · météo émotionnelle</a:t>
+              <a:t>08h30
+09h00</a:t>
             </a:r>
           </a:p>
         </p:txBody>
@@ -3779,14 +4010,14 @@
         </p:nvSpPr>
         <p:spPr>
           <a:xfrm>
-            <a:off x="274320" y="1536192"/>
-            <a:ext cx="1371600" cy="685800"/>
-          </a:xfrm>
-          <a:prstGeom prst="rect">
-            <a:avLst/>
-          </a:prstGeom>
-          <a:solidFill>
-            <a:srgbClr val="007A7A"/>
+            <a:off x="1618488" y="804672"/>
+            <a:ext cx="2743200" cy="658368"/>
+          </a:xfrm>
+          <a:prstGeom prst="rect">
+            <a:avLst/>
+          </a:prstGeom>
+          <a:solidFill>
+            <a:srgbClr val="005555"/>
           </a:solidFill>
           <a:ln>
             <a:noFill/>
@@ -3822,8 +4053,8 @@
         </p:nvSpPr>
         <p:spPr>
           <a:xfrm>
-            <a:off x="292608" y="1609344"/>
-            <a:ext cx="1335024" cy="548640"/>
+            <a:off x="1719072" y="950976"/>
+            <a:ext cx="2578608" cy="384048"/>
           </a:xfrm>
           <a:prstGeom prst="rect">
             <a:avLst/>
@@ -3836,15 +4067,14 @@
           </a:bodyPr>
           <a:lstStyle/>
           <a:p>
-            <a:pPr algn="ctr"/>
-            <a:r>
-              <a:rPr sz="1100" b="1" i="0">
+            <a:pPr algn="l"/>
+            <a:r>
+              <a:rPr sz="1200" b="1" i="0">
                 <a:solidFill>
                   <a:srgbClr val="FFFFFF"/>
                 </a:solidFill>
               </a:rPr>
-              <a:t>09h00
-11h00</a:t>
+              <a:t>Révision flash</a:t>
             </a:r>
           </a:p>
         </p:txBody>
@@ -3857,17 +4087,19 @@
         </p:nvSpPr>
         <p:spPr>
           <a:xfrm>
-            <a:off x="1664208" y="1536192"/>
-            <a:ext cx="2560320" cy="685800"/>
-          </a:xfrm>
-          <a:prstGeom prst="rect">
-            <a:avLst/>
-          </a:prstGeom>
-          <a:solidFill>
-            <a:srgbClr val="005050"/>
-          </a:solidFill>
-          <a:ln>
-            <a:noFill/>
+            <a:off x="4379976" y="804672"/>
+            <a:ext cx="7534656" cy="658368"/>
+          </a:xfrm>
+          <a:prstGeom prst="rect">
+            <a:avLst/>
+          </a:prstGeom>
+          <a:solidFill>
+            <a:srgbClr val="FFFFFF"/>
+          </a:solidFill>
+          <a:ln w="10160">
+            <a:solidFill>
+              <a:srgbClr val="008080"/>
+            </a:solidFill>
           </a:ln>
         </p:spPr>
         <p:style>
@@ -3900,8 +4132,8 @@
         </p:nvSpPr>
         <p:spPr>
           <a:xfrm>
-            <a:off x="1737360" y="1700784"/>
-            <a:ext cx="2423160" cy="384048"/>
+            <a:off x="4498848" y="859536"/>
+            <a:ext cx="7333488" cy="566928"/>
           </a:xfrm>
           <a:prstGeom prst="rect">
             <a:avLst/>
@@ -3916,12 +4148,12 @@
           <a:p>
             <a:pPr algn="l"/>
             <a:r>
-              <a:rPr sz="1200" b="1" i="0">
-                <a:solidFill>
-                  <a:srgbClr val="FFFFFF"/>
+              <a:rPr sz="900" b="0" i="0">
+                <a:solidFill>
+                  <a:srgbClr val="1A1A1A"/>
                 </a:solidFill>
               </a:rPr>
-              <a:t>Simulation terrain × 2</a:t>
+              <a:t>Tour de table rapide — Comment vous sentez-vous ce matin ? Rappel des 7 compétences.</a:t>
             </a:r>
           </a:p>
         </p:txBody>
@@ -3934,19 +4166,17 @@
         </p:nvSpPr>
         <p:spPr>
           <a:xfrm>
-            <a:off x="4242816" y="1536192"/>
-            <a:ext cx="7863840" cy="685800"/>
-          </a:xfrm>
-          <a:prstGeom prst="rect">
-            <a:avLst/>
-          </a:prstGeom>
-          <a:solidFill>
-            <a:srgbClr val="FFFFFF"/>
-          </a:solidFill>
-          <a:ln w="10160">
-            <a:solidFill>
-              <a:srgbClr val="007A7A"/>
-            </a:solidFill>
+            <a:off x="274320" y="1490472"/>
+            <a:ext cx="1325880" cy="658368"/>
+          </a:xfrm>
+          <a:prstGeom prst="rect">
+            <a:avLst/>
+          </a:prstGeom>
+          <a:solidFill>
+            <a:srgbClr val="FF0000"/>
+          </a:solidFill>
+          <a:ln>
+            <a:noFill/>
           </a:ln>
         </p:spPr>
         <p:style>
@@ -3979,8 +4209,8 @@
         </p:nvSpPr>
         <p:spPr>
           <a:xfrm>
-            <a:off x="4334256" y="1591056"/>
-            <a:ext cx="7680960" cy="594360"/>
+            <a:off x="292608" y="1563624"/>
+            <a:ext cx="1289304" cy="530352"/>
           </a:xfrm>
           <a:prstGeom prst="rect">
             <a:avLst/>
@@ -3993,15 +4223,15 @@
           </a:bodyPr>
           <a:lstStyle/>
           <a:p>
-            <a:pPr algn="l"/>
-            <a:r>
-              <a:rPr sz="900" b="0" i="0">
-                <a:solidFill>
-                  <a:srgbClr val="1A1A1A"/>
+            <a:pPr algn="ctr"/>
+            <a:r>
+              <a:rPr sz="1100" b="1" i="0">
+                <a:solidFill>
+                  <a:srgbClr val="FFFFFF"/>
                 </a:solidFill>
               </a:rPr>
-              <a:t>Round 1 : passant 'neutre' · Round 2 : passant 'difficile avec 3 objections'
-Formateur joue le rôle du passant · apprenants observent avec grille</a:t>
+              <a:t>09h00
+11h00</a:t>
             </a:r>
           </a:p>
         </p:txBody>
@@ -4014,14 +4244,14 @@
         </p:nvSpPr>
         <p:spPr>
           <a:xfrm>
-            <a:off x="274320" y="2249424"/>
-            <a:ext cx="1371600" cy="685800"/>
-          </a:xfrm>
-          <a:prstGeom prst="rect">
-            <a:avLst/>
-          </a:prstGeom>
-          <a:solidFill>
-            <a:srgbClr val="007A7A"/>
+            <a:off x="1618488" y="1490472"/>
+            <a:ext cx="2743200" cy="658368"/>
+          </a:xfrm>
+          <a:prstGeom prst="rect">
+            <a:avLst/>
+          </a:prstGeom>
+          <a:solidFill>
+            <a:srgbClr val="005555"/>
           </a:solidFill>
           <a:ln>
             <a:noFill/>
@@ -4057,8 +4287,8 @@
         </p:nvSpPr>
         <p:spPr>
           <a:xfrm>
-            <a:off x="292608" y="2322576"/>
-            <a:ext cx="1335024" cy="548640"/>
+            <a:off x="1719072" y="1636775"/>
+            <a:ext cx="2578608" cy="384048"/>
           </a:xfrm>
           <a:prstGeom prst="rect">
             <a:avLst/>
@@ -4071,15 +4301,14 @@
           </a:bodyPr>
           <a:lstStyle/>
           <a:p>
-            <a:pPr algn="ctr"/>
-            <a:r>
-              <a:rPr sz="1100" b="1" i="0">
+            <a:pPr algn="l"/>
+            <a:r>
+              <a:rPr sz="1200" b="1" i="0">
                 <a:solidFill>
                   <a:srgbClr val="FFFFFF"/>
                 </a:solidFill>
               </a:rPr>
-              <a:t>11h00
-11h30</a:t>
+              <a:t>Simulations × 2 rounds</a:t>
             </a:r>
           </a:p>
         </p:txBody>
@@ -4092,17 +4321,19 @@
         </p:nvSpPr>
         <p:spPr>
           <a:xfrm>
-            <a:off x="1664208" y="2249424"/>
-            <a:ext cx="2560320" cy="685800"/>
-          </a:xfrm>
-          <a:prstGeom prst="rect">
-            <a:avLst/>
-          </a:prstGeom>
-          <a:solidFill>
-            <a:srgbClr val="005050"/>
-          </a:solidFill>
-          <a:ln>
-            <a:noFill/>
+            <a:off x="4379976" y="1490472"/>
+            <a:ext cx="7534656" cy="658368"/>
+          </a:xfrm>
+          <a:prstGeom prst="rect">
+            <a:avLst/>
+          </a:prstGeom>
+          <a:solidFill>
+            <a:srgbClr val="FFFFFF"/>
+          </a:solidFill>
+          <a:ln w="10160">
+            <a:solidFill>
+              <a:srgbClr val="008080"/>
+            </a:solidFill>
           </a:ln>
         </p:spPr>
         <p:style>
@@ -4135,8 +4366,8 @@
         </p:nvSpPr>
         <p:spPr>
           <a:xfrm>
-            <a:off x="1737360" y="2414016"/>
-            <a:ext cx="2423160" cy="384048"/>
+            <a:off x="4498848" y="1545336"/>
+            <a:ext cx="7333488" cy="566928"/>
           </a:xfrm>
           <a:prstGeom prst="rect">
             <a:avLst/>
@@ -4151,12 +4382,13 @@
           <a:p>
             <a:pPr algn="l"/>
             <a:r>
-              <a:rPr sz="1200" b="1" i="0">
-                <a:solidFill>
-                  <a:srgbClr val="FFFFFF"/>
+              <a:rPr sz="900" b="0" i="0">
+                <a:solidFill>
+                  <a:srgbClr val="1A1A1A"/>
                 </a:solidFill>
               </a:rPr>
-              <a:t>Debriefing collectif</a:t>
+              <a:t>Round 1 : donateur 'neutre'  ·  Round 2 : donateur 'difficile avec 3 objections'
+Vous observez vos camarades avec la grille — et ils font de même pour vous.</a:t>
             </a:r>
           </a:p>
         </p:txBody>
@@ -4169,19 +4401,17 @@
         </p:nvSpPr>
         <p:spPr>
           <a:xfrm>
-            <a:off x="4242816" y="2249424"/>
-            <a:ext cx="7863840" cy="685800"/>
-          </a:xfrm>
-          <a:prstGeom prst="rect">
-            <a:avLst/>
-          </a:prstGeom>
-          <a:solidFill>
-            <a:srgbClr val="FFFFFF"/>
-          </a:solidFill>
-          <a:ln w="10160">
-            <a:solidFill>
-              <a:srgbClr val="007A7A"/>
-            </a:solidFill>
+            <a:off x="274320" y="2176272"/>
+            <a:ext cx="1325880" cy="658368"/>
+          </a:xfrm>
+          <a:prstGeom prst="rect">
+            <a:avLst/>
+          </a:prstGeom>
+          <a:solidFill>
+            <a:srgbClr val="FF0000"/>
+          </a:solidFill>
+          <a:ln>
+            <a:noFill/>
           </a:ln>
         </p:spPr>
         <p:style>
@@ -4214,8 +4444,8 @@
         </p:nvSpPr>
         <p:spPr>
           <a:xfrm>
-            <a:off x="4334256" y="2304288"/>
-            <a:ext cx="7680960" cy="594360"/>
+            <a:off x="292608" y="2249424"/>
+            <a:ext cx="1289304" cy="530352"/>
           </a:xfrm>
           <a:prstGeom prst="rect">
             <a:avLst/>
@@ -4228,14 +4458,15 @@
           </a:bodyPr>
           <a:lstStyle/>
           <a:p>
-            <a:pPr algn="l"/>
-            <a:r>
-              <a:rPr sz="900" b="0" i="0">
-                <a:solidFill>
-                  <a:srgbClr val="1A1A1A"/>
+            <a:pPr algn="ctr"/>
+            <a:r>
+              <a:rPr sz="1100" b="1" i="0">
+                <a:solidFill>
+                  <a:srgbClr val="FFFFFF"/>
                 </a:solidFill>
               </a:rPr>
-              <a:t>Célébration des progrès individuels · 3 apprentissages collectifs retenus</a:t>
+              <a:t>11h00
+11h30</a:t>
             </a:r>
           </a:p>
         </p:txBody>
@@ -4248,14 +4479,14 @@
         </p:nvSpPr>
         <p:spPr>
           <a:xfrm>
-            <a:off x="274320" y="2962656"/>
-            <a:ext cx="1371600" cy="685800"/>
-          </a:xfrm>
-          <a:prstGeom prst="rect">
-            <a:avLst/>
-          </a:prstGeom>
-          <a:solidFill>
-            <a:srgbClr val="007A7A"/>
+            <a:off x="1618488" y="2176272"/>
+            <a:ext cx="2743200" cy="658368"/>
+          </a:xfrm>
+          <a:prstGeom prst="rect">
+            <a:avLst/>
+          </a:prstGeom>
+          <a:solidFill>
+            <a:srgbClr val="005555"/>
           </a:solidFill>
           <a:ln>
             <a:noFill/>
@@ -4291,8 +4522,8 @@
         </p:nvSpPr>
         <p:spPr>
           <a:xfrm>
-            <a:off x="292608" y="3035808"/>
-            <a:ext cx="1335024" cy="548640"/>
+            <a:off x="1719072" y="2322576"/>
+            <a:ext cx="2578608" cy="384048"/>
           </a:xfrm>
           <a:prstGeom prst="rect">
             <a:avLst/>
@@ -4305,15 +4536,14 @@
           </a:bodyPr>
           <a:lstStyle/>
           <a:p>
-            <a:pPr algn="ctr"/>
-            <a:r>
-              <a:rPr sz="1100" b="1" i="0">
+            <a:pPr algn="l"/>
+            <a:r>
+              <a:rPr sz="1200" b="1" i="0">
                 <a:solidFill>
                   <a:srgbClr val="FFFFFF"/>
                 </a:solidFill>
               </a:rPr>
-              <a:t>11h30
-12h30</a:t>
+              <a:t>Débriefing collectif</a:t>
             </a:r>
           </a:p>
         </p:txBody>
@@ -4326,17 +4556,19 @@
         </p:nvSpPr>
         <p:spPr>
           <a:xfrm>
-            <a:off x="1664208" y="2962656"/>
-            <a:ext cx="2560320" cy="685800"/>
-          </a:xfrm>
-          <a:prstGeom prst="rect">
-            <a:avLst/>
-          </a:prstGeom>
-          <a:solidFill>
-            <a:srgbClr val="005050"/>
-          </a:solidFill>
-          <a:ln>
-            <a:noFill/>
+            <a:off x="4379976" y="2176272"/>
+            <a:ext cx="7534656" cy="658368"/>
+          </a:xfrm>
+          <a:prstGeom prst="rect">
+            <a:avLst/>
+          </a:prstGeom>
+          <a:solidFill>
+            <a:srgbClr val="FFFFFF"/>
+          </a:solidFill>
+          <a:ln w="10160">
+            <a:solidFill>
+              <a:srgbClr val="008080"/>
+            </a:solidFill>
           </a:ln>
         </p:spPr>
         <p:style>
@@ -4369,8 +4601,8 @@
         </p:nvSpPr>
         <p:spPr>
           <a:xfrm>
-            <a:off x="1737360" y="3127248"/>
-            <a:ext cx="2423160" cy="384048"/>
+            <a:off x="4498848" y="2231136"/>
+            <a:ext cx="7333488" cy="566928"/>
           </a:xfrm>
           <a:prstGeom prst="rect">
             <a:avLst/>
@@ -4385,12 +4617,12 @@
           <a:p>
             <a:pPr algn="l"/>
             <a:r>
-              <a:rPr sz="1200" b="1" i="0">
-                <a:solidFill>
-                  <a:srgbClr val="FFFFFF"/>
+              <a:rPr sz="900" b="0" i="0">
+                <a:solidFill>
+                  <a:srgbClr val="1A1A1A"/>
                 </a:solidFill>
               </a:rPr>
-              <a:t>Évaluation sommative</a:t>
+              <a:t>Célébration des progrès de chacun. Les 3 apprentissages collectifs de la semaine.</a:t>
             </a:r>
           </a:p>
         </p:txBody>
@@ -4403,19 +4635,17 @@
         </p:nvSpPr>
         <p:spPr>
           <a:xfrm>
-            <a:off x="4242816" y="2962656"/>
-            <a:ext cx="7863840" cy="685800"/>
-          </a:xfrm>
-          <a:prstGeom prst="rect">
-            <a:avLst/>
-          </a:prstGeom>
-          <a:solidFill>
-            <a:srgbClr val="FFFFFF"/>
-          </a:solidFill>
-          <a:ln w="10160">
-            <a:solidFill>
-              <a:srgbClr val="007A7A"/>
-            </a:solidFill>
+            <a:off x="274320" y="2862072"/>
+            <a:ext cx="1325880" cy="658368"/>
+          </a:xfrm>
+          <a:prstGeom prst="rect">
+            <a:avLst/>
+          </a:prstGeom>
+          <a:solidFill>
+            <a:srgbClr val="FF0000"/>
+          </a:solidFill>
+          <a:ln>
+            <a:noFill/>
           </a:ln>
         </p:spPr>
         <p:style>
@@ -4448,8 +4678,8 @@
         </p:nvSpPr>
         <p:spPr>
           <a:xfrm>
-            <a:off x="4334256" y="3017520"/>
-            <a:ext cx="7680960" cy="594360"/>
+            <a:off x="292608" y="2935224"/>
+            <a:ext cx="1289304" cy="530352"/>
           </a:xfrm>
           <a:prstGeom prst="rect">
             <a:avLst/>
@@ -4462,14 +4692,15 @@
           </a:bodyPr>
           <a:lstStyle/>
           <a:p>
-            <a:pPr algn="l"/>
-            <a:r>
-              <a:rPr sz="900" b="0" i="0">
-                <a:solidFill>
-                  <a:srgbClr val="1A1A1A"/>
+            <a:pPr algn="ctr"/>
+            <a:r>
+              <a:rPr sz="1100" b="1" i="0">
+                <a:solidFill>
+                  <a:srgbClr val="FFFFFF"/>
                 </a:solidFill>
               </a:rPr>
-              <a:t>Grille 28 pts — formateur + superviseur · entretien individuel 5 min</a:t>
+              <a:t>11h30
+12h30</a:t>
             </a:r>
           </a:p>
         </p:txBody>
@@ -4482,14 +4713,14 @@
         </p:nvSpPr>
         <p:spPr>
           <a:xfrm>
-            <a:off x="274320" y="3675888"/>
-            <a:ext cx="1371600" cy="685800"/>
-          </a:xfrm>
-          <a:prstGeom prst="rect">
-            <a:avLst/>
-          </a:prstGeom>
-          <a:solidFill>
-            <a:srgbClr val="007A7A"/>
+            <a:off x="1618488" y="2862072"/>
+            <a:ext cx="2743200" cy="658368"/>
+          </a:xfrm>
+          <a:prstGeom prst="rect">
+            <a:avLst/>
+          </a:prstGeom>
+          <a:solidFill>
+            <a:srgbClr val="005555"/>
           </a:solidFill>
           <a:ln>
             <a:noFill/>
@@ -4525,8 +4756,8 @@
         </p:nvSpPr>
         <p:spPr>
           <a:xfrm>
-            <a:off x="292608" y="3749040"/>
-            <a:ext cx="1335024" cy="548640"/>
+            <a:off x="1719072" y="3008376"/>
+            <a:ext cx="2578608" cy="384048"/>
           </a:xfrm>
           <a:prstGeom prst="rect">
             <a:avLst/>
@@ -4539,15 +4770,14 @@
           </a:bodyPr>
           <a:lstStyle/>
           <a:p>
-            <a:pPr algn="ctr"/>
-            <a:r>
-              <a:rPr sz="1100" b="1" i="0">
+            <a:pPr algn="l"/>
+            <a:r>
+              <a:rPr sz="1200" b="1" i="0">
                 <a:solidFill>
                   <a:srgbClr val="FFFFFF"/>
                 </a:solidFill>
               </a:rPr>
-              <a:t>13h30
-14h30</a:t>
+              <a:t>Évaluation individuelle</a:t>
             </a:r>
           </a:p>
         </p:txBody>
@@ -4560,17 +4790,19 @@
         </p:nvSpPr>
         <p:spPr>
           <a:xfrm>
-            <a:off x="1664208" y="3675888"/>
-            <a:ext cx="2560320" cy="685800"/>
-          </a:xfrm>
-          <a:prstGeom prst="rect">
-            <a:avLst/>
-          </a:prstGeom>
-          <a:solidFill>
-            <a:srgbClr val="005050"/>
-          </a:solidFill>
-          <a:ln>
-            <a:noFill/>
+            <a:off x="4379976" y="2862072"/>
+            <a:ext cx="7534656" cy="658368"/>
+          </a:xfrm>
+          <a:prstGeom prst="rect">
+            <a:avLst/>
+          </a:prstGeom>
+          <a:solidFill>
+            <a:srgbClr val="FFFFFF"/>
+          </a:solidFill>
+          <a:ln w="10160">
+            <a:solidFill>
+              <a:srgbClr val="008080"/>
+            </a:solidFill>
           </a:ln>
         </p:spPr>
         <p:style>
@@ -4603,8 +4835,8 @@
         </p:nvSpPr>
         <p:spPr>
           <a:xfrm>
-            <a:off x="1737360" y="3840480"/>
-            <a:ext cx="2423160" cy="384048"/>
+            <a:off x="4498848" y="2916936"/>
+            <a:ext cx="7333488" cy="566928"/>
           </a:xfrm>
           <a:prstGeom prst="rect">
             <a:avLst/>
@@ -4619,12 +4851,12 @@
           <a:p>
             <a:pPr algn="l"/>
             <a:r>
-              <a:rPr sz="1200" b="1" i="0">
-                <a:solidFill>
-                  <a:srgbClr val="FFFFFF"/>
+              <a:rPr sz="900" b="0" i="0">
+                <a:solidFill>
+                  <a:srgbClr val="1A1A1A"/>
                 </a:solidFill>
               </a:rPr>
-              <a:t>Construction PAP</a:t>
+              <a:t>Votre formateur vous évalue sur la grille 28 points. Entretien individuel 5 min.</a:t>
             </a:r>
           </a:p>
         </p:txBody>
@@ -4637,19 +4869,17 @@
         </p:nvSpPr>
         <p:spPr>
           <a:xfrm>
-            <a:off x="4242816" y="3675888"/>
-            <a:ext cx="7863840" cy="685800"/>
-          </a:xfrm>
-          <a:prstGeom prst="rect">
-            <a:avLst/>
-          </a:prstGeom>
-          <a:solidFill>
-            <a:srgbClr val="FFFFFF"/>
-          </a:solidFill>
-          <a:ln w="10160">
-            <a:solidFill>
-              <a:srgbClr val="007A7A"/>
-            </a:solidFill>
+            <a:off x="274320" y="3547872"/>
+            <a:ext cx="1325880" cy="658368"/>
+          </a:xfrm>
+          <a:prstGeom prst="rect">
+            <a:avLst/>
+          </a:prstGeom>
+          <a:solidFill>
+            <a:srgbClr val="FF0000"/>
+          </a:solidFill>
+          <a:ln>
+            <a:noFill/>
           </a:ln>
         </p:spPr>
         <p:style>
@@ -4682,8 +4912,8 @@
         </p:nvSpPr>
         <p:spPr>
           <a:xfrm>
-            <a:off x="4334256" y="3730752"/>
-            <a:ext cx="7680960" cy="594360"/>
+            <a:off x="292608" y="3621024"/>
+            <a:ext cx="1289304" cy="530352"/>
           </a:xfrm>
           <a:prstGeom prst="rect">
             <a:avLst/>
@@ -4696,14 +4926,15 @@
           </a:bodyPr>
           <a:lstStyle/>
           <a:p>
-            <a:pPr algn="l"/>
-            <a:r>
-              <a:rPr sz="900" b="0" i="0">
-                <a:solidFill>
-                  <a:srgbClr val="1A1A1A"/>
+            <a:pPr algn="ctr"/>
+            <a:r>
+              <a:rPr sz="1100" b="1" i="0">
+                <a:solidFill>
+                  <a:srgbClr val="FFFFFF"/>
                 </a:solidFill>
               </a:rPr>
-              <a:t>Plan d'Action Personnel : 4 objectifs sur 4 semaines · 1 mesure/semaine</a:t>
+              <a:t>13h30
+14h30</a:t>
             </a:r>
           </a:p>
         </p:txBody>
@@ -4716,14 +4947,14 @@
         </p:nvSpPr>
         <p:spPr>
           <a:xfrm>
-            <a:off x="274320" y="4389120"/>
-            <a:ext cx="1371600" cy="685800"/>
-          </a:xfrm>
-          <a:prstGeom prst="rect">
-            <a:avLst/>
-          </a:prstGeom>
-          <a:solidFill>
-            <a:srgbClr val="007A7A"/>
+            <a:off x="1618488" y="3547872"/>
+            <a:ext cx="2743200" cy="658368"/>
+          </a:xfrm>
+          <a:prstGeom prst="rect">
+            <a:avLst/>
+          </a:prstGeom>
+          <a:solidFill>
+            <a:srgbClr val="005555"/>
           </a:solidFill>
           <a:ln>
             <a:noFill/>
@@ -4759,8 +4990,8 @@
         </p:nvSpPr>
         <p:spPr>
           <a:xfrm>
-            <a:off x="292608" y="4462272"/>
-            <a:ext cx="1335024" cy="548640"/>
+            <a:off x="1719072" y="3694176"/>
+            <a:ext cx="2578608" cy="384048"/>
           </a:xfrm>
           <a:prstGeom prst="rect">
             <a:avLst/>
@@ -4773,15 +5004,14 @@
           </a:bodyPr>
           <a:lstStyle/>
           <a:p>
-            <a:pPr algn="ctr"/>
-            <a:r>
-              <a:rPr sz="1100" b="1" i="0">
+            <a:pPr algn="l"/>
+            <a:r>
+              <a:rPr sz="1200" b="1" i="0">
                 <a:solidFill>
                   <a:srgbClr val="FFFFFF"/>
                 </a:solidFill>
               </a:rPr>
-              <a:t>14h30
-15h00</a:t>
+              <a:t>Votre plan d'action</a:t>
             </a:r>
           </a:p>
         </p:txBody>
@@ -4794,17 +5024,19 @@
         </p:nvSpPr>
         <p:spPr>
           <a:xfrm>
-            <a:off x="1664208" y="4389120"/>
-            <a:ext cx="2560320" cy="685800"/>
-          </a:xfrm>
-          <a:prstGeom prst="rect">
-            <a:avLst/>
-          </a:prstGeom>
-          <a:solidFill>
-            <a:srgbClr val="005050"/>
-          </a:solidFill>
-          <a:ln>
-            <a:noFill/>
+            <a:off x="4379976" y="3547872"/>
+            <a:ext cx="7534656" cy="658368"/>
+          </a:xfrm>
+          <a:prstGeom prst="rect">
+            <a:avLst/>
+          </a:prstGeom>
+          <a:solidFill>
+            <a:srgbClr val="FFFFFF"/>
+          </a:solidFill>
+          <a:ln w="10160">
+            <a:solidFill>
+              <a:srgbClr val="008080"/>
+            </a:solidFill>
           </a:ln>
         </p:spPr>
         <p:style>
@@ -4837,8 +5069,8 @@
         </p:nvSpPr>
         <p:spPr>
           <a:xfrm>
-            <a:off x="1737360" y="4553712"/>
-            <a:ext cx="2423160" cy="384048"/>
+            <a:off x="4498848" y="3602736"/>
+            <a:ext cx="7333488" cy="566928"/>
           </a:xfrm>
           <a:prstGeom prst="rect">
             <a:avLst/>
@@ -4853,12 +5085,12 @@
           <a:p>
             <a:pPr algn="l"/>
             <a:r>
-              <a:rPr sz="1200" b="1" i="0">
-                <a:solidFill>
-                  <a:srgbClr val="FFFFFF"/>
+              <a:rPr sz="900" b="0" i="0">
+                <a:solidFill>
+                  <a:srgbClr val="1A1A1A"/>
                 </a:solidFill>
               </a:rPr>
-              <a:t>Clôture ritualisée</a:t>
+              <a:t>Vous construisez votre plan personnel : 4 objectifs sur 4 semaines terrain.</a:t>
             </a:r>
           </a:p>
         </p:txBody>
@@ -4871,19 +5103,17 @@
         </p:nvSpPr>
         <p:spPr>
           <a:xfrm>
-            <a:off x="4242816" y="4389120"/>
-            <a:ext cx="7863840" cy="685800"/>
-          </a:xfrm>
-          <a:prstGeom prst="rect">
-            <a:avLst/>
-          </a:prstGeom>
-          <a:solidFill>
-            <a:srgbClr val="FFFFFF"/>
-          </a:solidFill>
-          <a:ln w="10160">
-            <a:solidFill>
-              <a:srgbClr val="007A7A"/>
-            </a:solidFill>
+            <a:off x="274320" y="4233672"/>
+            <a:ext cx="1325880" cy="658368"/>
+          </a:xfrm>
+          <a:prstGeom prst="rect">
+            <a:avLst/>
+          </a:prstGeom>
+          <a:solidFill>
+            <a:srgbClr val="FF0000"/>
+          </a:solidFill>
+          <a:ln>
+            <a:noFill/>
           </a:ln>
         </p:spPr>
         <p:style>
@@ -4916,8 +5146,8 @@
         </p:nvSpPr>
         <p:spPr>
           <a:xfrm>
-            <a:off x="4334256" y="4443984"/>
-            <a:ext cx="7680960" cy="594360"/>
+            <a:off x="292608" y="4306824"/>
+            <a:ext cx="1289304" cy="530352"/>
           </a:xfrm>
           <a:prstGeom prst="rect">
             <a:avLst/>
@@ -4930,28 +5160,72 @@
           </a:bodyPr>
           <a:lstStyle/>
           <a:p>
-            <a:pPr algn="l"/>
-            <a:r>
-              <a:rPr sz="900" b="0" i="0">
-                <a:solidFill>
-                  <a:srgbClr val="1A1A1A"/>
+            <a:pPr algn="ctr"/>
+            <a:r>
+              <a:rPr sz="1100" b="1" i="0">
+                <a:solidFill>
+                  <a:srgbClr val="FFFFFF"/>
                 </a:solidFill>
               </a:rPr>
-              <a:t>Remise attestations · Engagement public 1 min/apprenant · Photos groupe</a:t>
-            </a:r>
-          </a:p>
-        </p:txBody>
-      </p:sp>
-      <p:sp>
-        <p:nvSpPr>
-          <p:cNvPr id="42" name="TextBox 41"/>
+              <a:t>14h30
+15h00</a:t>
+            </a:r>
+          </a:p>
+        </p:txBody>
+      </p:sp>
+      <p:sp>
+        <p:nvSpPr>
+          <p:cNvPr id="42" name="Rectangle 41"/>
+          <p:cNvSpPr/>
+          <p:nvPr/>
+        </p:nvSpPr>
+        <p:spPr>
+          <a:xfrm>
+            <a:off x="1618488" y="4233672"/>
+            <a:ext cx="2743200" cy="658368"/>
+          </a:xfrm>
+          <a:prstGeom prst="rect">
+            <a:avLst/>
+          </a:prstGeom>
+          <a:solidFill>
+            <a:srgbClr val="005555"/>
+          </a:solidFill>
+          <a:ln>
+            <a:noFill/>
+          </a:ln>
+        </p:spPr>
+        <p:style>
+          <a:lnRef idx="1">
+            <a:schemeClr val="accent1"/>
+          </a:lnRef>
+          <a:fillRef idx="3">
+            <a:schemeClr val="accent1"/>
+          </a:fillRef>
+          <a:effectRef idx="2">
+            <a:schemeClr val="accent1"/>
+          </a:effectRef>
+          <a:fontRef idx="minor">
+            <a:schemeClr val="lt1"/>
+          </a:fontRef>
+        </p:style>
+        <p:txBody>
+          <a:bodyPr rtlCol="0" anchor="ctr"/>
+          <a:lstStyle/>
+          <a:p>
+            <a:pPr algn="ctr"/>
+          </a:p>
+        </p:txBody>
+      </p:sp>
+      <p:sp>
+        <p:nvSpPr>
+          <p:cNvPr id="43" name="TextBox 42"/>
           <p:cNvSpPr txBox="1"/>
           <p:nvPr/>
         </p:nvSpPr>
         <p:spPr>
           <a:xfrm>
-            <a:off x="0" y="6492240"/>
-            <a:ext cx="12188952" cy="365760"/>
+            <a:off x="1719072" y="4379976"/>
+            <a:ext cx="2578608" cy="384048"/>
           </a:xfrm>
           <a:prstGeom prst="rect">
             <a:avLst/>
@@ -4964,14 +5238,93 @@
           </a:bodyPr>
           <a:lstStyle/>
           <a:p>
-            <a:pPr algn="ctr"/>
-            <a:r>
-              <a:rPr sz="800" b="0" i="0">
-                <a:solidFill>
-                  <a:srgbClr val="888888"/>
+            <a:pPr algn="l"/>
+            <a:r>
+              <a:rPr sz="1200" b="1" i="0">
+                <a:solidFill>
+                  <a:srgbClr val="FFFFFF"/>
                 </a:solidFill>
               </a:rPr>
-              <a:t>SHY-Performance · V6-01062026SHY-TE</a:t>
+              <a:t>Remise des certifications</a:t>
+            </a:r>
+          </a:p>
+        </p:txBody>
+      </p:sp>
+      <p:sp>
+        <p:nvSpPr>
+          <p:cNvPr id="44" name="Rectangle 43"/>
+          <p:cNvSpPr/>
+          <p:nvPr/>
+        </p:nvSpPr>
+        <p:spPr>
+          <a:xfrm>
+            <a:off x="4379976" y="4233672"/>
+            <a:ext cx="7534656" cy="658368"/>
+          </a:xfrm>
+          <a:prstGeom prst="rect">
+            <a:avLst/>
+          </a:prstGeom>
+          <a:solidFill>
+            <a:srgbClr val="FFFFFF"/>
+          </a:solidFill>
+          <a:ln w="10160">
+            <a:solidFill>
+              <a:srgbClr val="008080"/>
+            </a:solidFill>
+          </a:ln>
+        </p:spPr>
+        <p:style>
+          <a:lnRef idx="1">
+            <a:schemeClr val="accent1"/>
+          </a:lnRef>
+          <a:fillRef idx="3">
+            <a:schemeClr val="accent1"/>
+          </a:fillRef>
+          <a:effectRef idx="2">
+            <a:schemeClr val="accent1"/>
+          </a:effectRef>
+          <a:fontRef idx="minor">
+            <a:schemeClr val="lt1"/>
+          </a:fontRef>
+        </p:style>
+        <p:txBody>
+          <a:bodyPr rtlCol="0" anchor="ctr"/>
+          <a:lstStyle/>
+          <a:p>
+            <a:pPr algn="ctr"/>
+          </a:p>
+        </p:txBody>
+      </p:sp>
+      <p:sp>
+        <p:nvSpPr>
+          <p:cNvPr id="45" name="TextBox 44"/>
+          <p:cNvSpPr txBox="1"/>
+          <p:nvPr/>
+        </p:nvSpPr>
+        <p:spPr>
+          <a:xfrm>
+            <a:off x="4498848" y="4288536"/>
+            <a:ext cx="7333488" cy="566928"/>
+          </a:xfrm>
+          <a:prstGeom prst="rect">
+            <a:avLst/>
+          </a:prstGeom>
+          <a:noFill/>
+        </p:spPr>
+        <p:txBody>
+          <a:bodyPr wrap="square">
+            <a:spAutoFit/>
+          </a:bodyPr>
+          <a:lstStyle/>
+          <a:p>
+            <a:pPr algn="l"/>
+            <a:r>
+              <a:rPr sz="900" b="0" i="0">
+                <a:solidFill>
+                  <a:srgbClr val="1A1A1A"/>
+                </a:solidFill>
+              </a:rPr>
+              <a:t>Remise officielle · Engagement public 1 min · Votre premier jour terrain = demain.</a:t>
             </a:r>
           </a:p>
         </p:txBody>
@@ -5046,13 +5399,13 @@
         <p:spPr>
           <a:xfrm>
             <a:off x="0" y="0"/>
-            <a:ext cx="12188952" cy="685800"/>
-          </a:xfrm>
-          <a:prstGeom prst="rect">
-            <a:avLst/>
-          </a:prstGeom>
-          <a:solidFill>
-            <a:srgbClr val="005050"/>
+            <a:ext cx="12188952" cy="658368"/>
+          </a:xfrm>
+          <a:prstGeom prst="rect">
+            <a:avLst/>
+          </a:prstGeom>
+          <a:solidFill>
+            <a:srgbClr val="005555"/>
           </a:solidFill>
           <a:ln>
             <a:noFill/>
@@ -5088,14 +5441,14 @@
         </p:nvSpPr>
         <p:spPr>
           <a:xfrm>
-            <a:off x="0" y="667512"/>
-            <a:ext cx="12188952" cy="36576"/>
-          </a:xfrm>
-          <a:prstGeom prst="rect">
-            <a:avLst/>
-          </a:prstGeom>
-          <a:solidFill>
-            <a:srgbClr val="C9A84C"/>
+            <a:off x="0" y="640080"/>
+            <a:ext cx="12188952" cy="54864"/>
+          </a:xfrm>
+          <a:prstGeom prst="rect">
+            <a:avLst/>
+          </a:prstGeom>
+          <a:solidFill>
+            <a:srgbClr val="FF0000"/>
           </a:solidFill>
           <a:ln>
             <a:noFill/>
@@ -5131,8 +5484,8 @@
         </p:nvSpPr>
         <p:spPr>
           <a:xfrm>
-            <a:off x="274320" y="73152"/>
-            <a:ext cx="11612880" cy="566928"/>
+            <a:off x="164592" y="64008"/>
+            <a:ext cx="685800" cy="530352"/>
           </a:xfrm>
           <a:prstGeom prst="rect">
             <a:avLst/>
@@ -5147,12 +5500,12 @@
           <a:p>
             <a:pPr algn="l"/>
             <a:r>
-              <a:rPr sz="1800" b="1" i="0">
+              <a:rPr sz="2000" b="1" i="0">
                 <a:solidFill>
                   <a:srgbClr val="FFFFFF"/>
                 </a:solidFill>
               </a:rPr>
-              <a:t>Grille de Certification FIM V6 — 7 Critères / 28 Points</a:t>
+              <a:t>SHY</a:t>
             </a:r>
           </a:p>
         </p:txBody>
@@ -5165,14 +5518,14 @@
         </p:nvSpPr>
         <p:spPr>
           <a:xfrm>
-            <a:off x="274320" y="804672"/>
-            <a:ext cx="393192" cy="274320"/>
-          </a:xfrm>
-          <a:prstGeom prst="rect">
-            <a:avLst/>
-          </a:prstGeom>
-          <a:solidFill>
-            <a:srgbClr val="007A7A"/>
+            <a:off x="914400" y="91440"/>
+            <a:ext cx="36576" cy="475488"/>
+          </a:xfrm>
+          <a:prstGeom prst="rect">
+            <a:avLst/>
+          </a:prstGeom>
+          <a:solidFill>
+            <a:srgbClr val="FF0000"/>
           </a:solidFill>
           <a:ln>
             <a:noFill/>
@@ -5208,8 +5561,8 @@
         </p:nvSpPr>
         <p:spPr>
           <a:xfrm>
-            <a:off x="320040" y="841248"/>
-            <a:ext cx="301751" cy="219456"/>
+            <a:off x="1024128" y="91440"/>
+            <a:ext cx="10881360" cy="475488"/>
           </a:xfrm>
           <a:prstGeom prst="rect">
             <a:avLst/>
@@ -5222,14 +5575,14 @@
           </a:bodyPr>
           <a:lstStyle/>
           <a:p>
-            <a:pPr algn="ctr"/>
-            <a:r>
-              <a:rPr sz="900" b="1" i="0">
+            <a:pPr algn="l"/>
+            <a:r>
+              <a:rPr sz="1700" b="1" i="0">
                 <a:solidFill>
                   <a:srgbClr val="FFFFFF"/>
                 </a:solidFill>
               </a:rPr>
-              <a:t>#</a:t>
+              <a:t>Votre Grille de Certification — 7 Critères / 28 Points</a:t>
             </a:r>
           </a:p>
         </p:txBody>
@@ -5242,14 +5595,14 @@
         </p:nvSpPr>
         <p:spPr>
           <a:xfrm>
-            <a:off x="685800" y="804672"/>
-            <a:ext cx="3730752" cy="274320"/>
-          </a:xfrm>
-          <a:prstGeom prst="rect">
-            <a:avLst/>
-          </a:prstGeom>
-          <a:solidFill>
-            <a:srgbClr val="007A7A"/>
+            <a:off x="0" y="6492240"/>
+            <a:ext cx="12188952" cy="365760"/>
+          </a:xfrm>
+          <a:prstGeom prst="rect">
+            <a:avLst/>
+          </a:prstGeom>
+          <a:solidFill>
+            <a:srgbClr val="005555"/>
           </a:solidFill>
           <a:ln>
             <a:noFill/>
@@ -5285,8 +5638,8 @@
         </p:nvSpPr>
         <p:spPr>
           <a:xfrm>
-            <a:off x="731520" y="841248"/>
-            <a:ext cx="3639312" cy="219456"/>
+            <a:off x="0" y="6519672"/>
+            <a:ext cx="12188952" cy="274320"/>
           </a:xfrm>
           <a:prstGeom prst="rect">
             <a:avLst/>
@@ -5301,32 +5654,66 @@
           <a:p>
             <a:pPr algn="ctr"/>
             <a:r>
-              <a:rPr sz="900" b="1" i="0">
+              <a:rPr sz="900" b="0" i="0">
                 <a:solidFill>
                   <a:srgbClr val="FFFFFF"/>
                 </a:solidFill>
               </a:rPr>
-              <a:t>Critère</a:t>
-            </a:r>
-          </a:p>
-        </p:txBody>
-      </p:sp>
-      <p:sp>
-        <p:nvSpPr>
-          <p:cNvPr id="10" name="Rectangle 9"/>
+              <a:t>SHY-Performance  ·  Formation FIM  ·  V6-01062026SHY-TE</a:t>
+            </a:r>
+          </a:p>
+        </p:txBody>
+      </p:sp>
+      <p:sp>
+        <p:nvSpPr>
+          <p:cNvPr id="10" name="TextBox 9"/>
+          <p:cNvSpPr txBox="1"/>
+          <p:nvPr/>
+        </p:nvSpPr>
+        <p:spPr>
+          <a:xfrm>
+            <a:off x="320040" y="777240"/>
+            <a:ext cx="11521440" cy="292608"/>
+          </a:xfrm>
+          <a:prstGeom prst="rect">
+            <a:avLst/>
+          </a:prstGeom>
+          <a:noFill/>
+        </p:spPr>
+        <p:txBody>
+          <a:bodyPr wrap="square">
+            <a:spAutoFit/>
+          </a:bodyPr>
+          <a:lstStyle/>
+          <a:p>
+            <a:pPr algn="l"/>
+            <a:r>
+              <a:rPr sz="1200" b="1" i="0">
+                <a:solidFill>
+                  <a:srgbClr val="005555"/>
+                </a:solidFill>
+              </a:rPr>
+              <a:t>Voici exactement ce sur quoi vous serez évalué(e) — aucune surprise :</a:t>
+            </a:r>
+          </a:p>
+        </p:txBody>
+      </p:sp>
+      <p:sp>
+        <p:nvSpPr>
+          <p:cNvPr id="11" name="Rectangle 10"/>
           <p:cNvSpPr/>
           <p:nvPr/>
         </p:nvSpPr>
         <p:spPr>
           <a:xfrm>
-            <a:off x="4434840" y="804672"/>
-            <a:ext cx="5010912" cy="274320"/>
-          </a:xfrm>
-          <a:prstGeom prst="rect">
-            <a:avLst/>
-          </a:prstGeom>
-          <a:solidFill>
-            <a:srgbClr val="007A7A"/>
+            <a:off x="274320" y="1152144"/>
+            <a:ext cx="384048" cy="274320"/>
+          </a:xfrm>
+          <a:prstGeom prst="rect">
+            <a:avLst/>
+          </a:prstGeom>
+          <a:solidFill>
+            <a:srgbClr val="005555"/>
           </a:solidFill>
           <a:ln>
             <a:noFill/>
@@ -5356,14 +5743,14 @@
       </p:sp>
       <p:sp>
         <p:nvSpPr>
-          <p:cNvPr id="11" name="TextBox 10"/>
+          <p:cNvPr id="12" name="TextBox 11"/>
           <p:cNvSpPr txBox="1"/>
           <p:nvPr/>
         </p:nvSpPr>
         <p:spPr>
           <a:xfrm>
-            <a:off x="4480559" y="841248"/>
-            <a:ext cx="4919472" cy="219456"/>
+            <a:off x="329184" y="1188720"/>
+            <a:ext cx="292607" cy="219456"/>
           </a:xfrm>
           <a:prstGeom prst="rect">
             <a:avLst/>
@@ -5383,27 +5770,27 @@
                   <a:srgbClr val="FFFFFF"/>
                 </a:solidFill>
               </a:rPr>
-              <a:t>Indicateurs observables</a:t>
-            </a:r>
-          </a:p>
-        </p:txBody>
-      </p:sp>
-      <p:sp>
-        <p:nvSpPr>
-          <p:cNvPr id="12" name="Rectangle 11"/>
+              <a:t>#</a:t>
+            </a:r>
+          </a:p>
+        </p:txBody>
+      </p:sp>
+      <p:sp>
+        <p:nvSpPr>
+          <p:cNvPr id="13" name="Rectangle 12"/>
           <p:cNvSpPr/>
           <p:nvPr/>
         </p:nvSpPr>
         <p:spPr>
           <a:xfrm>
-            <a:off x="9464040" y="804672"/>
-            <a:ext cx="713232" cy="274320"/>
-          </a:xfrm>
-          <a:prstGeom prst="rect">
-            <a:avLst/>
-          </a:prstGeom>
-          <a:solidFill>
-            <a:srgbClr val="007A7A"/>
+            <a:off x="685800" y="1152144"/>
+            <a:ext cx="6236208" cy="274320"/>
+          </a:xfrm>
+          <a:prstGeom prst="rect">
+            <a:avLst/>
+          </a:prstGeom>
+          <a:solidFill>
+            <a:srgbClr val="005555"/>
           </a:solidFill>
           <a:ln>
             <a:noFill/>
@@ -5433,14 +5820,14 @@
       </p:sp>
       <p:sp>
         <p:nvSpPr>
-          <p:cNvPr id="13" name="TextBox 12"/>
+          <p:cNvPr id="14" name="TextBox 13"/>
           <p:cNvSpPr txBox="1"/>
           <p:nvPr/>
         </p:nvSpPr>
         <p:spPr>
           <a:xfrm>
-            <a:off x="9509760" y="841248"/>
-            <a:ext cx="621792" cy="219456"/>
+            <a:off x="740664" y="1188720"/>
+            <a:ext cx="6144768" cy="219456"/>
           </a:xfrm>
           <a:prstGeom prst="rect">
             <a:avLst/>
@@ -5453,34 +5840,34 @@
           </a:bodyPr>
           <a:lstStyle/>
           <a:p>
-            <a:pPr algn="ctr"/>
+            <a:pPr algn="l"/>
             <a:r>
               <a:rPr sz="900" b="1" i="0">
                 <a:solidFill>
                   <a:srgbClr val="FFFFFF"/>
                 </a:solidFill>
               </a:rPr>
-              <a:t>1</a:t>
-            </a:r>
-          </a:p>
-        </p:txBody>
-      </p:sp>
-      <p:sp>
-        <p:nvSpPr>
-          <p:cNvPr id="14" name="Rectangle 13"/>
+              <a:t>Ce que vous devez démontrer</a:t>
+            </a:r>
+          </a:p>
+        </p:txBody>
+      </p:sp>
+      <p:sp>
+        <p:nvSpPr>
+          <p:cNvPr id="15" name="Rectangle 14"/>
           <p:cNvSpPr/>
           <p:nvPr/>
         </p:nvSpPr>
         <p:spPr>
           <a:xfrm>
-            <a:off x="10195560" y="804672"/>
-            <a:ext cx="713232" cy="274320"/>
-          </a:xfrm>
-          <a:prstGeom prst="rect">
-            <a:avLst/>
-          </a:prstGeom>
-          <a:solidFill>
-            <a:srgbClr val="007A7A"/>
+            <a:off x="6949440" y="1152144"/>
+            <a:ext cx="2487168" cy="274320"/>
+          </a:xfrm>
+          <a:prstGeom prst="rect">
+            <a:avLst/>
+          </a:prstGeom>
+          <a:solidFill>
+            <a:srgbClr val="005555"/>
           </a:solidFill>
           <a:ln>
             <a:noFill/>
@@ -5510,14 +5897,14 @@
       </p:sp>
       <p:sp>
         <p:nvSpPr>
-          <p:cNvPr id="15" name="TextBox 14"/>
+          <p:cNvPr id="16" name="TextBox 15"/>
           <p:cNvSpPr txBox="1"/>
           <p:nvPr/>
         </p:nvSpPr>
         <p:spPr>
           <a:xfrm>
-            <a:off x="10241280" y="841248"/>
-            <a:ext cx="621792" cy="219456"/>
+            <a:off x="7004303" y="1188720"/>
+            <a:ext cx="2395728" cy="219456"/>
           </a:xfrm>
           <a:prstGeom prst="rect">
             <a:avLst/>
@@ -5530,34 +5917,34 @@
           </a:bodyPr>
           <a:lstStyle/>
           <a:p>
-            <a:pPr algn="ctr"/>
+            <a:pPr algn="l"/>
             <a:r>
               <a:rPr sz="900" b="1" i="0">
                 <a:solidFill>
                   <a:srgbClr val="FFFFFF"/>
                 </a:solidFill>
               </a:rPr>
-              <a:t>2</a:t>
-            </a:r>
-          </a:p>
-        </p:txBody>
-      </p:sp>
-      <p:sp>
-        <p:nvSpPr>
-          <p:cNvPr id="16" name="Rectangle 15"/>
+              <a:t>Indicateurs observés</a:t>
+            </a:r>
+          </a:p>
+        </p:txBody>
+      </p:sp>
+      <p:sp>
+        <p:nvSpPr>
+          <p:cNvPr id="17" name="Rectangle 16"/>
           <p:cNvSpPr/>
           <p:nvPr/>
         </p:nvSpPr>
         <p:spPr>
           <a:xfrm>
-            <a:off x="10927080" y="804672"/>
+            <a:off x="9464040" y="1152144"/>
             <a:ext cx="713232" cy="274320"/>
           </a:xfrm>
           <a:prstGeom prst="rect">
             <a:avLst/>
           </a:prstGeom>
           <a:solidFill>
-            <a:srgbClr val="007A7A"/>
+            <a:srgbClr val="005555"/>
           </a:solidFill>
           <a:ln>
             <a:noFill/>
@@ -5587,13 +5974,13 @@
       </p:sp>
       <p:sp>
         <p:nvSpPr>
-          <p:cNvPr id="17" name="TextBox 16"/>
+          <p:cNvPr id="18" name="TextBox 17"/>
           <p:cNvSpPr txBox="1"/>
           <p:nvPr/>
         </p:nvSpPr>
         <p:spPr>
           <a:xfrm>
-            <a:off x="10972800" y="841248"/>
+            <a:off x="9518904" y="1188720"/>
             <a:ext cx="621792" cy="219456"/>
           </a:xfrm>
           <a:prstGeom prst="rect">
@@ -5614,27 +6001,27 @@
                   <a:srgbClr val="FFFFFF"/>
                 </a:solidFill>
               </a:rPr>
-              <a:t>3</a:t>
-            </a:r>
-          </a:p>
-        </p:txBody>
-      </p:sp>
-      <p:sp>
-        <p:nvSpPr>
-          <p:cNvPr id="18" name="Rectangle 17"/>
+              <a:t>1</a:t>
+            </a:r>
+          </a:p>
+        </p:txBody>
+      </p:sp>
+      <p:sp>
+        <p:nvSpPr>
+          <p:cNvPr id="19" name="Rectangle 18"/>
           <p:cNvSpPr/>
           <p:nvPr/>
         </p:nvSpPr>
         <p:spPr>
           <a:xfrm>
-            <a:off x="11658600" y="804672"/>
-            <a:ext cx="457200" cy="274320"/>
-          </a:xfrm>
-          <a:prstGeom prst="rect">
-            <a:avLst/>
-          </a:prstGeom>
-          <a:solidFill>
-            <a:srgbClr val="007A7A"/>
+            <a:off x="10195560" y="1152144"/>
+            <a:ext cx="713232" cy="274320"/>
+          </a:xfrm>
+          <a:prstGeom prst="rect">
+            <a:avLst/>
+          </a:prstGeom>
+          <a:solidFill>
+            <a:srgbClr val="005555"/>
           </a:solidFill>
           <a:ln>
             <a:noFill/>
@@ -5664,14 +6051,14 @@
       </p:sp>
       <p:sp>
         <p:nvSpPr>
-          <p:cNvPr id="19" name="TextBox 18"/>
+          <p:cNvPr id="20" name="TextBox 19"/>
           <p:cNvSpPr txBox="1"/>
           <p:nvPr/>
         </p:nvSpPr>
         <p:spPr>
           <a:xfrm>
-            <a:off x="11704320" y="841248"/>
-            <a:ext cx="365760" cy="219456"/>
+            <a:off x="10250424" y="1188720"/>
+            <a:ext cx="621792" cy="219456"/>
           </a:xfrm>
           <a:prstGeom prst="rect">
             <a:avLst/>
@@ -5691,27 +6078,27 @@
                   <a:srgbClr val="FFFFFF"/>
                 </a:solidFill>
               </a:rPr>
-              <a:t>4</a:t>
-            </a:r>
-          </a:p>
-        </p:txBody>
-      </p:sp>
-      <p:sp>
-        <p:nvSpPr>
-          <p:cNvPr id="20" name="Rectangle 19"/>
+              <a:t>2</a:t>
+            </a:r>
+          </a:p>
+        </p:txBody>
+      </p:sp>
+      <p:sp>
+        <p:nvSpPr>
+          <p:cNvPr id="21" name="Rectangle 20"/>
           <p:cNvSpPr/>
           <p:nvPr/>
         </p:nvSpPr>
         <p:spPr>
           <a:xfrm>
-            <a:off x="274320" y="1097280"/>
-            <a:ext cx="393192" cy="502920"/>
-          </a:xfrm>
-          <a:prstGeom prst="rect">
-            <a:avLst/>
-          </a:prstGeom>
-          <a:solidFill>
-            <a:srgbClr val="007A7A"/>
+            <a:off x="10927080" y="1152144"/>
+            <a:ext cx="713232" cy="274320"/>
+          </a:xfrm>
+          <a:prstGeom prst="rect">
+            <a:avLst/>
+          </a:prstGeom>
+          <a:solidFill>
+            <a:srgbClr val="005555"/>
           </a:solidFill>
           <a:ln>
             <a:noFill/>
@@ -5741,14 +6128,14 @@
       </p:sp>
       <p:sp>
         <p:nvSpPr>
-          <p:cNvPr id="21" name="TextBox 20"/>
+          <p:cNvPr id="22" name="TextBox 21"/>
           <p:cNvSpPr txBox="1"/>
           <p:nvPr/>
         </p:nvSpPr>
         <p:spPr>
           <a:xfrm>
-            <a:off x="292608" y="1207007"/>
-            <a:ext cx="356616" cy="320040"/>
+            <a:off x="10981944" y="1188720"/>
+            <a:ext cx="621792" cy="219456"/>
           </a:xfrm>
           <a:prstGeom prst="rect">
             <a:avLst/>
@@ -5763,32 +6150,32 @@
           <a:p>
             <a:pPr algn="ctr"/>
             <a:r>
-              <a:rPr sz="1000" b="1" i="0">
+              <a:rPr sz="900" b="1" i="0">
                 <a:solidFill>
                   <a:srgbClr val="FFFFFF"/>
                 </a:solidFill>
               </a:rPr>
-              <a:t>C1</a:t>
-            </a:r>
-          </a:p>
-        </p:txBody>
-      </p:sp>
-      <p:sp>
-        <p:nvSpPr>
-          <p:cNvPr id="22" name="Rectangle 21"/>
+              <a:t>3</a:t>
+            </a:r>
+          </a:p>
+        </p:txBody>
+      </p:sp>
+      <p:sp>
+        <p:nvSpPr>
+          <p:cNvPr id="23" name="Rectangle 22"/>
           <p:cNvSpPr/>
           <p:nvPr/>
         </p:nvSpPr>
         <p:spPr>
           <a:xfrm>
-            <a:off x="685800" y="1097280"/>
-            <a:ext cx="3730752" cy="502920"/>
-          </a:xfrm>
-          <a:prstGeom prst="rect">
-            <a:avLst/>
-          </a:prstGeom>
-          <a:solidFill>
-            <a:srgbClr val="F0F7F7"/>
+            <a:off x="11658600" y="1152144"/>
+            <a:ext cx="457200" cy="274320"/>
+          </a:xfrm>
+          <a:prstGeom prst="rect">
+            <a:avLst/>
+          </a:prstGeom>
+          <a:solidFill>
+            <a:srgbClr val="005555"/>
           </a:solidFill>
           <a:ln>
             <a:noFill/>
@@ -5818,14 +6205,14 @@
       </p:sp>
       <p:sp>
         <p:nvSpPr>
-          <p:cNvPr id="23" name="TextBox 22"/>
+          <p:cNvPr id="24" name="TextBox 23"/>
           <p:cNvSpPr txBox="1"/>
           <p:nvPr/>
         </p:nvSpPr>
         <p:spPr>
           <a:xfrm>
-            <a:off x="758952" y="1188720"/>
-            <a:ext cx="3584448" cy="384048"/>
+            <a:off x="11713464" y="1188720"/>
+            <a:ext cx="365760" cy="219456"/>
           </a:xfrm>
           <a:prstGeom prst="rect">
             <a:avLst/>
@@ -5838,34 +6225,34 @@
           </a:bodyPr>
           <a:lstStyle/>
           <a:p>
-            <a:pPr algn="l"/>
-            <a:r>
-              <a:rPr sz="1000" b="1" i="0">
-                <a:solidFill>
-                  <a:srgbClr val="005050"/>
+            <a:pPr algn="ctr"/>
+            <a:r>
+              <a:rPr sz="900" b="1" i="0">
+                <a:solidFill>
+                  <a:srgbClr val="FFFFFF"/>
                 </a:solidFill>
               </a:rPr>
-              <a:t>Accroche naturelle ≤ 15 sec</a:t>
-            </a:r>
-          </a:p>
-        </p:txBody>
-      </p:sp>
-      <p:sp>
-        <p:nvSpPr>
-          <p:cNvPr id="24" name="Rectangle 23"/>
+              <a:t>4</a:t>
+            </a:r>
+          </a:p>
+        </p:txBody>
+      </p:sp>
+      <p:sp>
+        <p:nvSpPr>
+          <p:cNvPr id="25" name="Rectangle 24"/>
           <p:cNvSpPr/>
           <p:nvPr/>
         </p:nvSpPr>
         <p:spPr>
           <a:xfrm>
-            <a:off x="4434840" y="1097280"/>
-            <a:ext cx="5010912" cy="502920"/>
-          </a:xfrm>
-          <a:prstGeom prst="rect">
-            <a:avLst/>
-          </a:prstGeom>
-          <a:solidFill>
-            <a:srgbClr val="F0F7F7"/>
+            <a:off x="274320" y="1444752"/>
+            <a:ext cx="384048" cy="475488"/>
+          </a:xfrm>
+          <a:prstGeom prst="rect">
+            <a:avLst/>
+          </a:prstGeom>
+          <a:solidFill>
+            <a:srgbClr val="FF0000"/>
           </a:solidFill>
           <a:ln>
             <a:noFill/>
@@ -5895,14 +6282,14 @@
       </p:sp>
       <p:sp>
         <p:nvSpPr>
-          <p:cNvPr id="25" name="TextBox 24"/>
+          <p:cNvPr id="26" name="TextBox 25"/>
           <p:cNvSpPr txBox="1"/>
           <p:nvPr/>
         </p:nvSpPr>
         <p:spPr>
           <a:xfrm>
-            <a:off x="4507992" y="1152144"/>
-            <a:ext cx="4864608" cy="420624"/>
+            <a:off x="310896" y="1554480"/>
+            <a:ext cx="329184" cy="310896"/>
           </a:xfrm>
           <a:prstGeom prst="rect">
             <a:avLst/>
@@ -5915,28 +6302,28 @@
           </a:bodyPr>
           <a:lstStyle/>
           <a:p>
-            <a:pPr algn="l"/>
-            <a:r>
-              <a:rPr sz="900" b="0" i="1">
-                <a:solidFill>
-                  <a:srgbClr val="1A1A1A"/>
+            <a:pPr algn="ctr"/>
+            <a:r>
+              <a:rPr sz="1000" b="1" i="0">
+                <a:solidFill>
+                  <a:srgbClr val="FFFFFF"/>
                 </a:solidFill>
               </a:rPr>
-              <a:t>Contact visuel, sourire, question ouverte, aisance</a:t>
-            </a:r>
-          </a:p>
-        </p:txBody>
-      </p:sp>
-      <p:sp>
-        <p:nvSpPr>
-          <p:cNvPr id="26" name="Rectangle 25"/>
+              <a:t>C1</a:t>
+            </a:r>
+          </a:p>
+        </p:txBody>
+      </p:sp>
+      <p:sp>
+        <p:nvSpPr>
+          <p:cNvPr id="27" name="Rectangle 26"/>
           <p:cNvSpPr/>
           <p:nvPr/>
         </p:nvSpPr>
         <p:spPr>
           <a:xfrm>
-            <a:off x="9464040" y="1097280"/>
-            <a:ext cx="713232" cy="502920"/>
+            <a:off x="685800" y="1444752"/>
+            <a:ext cx="6236208" cy="475488"/>
           </a:xfrm>
           <a:prstGeom prst="rect">
             <a:avLst/>
@@ -5944,10 +6331,8 @@
           <a:solidFill>
             <a:srgbClr val="FFFFFF"/>
           </a:solidFill>
-          <a:ln w="6350">
-            <a:solidFill>
-              <a:srgbClr val="007A7A"/>
-            </a:solidFill>
+          <a:ln>
+            <a:noFill/>
           </a:ln>
         </p:spPr>
         <p:style>
@@ -5974,14 +6359,14 @@
       </p:sp>
       <p:sp>
         <p:nvSpPr>
-          <p:cNvPr id="27" name="TextBox 26"/>
+          <p:cNvPr id="28" name="TextBox 27"/>
           <p:cNvSpPr txBox="1"/>
           <p:nvPr/>
         </p:nvSpPr>
         <p:spPr>
           <a:xfrm>
-            <a:off x="9555480" y="1207007"/>
-            <a:ext cx="530352" cy="320040"/>
+            <a:off x="777240" y="1517904"/>
+            <a:ext cx="6099048" cy="365760"/>
           </a:xfrm>
           <a:prstGeom prst="rect">
             <a:avLst/>
@@ -5994,28 +6379,28 @@
           </a:bodyPr>
           <a:lstStyle/>
           <a:p>
-            <a:pPr algn="ctr"/>
-            <a:r>
-              <a:rPr sz="900" b="0" i="0">
-                <a:solidFill>
-                  <a:srgbClr val="BBBBBB"/>
+            <a:pPr algn="l"/>
+            <a:r>
+              <a:rPr sz="1000" b="1" i="0">
+                <a:solidFill>
+                  <a:srgbClr val="005555"/>
                 </a:solidFill>
               </a:rPr>
-              <a:t>1</a:t>
-            </a:r>
-          </a:p>
-        </p:txBody>
-      </p:sp>
-      <p:sp>
-        <p:nvSpPr>
-          <p:cNvPr id="28" name="Rectangle 27"/>
+              <a:t>Votre accroche est naturelle en &lt; 15 sec</a:t>
+            </a:r>
+          </a:p>
+        </p:txBody>
+      </p:sp>
+      <p:sp>
+        <p:nvSpPr>
+          <p:cNvPr id="29" name="Rectangle 28"/>
           <p:cNvSpPr/>
           <p:nvPr/>
         </p:nvSpPr>
         <p:spPr>
           <a:xfrm>
-            <a:off x="10195560" y="1097280"/>
-            <a:ext cx="713232" cy="502920"/>
+            <a:off x="6949440" y="1444752"/>
+            <a:ext cx="2487168" cy="475488"/>
           </a:xfrm>
           <a:prstGeom prst="rect">
             <a:avLst/>
@@ -6023,10 +6408,8 @@
           <a:solidFill>
             <a:srgbClr val="FFFFFF"/>
           </a:solidFill>
-          <a:ln w="6350">
-            <a:solidFill>
-              <a:srgbClr val="007A7A"/>
-            </a:solidFill>
+          <a:ln>
+            <a:noFill/>
           </a:ln>
         </p:spPr>
         <p:style>
@@ -6053,14 +6436,14 @@
       </p:sp>
       <p:sp>
         <p:nvSpPr>
-          <p:cNvPr id="29" name="TextBox 28"/>
+          <p:cNvPr id="30" name="TextBox 29"/>
           <p:cNvSpPr txBox="1"/>
           <p:nvPr/>
         </p:nvSpPr>
         <p:spPr>
           <a:xfrm>
-            <a:off x="10287000" y="1207007"/>
-            <a:ext cx="530352" cy="320040"/>
+            <a:off x="7040879" y="1499616"/>
+            <a:ext cx="2350008" cy="384048"/>
           </a:xfrm>
           <a:prstGeom prst="rect">
             <a:avLst/>
@@ -6073,28 +6456,28 @@
           </a:bodyPr>
           <a:lstStyle/>
           <a:p>
-            <a:pPr algn="ctr"/>
-            <a:r>
-              <a:rPr sz="900" b="0" i="0">
-                <a:solidFill>
-                  <a:srgbClr val="BBBBBB"/>
+            <a:pPr algn="l"/>
+            <a:r>
+              <a:rPr sz="900" b="0" i="1">
+                <a:solidFill>
+                  <a:srgbClr val="555555"/>
                 </a:solidFill>
               </a:rPr>
-              <a:t>2</a:t>
-            </a:r>
-          </a:p>
-        </p:txBody>
-      </p:sp>
-      <p:sp>
-        <p:nvSpPr>
-          <p:cNvPr id="30" name="Rectangle 29"/>
+              <a:t>Contact visuel, sourire, question ouverte, aisance corporelle</a:t>
+            </a:r>
+          </a:p>
+        </p:txBody>
+      </p:sp>
+      <p:sp>
+        <p:nvSpPr>
+          <p:cNvPr id="31" name="Rectangle 30"/>
           <p:cNvSpPr/>
           <p:nvPr/>
         </p:nvSpPr>
         <p:spPr>
           <a:xfrm>
-            <a:off x="10927080" y="1097280"/>
-            <a:ext cx="713232" cy="502920"/>
+            <a:off x="9464040" y="1444752"/>
+            <a:ext cx="713232" cy="475488"/>
           </a:xfrm>
           <a:prstGeom prst="rect">
             <a:avLst/>
@@ -6104,7 +6487,7 @@
           </a:solidFill>
           <a:ln w="6350">
             <a:solidFill>
-              <a:srgbClr val="007A7A"/>
+              <a:srgbClr val="008080"/>
             </a:solidFill>
           </a:ln>
         </p:spPr>
@@ -6132,14 +6515,14 @@
       </p:sp>
       <p:sp>
         <p:nvSpPr>
-          <p:cNvPr id="31" name="TextBox 30"/>
+          <p:cNvPr id="32" name="TextBox 31"/>
           <p:cNvSpPr txBox="1"/>
           <p:nvPr/>
         </p:nvSpPr>
         <p:spPr>
           <a:xfrm>
-            <a:off x="11018519" y="1207007"/>
-            <a:ext cx="530352" cy="320040"/>
+            <a:off x="9555480" y="1554480"/>
+            <a:ext cx="530352" cy="292608"/>
           </a:xfrm>
           <a:prstGeom prst="rect">
             <a:avLst/>
@@ -6156,24 +6539,24 @@
             <a:r>
               <a:rPr sz="900" b="0" i="0">
                 <a:solidFill>
-                  <a:srgbClr val="BBBBBB"/>
+                  <a:srgbClr val="EEEEEE"/>
                 </a:solidFill>
               </a:rPr>
-              <a:t>3</a:t>
-            </a:r>
-          </a:p>
-        </p:txBody>
-      </p:sp>
-      <p:sp>
-        <p:nvSpPr>
-          <p:cNvPr id="32" name="Rectangle 31"/>
+              <a:t>1</a:t>
+            </a:r>
+          </a:p>
+        </p:txBody>
+      </p:sp>
+      <p:sp>
+        <p:nvSpPr>
+          <p:cNvPr id="33" name="Rectangle 32"/>
           <p:cNvSpPr/>
           <p:nvPr/>
         </p:nvSpPr>
         <p:spPr>
           <a:xfrm>
-            <a:off x="11658600" y="1097280"/>
-            <a:ext cx="457200" cy="502920"/>
+            <a:off x="10195560" y="1444752"/>
+            <a:ext cx="713232" cy="475488"/>
           </a:xfrm>
           <a:prstGeom prst="rect">
             <a:avLst/>
@@ -6183,7 +6566,7 @@
           </a:solidFill>
           <a:ln w="6350">
             <a:solidFill>
-              <a:srgbClr val="007A7A"/>
+              <a:srgbClr val="008080"/>
             </a:solidFill>
           </a:ln>
         </p:spPr>
@@ -6211,14 +6594,14 @@
       </p:sp>
       <p:sp>
         <p:nvSpPr>
-          <p:cNvPr id="33" name="TextBox 32"/>
+          <p:cNvPr id="34" name="TextBox 33"/>
           <p:cNvSpPr txBox="1"/>
           <p:nvPr/>
         </p:nvSpPr>
         <p:spPr>
           <a:xfrm>
-            <a:off x="11750040" y="1207007"/>
-            <a:ext cx="274320" cy="320040"/>
+            <a:off x="10287000" y="1554480"/>
+            <a:ext cx="530352" cy="292608"/>
           </a:xfrm>
           <a:prstGeom prst="rect">
             <a:avLst/>
@@ -6235,33 +6618,35 @@
             <a:r>
               <a:rPr sz="900" b="0" i="0">
                 <a:solidFill>
-                  <a:srgbClr val="BBBBBB"/>
+                  <a:srgbClr val="EEEEEE"/>
                 </a:solidFill>
               </a:rPr>
-              <a:t>4</a:t>
-            </a:r>
-          </a:p>
-        </p:txBody>
-      </p:sp>
-      <p:sp>
-        <p:nvSpPr>
-          <p:cNvPr id="34" name="Rectangle 33"/>
+              <a:t>2</a:t>
+            </a:r>
+          </a:p>
+        </p:txBody>
+      </p:sp>
+      <p:sp>
+        <p:nvSpPr>
+          <p:cNvPr id="35" name="Rectangle 34"/>
           <p:cNvSpPr/>
           <p:nvPr/>
         </p:nvSpPr>
         <p:spPr>
           <a:xfrm>
-            <a:off x="274320" y="1618488"/>
-            <a:ext cx="393192" cy="502920"/>
-          </a:xfrm>
-          <a:prstGeom prst="rect">
-            <a:avLst/>
-          </a:prstGeom>
-          <a:solidFill>
-            <a:srgbClr val="007A7A"/>
-          </a:solidFill>
-          <a:ln>
-            <a:noFill/>
+            <a:off x="10927080" y="1444752"/>
+            <a:ext cx="713232" cy="475488"/>
+          </a:xfrm>
+          <a:prstGeom prst="rect">
+            <a:avLst/>
+          </a:prstGeom>
+          <a:solidFill>
+            <a:srgbClr val="FFFFFF"/>
+          </a:solidFill>
+          <a:ln w="6350">
+            <a:solidFill>
+              <a:srgbClr val="008080"/>
+            </a:solidFill>
           </a:ln>
         </p:spPr>
         <p:style>
@@ -6288,14 +6673,14 @@
       </p:sp>
       <p:sp>
         <p:nvSpPr>
-          <p:cNvPr id="35" name="TextBox 34"/>
+          <p:cNvPr id="36" name="TextBox 35"/>
           <p:cNvSpPr txBox="1"/>
           <p:nvPr/>
         </p:nvSpPr>
         <p:spPr>
           <a:xfrm>
-            <a:off x="292608" y="1728216"/>
-            <a:ext cx="356616" cy="320040"/>
+            <a:off x="11018519" y="1554480"/>
+            <a:ext cx="530352" cy="292608"/>
           </a:xfrm>
           <a:prstGeom prst="rect">
             <a:avLst/>
@@ -6310,26 +6695,26 @@
           <a:p>
             <a:pPr algn="ctr"/>
             <a:r>
-              <a:rPr sz="1000" b="1" i="0">
-                <a:solidFill>
-                  <a:srgbClr val="FFFFFF"/>
+              <a:rPr sz="900" b="0" i="0">
+                <a:solidFill>
+                  <a:srgbClr val="EEEEEE"/>
                 </a:solidFill>
               </a:rPr>
-              <a:t>C2</a:t>
-            </a:r>
-          </a:p>
-        </p:txBody>
-      </p:sp>
-      <p:sp>
-        <p:nvSpPr>
-          <p:cNvPr id="36" name="Rectangle 35"/>
+              <a:t>3</a:t>
+            </a:r>
+          </a:p>
+        </p:txBody>
+      </p:sp>
+      <p:sp>
+        <p:nvSpPr>
+          <p:cNvPr id="37" name="Rectangle 36"/>
           <p:cNvSpPr/>
           <p:nvPr/>
         </p:nvSpPr>
         <p:spPr>
           <a:xfrm>
-            <a:off x="685800" y="1618488"/>
-            <a:ext cx="3730752" cy="502920"/>
+            <a:off x="11658600" y="1444752"/>
+            <a:ext cx="457200" cy="475488"/>
           </a:xfrm>
           <a:prstGeom prst="rect">
             <a:avLst/>
@@ -6337,8 +6722,10 @@
           <a:solidFill>
             <a:srgbClr val="FFFFFF"/>
           </a:solidFill>
-          <a:ln>
-            <a:noFill/>
+          <a:ln w="6350">
+            <a:solidFill>
+              <a:srgbClr val="008080"/>
+            </a:solidFill>
           </a:ln>
         </p:spPr>
         <p:style>
@@ -6365,14 +6752,14 @@
       </p:sp>
       <p:sp>
         <p:nvSpPr>
-          <p:cNvPr id="37" name="TextBox 36"/>
+          <p:cNvPr id="38" name="TextBox 37"/>
           <p:cNvSpPr txBox="1"/>
           <p:nvPr/>
         </p:nvSpPr>
         <p:spPr>
           <a:xfrm>
-            <a:off x="758952" y="1709928"/>
-            <a:ext cx="3584448" cy="384048"/>
+            <a:off x="11750040" y="1554480"/>
+            <a:ext cx="274320" cy="292608"/>
           </a:xfrm>
           <a:prstGeom prst="rect">
             <a:avLst/>
@@ -6385,34 +6772,34 @@
           </a:bodyPr>
           <a:lstStyle/>
           <a:p>
-            <a:pPr algn="l"/>
-            <a:r>
-              <a:rPr sz="1000" b="1" i="0">
-                <a:solidFill>
-                  <a:srgbClr val="005050"/>
+            <a:pPr algn="ctr"/>
+            <a:r>
+              <a:rPr sz="900" b="0" i="0">
+                <a:solidFill>
+                  <a:srgbClr val="EEEEEE"/>
                 </a:solidFill>
               </a:rPr>
-              <a:t>Script fluide et personnalisé</a:t>
-            </a:r>
-          </a:p>
-        </p:txBody>
-      </p:sp>
-      <p:sp>
-        <p:nvSpPr>
-          <p:cNvPr id="38" name="Rectangle 37"/>
+              <a:t>4</a:t>
+            </a:r>
+          </a:p>
+        </p:txBody>
+      </p:sp>
+      <p:sp>
+        <p:nvSpPr>
+          <p:cNvPr id="39" name="Rectangle 38"/>
           <p:cNvSpPr/>
           <p:nvPr/>
         </p:nvSpPr>
         <p:spPr>
           <a:xfrm>
-            <a:off x="4434840" y="1618488"/>
-            <a:ext cx="5010912" cy="502920"/>
-          </a:xfrm>
-          <a:prstGeom prst="rect">
-            <a:avLst/>
-          </a:prstGeom>
-          <a:solidFill>
-            <a:srgbClr val="FFFFFF"/>
+            <a:off x="274320" y="1938528"/>
+            <a:ext cx="384048" cy="475488"/>
+          </a:xfrm>
+          <a:prstGeom prst="rect">
+            <a:avLst/>
+          </a:prstGeom>
+          <a:solidFill>
+            <a:srgbClr val="FF0000"/>
           </a:solidFill>
           <a:ln>
             <a:noFill/>
@@ -6442,14 +6829,14 @@
       </p:sp>
       <p:sp>
         <p:nvSpPr>
-          <p:cNvPr id="39" name="TextBox 38"/>
+          <p:cNvPr id="40" name="TextBox 39"/>
           <p:cNvSpPr txBox="1"/>
           <p:nvPr/>
         </p:nvSpPr>
         <p:spPr>
           <a:xfrm>
-            <a:off x="4507992" y="1673352"/>
-            <a:ext cx="4864608" cy="420624"/>
+            <a:off x="310896" y="2048256"/>
+            <a:ext cx="329184" cy="310896"/>
           </a:xfrm>
           <a:prstGeom prst="rect">
             <a:avLst/>
@@ -6462,39 +6849,37 @@
           </a:bodyPr>
           <a:lstStyle/>
           <a:p>
-            <a:pPr algn="l"/>
-            <a:r>
-              <a:rPr sz="900" b="0" i="1">
-                <a:solidFill>
-                  <a:srgbClr val="1A1A1A"/>
+            <a:pPr algn="ctr"/>
+            <a:r>
+              <a:rPr sz="1000" b="1" i="0">
+                <a:solidFill>
+                  <a:srgbClr val="FFFFFF"/>
                 </a:solidFill>
               </a:rPr>
-              <a:t>5 étapes dans l'ordre, langage adapté au passant</a:t>
-            </a:r>
-          </a:p>
-        </p:txBody>
-      </p:sp>
-      <p:sp>
-        <p:nvSpPr>
-          <p:cNvPr id="40" name="Rectangle 39"/>
+              <a:t>C2</a:t>
+            </a:r>
+          </a:p>
+        </p:txBody>
+      </p:sp>
+      <p:sp>
+        <p:nvSpPr>
+          <p:cNvPr id="41" name="Rectangle 40"/>
           <p:cNvSpPr/>
           <p:nvPr/>
         </p:nvSpPr>
         <p:spPr>
           <a:xfrm>
-            <a:off x="9464040" y="1618488"/>
-            <a:ext cx="713232" cy="502920"/>
-          </a:xfrm>
-          <a:prstGeom prst="rect">
-            <a:avLst/>
-          </a:prstGeom>
-          <a:solidFill>
-            <a:srgbClr val="FFFFFF"/>
-          </a:solidFill>
-          <a:ln w="6350">
-            <a:solidFill>
-              <a:srgbClr val="007A7A"/>
-            </a:solidFill>
+            <a:off x="685800" y="1938528"/>
+            <a:ext cx="6236208" cy="475488"/>
+          </a:xfrm>
+          <a:prstGeom prst="rect">
+            <a:avLst/>
+          </a:prstGeom>
+          <a:solidFill>
+            <a:srgbClr val="F0F7F7"/>
+          </a:solidFill>
+          <a:ln>
+            <a:noFill/>
           </a:ln>
         </p:spPr>
         <p:style>
@@ -6521,14 +6906,14 @@
       </p:sp>
       <p:sp>
         <p:nvSpPr>
-          <p:cNvPr id="41" name="TextBox 40"/>
+          <p:cNvPr id="42" name="TextBox 41"/>
           <p:cNvSpPr txBox="1"/>
           <p:nvPr/>
         </p:nvSpPr>
         <p:spPr>
           <a:xfrm>
-            <a:off x="9555480" y="1728216"/>
-            <a:ext cx="530352" cy="320040"/>
+            <a:off x="777240" y="2011680"/>
+            <a:ext cx="6099048" cy="365760"/>
           </a:xfrm>
           <a:prstGeom prst="rect">
             <a:avLst/>
@@ -6541,39 +6926,37 @@
           </a:bodyPr>
           <a:lstStyle/>
           <a:p>
-            <a:pPr algn="ctr"/>
-            <a:r>
-              <a:rPr sz="900" b="0" i="0">
-                <a:solidFill>
-                  <a:srgbClr val="BBBBBB"/>
+            <a:pPr algn="l"/>
+            <a:r>
+              <a:rPr sz="1000" b="1" i="0">
+                <a:solidFill>
+                  <a:srgbClr val="005555"/>
                 </a:solidFill>
               </a:rPr>
-              <a:t>1</a:t>
-            </a:r>
-          </a:p>
-        </p:txBody>
-      </p:sp>
-      <p:sp>
-        <p:nvSpPr>
-          <p:cNvPr id="42" name="Rectangle 41"/>
+              <a:t>Votre script est fluide et personnalisé</a:t>
+            </a:r>
+          </a:p>
+        </p:txBody>
+      </p:sp>
+      <p:sp>
+        <p:nvSpPr>
+          <p:cNvPr id="43" name="Rectangle 42"/>
           <p:cNvSpPr/>
           <p:nvPr/>
         </p:nvSpPr>
         <p:spPr>
           <a:xfrm>
-            <a:off x="10195560" y="1618488"/>
-            <a:ext cx="713232" cy="502920"/>
-          </a:xfrm>
-          <a:prstGeom prst="rect">
-            <a:avLst/>
-          </a:prstGeom>
-          <a:solidFill>
-            <a:srgbClr val="FFFFFF"/>
-          </a:solidFill>
-          <a:ln w="6350">
-            <a:solidFill>
-              <a:srgbClr val="007A7A"/>
-            </a:solidFill>
+            <a:off x="6949440" y="1938528"/>
+            <a:ext cx="2487168" cy="475488"/>
+          </a:xfrm>
+          <a:prstGeom prst="rect">
+            <a:avLst/>
+          </a:prstGeom>
+          <a:solidFill>
+            <a:srgbClr val="F0F7F7"/>
+          </a:solidFill>
+          <a:ln>
+            <a:noFill/>
           </a:ln>
         </p:spPr>
         <p:style>
@@ -6600,14 +6983,14 @@
       </p:sp>
       <p:sp>
         <p:nvSpPr>
-          <p:cNvPr id="43" name="TextBox 42"/>
+          <p:cNvPr id="44" name="TextBox 43"/>
           <p:cNvSpPr txBox="1"/>
           <p:nvPr/>
         </p:nvSpPr>
         <p:spPr>
           <a:xfrm>
-            <a:off x="10287000" y="1728216"/>
-            <a:ext cx="530352" cy="320040"/>
+            <a:off x="7040879" y="1993392"/>
+            <a:ext cx="2350008" cy="384048"/>
           </a:xfrm>
           <a:prstGeom prst="rect">
             <a:avLst/>
@@ -6620,28 +7003,28 @@
           </a:bodyPr>
           <a:lstStyle/>
           <a:p>
-            <a:pPr algn="ctr"/>
-            <a:r>
-              <a:rPr sz="900" b="0" i="0">
-                <a:solidFill>
-                  <a:srgbClr val="BBBBBB"/>
+            <a:pPr algn="l"/>
+            <a:r>
+              <a:rPr sz="900" b="0" i="1">
+                <a:solidFill>
+                  <a:srgbClr val="555555"/>
                 </a:solidFill>
               </a:rPr>
-              <a:t>2</a:t>
-            </a:r>
-          </a:p>
-        </p:txBody>
-      </p:sp>
-      <p:sp>
-        <p:nvSpPr>
-          <p:cNvPr id="44" name="Rectangle 43"/>
+              <a:t>Les 5 étapes dans l'ordre, langage adapté au profil du donateur</a:t>
+            </a:r>
+          </a:p>
+        </p:txBody>
+      </p:sp>
+      <p:sp>
+        <p:nvSpPr>
+          <p:cNvPr id="45" name="Rectangle 44"/>
           <p:cNvSpPr/>
           <p:nvPr/>
         </p:nvSpPr>
         <p:spPr>
           <a:xfrm>
-            <a:off x="10927080" y="1618488"/>
-            <a:ext cx="713232" cy="502920"/>
+            <a:off x="9464040" y="1938528"/>
+            <a:ext cx="713232" cy="475488"/>
           </a:xfrm>
           <a:prstGeom prst="rect">
             <a:avLst/>
@@ -6651,7 +7034,7 @@
           </a:solidFill>
           <a:ln w="6350">
             <a:solidFill>
-              <a:srgbClr val="007A7A"/>
+              <a:srgbClr val="008080"/>
             </a:solidFill>
           </a:ln>
         </p:spPr>
@@ -6679,14 +7062,14 @@
       </p:sp>
       <p:sp>
         <p:nvSpPr>
-          <p:cNvPr id="45" name="TextBox 44"/>
+          <p:cNvPr id="46" name="TextBox 45"/>
           <p:cNvSpPr txBox="1"/>
           <p:nvPr/>
         </p:nvSpPr>
         <p:spPr>
           <a:xfrm>
-            <a:off x="11018519" y="1728216"/>
-            <a:ext cx="530352" cy="320040"/>
+            <a:off x="9555480" y="2048256"/>
+            <a:ext cx="530352" cy="292608"/>
           </a:xfrm>
           <a:prstGeom prst="rect">
             <a:avLst/>
@@ -6703,24 +7086,24 @@
             <a:r>
               <a:rPr sz="900" b="0" i="0">
                 <a:solidFill>
-                  <a:srgbClr val="BBBBBB"/>
+                  <a:srgbClr val="EEEEEE"/>
                 </a:solidFill>
               </a:rPr>
-              <a:t>3</a:t>
-            </a:r>
-          </a:p>
-        </p:txBody>
-      </p:sp>
-      <p:sp>
-        <p:nvSpPr>
-          <p:cNvPr id="46" name="Rectangle 45"/>
+              <a:t>1</a:t>
+            </a:r>
+          </a:p>
+        </p:txBody>
+      </p:sp>
+      <p:sp>
+        <p:nvSpPr>
+          <p:cNvPr id="47" name="Rectangle 46"/>
           <p:cNvSpPr/>
           <p:nvPr/>
         </p:nvSpPr>
         <p:spPr>
           <a:xfrm>
-            <a:off x="11658600" y="1618488"/>
-            <a:ext cx="457200" cy="502920"/>
+            <a:off x="10195560" y="1938528"/>
+            <a:ext cx="713232" cy="475488"/>
           </a:xfrm>
           <a:prstGeom prst="rect">
             <a:avLst/>
@@ -6730,7 +7113,7 @@
           </a:solidFill>
           <a:ln w="6350">
             <a:solidFill>
-              <a:srgbClr val="007A7A"/>
+              <a:srgbClr val="008080"/>
             </a:solidFill>
           </a:ln>
         </p:spPr>
@@ -6758,14 +7141,14 @@
       </p:sp>
       <p:sp>
         <p:nvSpPr>
-          <p:cNvPr id="47" name="TextBox 46"/>
+          <p:cNvPr id="48" name="TextBox 47"/>
           <p:cNvSpPr txBox="1"/>
           <p:nvPr/>
         </p:nvSpPr>
         <p:spPr>
           <a:xfrm>
-            <a:off x="11750040" y="1728216"/>
-            <a:ext cx="274320" cy="320040"/>
+            <a:off x="10287000" y="2048256"/>
+            <a:ext cx="530352" cy="292608"/>
           </a:xfrm>
           <a:prstGeom prst="rect">
             <a:avLst/>
@@ -6782,33 +7165,35 @@
             <a:r>
               <a:rPr sz="900" b="0" i="0">
                 <a:solidFill>
-                  <a:srgbClr val="BBBBBB"/>
+                  <a:srgbClr val="EEEEEE"/>
                 </a:solidFill>
               </a:rPr>
-              <a:t>4</a:t>
-            </a:r>
-          </a:p>
-        </p:txBody>
-      </p:sp>
-      <p:sp>
-        <p:nvSpPr>
-          <p:cNvPr id="48" name="Rectangle 47"/>
+              <a:t>2</a:t>
+            </a:r>
+          </a:p>
+        </p:txBody>
+      </p:sp>
+      <p:sp>
+        <p:nvSpPr>
+          <p:cNvPr id="49" name="Rectangle 48"/>
           <p:cNvSpPr/>
           <p:nvPr/>
         </p:nvSpPr>
         <p:spPr>
           <a:xfrm>
-            <a:off x="274320" y="2139696"/>
-            <a:ext cx="393192" cy="502920"/>
-          </a:xfrm>
-          <a:prstGeom prst="rect">
-            <a:avLst/>
-          </a:prstGeom>
-          <a:solidFill>
-            <a:srgbClr val="007A7A"/>
-          </a:solidFill>
-          <a:ln>
-            <a:noFill/>
+            <a:off x="10927080" y="1938528"/>
+            <a:ext cx="713232" cy="475488"/>
+          </a:xfrm>
+          <a:prstGeom prst="rect">
+            <a:avLst/>
+          </a:prstGeom>
+          <a:solidFill>
+            <a:srgbClr val="FFFFFF"/>
+          </a:solidFill>
+          <a:ln w="6350">
+            <a:solidFill>
+              <a:srgbClr val="008080"/>
+            </a:solidFill>
           </a:ln>
         </p:spPr>
         <p:style>
@@ -6835,14 +7220,14 @@
       </p:sp>
       <p:sp>
         <p:nvSpPr>
-          <p:cNvPr id="49" name="TextBox 48"/>
+          <p:cNvPr id="50" name="TextBox 49"/>
           <p:cNvSpPr txBox="1"/>
           <p:nvPr/>
         </p:nvSpPr>
         <p:spPr>
           <a:xfrm>
-            <a:off x="292608" y="2249424"/>
-            <a:ext cx="356616" cy="320040"/>
+            <a:off x="11018519" y="2048256"/>
+            <a:ext cx="530352" cy="292608"/>
           </a:xfrm>
           <a:prstGeom prst="rect">
             <a:avLst/>
@@ -6857,35 +7242,37 @@
           <a:p>
             <a:pPr algn="ctr"/>
             <a:r>
-              <a:rPr sz="1000" b="1" i="0">
-                <a:solidFill>
-                  <a:srgbClr val="FFFFFF"/>
+              <a:rPr sz="900" b="0" i="0">
+                <a:solidFill>
+                  <a:srgbClr val="EEEEEE"/>
                 </a:solidFill>
               </a:rPr>
-              <a:t>C3</a:t>
-            </a:r>
-          </a:p>
-        </p:txBody>
-      </p:sp>
-      <p:sp>
-        <p:nvSpPr>
-          <p:cNvPr id="50" name="Rectangle 49"/>
+              <a:t>3</a:t>
+            </a:r>
+          </a:p>
+        </p:txBody>
+      </p:sp>
+      <p:sp>
+        <p:nvSpPr>
+          <p:cNvPr id="51" name="Rectangle 50"/>
           <p:cNvSpPr/>
           <p:nvPr/>
         </p:nvSpPr>
         <p:spPr>
           <a:xfrm>
-            <a:off x="685800" y="2139696"/>
-            <a:ext cx="3730752" cy="502920"/>
-          </a:xfrm>
-          <a:prstGeom prst="rect">
-            <a:avLst/>
-          </a:prstGeom>
-          <a:solidFill>
-            <a:srgbClr val="F0F7F7"/>
-          </a:solidFill>
-          <a:ln>
-            <a:noFill/>
+            <a:off x="11658600" y="1938528"/>
+            <a:ext cx="457200" cy="475488"/>
+          </a:xfrm>
+          <a:prstGeom prst="rect">
+            <a:avLst/>
+          </a:prstGeom>
+          <a:solidFill>
+            <a:srgbClr val="FFFFFF"/>
+          </a:solidFill>
+          <a:ln w="6350">
+            <a:solidFill>
+              <a:srgbClr val="008080"/>
+            </a:solidFill>
           </a:ln>
         </p:spPr>
         <p:style>
@@ -6912,14 +7299,14 @@
       </p:sp>
       <p:sp>
         <p:nvSpPr>
-          <p:cNvPr id="51" name="TextBox 50"/>
+          <p:cNvPr id="52" name="TextBox 51"/>
           <p:cNvSpPr txBox="1"/>
           <p:nvPr/>
         </p:nvSpPr>
         <p:spPr>
           <a:xfrm>
-            <a:off x="758952" y="2231136"/>
-            <a:ext cx="3584448" cy="384048"/>
+            <a:off x="11750040" y="2048256"/>
+            <a:ext cx="274320" cy="292608"/>
           </a:xfrm>
           <a:prstGeom prst="rect">
             <a:avLst/>
@@ -6932,34 +7319,34 @@
           </a:bodyPr>
           <a:lstStyle/>
           <a:p>
-            <a:pPr algn="l"/>
-            <a:r>
-              <a:rPr sz="1000" b="1" i="0">
-                <a:solidFill>
-                  <a:srgbClr val="005050"/>
+            <a:pPr algn="ctr"/>
+            <a:r>
+              <a:rPr sz="900" b="0" i="0">
+                <a:solidFill>
+                  <a:srgbClr val="EEEEEE"/>
                 </a:solidFill>
               </a:rPr>
-              <a:t>Impact Story (émotion + faits)</a:t>
-            </a:r>
-          </a:p>
-        </p:txBody>
-      </p:sp>
-      <p:sp>
-        <p:nvSpPr>
-          <p:cNvPr id="52" name="Rectangle 51"/>
+              <a:t>4</a:t>
+            </a:r>
+          </a:p>
+        </p:txBody>
+      </p:sp>
+      <p:sp>
+        <p:nvSpPr>
+          <p:cNvPr id="53" name="Rectangle 52"/>
           <p:cNvSpPr/>
           <p:nvPr/>
         </p:nvSpPr>
         <p:spPr>
           <a:xfrm>
-            <a:off x="4434840" y="2139696"/>
-            <a:ext cx="5010912" cy="502920"/>
-          </a:xfrm>
-          <a:prstGeom prst="rect">
-            <a:avLst/>
-          </a:prstGeom>
-          <a:solidFill>
-            <a:srgbClr val="F0F7F7"/>
+            <a:off x="274320" y="2432304"/>
+            <a:ext cx="384048" cy="475488"/>
+          </a:xfrm>
+          <a:prstGeom prst="rect">
+            <a:avLst/>
+          </a:prstGeom>
+          <a:solidFill>
+            <a:srgbClr val="FF0000"/>
           </a:solidFill>
           <a:ln>
             <a:noFill/>
@@ -6989,14 +7376,14 @@
       </p:sp>
       <p:sp>
         <p:nvSpPr>
-          <p:cNvPr id="53" name="TextBox 52"/>
+          <p:cNvPr id="54" name="TextBox 53"/>
           <p:cNvSpPr txBox="1"/>
           <p:nvPr/>
         </p:nvSpPr>
         <p:spPr>
           <a:xfrm>
-            <a:off x="4507992" y="2194560"/>
-            <a:ext cx="4864608" cy="420624"/>
+            <a:off x="310896" y="2542032"/>
+            <a:ext cx="329184" cy="310896"/>
           </a:xfrm>
           <a:prstGeom prst="rect">
             <a:avLst/>
@@ -7009,28 +7396,28 @@
           </a:bodyPr>
           <a:lstStyle/>
           <a:p>
-            <a:pPr algn="l"/>
-            <a:r>
-              <a:rPr sz="900" b="0" i="1">
-                <a:solidFill>
-                  <a:srgbClr val="1A1A1A"/>
+            <a:pPr algn="ctr"/>
+            <a:r>
+              <a:rPr sz="1000" b="1" i="0">
+                <a:solidFill>
+                  <a:srgbClr val="FFFFFF"/>
                 </a:solidFill>
               </a:rPr>
-              <a:t>Récit bénéficiaire spécifique, chiffre concret, résolution</a:t>
-            </a:r>
-          </a:p>
-        </p:txBody>
-      </p:sp>
-      <p:sp>
-        <p:nvSpPr>
-          <p:cNvPr id="54" name="Rectangle 53"/>
+              <a:t>C3</a:t>
+            </a:r>
+          </a:p>
+        </p:txBody>
+      </p:sp>
+      <p:sp>
+        <p:nvSpPr>
+          <p:cNvPr id="55" name="Rectangle 54"/>
           <p:cNvSpPr/>
           <p:nvPr/>
         </p:nvSpPr>
         <p:spPr>
           <a:xfrm>
-            <a:off x="9464040" y="2139696"/>
-            <a:ext cx="713232" cy="502920"/>
+            <a:off x="685800" y="2432304"/>
+            <a:ext cx="6236208" cy="475488"/>
           </a:xfrm>
           <a:prstGeom prst="rect">
             <a:avLst/>
@@ -7038,10 +7425,8 @@
           <a:solidFill>
             <a:srgbClr val="FFFFFF"/>
           </a:solidFill>
-          <a:ln w="6350">
-            <a:solidFill>
-              <a:srgbClr val="007A7A"/>
-            </a:solidFill>
+          <a:ln>
+            <a:noFill/>
           </a:ln>
         </p:spPr>
         <p:style>
@@ -7068,14 +7453,14 @@
       </p:sp>
       <p:sp>
         <p:nvSpPr>
-          <p:cNvPr id="55" name="TextBox 54"/>
+          <p:cNvPr id="56" name="TextBox 55"/>
           <p:cNvSpPr txBox="1"/>
           <p:nvPr/>
         </p:nvSpPr>
         <p:spPr>
           <a:xfrm>
-            <a:off x="9555480" y="2249424"/>
-            <a:ext cx="530352" cy="320040"/>
+            <a:off x="777240" y="2505456"/>
+            <a:ext cx="6099048" cy="365760"/>
           </a:xfrm>
           <a:prstGeom prst="rect">
             <a:avLst/>
@@ -7088,28 +7473,28 @@
           </a:bodyPr>
           <a:lstStyle/>
           <a:p>
-            <a:pPr algn="ctr"/>
-            <a:r>
-              <a:rPr sz="900" b="0" i="0">
-                <a:solidFill>
-                  <a:srgbClr val="BBBBBB"/>
+            <a:pPr algn="l"/>
+            <a:r>
+              <a:rPr sz="1000" b="1" i="0">
+                <a:solidFill>
+                  <a:srgbClr val="005555"/>
                 </a:solidFill>
               </a:rPr>
-              <a:t>1</a:t>
-            </a:r>
-          </a:p>
-        </p:txBody>
-      </p:sp>
-      <p:sp>
-        <p:nvSpPr>
-          <p:cNvPr id="56" name="Rectangle 55"/>
+              <a:t>Votre Impact Story touche et convainc</a:t>
+            </a:r>
+          </a:p>
+        </p:txBody>
+      </p:sp>
+      <p:sp>
+        <p:nvSpPr>
+          <p:cNvPr id="57" name="Rectangle 56"/>
           <p:cNvSpPr/>
           <p:nvPr/>
         </p:nvSpPr>
         <p:spPr>
           <a:xfrm>
-            <a:off x="10195560" y="2139696"/>
-            <a:ext cx="713232" cy="502920"/>
+            <a:off x="6949440" y="2432304"/>
+            <a:ext cx="2487168" cy="475488"/>
           </a:xfrm>
           <a:prstGeom prst="rect">
             <a:avLst/>
@@ -7117,10 +7502,8 @@
           <a:solidFill>
             <a:srgbClr val="FFFFFF"/>
           </a:solidFill>
-          <a:ln w="6350">
-            <a:solidFill>
-              <a:srgbClr val="007A7A"/>
-            </a:solidFill>
+          <a:ln>
+            <a:noFill/>
           </a:ln>
         </p:spPr>
         <p:style>
@@ -7147,14 +7530,14 @@
       </p:sp>
       <p:sp>
         <p:nvSpPr>
-          <p:cNvPr id="57" name="TextBox 56"/>
+          <p:cNvPr id="58" name="TextBox 57"/>
           <p:cNvSpPr txBox="1"/>
           <p:nvPr/>
         </p:nvSpPr>
         <p:spPr>
           <a:xfrm>
-            <a:off x="10287000" y="2249424"/>
-            <a:ext cx="530352" cy="320040"/>
+            <a:off x="7040879" y="2487168"/>
+            <a:ext cx="2350008" cy="384048"/>
           </a:xfrm>
           <a:prstGeom prst="rect">
             <a:avLst/>
@@ -7167,28 +7550,28 @@
           </a:bodyPr>
           <a:lstStyle/>
           <a:p>
-            <a:pPr algn="ctr"/>
-            <a:r>
-              <a:rPr sz="900" b="0" i="0">
-                <a:solidFill>
-                  <a:srgbClr val="BBBBBB"/>
+            <a:pPr algn="l"/>
+            <a:r>
+              <a:rPr sz="900" b="0" i="1">
+                <a:solidFill>
+                  <a:srgbClr val="555555"/>
                 </a:solidFill>
               </a:rPr>
-              <a:t>2</a:t>
-            </a:r>
-          </a:p>
-        </p:txBody>
-      </p:sp>
-      <p:sp>
-        <p:nvSpPr>
-          <p:cNvPr id="58" name="Rectangle 57"/>
+              <a:t>Récit bénéficiaire spécifique, chiffre concret, résolution par le don</a:t>
+            </a:r>
+          </a:p>
+        </p:txBody>
+      </p:sp>
+      <p:sp>
+        <p:nvSpPr>
+          <p:cNvPr id="59" name="Rectangle 58"/>
           <p:cNvSpPr/>
           <p:nvPr/>
         </p:nvSpPr>
         <p:spPr>
           <a:xfrm>
-            <a:off x="10927080" y="2139696"/>
-            <a:ext cx="713232" cy="502920"/>
+            <a:off x="9464040" y="2432304"/>
+            <a:ext cx="713232" cy="475488"/>
           </a:xfrm>
           <a:prstGeom prst="rect">
             <a:avLst/>
@@ -7198,7 +7581,7 @@
           </a:solidFill>
           <a:ln w="6350">
             <a:solidFill>
-              <a:srgbClr val="007A7A"/>
+              <a:srgbClr val="008080"/>
             </a:solidFill>
           </a:ln>
         </p:spPr>
@@ -7226,14 +7609,14 @@
       </p:sp>
       <p:sp>
         <p:nvSpPr>
-          <p:cNvPr id="59" name="TextBox 58"/>
+          <p:cNvPr id="60" name="TextBox 59"/>
           <p:cNvSpPr txBox="1"/>
           <p:nvPr/>
         </p:nvSpPr>
         <p:spPr>
           <a:xfrm>
-            <a:off x="11018519" y="2249424"/>
-            <a:ext cx="530352" cy="320040"/>
+            <a:off x="9555480" y="2542032"/>
+            <a:ext cx="530352" cy="292608"/>
           </a:xfrm>
           <a:prstGeom prst="rect">
             <a:avLst/>
@@ -7250,24 +7633,24 @@
             <a:r>
               <a:rPr sz="900" b="0" i="0">
                 <a:solidFill>
-                  <a:srgbClr val="BBBBBB"/>
+                  <a:srgbClr val="EEEEEE"/>
                 </a:solidFill>
               </a:rPr>
-              <a:t>3</a:t>
-            </a:r>
-          </a:p>
-        </p:txBody>
-      </p:sp>
-      <p:sp>
-        <p:nvSpPr>
-          <p:cNvPr id="60" name="Rectangle 59"/>
+              <a:t>1</a:t>
+            </a:r>
+          </a:p>
+        </p:txBody>
+      </p:sp>
+      <p:sp>
+        <p:nvSpPr>
+          <p:cNvPr id="61" name="Rectangle 60"/>
           <p:cNvSpPr/>
           <p:nvPr/>
         </p:nvSpPr>
         <p:spPr>
           <a:xfrm>
-            <a:off x="11658600" y="2139696"/>
-            <a:ext cx="457200" cy="502920"/>
+            <a:off x="10195560" y="2432304"/>
+            <a:ext cx="713232" cy="475488"/>
           </a:xfrm>
           <a:prstGeom prst="rect">
             <a:avLst/>
@@ -7277,7 +7660,7 @@
           </a:solidFill>
           <a:ln w="6350">
             <a:solidFill>
-              <a:srgbClr val="007A7A"/>
+              <a:srgbClr val="008080"/>
             </a:solidFill>
           </a:ln>
         </p:spPr>
@@ -7305,14 +7688,14 @@
       </p:sp>
       <p:sp>
         <p:nvSpPr>
-          <p:cNvPr id="61" name="TextBox 60"/>
+          <p:cNvPr id="62" name="TextBox 61"/>
           <p:cNvSpPr txBox="1"/>
           <p:nvPr/>
         </p:nvSpPr>
         <p:spPr>
           <a:xfrm>
-            <a:off x="11750040" y="2249424"/>
-            <a:ext cx="274320" cy="320040"/>
+            <a:off x="10287000" y="2542032"/>
+            <a:ext cx="530352" cy="292608"/>
           </a:xfrm>
           <a:prstGeom prst="rect">
             <a:avLst/>
@@ -7329,33 +7712,35 @@
             <a:r>
               <a:rPr sz="900" b="0" i="0">
                 <a:solidFill>
-                  <a:srgbClr val="BBBBBB"/>
+                  <a:srgbClr val="EEEEEE"/>
                 </a:solidFill>
               </a:rPr>
-              <a:t>4</a:t>
-            </a:r>
-          </a:p>
-        </p:txBody>
-      </p:sp>
-      <p:sp>
-        <p:nvSpPr>
-          <p:cNvPr id="62" name="Rectangle 61"/>
+              <a:t>2</a:t>
+            </a:r>
+          </a:p>
+        </p:txBody>
+      </p:sp>
+      <p:sp>
+        <p:nvSpPr>
+          <p:cNvPr id="63" name="Rectangle 62"/>
           <p:cNvSpPr/>
           <p:nvPr/>
         </p:nvSpPr>
         <p:spPr>
           <a:xfrm>
-            <a:off x="274320" y="2660904"/>
-            <a:ext cx="393192" cy="502920"/>
-          </a:xfrm>
-          <a:prstGeom prst="rect">
-            <a:avLst/>
-          </a:prstGeom>
-          <a:solidFill>
-            <a:srgbClr val="007A7A"/>
-          </a:solidFill>
-          <a:ln>
-            <a:noFill/>
+            <a:off x="10927080" y="2432304"/>
+            <a:ext cx="713232" cy="475488"/>
+          </a:xfrm>
+          <a:prstGeom prst="rect">
+            <a:avLst/>
+          </a:prstGeom>
+          <a:solidFill>
+            <a:srgbClr val="FFFFFF"/>
+          </a:solidFill>
+          <a:ln w="6350">
+            <a:solidFill>
+              <a:srgbClr val="008080"/>
+            </a:solidFill>
           </a:ln>
         </p:spPr>
         <p:style>
@@ -7382,14 +7767,14 @@
       </p:sp>
       <p:sp>
         <p:nvSpPr>
-          <p:cNvPr id="63" name="TextBox 62"/>
+          <p:cNvPr id="64" name="TextBox 63"/>
           <p:cNvSpPr txBox="1"/>
           <p:nvPr/>
         </p:nvSpPr>
         <p:spPr>
           <a:xfrm>
-            <a:off x="292608" y="2770632"/>
-            <a:ext cx="356616" cy="320040"/>
+            <a:off x="11018519" y="2542032"/>
+            <a:ext cx="530352" cy="292608"/>
           </a:xfrm>
           <a:prstGeom prst="rect">
             <a:avLst/>
@@ -7404,26 +7789,26 @@
           <a:p>
             <a:pPr algn="ctr"/>
             <a:r>
-              <a:rPr sz="1000" b="1" i="0">
-                <a:solidFill>
-                  <a:srgbClr val="FFFFFF"/>
+              <a:rPr sz="900" b="0" i="0">
+                <a:solidFill>
+                  <a:srgbClr val="EEEEEE"/>
                 </a:solidFill>
               </a:rPr>
-              <a:t>C4</a:t>
-            </a:r>
-          </a:p>
-        </p:txBody>
-      </p:sp>
-      <p:sp>
-        <p:nvSpPr>
-          <p:cNvPr id="64" name="Rectangle 63"/>
+              <a:t>3</a:t>
+            </a:r>
+          </a:p>
+        </p:txBody>
+      </p:sp>
+      <p:sp>
+        <p:nvSpPr>
+          <p:cNvPr id="65" name="Rectangle 64"/>
           <p:cNvSpPr/>
           <p:nvPr/>
         </p:nvSpPr>
         <p:spPr>
           <a:xfrm>
-            <a:off x="685800" y="2660904"/>
-            <a:ext cx="3730752" cy="502920"/>
+            <a:off x="11658600" y="2432304"/>
+            <a:ext cx="457200" cy="475488"/>
           </a:xfrm>
           <a:prstGeom prst="rect">
             <a:avLst/>
@@ -7431,8 +7816,10 @@
           <a:solidFill>
             <a:srgbClr val="FFFFFF"/>
           </a:solidFill>
-          <a:ln>
-            <a:noFill/>
+          <a:ln w="6350">
+            <a:solidFill>
+              <a:srgbClr val="008080"/>
+            </a:solidFill>
           </a:ln>
         </p:spPr>
         <p:style>
@@ -7459,14 +7846,14 @@
       </p:sp>
       <p:sp>
         <p:nvSpPr>
-          <p:cNvPr id="65" name="TextBox 64"/>
+          <p:cNvPr id="66" name="TextBox 65"/>
           <p:cNvSpPr txBox="1"/>
           <p:nvPr/>
         </p:nvSpPr>
         <p:spPr>
           <a:xfrm>
-            <a:off x="758952" y="2752344"/>
-            <a:ext cx="3584448" cy="384048"/>
+            <a:off x="11750040" y="2542032"/>
+            <a:ext cx="274320" cy="292608"/>
           </a:xfrm>
           <a:prstGeom prst="rect">
             <a:avLst/>
@@ -7479,34 +7866,34 @@
           </a:bodyPr>
           <a:lstStyle/>
           <a:p>
-            <a:pPr algn="l"/>
-            <a:r>
-              <a:rPr sz="1000" b="1" i="0">
-                <a:solidFill>
-                  <a:srgbClr val="005050"/>
+            <a:pPr algn="ctr"/>
+            <a:r>
+              <a:rPr sz="900" b="0" i="0">
+                <a:solidFill>
+                  <a:srgbClr val="EEEEEE"/>
                 </a:solidFill>
               </a:rPr>
-              <a:t>Traitement ≥ 2 objections CROC</a:t>
-            </a:r>
-          </a:p>
-        </p:txBody>
-      </p:sp>
-      <p:sp>
-        <p:nvSpPr>
-          <p:cNvPr id="66" name="Rectangle 65"/>
+              <a:t>4</a:t>
+            </a:r>
+          </a:p>
+        </p:txBody>
+      </p:sp>
+      <p:sp>
+        <p:nvSpPr>
+          <p:cNvPr id="67" name="Rectangle 66"/>
           <p:cNvSpPr/>
           <p:nvPr/>
         </p:nvSpPr>
         <p:spPr>
           <a:xfrm>
-            <a:off x="4434840" y="2660904"/>
-            <a:ext cx="5010912" cy="502920"/>
-          </a:xfrm>
-          <a:prstGeom prst="rect">
-            <a:avLst/>
-          </a:prstGeom>
-          <a:solidFill>
-            <a:srgbClr val="FFFFFF"/>
+            <a:off x="274320" y="2926080"/>
+            <a:ext cx="384048" cy="475488"/>
+          </a:xfrm>
+          <a:prstGeom prst="rect">
+            <a:avLst/>
+          </a:prstGeom>
+          <a:solidFill>
+            <a:srgbClr val="FF0000"/>
           </a:solidFill>
           <a:ln>
             <a:noFill/>
@@ -7536,14 +7923,14 @@
       </p:sp>
       <p:sp>
         <p:nvSpPr>
-          <p:cNvPr id="67" name="TextBox 66"/>
+          <p:cNvPr id="68" name="TextBox 67"/>
           <p:cNvSpPr txBox="1"/>
           <p:nvPr/>
         </p:nvSpPr>
         <p:spPr>
           <a:xfrm>
-            <a:off x="4507992" y="2715768"/>
-            <a:ext cx="4864608" cy="420624"/>
+            <a:off x="310896" y="3035808"/>
+            <a:ext cx="329184" cy="310896"/>
           </a:xfrm>
           <a:prstGeom prst="rect">
             <a:avLst/>
@@ -7556,39 +7943,37 @@
           </a:bodyPr>
           <a:lstStyle/>
           <a:p>
-            <a:pPr algn="l"/>
-            <a:r>
-              <a:rPr sz="900" b="0" i="1">
-                <a:solidFill>
-                  <a:srgbClr val="1A1A1A"/>
+            <a:pPr algn="ctr"/>
+            <a:r>
+              <a:rPr sz="1000" b="1" i="0">
+                <a:solidFill>
+                  <a:srgbClr val="FFFFFF"/>
                 </a:solidFill>
               </a:rPr>
-              <a:t>Considérer, reformuler, organiser, conclure</a:t>
-            </a:r>
-          </a:p>
-        </p:txBody>
-      </p:sp>
-      <p:sp>
-        <p:nvSpPr>
-          <p:cNvPr id="68" name="Rectangle 67"/>
+              <a:t>C4</a:t>
+            </a:r>
+          </a:p>
+        </p:txBody>
+      </p:sp>
+      <p:sp>
+        <p:nvSpPr>
+          <p:cNvPr id="69" name="Rectangle 68"/>
           <p:cNvSpPr/>
           <p:nvPr/>
         </p:nvSpPr>
         <p:spPr>
           <a:xfrm>
-            <a:off x="9464040" y="2660904"/>
-            <a:ext cx="713232" cy="502920"/>
-          </a:xfrm>
-          <a:prstGeom prst="rect">
-            <a:avLst/>
-          </a:prstGeom>
-          <a:solidFill>
-            <a:srgbClr val="FFFFFF"/>
-          </a:solidFill>
-          <a:ln w="6350">
-            <a:solidFill>
-              <a:srgbClr val="007A7A"/>
-            </a:solidFill>
+            <a:off x="685800" y="2926080"/>
+            <a:ext cx="6236208" cy="475488"/>
+          </a:xfrm>
+          <a:prstGeom prst="rect">
+            <a:avLst/>
+          </a:prstGeom>
+          <a:solidFill>
+            <a:srgbClr val="F0F7F7"/>
+          </a:solidFill>
+          <a:ln>
+            <a:noFill/>
           </a:ln>
         </p:spPr>
         <p:style>
@@ -7615,14 +8000,14 @@
       </p:sp>
       <p:sp>
         <p:nvSpPr>
-          <p:cNvPr id="69" name="TextBox 68"/>
+          <p:cNvPr id="70" name="TextBox 69"/>
           <p:cNvSpPr txBox="1"/>
           <p:nvPr/>
         </p:nvSpPr>
         <p:spPr>
           <a:xfrm>
-            <a:off x="9555480" y="2770632"/>
-            <a:ext cx="530352" cy="320040"/>
+            <a:off x="777240" y="2999232"/>
+            <a:ext cx="6099048" cy="365760"/>
           </a:xfrm>
           <a:prstGeom prst="rect">
             <a:avLst/>
@@ -7635,39 +8020,37 @@
           </a:bodyPr>
           <a:lstStyle/>
           <a:p>
-            <a:pPr algn="ctr"/>
-            <a:r>
-              <a:rPr sz="900" b="0" i="0">
-                <a:solidFill>
-                  <a:srgbClr val="BBBBBB"/>
+            <a:pPr algn="l"/>
+            <a:r>
+              <a:rPr sz="1000" b="1" i="0">
+                <a:solidFill>
+                  <a:srgbClr val="005555"/>
                 </a:solidFill>
               </a:rPr>
-              <a:t>1</a:t>
-            </a:r>
-          </a:p>
-        </p:txBody>
-      </p:sp>
-      <p:sp>
-        <p:nvSpPr>
-          <p:cNvPr id="70" name="Rectangle 69"/>
+              <a:t>Vous traitez ≥ 2 objections avec la méthode en 4 temps</a:t>
+            </a:r>
+          </a:p>
+        </p:txBody>
+      </p:sp>
+      <p:sp>
+        <p:nvSpPr>
+          <p:cNvPr id="71" name="Rectangle 70"/>
           <p:cNvSpPr/>
           <p:nvPr/>
         </p:nvSpPr>
         <p:spPr>
           <a:xfrm>
-            <a:off x="10195560" y="2660904"/>
-            <a:ext cx="713232" cy="502920"/>
-          </a:xfrm>
-          <a:prstGeom prst="rect">
-            <a:avLst/>
-          </a:prstGeom>
-          <a:solidFill>
-            <a:srgbClr val="FFFFFF"/>
-          </a:solidFill>
-          <a:ln w="6350">
-            <a:solidFill>
-              <a:srgbClr val="007A7A"/>
-            </a:solidFill>
+            <a:off x="6949440" y="2926080"/>
+            <a:ext cx="2487168" cy="475488"/>
+          </a:xfrm>
+          <a:prstGeom prst="rect">
+            <a:avLst/>
+          </a:prstGeom>
+          <a:solidFill>
+            <a:srgbClr val="F0F7F7"/>
+          </a:solidFill>
+          <a:ln>
+            <a:noFill/>
           </a:ln>
         </p:spPr>
         <p:style>
@@ -7694,14 +8077,14 @@
       </p:sp>
       <p:sp>
         <p:nvSpPr>
-          <p:cNvPr id="71" name="TextBox 70"/>
+          <p:cNvPr id="72" name="TextBox 71"/>
           <p:cNvSpPr txBox="1"/>
           <p:nvPr/>
         </p:nvSpPr>
         <p:spPr>
           <a:xfrm>
-            <a:off x="10287000" y="2770632"/>
-            <a:ext cx="530352" cy="320040"/>
+            <a:off x="7040879" y="2980944"/>
+            <a:ext cx="2350008" cy="384048"/>
           </a:xfrm>
           <a:prstGeom prst="rect">
             <a:avLst/>
@@ -7714,28 +8097,28 @@
           </a:bodyPr>
           <a:lstStyle/>
           <a:p>
-            <a:pPr algn="ctr"/>
-            <a:r>
-              <a:rPr sz="900" b="0" i="0">
-                <a:solidFill>
-                  <a:srgbClr val="BBBBBB"/>
+            <a:pPr algn="l"/>
+            <a:r>
+              <a:rPr sz="900" b="0" i="1">
+                <a:solidFill>
+                  <a:srgbClr val="555555"/>
                 </a:solidFill>
               </a:rPr>
-              <a:t>2</a:t>
-            </a:r>
-          </a:p>
-        </p:txBody>
-      </p:sp>
-      <p:sp>
-        <p:nvSpPr>
-          <p:cNvPr id="72" name="Rectangle 71"/>
+              <a:t>Accusé réception, reformulation, preuve, relance</a:t>
+            </a:r>
+          </a:p>
+        </p:txBody>
+      </p:sp>
+      <p:sp>
+        <p:nvSpPr>
+          <p:cNvPr id="73" name="Rectangle 72"/>
           <p:cNvSpPr/>
           <p:nvPr/>
         </p:nvSpPr>
         <p:spPr>
           <a:xfrm>
-            <a:off x="10927080" y="2660904"/>
-            <a:ext cx="713232" cy="502920"/>
+            <a:off x="9464040" y="2926080"/>
+            <a:ext cx="713232" cy="475488"/>
           </a:xfrm>
           <a:prstGeom prst="rect">
             <a:avLst/>
@@ -7745,7 +8128,7 @@
           </a:solidFill>
           <a:ln w="6350">
             <a:solidFill>
-              <a:srgbClr val="007A7A"/>
+              <a:srgbClr val="008080"/>
             </a:solidFill>
           </a:ln>
         </p:spPr>
@@ -7773,14 +8156,14 @@
       </p:sp>
       <p:sp>
         <p:nvSpPr>
-          <p:cNvPr id="73" name="TextBox 72"/>
+          <p:cNvPr id="74" name="TextBox 73"/>
           <p:cNvSpPr txBox="1"/>
           <p:nvPr/>
         </p:nvSpPr>
         <p:spPr>
           <a:xfrm>
-            <a:off x="11018519" y="2770632"/>
-            <a:ext cx="530352" cy="320040"/>
+            <a:off x="9555480" y="3035808"/>
+            <a:ext cx="530352" cy="292608"/>
           </a:xfrm>
           <a:prstGeom prst="rect">
             <a:avLst/>
@@ -7797,24 +8180,24 @@
             <a:r>
               <a:rPr sz="900" b="0" i="0">
                 <a:solidFill>
-                  <a:srgbClr val="BBBBBB"/>
+                  <a:srgbClr val="EEEEEE"/>
                 </a:solidFill>
               </a:rPr>
-              <a:t>3</a:t>
-            </a:r>
-          </a:p>
-        </p:txBody>
-      </p:sp>
-      <p:sp>
-        <p:nvSpPr>
-          <p:cNvPr id="74" name="Rectangle 73"/>
+              <a:t>1</a:t>
+            </a:r>
+          </a:p>
+        </p:txBody>
+      </p:sp>
+      <p:sp>
+        <p:nvSpPr>
+          <p:cNvPr id="75" name="Rectangle 74"/>
           <p:cNvSpPr/>
           <p:nvPr/>
         </p:nvSpPr>
         <p:spPr>
           <a:xfrm>
-            <a:off x="11658600" y="2660904"/>
-            <a:ext cx="457200" cy="502920"/>
+            <a:off x="10195560" y="2926080"/>
+            <a:ext cx="713232" cy="475488"/>
           </a:xfrm>
           <a:prstGeom prst="rect">
             <a:avLst/>
@@ -7824,7 +8207,7 @@
           </a:solidFill>
           <a:ln w="6350">
             <a:solidFill>
-              <a:srgbClr val="007A7A"/>
+              <a:srgbClr val="008080"/>
             </a:solidFill>
           </a:ln>
         </p:spPr>
@@ -7852,14 +8235,14 @@
       </p:sp>
       <p:sp>
         <p:nvSpPr>
-          <p:cNvPr id="75" name="TextBox 74"/>
+          <p:cNvPr id="76" name="TextBox 75"/>
           <p:cNvSpPr txBox="1"/>
           <p:nvPr/>
         </p:nvSpPr>
         <p:spPr>
           <a:xfrm>
-            <a:off x="11750040" y="2770632"/>
-            <a:ext cx="274320" cy="320040"/>
+            <a:off x="10287000" y="3035808"/>
+            <a:ext cx="530352" cy="292608"/>
           </a:xfrm>
           <a:prstGeom prst="rect">
             <a:avLst/>
@@ -7876,33 +8259,35 @@
             <a:r>
               <a:rPr sz="900" b="0" i="0">
                 <a:solidFill>
-                  <a:srgbClr val="BBBBBB"/>
+                  <a:srgbClr val="EEEEEE"/>
                 </a:solidFill>
               </a:rPr>
-              <a:t>4</a:t>
-            </a:r>
-          </a:p>
-        </p:txBody>
-      </p:sp>
-      <p:sp>
-        <p:nvSpPr>
-          <p:cNvPr id="76" name="Rectangle 75"/>
+              <a:t>2</a:t>
+            </a:r>
+          </a:p>
+        </p:txBody>
+      </p:sp>
+      <p:sp>
+        <p:nvSpPr>
+          <p:cNvPr id="77" name="Rectangle 76"/>
           <p:cNvSpPr/>
           <p:nvPr/>
         </p:nvSpPr>
         <p:spPr>
           <a:xfrm>
-            <a:off x="274320" y="3182112"/>
-            <a:ext cx="393192" cy="502920"/>
-          </a:xfrm>
-          <a:prstGeom prst="rect">
-            <a:avLst/>
-          </a:prstGeom>
-          <a:solidFill>
-            <a:srgbClr val="007A7A"/>
-          </a:solidFill>
-          <a:ln>
-            <a:noFill/>
+            <a:off x="10927080" y="2926080"/>
+            <a:ext cx="713232" cy="475488"/>
+          </a:xfrm>
+          <a:prstGeom prst="rect">
+            <a:avLst/>
+          </a:prstGeom>
+          <a:solidFill>
+            <a:srgbClr val="FFFFFF"/>
+          </a:solidFill>
+          <a:ln w="6350">
+            <a:solidFill>
+              <a:srgbClr val="008080"/>
+            </a:solidFill>
           </a:ln>
         </p:spPr>
         <p:style>
@@ -7929,14 +8314,14 @@
       </p:sp>
       <p:sp>
         <p:nvSpPr>
-          <p:cNvPr id="77" name="TextBox 76"/>
+          <p:cNvPr id="78" name="TextBox 77"/>
           <p:cNvSpPr txBox="1"/>
           <p:nvPr/>
         </p:nvSpPr>
         <p:spPr>
           <a:xfrm>
-            <a:off x="292608" y="3291840"/>
-            <a:ext cx="356616" cy="320040"/>
+            <a:off x="11018519" y="3035808"/>
+            <a:ext cx="530352" cy="292608"/>
           </a:xfrm>
           <a:prstGeom prst="rect">
             <a:avLst/>
@@ -7951,35 +8336,37 @@
           <a:p>
             <a:pPr algn="ctr"/>
             <a:r>
-              <a:rPr sz="1000" b="1" i="0">
-                <a:solidFill>
-                  <a:srgbClr val="FFFFFF"/>
+              <a:rPr sz="900" b="0" i="0">
+                <a:solidFill>
+                  <a:srgbClr val="EEEEEE"/>
                 </a:solidFill>
               </a:rPr>
-              <a:t>C5</a:t>
-            </a:r>
-          </a:p>
-        </p:txBody>
-      </p:sp>
-      <p:sp>
-        <p:nvSpPr>
-          <p:cNvPr id="78" name="Rectangle 77"/>
+              <a:t>3</a:t>
+            </a:r>
+          </a:p>
+        </p:txBody>
+      </p:sp>
+      <p:sp>
+        <p:nvSpPr>
+          <p:cNvPr id="79" name="Rectangle 78"/>
           <p:cNvSpPr/>
           <p:nvPr/>
         </p:nvSpPr>
         <p:spPr>
           <a:xfrm>
-            <a:off x="685800" y="3182112"/>
-            <a:ext cx="3730752" cy="502920"/>
-          </a:xfrm>
-          <a:prstGeom prst="rect">
-            <a:avLst/>
-          </a:prstGeom>
-          <a:solidFill>
-            <a:srgbClr val="F0F7F7"/>
-          </a:solidFill>
-          <a:ln>
-            <a:noFill/>
+            <a:off x="11658600" y="2926080"/>
+            <a:ext cx="457200" cy="475488"/>
+          </a:xfrm>
+          <a:prstGeom prst="rect">
+            <a:avLst/>
+          </a:prstGeom>
+          <a:solidFill>
+            <a:srgbClr val="FFFFFF"/>
+          </a:solidFill>
+          <a:ln w="6350">
+            <a:solidFill>
+              <a:srgbClr val="008080"/>
+            </a:solidFill>
           </a:ln>
         </p:spPr>
         <p:style>
@@ -8006,14 +8393,14 @@
       </p:sp>
       <p:sp>
         <p:nvSpPr>
-          <p:cNvPr id="79" name="TextBox 78"/>
+          <p:cNvPr id="80" name="TextBox 79"/>
           <p:cNvSpPr txBox="1"/>
           <p:nvPr/>
         </p:nvSpPr>
         <p:spPr>
           <a:xfrm>
-            <a:off x="758952" y="3273552"/>
-            <a:ext cx="3584448" cy="384048"/>
+            <a:off x="11750040" y="3035808"/>
+            <a:ext cx="274320" cy="292608"/>
           </a:xfrm>
           <a:prstGeom prst="rect">
             <a:avLst/>
@@ -8026,34 +8413,34 @@
           </a:bodyPr>
           <a:lstStyle/>
           <a:p>
-            <a:pPr algn="l"/>
-            <a:r>
-              <a:rPr sz="1000" b="1" i="0">
-                <a:solidFill>
-                  <a:srgbClr val="005050"/>
+            <a:pPr algn="ctr"/>
+            <a:r>
+              <a:rPr sz="900" b="0" i="0">
+                <a:solidFill>
+                  <a:srgbClr val="EEEEEE"/>
                 </a:solidFill>
               </a:rPr>
-              <a:t>Engagement au don / closing</a:t>
-            </a:r>
-          </a:p>
-        </p:txBody>
-      </p:sp>
-      <p:sp>
-        <p:nvSpPr>
-          <p:cNvPr id="80" name="Rectangle 79"/>
+              <a:t>4</a:t>
+            </a:r>
+          </a:p>
+        </p:txBody>
+      </p:sp>
+      <p:sp>
+        <p:nvSpPr>
+          <p:cNvPr id="81" name="Rectangle 80"/>
           <p:cNvSpPr/>
           <p:nvPr/>
         </p:nvSpPr>
         <p:spPr>
           <a:xfrm>
-            <a:off x="4434840" y="3182112"/>
-            <a:ext cx="5010912" cy="502920"/>
-          </a:xfrm>
-          <a:prstGeom prst="rect">
-            <a:avLst/>
-          </a:prstGeom>
-          <a:solidFill>
-            <a:srgbClr val="F0F7F7"/>
+            <a:off x="274320" y="3419856"/>
+            <a:ext cx="384048" cy="475488"/>
+          </a:xfrm>
+          <a:prstGeom prst="rect">
+            <a:avLst/>
+          </a:prstGeom>
+          <a:solidFill>
+            <a:srgbClr val="FF0000"/>
           </a:solidFill>
           <a:ln>
             <a:noFill/>
@@ -8083,14 +8470,14 @@
       </p:sp>
       <p:sp>
         <p:nvSpPr>
-          <p:cNvPr id="81" name="TextBox 80"/>
+          <p:cNvPr id="82" name="TextBox 81"/>
           <p:cNvSpPr txBox="1"/>
           <p:nvPr/>
         </p:nvSpPr>
         <p:spPr>
           <a:xfrm>
-            <a:off x="4507992" y="3236976"/>
-            <a:ext cx="4864608" cy="420624"/>
+            <a:off x="310896" y="3529584"/>
+            <a:ext cx="329184" cy="310896"/>
           </a:xfrm>
           <a:prstGeom prst="rect">
             <a:avLst/>
@@ -8103,28 +8490,28 @@
           </a:bodyPr>
           <a:lstStyle/>
           <a:p>
-            <a:pPr algn="l"/>
-            <a:r>
-              <a:rPr sz="900" b="0" i="1">
-                <a:solidFill>
-                  <a:srgbClr val="1A1A1A"/>
+            <a:pPr algn="ctr"/>
+            <a:r>
+              <a:rPr sz="1000" b="1" i="0">
+                <a:solidFill>
+                  <a:srgbClr val="FFFFFF"/>
                 </a:solidFill>
               </a:rPr>
-              <a:t>Proposition montant, signature, remerciement</a:t>
-            </a:r>
-          </a:p>
-        </p:txBody>
-      </p:sp>
-      <p:sp>
-        <p:nvSpPr>
-          <p:cNvPr id="82" name="Rectangle 81"/>
+              <a:t>C5</a:t>
+            </a:r>
+          </a:p>
+        </p:txBody>
+      </p:sp>
+      <p:sp>
+        <p:nvSpPr>
+          <p:cNvPr id="83" name="Rectangle 82"/>
           <p:cNvSpPr/>
           <p:nvPr/>
         </p:nvSpPr>
         <p:spPr>
           <a:xfrm>
-            <a:off x="9464040" y="3182112"/>
-            <a:ext cx="713232" cy="502920"/>
+            <a:off x="685800" y="3419856"/>
+            <a:ext cx="6236208" cy="475488"/>
           </a:xfrm>
           <a:prstGeom prst="rect">
             <a:avLst/>
@@ -8132,10 +8519,8 @@
           <a:solidFill>
             <a:srgbClr val="FFFFFF"/>
           </a:solidFill>
-          <a:ln w="6350">
-            <a:solidFill>
-              <a:srgbClr val="007A7A"/>
-            </a:solidFill>
+          <a:ln>
+            <a:noFill/>
           </a:ln>
         </p:spPr>
         <p:style>
@@ -8162,14 +8547,14 @@
       </p:sp>
       <p:sp>
         <p:nvSpPr>
-          <p:cNvPr id="83" name="TextBox 82"/>
+          <p:cNvPr id="84" name="TextBox 83"/>
           <p:cNvSpPr txBox="1"/>
           <p:nvPr/>
         </p:nvSpPr>
         <p:spPr>
           <a:xfrm>
-            <a:off x="9555480" y="3291840"/>
-            <a:ext cx="530352" cy="320040"/>
+            <a:off x="777240" y="3493008"/>
+            <a:ext cx="6099048" cy="365760"/>
           </a:xfrm>
           <a:prstGeom prst="rect">
             <a:avLst/>
@@ -8182,28 +8567,28 @@
           </a:bodyPr>
           <a:lstStyle/>
           <a:p>
-            <a:pPr algn="ctr"/>
-            <a:r>
-              <a:rPr sz="900" b="0" i="0">
-                <a:solidFill>
-                  <a:srgbClr val="BBBBBB"/>
+            <a:pPr algn="l"/>
+            <a:r>
+              <a:rPr sz="1000" b="1" i="0">
+                <a:solidFill>
+                  <a:srgbClr val="005555"/>
                 </a:solidFill>
               </a:rPr>
-              <a:t>1</a:t>
-            </a:r>
-          </a:p>
-        </p:txBody>
-      </p:sp>
-      <p:sp>
-        <p:nvSpPr>
-          <p:cNvPr id="84" name="Rectangle 83"/>
+              <a:t>Vous obtenez l'engagement et concluez</a:t>
+            </a:r>
+          </a:p>
+        </p:txBody>
+      </p:sp>
+      <p:sp>
+        <p:nvSpPr>
+          <p:cNvPr id="85" name="Rectangle 84"/>
           <p:cNvSpPr/>
           <p:nvPr/>
         </p:nvSpPr>
         <p:spPr>
           <a:xfrm>
-            <a:off x="10195560" y="3182112"/>
-            <a:ext cx="713232" cy="502920"/>
+            <a:off x="6949440" y="3419856"/>
+            <a:ext cx="2487168" cy="475488"/>
           </a:xfrm>
           <a:prstGeom prst="rect">
             <a:avLst/>
@@ -8211,10 +8596,8 @@
           <a:solidFill>
             <a:srgbClr val="FFFFFF"/>
           </a:solidFill>
-          <a:ln w="6350">
-            <a:solidFill>
-              <a:srgbClr val="007A7A"/>
-            </a:solidFill>
+          <a:ln>
+            <a:noFill/>
           </a:ln>
         </p:spPr>
         <p:style>
@@ -8241,14 +8624,14 @@
       </p:sp>
       <p:sp>
         <p:nvSpPr>
-          <p:cNvPr id="85" name="TextBox 84"/>
+          <p:cNvPr id="86" name="TextBox 85"/>
           <p:cNvSpPr txBox="1"/>
           <p:nvPr/>
         </p:nvSpPr>
         <p:spPr>
           <a:xfrm>
-            <a:off x="10287000" y="3291840"/>
-            <a:ext cx="530352" cy="320040"/>
+            <a:off x="7040879" y="3474720"/>
+            <a:ext cx="2350008" cy="384048"/>
           </a:xfrm>
           <a:prstGeom prst="rect">
             <a:avLst/>
@@ -8261,28 +8644,28 @@
           </a:bodyPr>
           <a:lstStyle/>
           <a:p>
-            <a:pPr algn="ctr"/>
-            <a:r>
-              <a:rPr sz="900" b="0" i="0">
-                <a:solidFill>
-                  <a:srgbClr val="BBBBBB"/>
+            <a:pPr algn="l"/>
+            <a:r>
+              <a:rPr sz="900" b="0" i="1">
+                <a:solidFill>
+                  <a:srgbClr val="555555"/>
                 </a:solidFill>
               </a:rPr>
-              <a:t>2</a:t>
-            </a:r>
-          </a:p>
-        </p:txBody>
-      </p:sp>
-      <p:sp>
-        <p:nvSpPr>
-          <p:cNvPr id="86" name="Rectangle 85"/>
+              <a:t>Proposition montant adapté, formulaire signé, remerciement</a:t>
+            </a:r>
+          </a:p>
+        </p:txBody>
+      </p:sp>
+      <p:sp>
+        <p:nvSpPr>
+          <p:cNvPr id="87" name="Rectangle 86"/>
           <p:cNvSpPr/>
           <p:nvPr/>
         </p:nvSpPr>
         <p:spPr>
           <a:xfrm>
-            <a:off x="10927080" y="3182112"/>
-            <a:ext cx="713232" cy="502920"/>
+            <a:off x="9464040" y="3419856"/>
+            <a:ext cx="713232" cy="475488"/>
           </a:xfrm>
           <a:prstGeom prst="rect">
             <a:avLst/>
@@ -8292,7 +8675,7 @@
           </a:solidFill>
           <a:ln w="6350">
             <a:solidFill>
-              <a:srgbClr val="007A7A"/>
+              <a:srgbClr val="008080"/>
             </a:solidFill>
           </a:ln>
         </p:spPr>
@@ -8320,14 +8703,14 @@
       </p:sp>
       <p:sp>
         <p:nvSpPr>
-          <p:cNvPr id="87" name="TextBox 86"/>
+          <p:cNvPr id="88" name="TextBox 87"/>
           <p:cNvSpPr txBox="1"/>
           <p:nvPr/>
         </p:nvSpPr>
         <p:spPr>
           <a:xfrm>
-            <a:off x="11018519" y="3291840"/>
-            <a:ext cx="530352" cy="320040"/>
+            <a:off x="9555480" y="3529584"/>
+            <a:ext cx="530352" cy="292608"/>
           </a:xfrm>
           <a:prstGeom prst="rect">
             <a:avLst/>
@@ -8344,24 +8727,24 @@
             <a:r>
               <a:rPr sz="900" b="0" i="0">
                 <a:solidFill>
-                  <a:srgbClr val="BBBBBB"/>
+                  <a:srgbClr val="EEEEEE"/>
                 </a:solidFill>
               </a:rPr>
-              <a:t>3</a:t>
-            </a:r>
-          </a:p>
-        </p:txBody>
-      </p:sp>
-      <p:sp>
-        <p:nvSpPr>
-          <p:cNvPr id="88" name="Rectangle 87"/>
+              <a:t>1</a:t>
+            </a:r>
+          </a:p>
+        </p:txBody>
+      </p:sp>
+      <p:sp>
+        <p:nvSpPr>
+          <p:cNvPr id="89" name="Rectangle 88"/>
           <p:cNvSpPr/>
           <p:nvPr/>
         </p:nvSpPr>
         <p:spPr>
           <a:xfrm>
-            <a:off x="11658600" y="3182112"/>
-            <a:ext cx="457200" cy="502920"/>
+            <a:off x="10195560" y="3419856"/>
+            <a:ext cx="713232" cy="475488"/>
           </a:xfrm>
           <a:prstGeom prst="rect">
             <a:avLst/>
@@ -8371,7 +8754,7 @@
           </a:solidFill>
           <a:ln w="6350">
             <a:solidFill>
-              <a:srgbClr val="007A7A"/>
+              <a:srgbClr val="008080"/>
             </a:solidFill>
           </a:ln>
         </p:spPr>
@@ -8399,14 +8782,14 @@
       </p:sp>
       <p:sp>
         <p:nvSpPr>
-          <p:cNvPr id="89" name="TextBox 88"/>
+          <p:cNvPr id="90" name="TextBox 89"/>
           <p:cNvSpPr txBox="1"/>
           <p:nvPr/>
         </p:nvSpPr>
         <p:spPr>
           <a:xfrm>
-            <a:off x="11750040" y="3291840"/>
-            <a:ext cx="274320" cy="320040"/>
+            <a:off x="10287000" y="3529584"/>
+            <a:ext cx="530352" cy="292608"/>
           </a:xfrm>
           <a:prstGeom prst="rect">
             <a:avLst/>
@@ -8423,33 +8806,35 @@
             <a:r>
               <a:rPr sz="900" b="0" i="0">
                 <a:solidFill>
-                  <a:srgbClr val="BBBBBB"/>
+                  <a:srgbClr val="EEEEEE"/>
                 </a:solidFill>
               </a:rPr>
-              <a:t>4</a:t>
-            </a:r>
-          </a:p>
-        </p:txBody>
-      </p:sp>
-      <p:sp>
-        <p:nvSpPr>
-          <p:cNvPr id="90" name="Rectangle 89"/>
+              <a:t>2</a:t>
+            </a:r>
+          </a:p>
+        </p:txBody>
+      </p:sp>
+      <p:sp>
+        <p:nvSpPr>
+          <p:cNvPr id="91" name="Rectangle 90"/>
           <p:cNvSpPr/>
           <p:nvPr/>
         </p:nvSpPr>
         <p:spPr>
           <a:xfrm>
-            <a:off x="274320" y="3703320"/>
-            <a:ext cx="393192" cy="502920"/>
-          </a:xfrm>
-          <a:prstGeom prst="rect">
-            <a:avLst/>
-          </a:prstGeom>
-          <a:solidFill>
-            <a:srgbClr val="007A7A"/>
-          </a:solidFill>
-          <a:ln>
-            <a:noFill/>
+            <a:off x="10927080" y="3419856"/>
+            <a:ext cx="713232" cy="475488"/>
+          </a:xfrm>
+          <a:prstGeom prst="rect">
+            <a:avLst/>
+          </a:prstGeom>
+          <a:solidFill>
+            <a:srgbClr val="FFFFFF"/>
+          </a:solidFill>
+          <a:ln w="6350">
+            <a:solidFill>
+              <a:srgbClr val="008080"/>
+            </a:solidFill>
           </a:ln>
         </p:spPr>
         <p:style>
@@ -8476,14 +8861,14 @@
       </p:sp>
       <p:sp>
         <p:nvSpPr>
-          <p:cNvPr id="91" name="TextBox 90"/>
+          <p:cNvPr id="92" name="TextBox 91"/>
           <p:cNvSpPr txBox="1"/>
           <p:nvPr/>
         </p:nvSpPr>
         <p:spPr>
           <a:xfrm>
-            <a:off x="292608" y="3813048"/>
-            <a:ext cx="356616" cy="320040"/>
+            <a:off x="11018519" y="3529584"/>
+            <a:ext cx="530352" cy="292608"/>
           </a:xfrm>
           <a:prstGeom prst="rect">
             <a:avLst/>
@@ -8498,26 +8883,26 @@
           <a:p>
             <a:pPr algn="ctr"/>
             <a:r>
-              <a:rPr sz="1000" b="1" i="0">
-                <a:solidFill>
-                  <a:srgbClr val="FFFFFF"/>
+              <a:rPr sz="900" b="0" i="0">
+                <a:solidFill>
+                  <a:srgbClr val="EEEEEE"/>
                 </a:solidFill>
               </a:rPr>
-              <a:t>C6</a:t>
-            </a:r>
-          </a:p>
-        </p:txBody>
-      </p:sp>
-      <p:sp>
-        <p:nvSpPr>
-          <p:cNvPr id="92" name="Rectangle 91"/>
+              <a:t>3</a:t>
+            </a:r>
+          </a:p>
+        </p:txBody>
+      </p:sp>
+      <p:sp>
+        <p:nvSpPr>
+          <p:cNvPr id="93" name="Rectangle 92"/>
           <p:cNvSpPr/>
           <p:nvPr/>
         </p:nvSpPr>
         <p:spPr>
           <a:xfrm>
-            <a:off x="685800" y="3703320"/>
-            <a:ext cx="3730752" cy="502920"/>
+            <a:off x="11658600" y="3419856"/>
+            <a:ext cx="457200" cy="475488"/>
           </a:xfrm>
           <a:prstGeom prst="rect">
             <a:avLst/>
@@ -8525,8 +8910,10 @@
           <a:solidFill>
             <a:srgbClr val="FFFFFF"/>
           </a:solidFill>
-          <a:ln>
-            <a:noFill/>
+          <a:ln w="6350">
+            <a:solidFill>
+              <a:srgbClr val="008080"/>
+            </a:solidFill>
           </a:ln>
         </p:spPr>
         <p:style>
@@ -8553,14 +8940,14 @@
       </p:sp>
       <p:sp>
         <p:nvSpPr>
-          <p:cNvPr id="93" name="TextBox 92"/>
+          <p:cNvPr id="94" name="TextBox 93"/>
           <p:cNvSpPr txBox="1"/>
           <p:nvPr/>
         </p:nvSpPr>
         <p:spPr>
           <a:xfrm>
-            <a:off x="758952" y="3794760"/>
-            <a:ext cx="3584448" cy="384048"/>
+            <a:off x="11750040" y="3529584"/>
+            <a:ext cx="274320" cy="292608"/>
           </a:xfrm>
           <a:prstGeom prst="rect">
             <a:avLst/>
@@ -8573,34 +8960,34 @@
           </a:bodyPr>
           <a:lstStyle/>
           <a:p>
-            <a:pPr algn="l"/>
-            <a:r>
-              <a:rPr sz="1000" b="1" i="0">
-                <a:solidFill>
-                  <a:srgbClr val="005050"/>
+            <a:pPr algn="ctr"/>
+            <a:r>
+              <a:rPr sz="900" b="0" i="0">
+                <a:solidFill>
+                  <a:srgbClr val="EEEEEE"/>
                 </a:solidFill>
               </a:rPr>
-              <a:t>Posture éthique &amp; conformité</a:t>
-            </a:r>
-          </a:p>
-        </p:txBody>
-      </p:sp>
-      <p:sp>
-        <p:nvSpPr>
-          <p:cNvPr id="94" name="Rectangle 93"/>
+              <a:t>4</a:t>
+            </a:r>
+          </a:p>
+        </p:txBody>
+      </p:sp>
+      <p:sp>
+        <p:nvSpPr>
+          <p:cNvPr id="95" name="Rectangle 94"/>
           <p:cNvSpPr/>
           <p:nvPr/>
         </p:nvSpPr>
         <p:spPr>
           <a:xfrm>
-            <a:off x="4434840" y="3703320"/>
-            <a:ext cx="5010912" cy="502920"/>
-          </a:xfrm>
-          <a:prstGeom prst="rect">
-            <a:avLst/>
-          </a:prstGeom>
-          <a:solidFill>
-            <a:srgbClr val="FFFFFF"/>
+            <a:off x="274320" y="3913632"/>
+            <a:ext cx="384048" cy="475488"/>
+          </a:xfrm>
+          <a:prstGeom prst="rect">
+            <a:avLst/>
+          </a:prstGeom>
+          <a:solidFill>
+            <a:srgbClr val="FF0000"/>
           </a:solidFill>
           <a:ln>
             <a:noFill/>
@@ -8630,14 +9017,14 @@
       </p:sp>
       <p:sp>
         <p:nvSpPr>
-          <p:cNvPr id="95" name="TextBox 94"/>
+          <p:cNvPr id="96" name="TextBox 95"/>
           <p:cNvSpPr txBox="1"/>
           <p:nvPr/>
         </p:nvSpPr>
         <p:spPr>
           <a:xfrm>
-            <a:off x="4507992" y="3758184"/>
-            <a:ext cx="4864608" cy="420624"/>
+            <a:off x="310896" y="4023360"/>
+            <a:ext cx="329184" cy="310896"/>
           </a:xfrm>
           <a:prstGeom prst="rect">
             <a:avLst/>
@@ -8650,39 +9037,37 @@
           </a:bodyPr>
           <a:lstStyle/>
           <a:p>
-            <a:pPr algn="l"/>
-            <a:r>
-              <a:rPr sz="900" b="0" i="1">
-                <a:solidFill>
-                  <a:srgbClr val="1A1A1A"/>
+            <a:pPr algn="ctr"/>
+            <a:r>
+              <a:rPr sz="1000" b="1" i="0">
+                <a:solidFill>
+                  <a:srgbClr val="FFFFFF"/>
                 </a:solidFill>
               </a:rPr>
-              <a:t>Badge visible, pas de pression, règles déontologiques</a:t>
-            </a:r>
-          </a:p>
-        </p:txBody>
-      </p:sp>
-      <p:sp>
-        <p:nvSpPr>
-          <p:cNvPr id="96" name="Rectangle 95"/>
+              <a:t>C6</a:t>
+            </a:r>
+          </a:p>
+        </p:txBody>
+      </p:sp>
+      <p:sp>
+        <p:nvSpPr>
+          <p:cNvPr id="97" name="Rectangle 96"/>
           <p:cNvSpPr/>
           <p:nvPr/>
         </p:nvSpPr>
         <p:spPr>
           <a:xfrm>
-            <a:off x="9464040" y="3703320"/>
-            <a:ext cx="713232" cy="502920"/>
-          </a:xfrm>
-          <a:prstGeom prst="rect">
-            <a:avLst/>
-          </a:prstGeom>
-          <a:solidFill>
-            <a:srgbClr val="FFFFFF"/>
-          </a:solidFill>
-          <a:ln w="6350">
-            <a:solidFill>
-              <a:srgbClr val="007A7A"/>
-            </a:solidFill>
+            <a:off x="685800" y="3913632"/>
+            <a:ext cx="6236208" cy="475488"/>
+          </a:xfrm>
+          <a:prstGeom prst="rect">
+            <a:avLst/>
+          </a:prstGeom>
+          <a:solidFill>
+            <a:srgbClr val="F0F7F7"/>
+          </a:solidFill>
+          <a:ln>
+            <a:noFill/>
           </a:ln>
         </p:spPr>
         <p:style>
@@ -8709,14 +9094,14 @@
       </p:sp>
       <p:sp>
         <p:nvSpPr>
-          <p:cNvPr id="97" name="TextBox 96"/>
+          <p:cNvPr id="98" name="TextBox 97"/>
           <p:cNvSpPr txBox="1"/>
           <p:nvPr/>
         </p:nvSpPr>
         <p:spPr>
           <a:xfrm>
-            <a:off x="9555480" y="3813048"/>
-            <a:ext cx="530352" cy="320040"/>
+            <a:off x="777240" y="3986784"/>
+            <a:ext cx="6099048" cy="365760"/>
           </a:xfrm>
           <a:prstGeom prst="rect">
             <a:avLst/>
@@ -8729,39 +9114,37 @@
           </a:bodyPr>
           <a:lstStyle/>
           <a:p>
-            <a:pPr algn="ctr"/>
-            <a:r>
-              <a:rPr sz="900" b="0" i="0">
-                <a:solidFill>
-                  <a:srgbClr val="BBBBBB"/>
+            <a:pPr algn="l"/>
+            <a:r>
+              <a:rPr sz="1000" b="1" i="0">
+                <a:solidFill>
+                  <a:srgbClr val="005555"/>
                 </a:solidFill>
               </a:rPr>
-              <a:t>1</a:t>
-            </a:r>
-          </a:p>
-        </p:txBody>
-      </p:sp>
-      <p:sp>
-        <p:nvSpPr>
-          <p:cNvPr id="98" name="Rectangle 97"/>
+              <a:t>Vous respectez les règles éthiques en toute situation</a:t>
+            </a:r>
+          </a:p>
+        </p:txBody>
+      </p:sp>
+      <p:sp>
+        <p:nvSpPr>
+          <p:cNvPr id="99" name="Rectangle 98"/>
           <p:cNvSpPr/>
           <p:nvPr/>
         </p:nvSpPr>
         <p:spPr>
           <a:xfrm>
-            <a:off x="10195560" y="3703320"/>
-            <a:ext cx="713232" cy="502920"/>
-          </a:xfrm>
-          <a:prstGeom prst="rect">
-            <a:avLst/>
-          </a:prstGeom>
-          <a:solidFill>
-            <a:srgbClr val="FFFFFF"/>
-          </a:solidFill>
-          <a:ln w="6350">
-            <a:solidFill>
-              <a:srgbClr val="007A7A"/>
-            </a:solidFill>
+            <a:off x="6949440" y="3913632"/>
+            <a:ext cx="2487168" cy="475488"/>
+          </a:xfrm>
+          <a:prstGeom prst="rect">
+            <a:avLst/>
+          </a:prstGeom>
+          <a:solidFill>
+            <a:srgbClr val="F0F7F7"/>
+          </a:solidFill>
+          <a:ln>
+            <a:noFill/>
           </a:ln>
         </p:spPr>
         <p:style>
@@ -8788,14 +9171,14 @@
       </p:sp>
       <p:sp>
         <p:nvSpPr>
-          <p:cNvPr id="99" name="TextBox 98"/>
+          <p:cNvPr id="100" name="TextBox 99"/>
           <p:cNvSpPr txBox="1"/>
           <p:nvPr/>
         </p:nvSpPr>
         <p:spPr>
           <a:xfrm>
-            <a:off x="10287000" y="3813048"/>
-            <a:ext cx="530352" cy="320040"/>
+            <a:off x="7040879" y="3968496"/>
+            <a:ext cx="2350008" cy="384048"/>
           </a:xfrm>
           <a:prstGeom prst="rect">
             <a:avLst/>
@@ -8808,28 +9191,28 @@
           </a:bodyPr>
           <a:lstStyle/>
           <a:p>
-            <a:pPr algn="ctr"/>
-            <a:r>
-              <a:rPr sz="900" b="0" i="0">
-                <a:solidFill>
-                  <a:srgbClr val="BBBBBB"/>
+            <a:pPr algn="l"/>
+            <a:r>
+              <a:rPr sz="900" b="0" i="1">
+                <a:solidFill>
+                  <a:srgbClr val="555555"/>
                 </a:solidFill>
               </a:rPr>
-              <a:t>2</a:t>
-            </a:r>
-          </a:p>
-        </p:txBody>
-      </p:sp>
-      <p:sp>
-        <p:nvSpPr>
-          <p:cNvPr id="100" name="Rectangle 99"/>
+              <a:t>Badge visible, aucune pression, déontologie fundraiser</a:t>
+            </a:r>
+          </a:p>
+        </p:txBody>
+      </p:sp>
+      <p:sp>
+        <p:nvSpPr>
+          <p:cNvPr id="101" name="Rectangle 100"/>
           <p:cNvSpPr/>
           <p:nvPr/>
         </p:nvSpPr>
         <p:spPr>
           <a:xfrm>
-            <a:off x="10927080" y="3703320"/>
-            <a:ext cx="713232" cy="502920"/>
+            <a:off x="9464040" y="3913632"/>
+            <a:ext cx="713232" cy="475488"/>
           </a:xfrm>
           <a:prstGeom prst="rect">
             <a:avLst/>
@@ -8839,7 +9222,7 @@
           </a:solidFill>
           <a:ln w="6350">
             <a:solidFill>
-              <a:srgbClr val="007A7A"/>
+              <a:srgbClr val="008080"/>
             </a:solidFill>
           </a:ln>
         </p:spPr>
@@ -8867,14 +9250,14 @@
       </p:sp>
       <p:sp>
         <p:nvSpPr>
-          <p:cNvPr id="101" name="TextBox 100"/>
+          <p:cNvPr id="102" name="TextBox 101"/>
           <p:cNvSpPr txBox="1"/>
           <p:nvPr/>
         </p:nvSpPr>
         <p:spPr>
           <a:xfrm>
-            <a:off x="11018519" y="3813048"/>
-            <a:ext cx="530352" cy="320040"/>
+            <a:off x="9555480" y="4023360"/>
+            <a:ext cx="530352" cy="292608"/>
           </a:xfrm>
           <a:prstGeom prst="rect">
             <a:avLst/>
@@ -8891,24 +9274,24 @@
             <a:r>
               <a:rPr sz="900" b="0" i="0">
                 <a:solidFill>
-                  <a:srgbClr val="BBBBBB"/>
+                  <a:srgbClr val="EEEEEE"/>
                 </a:solidFill>
               </a:rPr>
-              <a:t>3</a:t>
-            </a:r>
-          </a:p>
-        </p:txBody>
-      </p:sp>
-      <p:sp>
-        <p:nvSpPr>
-          <p:cNvPr id="102" name="Rectangle 101"/>
+              <a:t>1</a:t>
+            </a:r>
+          </a:p>
+        </p:txBody>
+      </p:sp>
+      <p:sp>
+        <p:nvSpPr>
+          <p:cNvPr id="103" name="Rectangle 102"/>
           <p:cNvSpPr/>
           <p:nvPr/>
         </p:nvSpPr>
         <p:spPr>
           <a:xfrm>
-            <a:off x="11658600" y="3703320"/>
-            <a:ext cx="457200" cy="502920"/>
+            <a:off x="10195560" y="3913632"/>
+            <a:ext cx="713232" cy="475488"/>
           </a:xfrm>
           <a:prstGeom prst="rect">
             <a:avLst/>
@@ -8918,7 +9301,7 @@
           </a:solidFill>
           <a:ln w="6350">
             <a:solidFill>
-              <a:srgbClr val="007A7A"/>
+              <a:srgbClr val="008080"/>
             </a:solidFill>
           </a:ln>
         </p:spPr>
@@ -8946,14 +9329,14 @@
       </p:sp>
       <p:sp>
         <p:nvSpPr>
-          <p:cNvPr id="103" name="TextBox 102"/>
+          <p:cNvPr id="104" name="TextBox 103"/>
           <p:cNvSpPr txBox="1"/>
           <p:nvPr/>
         </p:nvSpPr>
         <p:spPr>
           <a:xfrm>
-            <a:off x="11750040" y="3813048"/>
-            <a:ext cx="274320" cy="320040"/>
+            <a:off x="10287000" y="4023360"/>
+            <a:ext cx="530352" cy="292608"/>
           </a:xfrm>
           <a:prstGeom prst="rect">
             <a:avLst/>
@@ -8970,33 +9353,35 @@
             <a:r>
               <a:rPr sz="900" b="0" i="0">
                 <a:solidFill>
-                  <a:srgbClr val="BBBBBB"/>
+                  <a:srgbClr val="EEEEEE"/>
                 </a:solidFill>
               </a:rPr>
-              <a:t>4</a:t>
-            </a:r>
-          </a:p>
-        </p:txBody>
-      </p:sp>
-      <p:sp>
-        <p:nvSpPr>
-          <p:cNvPr id="104" name="Rectangle 103"/>
+              <a:t>2</a:t>
+            </a:r>
+          </a:p>
+        </p:txBody>
+      </p:sp>
+      <p:sp>
+        <p:nvSpPr>
+          <p:cNvPr id="105" name="Rectangle 104"/>
           <p:cNvSpPr/>
           <p:nvPr/>
         </p:nvSpPr>
         <p:spPr>
           <a:xfrm>
-            <a:off x="274320" y="4224528"/>
-            <a:ext cx="393192" cy="502920"/>
-          </a:xfrm>
-          <a:prstGeom prst="rect">
-            <a:avLst/>
-          </a:prstGeom>
-          <a:solidFill>
-            <a:srgbClr val="007A7A"/>
-          </a:solidFill>
-          <a:ln>
-            <a:noFill/>
+            <a:off x="10927080" y="3913632"/>
+            <a:ext cx="713232" cy="475488"/>
+          </a:xfrm>
+          <a:prstGeom prst="rect">
+            <a:avLst/>
+          </a:prstGeom>
+          <a:solidFill>
+            <a:srgbClr val="FFFFFF"/>
+          </a:solidFill>
+          <a:ln w="6350">
+            <a:solidFill>
+              <a:srgbClr val="008080"/>
+            </a:solidFill>
           </a:ln>
         </p:spPr>
         <p:style>
@@ -9023,14 +9408,14 @@
       </p:sp>
       <p:sp>
         <p:nvSpPr>
-          <p:cNvPr id="105" name="TextBox 104"/>
+          <p:cNvPr id="106" name="TextBox 105"/>
           <p:cNvSpPr txBox="1"/>
           <p:nvPr/>
         </p:nvSpPr>
         <p:spPr>
           <a:xfrm>
-            <a:off x="292608" y="4334256"/>
-            <a:ext cx="356616" cy="320040"/>
+            <a:off x="11018519" y="4023360"/>
+            <a:ext cx="530352" cy="292608"/>
           </a:xfrm>
           <a:prstGeom prst="rect">
             <a:avLst/>
@@ -9045,35 +9430,37 @@
           <a:p>
             <a:pPr algn="ctr"/>
             <a:r>
-              <a:rPr sz="1000" b="1" i="0">
-                <a:solidFill>
-                  <a:srgbClr val="FFFFFF"/>
+              <a:rPr sz="900" b="0" i="0">
+                <a:solidFill>
+                  <a:srgbClr val="EEEEEE"/>
                 </a:solidFill>
               </a:rPr>
-              <a:t>C7</a:t>
-            </a:r>
-          </a:p>
-        </p:txBody>
-      </p:sp>
-      <p:sp>
-        <p:nvSpPr>
-          <p:cNvPr id="106" name="Rectangle 105"/>
+              <a:t>3</a:t>
+            </a:r>
+          </a:p>
+        </p:txBody>
+      </p:sp>
+      <p:sp>
+        <p:nvSpPr>
+          <p:cNvPr id="107" name="Rectangle 106"/>
           <p:cNvSpPr/>
           <p:nvPr/>
         </p:nvSpPr>
         <p:spPr>
           <a:xfrm>
-            <a:off x="685800" y="4224528"/>
-            <a:ext cx="3730752" cy="502920"/>
-          </a:xfrm>
-          <a:prstGeom prst="rect">
-            <a:avLst/>
-          </a:prstGeom>
-          <a:solidFill>
-            <a:srgbClr val="F0F7F7"/>
-          </a:solidFill>
-          <a:ln>
-            <a:noFill/>
+            <a:off x="11658600" y="3913632"/>
+            <a:ext cx="457200" cy="475488"/>
+          </a:xfrm>
+          <a:prstGeom prst="rect">
+            <a:avLst/>
+          </a:prstGeom>
+          <a:solidFill>
+            <a:srgbClr val="FFFFFF"/>
+          </a:solidFill>
+          <a:ln w="6350">
+            <a:solidFill>
+              <a:srgbClr val="008080"/>
+            </a:solidFill>
           </a:ln>
         </p:spPr>
         <p:style>
@@ -9100,14 +9487,14 @@
       </p:sp>
       <p:sp>
         <p:nvSpPr>
-          <p:cNvPr id="107" name="TextBox 106"/>
+          <p:cNvPr id="108" name="TextBox 107"/>
           <p:cNvSpPr txBox="1"/>
           <p:nvPr/>
         </p:nvSpPr>
         <p:spPr>
           <a:xfrm>
-            <a:off x="758952" y="4315968"/>
-            <a:ext cx="3584448" cy="384048"/>
+            <a:off x="11750040" y="4023360"/>
+            <a:ext cx="274320" cy="292608"/>
           </a:xfrm>
           <a:prstGeom prst="rect">
             <a:avLst/>
@@ -9120,34 +9507,34 @@
           </a:bodyPr>
           <a:lstStyle/>
           <a:p>
-            <a:pPr algn="l"/>
-            <a:r>
-              <a:rPr sz="1000" b="1" i="0">
-                <a:solidFill>
-                  <a:srgbClr val="005050"/>
+            <a:pPr algn="ctr"/>
+            <a:r>
+              <a:rPr sz="900" b="0" i="0">
+                <a:solidFill>
+                  <a:srgbClr val="EEEEEE"/>
                 </a:solidFill>
               </a:rPr>
-              <a:t>Gestion émotionnelle &amp; résilience</a:t>
-            </a:r>
-          </a:p>
-        </p:txBody>
-      </p:sp>
-      <p:sp>
-        <p:nvSpPr>
-          <p:cNvPr id="108" name="Rectangle 107"/>
+              <a:t>4</a:t>
+            </a:r>
+          </a:p>
+        </p:txBody>
+      </p:sp>
+      <p:sp>
+        <p:nvSpPr>
+          <p:cNvPr id="109" name="Rectangle 108"/>
           <p:cNvSpPr/>
           <p:nvPr/>
         </p:nvSpPr>
         <p:spPr>
           <a:xfrm>
-            <a:off x="4434840" y="4224528"/>
-            <a:ext cx="5010912" cy="502920"/>
-          </a:xfrm>
-          <a:prstGeom prst="rect">
-            <a:avLst/>
-          </a:prstGeom>
-          <a:solidFill>
-            <a:srgbClr val="F0F7F7"/>
+            <a:off x="274320" y="4407408"/>
+            <a:ext cx="384048" cy="475488"/>
+          </a:xfrm>
+          <a:prstGeom prst="rect">
+            <a:avLst/>
+          </a:prstGeom>
+          <a:solidFill>
+            <a:srgbClr val="FF0000"/>
           </a:solidFill>
           <a:ln>
             <a:noFill/>
@@ -9177,14 +9564,14 @@
       </p:sp>
       <p:sp>
         <p:nvSpPr>
-          <p:cNvPr id="109" name="TextBox 108"/>
+          <p:cNvPr id="110" name="TextBox 109"/>
           <p:cNvSpPr txBox="1"/>
           <p:nvPr/>
         </p:nvSpPr>
         <p:spPr>
           <a:xfrm>
-            <a:off x="4507992" y="4279392"/>
-            <a:ext cx="4864608" cy="420624"/>
+            <a:off x="310896" y="4517136"/>
+            <a:ext cx="329184" cy="310896"/>
           </a:xfrm>
           <a:prstGeom prst="rect">
             <a:avLst/>
@@ -9197,28 +9584,28 @@
           </a:bodyPr>
           <a:lstStyle/>
           <a:p>
-            <a:pPr algn="l"/>
-            <a:r>
-              <a:rPr sz="900" b="0" i="1">
-                <a:solidFill>
-                  <a:srgbClr val="1A1A1A"/>
+            <a:pPr algn="ctr"/>
+            <a:r>
+              <a:rPr sz="1000" b="1" i="0">
+                <a:solidFill>
+                  <a:srgbClr val="FFFFFF"/>
                 </a:solidFill>
               </a:rPr>
-              <a:t>Maintien posture positive après refus, 0 découragement visible</a:t>
-            </a:r>
-          </a:p>
-        </p:txBody>
-      </p:sp>
-      <p:sp>
-        <p:nvSpPr>
-          <p:cNvPr id="110" name="Rectangle 109"/>
+              <a:t>C7</a:t>
+            </a:r>
+          </a:p>
+        </p:txBody>
+      </p:sp>
+      <p:sp>
+        <p:nvSpPr>
+          <p:cNvPr id="111" name="Rectangle 110"/>
           <p:cNvSpPr/>
           <p:nvPr/>
         </p:nvSpPr>
         <p:spPr>
           <a:xfrm>
-            <a:off x="9464040" y="4224528"/>
-            <a:ext cx="713232" cy="502920"/>
+            <a:off x="685800" y="4407408"/>
+            <a:ext cx="6236208" cy="475488"/>
           </a:xfrm>
           <a:prstGeom prst="rect">
             <a:avLst/>
@@ -9226,10 +9613,8 @@
           <a:solidFill>
             <a:srgbClr val="FFFFFF"/>
           </a:solidFill>
-          <a:ln w="6350">
-            <a:solidFill>
-              <a:srgbClr val="007A7A"/>
-            </a:solidFill>
+          <a:ln>
+            <a:noFill/>
           </a:ln>
         </p:spPr>
         <p:style>
@@ -9256,14 +9641,14 @@
       </p:sp>
       <p:sp>
         <p:nvSpPr>
-          <p:cNvPr id="111" name="TextBox 110"/>
+          <p:cNvPr id="112" name="TextBox 111"/>
           <p:cNvSpPr txBox="1"/>
           <p:nvPr/>
         </p:nvSpPr>
         <p:spPr>
           <a:xfrm>
-            <a:off x="9555480" y="4334256"/>
-            <a:ext cx="530352" cy="320040"/>
+            <a:off x="777240" y="4480560"/>
+            <a:ext cx="6099048" cy="365760"/>
           </a:xfrm>
           <a:prstGeom prst="rect">
             <a:avLst/>
@@ -9276,28 +9661,28 @@
           </a:bodyPr>
           <a:lstStyle/>
           <a:p>
-            <a:pPr algn="ctr"/>
-            <a:r>
-              <a:rPr sz="900" b="0" i="0">
-                <a:solidFill>
-                  <a:srgbClr val="BBBBBB"/>
+            <a:pPr algn="l"/>
+            <a:r>
+              <a:rPr sz="1000" b="1" i="0">
+                <a:solidFill>
+                  <a:srgbClr val="005555"/>
                 </a:solidFill>
               </a:rPr>
-              <a:t>1</a:t>
-            </a:r>
-          </a:p>
-        </p:txBody>
-      </p:sp>
-      <p:sp>
-        <p:nvSpPr>
-          <p:cNvPr id="112" name="Rectangle 111"/>
+              <a:t>Vous gérez votre état émotionnel</a:t>
+            </a:r>
+          </a:p>
+        </p:txBody>
+      </p:sp>
+      <p:sp>
+        <p:nvSpPr>
+          <p:cNvPr id="113" name="Rectangle 112"/>
           <p:cNvSpPr/>
           <p:nvPr/>
         </p:nvSpPr>
         <p:spPr>
           <a:xfrm>
-            <a:off x="10195560" y="4224528"/>
-            <a:ext cx="713232" cy="502920"/>
+            <a:off x="6949440" y="4407408"/>
+            <a:ext cx="2487168" cy="475488"/>
           </a:xfrm>
           <a:prstGeom prst="rect">
             <a:avLst/>
@@ -9305,10 +9690,8 @@
           <a:solidFill>
             <a:srgbClr val="FFFFFF"/>
           </a:solidFill>
-          <a:ln w="6350">
-            <a:solidFill>
-              <a:srgbClr val="007A7A"/>
-            </a:solidFill>
+          <a:ln>
+            <a:noFill/>
           </a:ln>
         </p:spPr>
         <p:style>
@@ -9335,14 +9718,14 @@
       </p:sp>
       <p:sp>
         <p:nvSpPr>
-          <p:cNvPr id="113" name="TextBox 112"/>
+          <p:cNvPr id="114" name="TextBox 113"/>
           <p:cNvSpPr txBox="1"/>
           <p:nvPr/>
         </p:nvSpPr>
         <p:spPr>
           <a:xfrm>
-            <a:off x="10287000" y="4334256"/>
-            <a:ext cx="530352" cy="320040"/>
+            <a:off x="7040879" y="4462272"/>
+            <a:ext cx="2350008" cy="384048"/>
           </a:xfrm>
           <a:prstGeom prst="rect">
             <a:avLst/>
@@ -9355,28 +9738,28 @@
           </a:bodyPr>
           <a:lstStyle/>
           <a:p>
-            <a:pPr algn="ctr"/>
-            <a:r>
-              <a:rPr sz="900" b="0" i="0">
-                <a:solidFill>
-                  <a:srgbClr val="BBBBBB"/>
+            <a:pPr algn="l"/>
+            <a:r>
+              <a:rPr sz="900" b="0" i="1">
+                <a:solidFill>
+                  <a:srgbClr val="555555"/>
                 </a:solidFill>
               </a:rPr>
-              <a:t>2</a:t>
-            </a:r>
-          </a:p>
-        </p:txBody>
-      </p:sp>
-      <p:sp>
-        <p:nvSpPr>
-          <p:cNvPr id="114" name="Rectangle 113"/>
+              <a:t>Posture positive maintenue après refus, zéro découragement visible</a:t>
+            </a:r>
+          </a:p>
+        </p:txBody>
+      </p:sp>
+      <p:sp>
+        <p:nvSpPr>
+          <p:cNvPr id="115" name="Rectangle 114"/>
           <p:cNvSpPr/>
           <p:nvPr/>
         </p:nvSpPr>
         <p:spPr>
           <a:xfrm>
-            <a:off x="10927080" y="4224528"/>
-            <a:ext cx="713232" cy="502920"/>
+            <a:off x="9464040" y="4407408"/>
+            <a:ext cx="713232" cy="475488"/>
           </a:xfrm>
           <a:prstGeom prst="rect">
             <a:avLst/>
@@ -9386,7 +9769,7 @@
           </a:solidFill>
           <a:ln w="6350">
             <a:solidFill>
-              <a:srgbClr val="007A7A"/>
+              <a:srgbClr val="008080"/>
             </a:solidFill>
           </a:ln>
         </p:spPr>
@@ -9414,14 +9797,14 @@
       </p:sp>
       <p:sp>
         <p:nvSpPr>
-          <p:cNvPr id="115" name="TextBox 114"/>
+          <p:cNvPr id="116" name="TextBox 115"/>
           <p:cNvSpPr txBox="1"/>
           <p:nvPr/>
         </p:nvSpPr>
         <p:spPr>
           <a:xfrm>
-            <a:off x="11018519" y="4334256"/>
-            <a:ext cx="530352" cy="320040"/>
+            <a:off x="9555480" y="4517136"/>
+            <a:ext cx="530352" cy="292608"/>
           </a:xfrm>
           <a:prstGeom prst="rect">
             <a:avLst/>
@@ -9438,24 +9821,24 @@
             <a:r>
               <a:rPr sz="900" b="0" i="0">
                 <a:solidFill>
-                  <a:srgbClr val="BBBBBB"/>
+                  <a:srgbClr val="EEEEEE"/>
                 </a:solidFill>
               </a:rPr>
-              <a:t>3</a:t>
-            </a:r>
-          </a:p>
-        </p:txBody>
-      </p:sp>
-      <p:sp>
-        <p:nvSpPr>
-          <p:cNvPr id="116" name="Rectangle 115"/>
+              <a:t>1</a:t>
+            </a:r>
+          </a:p>
+        </p:txBody>
+      </p:sp>
+      <p:sp>
+        <p:nvSpPr>
+          <p:cNvPr id="117" name="Rectangle 116"/>
           <p:cNvSpPr/>
           <p:nvPr/>
         </p:nvSpPr>
         <p:spPr>
           <a:xfrm>
-            <a:off x="11658600" y="4224528"/>
-            <a:ext cx="457200" cy="502920"/>
+            <a:off x="10195560" y="4407408"/>
+            <a:ext cx="713232" cy="475488"/>
           </a:xfrm>
           <a:prstGeom prst="rect">
             <a:avLst/>
@@ -9465,7 +9848,7 @@
           </a:solidFill>
           <a:ln w="6350">
             <a:solidFill>
-              <a:srgbClr val="007A7A"/>
+              <a:srgbClr val="008080"/>
             </a:solidFill>
           </a:ln>
         </p:spPr>
@@ -9493,14 +9876,14 @@
       </p:sp>
       <p:sp>
         <p:nvSpPr>
-          <p:cNvPr id="117" name="TextBox 116"/>
+          <p:cNvPr id="118" name="TextBox 117"/>
           <p:cNvSpPr txBox="1"/>
           <p:nvPr/>
         </p:nvSpPr>
         <p:spPr>
           <a:xfrm>
-            <a:off x="11750040" y="4334256"/>
-            <a:ext cx="274320" cy="320040"/>
+            <a:off x="10287000" y="4517136"/>
+            <a:ext cx="530352" cy="292608"/>
           </a:xfrm>
           <a:prstGeom prst="rect">
             <a:avLst/>
@@ -9517,33 +9900,35 @@
             <a:r>
               <a:rPr sz="900" b="0" i="0">
                 <a:solidFill>
-                  <a:srgbClr val="BBBBBB"/>
+                  <a:srgbClr val="EEEEEE"/>
                 </a:solidFill>
               </a:rPr>
-              <a:t>4</a:t>
-            </a:r>
-          </a:p>
-        </p:txBody>
-      </p:sp>
-      <p:sp>
-        <p:nvSpPr>
-          <p:cNvPr id="118" name="Rectangle 117"/>
+              <a:t>2</a:t>
+            </a:r>
+          </a:p>
+        </p:txBody>
+      </p:sp>
+      <p:sp>
+        <p:nvSpPr>
+          <p:cNvPr id="119" name="Rectangle 118"/>
           <p:cNvSpPr/>
           <p:nvPr/>
         </p:nvSpPr>
         <p:spPr>
           <a:xfrm>
-            <a:off x="274320" y="4745736"/>
-            <a:ext cx="11841480" cy="384048"/>
-          </a:xfrm>
-          <a:prstGeom prst="rect">
-            <a:avLst/>
-          </a:prstGeom>
-          <a:solidFill>
-            <a:srgbClr val="005050"/>
-          </a:solidFill>
-          <a:ln>
-            <a:noFill/>
+            <a:off x="10927080" y="4407408"/>
+            <a:ext cx="713232" cy="475488"/>
+          </a:xfrm>
+          <a:prstGeom prst="rect">
+            <a:avLst/>
+          </a:prstGeom>
+          <a:solidFill>
+            <a:srgbClr val="FFFFFF"/>
+          </a:solidFill>
+          <a:ln w="6350">
+            <a:solidFill>
+              <a:srgbClr val="008080"/>
+            </a:solidFill>
           </a:ln>
         </p:spPr>
         <p:style>
@@ -9570,14 +9955,14 @@
       </p:sp>
       <p:sp>
         <p:nvSpPr>
-          <p:cNvPr id="119" name="TextBox 118"/>
+          <p:cNvPr id="120" name="TextBox 119"/>
           <p:cNvSpPr txBox="1"/>
           <p:nvPr/>
         </p:nvSpPr>
         <p:spPr>
           <a:xfrm>
-            <a:off x="365760" y="4818888"/>
-            <a:ext cx="9601200" cy="274320"/>
+            <a:off x="11018519" y="4517136"/>
+            <a:ext cx="530352" cy="292608"/>
           </a:xfrm>
           <a:prstGeom prst="rect">
             <a:avLst/>
@@ -9590,28 +9975,28 @@
           </a:bodyPr>
           <a:lstStyle/>
           <a:p>
-            <a:pPr algn="l"/>
-            <a:r>
-              <a:rPr sz="1100" b="1" i="0">
-                <a:solidFill>
-                  <a:srgbClr val="FFFFFF"/>
+            <a:pPr algn="ctr"/>
+            <a:r>
+              <a:rPr sz="900" b="0" i="0">
+                <a:solidFill>
+                  <a:srgbClr val="EEEEEE"/>
                 </a:solidFill>
               </a:rPr>
-              <a:t>TOTAL  /28</a:t>
-            </a:r>
-          </a:p>
-        </p:txBody>
-      </p:sp>
-      <p:sp>
-        <p:nvSpPr>
-          <p:cNvPr id="120" name="Rectangle 119"/>
+              <a:t>3</a:t>
+            </a:r>
+          </a:p>
+        </p:txBody>
+      </p:sp>
+      <p:sp>
+        <p:nvSpPr>
+          <p:cNvPr id="121" name="Rectangle 120"/>
           <p:cNvSpPr/>
           <p:nvPr/>
         </p:nvSpPr>
         <p:spPr>
           <a:xfrm>
-            <a:off x="10195560" y="4745736"/>
-            <a:ext cx="1920240" cy="384048"/>
+            <a:off x="11658600" y="4407408"/>
+            <a:ext cx="457200" cy="475488"/>
           </a:xfrm>
           <a:prstGeom prst="rect">
             <a:avLst/>
@@ -9619,9 +10004,9 @@
           <a:solidFill>
             <a:srgbClr val="FFFFFF"/>
           </a:solidFill>
-          <a:ln w="25400">
+          <a:ln w="6350">
             <a:solidFill>
-              <a:srgbClr val="C9A84C"/>
+              <a:srgbClr val="008080"/>
             </a:solidFill>
           </a:ln>
         </p:spPr>
@@ -9649,14 +10034,14 @@
       </p:sp>
       <p:sp>
         <p:nvSpPr>
-          <p:cNvPr id="121" name="TextBox 120"/>
+          <p:cNvPr id="122" name="TextBox 121"/>
           <p:cNvSpPr txBox="1"/>
           <p:nvPr/>
         </p:nvSpPr>
         <p:spPr>
           <a:xfrm>
-            <a:off x="10241280" y="4818888"/>
-            <a:ext cx="1828800" cy="274320"/>
+            <a:off x="11750040" y="4517136"/>
+            <a:ext cx="274320" cy="292608"/>
           </a:xfrm>
           <a:prstGeom prst="rect">
             <a:avLst/>
@@ -9671,26 +10056,69 @@
           <a:p>
             <a:pPr algn="ctr"/>
             <a:r>
-              <a:rPr sz="1200" b="1" i="0">
-                <a:solidFill>
-                  <a:srgbClr val="005050"/>
+              <a:rPr sz="900" b="0" i="0">
+                <a:solidFill>
+                  <a:srgbClr val="EEEEEE"/>
                 </a:solidFill>
               </a:rPr>
-              <a:t>__ / 28</a:t>
-            </a:r>
-          </a:p>
-        </p:txBody>
-      </p:sp>
-      <p:sp>
-        <p:nvSpPr>
-          <p:cNvPr id="122" name="TextBox 121"/>
+              <a:t>4</a:t>
+            </a:r>
+          </a:p>
+        </p:txBody>
+      </p:sp>
+      <p:sp>
+        <p:nvSpPr>
+          <p:cNvPr id="123" name="Rectangle 122"/>
+          <p:cNvSpPr/>
+          <p:nvPr/>
+        </p:nvSpPr>
+        <p:spPr>
+          <a:xfrm>
+            <a:off x="274320" y="4901184"/>
+            <a:ext cx="9125712" cy="347472"/>
+          </a:xfrm>
+          <a:prstGeom prst="rect">
+            <a:avLst/>
+          </a:prstGeom>
+          <a:solidFill>
+            <a:srgbClr val="005555"/>
+          </a:solidFill>
+          <a:ln>
+            <a:noFill/>
+          </a:ln>
+        </p:spPr>
+        <p:style>
+          <a:lnRef idx="1">
+            <a:schemeClr val="accent1"/>
+          </a:lnRef>
+          <a:fillRef idx="3">
+            <a:schemeClr val="accent1"/>
+          </a:fillRef>
+          <a:effectRef idx="2">
+            <a:schemeClr val="accent1"/>
+          </a:effectRef>
+          <a:fontRef idx="minor">
+            <a:schemeClr val="lt1"/>
+          </a:fontRef>
+        </p:style>
+        <p:txBody>
+          <a:bodyPr rtlCol="0" anchor="ctr"/>
+          <a:lstStyle/>
+          <a:p>
+            <a:pPr algn="ctr"/>
+          </a:p>
+        </p:txBody>
+      </p:sp>
+      <p:sp>
+        <p:nvSpPr>
+          <p:cNvPr id="124" name="TextBox 123"/>
           <p:cNvSpPr txBox="1"/>
           <p:nvPr/>
         </p:nvSpPr>
         <p:spPr>
           <a:xfrm>
-            <a:off x="274320" y="5221224"/>
-            <a:ext cx="11612880" cy="384048"/>
+            <a:off x="384048" y="4956048"/>
+            <a:ext cx="8229600" cy="256032"/>
           </a:xfrm>
           <a:prstGeom prst="rect">
             <a:avLst/>
@@ -9703,28 +10131,73 @@
           </a:bodyPr>
           <a:lstStyle/>
           <a:p>
-            <a:pPr algn="ctr"/>
-            <a:r>
-              <a:rPr sz="1000" b="1" i="0">
-                <a:solidFill>
-                  <a:srgbClr val="005050"/>
+            <a:pPr algn="l"/>
+            <a:r>
+              <a:rPr sz="1100" b="1" i="0">
+                <a:solidFill>
+                  <a:srgbClr val="FFFFFF"/>
                 </a:solidFill>
               </a:rPr>
-              <a:t>✅ Certifié FIM : ≥ 20/28 (71%)     ⚠ Formation complémentaire : 14–19/28     🔄 Reconduction J+15 : &lt; 14/28</a:t>
-            </a:r>
-          </a:p>
-        </p:txBody>
-      </p:sp>
-      <p:sp>
-        <p:nvSpPr>
-          <p:cNvPr id="123" name="TextBox 122"/>
+              <a:t>TOTAL  /28</a:t>
+            </a:r>
+          </a:p>
+        </p:txBody>
+      </p:sp>
+      <p:sp>
+        <p:nvSpPr>
+          <p:cNvPr id="125" name="Rectangle 124"/>
+          <p:cNvSpPr/>
+          <p:nvPr/>
+        </p:nvSpPr>
+        <p:spPr>
+          <a:xfrm>
+            <a:off x="9464040" y="4901184"/>
+            <a:ext cx="2633472" cy="347472"/>
+          </a:xfrm>
+          <a:prstGeom prst="rect">
+            <a:avLst/>
+          </a:prstGeom>
+          <a:solidFill>
+            <a:srgbClr val="FFFFFF"/>
+          </a:solidFill>
+          <a:ln w="25400">
+            <a:solidFill>
+              <a:srgbClr val="FF0000"/>
+            </a:solidFill>
+          </a:ln>
+        </p:spPr>
+        <p:style>
+          <a:lnRef idx="1">
+            <a:schemeClr val="accent1"/>
+          </a:lnRef>
+          <a:fillRef idx="3">
+            <a:schemeClr val="accent1"/>
+          </a:fillRef>
+          <a:effectRef idx="2">
+            <a:schemeClr val="accent1"/>
+          </a:effectRef>
+          <a:fontRef idx="minor">
+            <a:schemeClr val="lt1"/>
+          </a:fontRef>
+        </p:style>
+        <p:txBody>
+          <a:bodyPr rtlCol="0" anchor="ctr"/>
+          <a:lstStyle/>
+          <a:p>
+            <a:pPr algn="ctr"/>
+          </a:p>
+        </p:txBody>
+      </p:sp>
+      <p:sp>
+        <p:nvSpPr>
+          <p:cNvPr id="126" name="TextBox 125"/>
           <p:cNvSpPr txBox="1"/>
           <p:nvPr/>
         </p:nvSpPr>
         <p:spPr>
           <a:xfrm>
-            <a:off x="0" y="6492240"/>
-            <a:ext cx="12188952" cy="365760"/>
+            <a:off x="9573767" y="4956048"/>
+            <a:ext cx="2194560" cy="256032"/>
           </a:xfrm>
           <a:prstGeom prst="rect">
             <a:avLst/>
@@ -9739,12 +10212,89 @@
           <a:p>
             <a:pPr algn="ctr"/>
             <a:r>
-              <a:rPr sz="800" b="0" i="0">
-                <a:solidFill>
-                  <a:srgbClr val="888888"/>
+              <a:rPr sz="1200" b="1" i="0">
+                <a:solidFill>
+                  <a:srgbClr val="FF0000"/>
                 </a:solidFill>
               </a:rPr>
-              <a:t>SHY-Performance · V6-01062026SHY-TE</a:t>
+              <a:t>__ / 28</a:t>
+            </a:r>
+          </a:p>
+        </p:txBody>
+      </p:sp>
+      <p:sp>
+        <p:nvSpPr>
+          <p:cNvPr id="127" name="Rectangle 126"/>
+          <p:cNvSpPr/>
+          <p:nvPr/>
+        </p:nvSpPr>
+        <p:spPr>
+          <a:xfrm>
+            <a:off x="274320" y="5321808"/>
+            <a:ext cx="11640312" cy="347472"/>
+          </a:xfrm>
+          <a:prstGeom prst="rect">
+            <a:avLst/>
+          </a:prstGeom>
+          <a:solidFill>
+            <a:srgbClr val="FF0000"/>
+          </a:solidFill>
+          <a:ln>
+            <a:noFill/>
+          </a:ln>
+        </p:spPr>
+        <p:style>
+          <a:lnRef idx="1">
+            <a:schemeClr val="accent1"/>
+          </a:lnRef>
+          <a:fillRef idx="3">
+            <a:schemeClr val="accent1"/>
+          </a:fillRef>
+          <a:effectRef idx="2">
+            <a:schemeClr val="accent1"/>
+          </a:effectRef>
+          <a:fontRef idx="minor">
+            <a:schemeClr val="lt1"/>
+          </a:fontRef>
+        </p:style>
+        <p:txBody>
+          <a:bodyPr rtlCol="0" anchor="ctr"/>
+          <a:lstStyle/>
+          <a:p>
+            <a:pPr algn="ctr"/>
+          </a:p>
+        </p:txBody>
+      </p:sp>
+      <p:sp>
+        <p:nvSpPr>
+          <p:cNvPr id="128" name="TextBox 127"/>
+          <p:cNvSpPr txBox="1"/>
+          <p:nvPr/>
+        </p:nvSpPr>
+        <p:spPr>
+          <a:xfrm>
+            <a:off x="411479" y="5394960"/>
+            <a:ext cx="11365992" cy="201168"/>
+          </a:xfrm>
+          <a:prstGeom prst="rect">
+            <a:avLst/>
+          </a:prstGeom>
+          <a:noFill/>
+        </p:spPr>
+        <p:txBody>
+          <a:bodyPr wrap="square">
+            <a:spAutoFit/>
+          </a:bodyPr>
+          <a:lstStyle/>
+          <a:p>
+            <a:pPr algn="l"/>
+            <a:r>
+              <a:rPr sz="1000" b="0" i="0">
+                <a:solidFill>
+                  <a:srgbClr val="FFFFFF"/>
+                </a:solidFill>
+              </a:rPr>
+              <a:t>✅ Certifié(e) FIM : ≥ 20/28   ⚠ Formation complémentaire ciblée : 14–19/28   🔄 Évaluation de rattrapage à J+15 : &lt; 14/28</a:t>
             </a:r>
           </a:p>
         </p:txBody>
@@ -9819,13 +10369,13 @@
         <p:spPr>
           <a:xfrm>
             <a:off x="0" y="0"/>
-            <a:ext cx="12188952" cy="685800"/>
-          </a:xfrm>
-          <a:prstGeom prst="rect">
-            <a:avLst/>
-          </a:prstGeom>
-          <a:solidFill>
-            <a:srgbClr val="005050"/>
+            <a:ext cx="12188952" cy="658368"/>
+          </a:xfrm>
+          <a:prstGeom prst="rect">
+            <a:avLst/>
+          </a:prstGeom>
+          <a:solidFill>
+            <a:srgbClr val="005555"/>
           </a:solidFill>
           <a:ln>
             <a:noFill/>
@@ -9861,14 +10411,14 @@
         </p:nvSpPr>
         <p:spPr>
           <a:xfrm>
-            <a:off x="0" y="667512"/>
-            <a:ext cx="12188952" cy="36576"/>
-          </a:xfrm>
-          <a:prstGeom prst="rect">
-            <a:avLst/>
-          </a:prstGeom>
-          <a:solidFill>
-            <a:srgbClr val="C9A84C"/>
+            <a:off x="0" y="640080"/>
+            <a:ext cx="12188952" cy="54864"/>
+          </a:xfrm>
+          <a:prstGeom prst="rect">
+            <a:avLst/>
+          </a:prstGeom>
+          <a:solidFill>
+            <a:srgbClr val="FF0000"/>
           </a:solidFill>
           <a:ln>
             <a:noFill/>
@@ -9904,8 +10454,8 @@
         </p:nvSpPr>
         <p:spPr>
           <a:xfrm>
-            <a:off x="274320" y="73152"/>
-            <a:ext cx="11612880" cy="566928"/>
+            <a:off x="164592" y="64008"/>
+            <a:ext cx="685800" cy="530352"/>
           </a:xfrm>
           <a:prstGeom prst="rect">
             <a:avLst/>
@@ -9920,66 +10470,32 @@
           <a:p>
             <a:pPr algn="l"/>
             <a:r>
-              <a:rPr sz="1800" b="1" i="0">
+              <a:rPr sz="2000" b="1" i="0">
                 <a:solidFill>
                   <a:srgbClr val="FFFFFF"/>
                 </a:solidFill>
               </a:rPr>
-              <a:t>Plan d'Action Personnel &amp; Suivi Post-Formation</a:t>
-            </a:r>
-          </a:p>
-        </p:txBody>
-      </p:sp>
-      <p:sp>
-        <p:nvSpPr>
-          <p:cNvPr id="6" name="TextBox 5"/>
-          <p:cNvSpPr txBox="1"/>
-          <p:nvPr/>
-        </p:nvSpPr>
-        <p:spPr>
-          <a:xfrm>
-            <a:off x="0" y="6492240"/>
-            <a:ext cx="12188952" cy="365760"/>
-          </a:xfrm>
-          <a:prstGeom prst="rect">
-            <a:avLst/>
-          </a:prstGeom>
-          <a:noFill/>
-        </p:spPr>
-        <p:txBody>
-          <a:bodyPr wrap="square">
-            <a:spAutoFit/>
-          </a:bodyPr>
-          <a:lstStyle/>
-          <a:p>
-            <a:pPr algn="ctr"/>
-            <a:r>
-              <a:rPr sz="800" b="0" i="0">
-                <a:solidFill>
-                  <a:srgbClr val="888888"/>
-                </a:solidFill>
-              </a:rPr>
-              <a:t>SHY-Performance · V6-01062026SHY-TE</a:t>
-            </a:r>
-          </a:p>
-        </p:txBody>
-      </p:sp>
-      <p:sp>
-        <p:nvSpPr>
-          <p:cNvPr id="7" name="Rectangle 6"/>
+              <a:t>SHY</a:t>
+            </a:r>
+          </a:p>
+        </p:txBody>
+      </p:sp>
+      <p:sp>
+        <p:nvSpPr>
+          <p:cNvPr id="6" name="Rectangle 5"/>
           <p:cNvSpPr/>
           <p:nvPr/>
         </p:nvSpPr>
         <p:spPr>
           <a:xfrm>
-            <a:off x="274320" y="868680"/>
-            <a:ext cx="5486400" cy="347472"/>
-          </a:xfrm>
-          <a:prstGeom prst="rect">
-            <a:avLst/>
-          </a:prstGeom>
-          <a:solidFill>
-            <a:srgbClr val="007A7A"/>
+            <a:off x="914400" y="91440"/>
+            <a:ext cx="36576" cy="475488"/>
+          </a:xfrm>
+          <a:prstGeom prst="rect">
+            <a:avLst/>
+          </a:prstGeom>
+          <a:solidFill>
+            <a:srgbClr val="FF0000"/>
           </a:solidFill>
           <a:ln>
             <a:noFill/>
@@ -10009,14 +10525,14 @@
       </p:sp>
       <p:sp>
         <p:nvSpPr>
-          <p:cNvPr id="8" name="TextBox 7"/>
+          <p:cNvPr id="7" name="TextBox 6"/>
           <p:cNvSpPr txBox="1"/>
           <p:nvPr/>
         </p:nvSpPr>
         <p:spPr>
           <a:xfrm>
-            <a:off x="365760" y="905256"/>
-            <a:ext cx="5303520" cy="292608"/>
+            <a:off x="1024128" y="91440"/>
+            <a:ext cx="10881360" cy="475488"/>
           </a:xfrm>
           <a:prstGeom prst="rect">
             <a:avLst/>
@@ -10031,32 +10547,32 @@
           <a:p>
             <a:pPr algn="l"/>
             <a:r>
-              <a:rPr sz="1200" b="1" i="0">
+              <a:rPr sz="1700" b="1" i="0">
                 <a:solidFill>
                   <a:srgbClr val="FFFFFF"/>
                 </a:solidFill>
               </a:rPr>
-              <a:t>Plan d'Action Personnel (PAP) — 4 semaines</a:t>
-            </a:r>
-          </a:p>
-        </p:txBody>
-      </p:sp>
-      <p:sp>
-        <p:nvSpPr>
-          <p:cNvPr id="9" name="Rectangle 8"/>
+              <a:t>Votre Plan d'Action — 4 Semaines pour Devenir Expert</a:t>
+            </a:r>
+          </a:p>
+        </p:txBody>
+      </p:sp>
+      <p:sp>
+        <p:nvSpPr>
+          <p:cNvPr id="8" name="Rectangle 7"/>
           <p:cNvSpPr/>
           <p:nvPr/>
         </p:nvSpPr>
         <p:spPr>
           <a:xfrm>
-            <a:off x="6126480" y="868680"/>
-            <a:ext cx="5486400" cy="347472"/>
-          </a:xfrm>
-          <a:prstGeom prst="rect">
-            <a:avLst/>
-          </a:prstGeom>
-          <a:solidFill>
-            <a:srgbClr val="007A7A"/>
+            <a:off x="0" y="6492240"/>
+            <a:ext cx="12188952" cy="365760"/>
+          </a:xfrm>
+          <a:prstGeom prst="rect">
+            <a:avLst/>
+          </a:prstGeom>
+          <a:solidFill>
+            <a:srgbClr val="005555"/>
           </a:solidFill>
           <a:ln>
             <a:noFill/>
@@ -10086,14 +10602,14 @@
       </p:sp>
       <p:sp>
         <p:nvSpPr>
-          <p:cNvPr id="10" name="TextBox 9"/>
+          <p:cNvPr id="9" name="TextBox 8"/>
           <p:cNvSpPr txBox="1"/>
           <p:nvPr/>
         </p:nvSpPr>
         <p:spPr>
           <a:xfrm>
-            <a:off x="6217920" y="905256"/>
-            <a:ext cx="5303520" cy="292608"/>
+            <a:off x="0" y="6519672"/>
+            <a:ext cx="12188952" cy="274320"/>
           </a:xfrm>
           <a:prstGeom prst="rect">
             <a:avLst/>
@@ -10106,28 +10622,28 @@
           </a:bodyPr>
           <a:lstStyle/>
           <a:p>
-            <a:pPr algn="l"/>
-            <a:r>
-              <a:rPr sz="1200" b="1" i="0">
+            <a:pPr algn="ctr"/>
+            <a:r>
+              <a:rPr sz="900" b="0" i="0">
                 <a:solidFill>
                   <a:srgbClr val="FFFFFF"/>
                 </a:solidFill>
               </a:rPr>
-              <a:t>Suivi post-formation Kirkpatrick</a:t>
-            </a:r>
-          </a:p>
-        </p:txBody>
-      </p:sp>
-      <p:sp>
-        <p:nvSpPr>
-          <p:cNvPr id="11" name="TextBox 10"/>
+              <a:t>SHY-Performance  ·  Formation FIM  ·  V6-01062026SHY-TE</a:t>
+            </a:r>
+          </a:p>
+        </p:txBody>
+      </p:sp>
+      <p:sp>
+        <p:nvSpPr>
+          <p:cNvPr id="10" name="TextBox 9"/>
           <p:cNvSpPr txBox="1"/>
           <p:nvPr/>
         </p:nvSpPr>
         <p:spPr>
           <a:xfrm>
-            <a:off x="365760" y="1280160"/>
-            <a:ext cx="5303520" cy="347472"/>
+            <a:off x="320040" y="804672"/>
+            <a:ext cx="11521440" cy="502920"/>
           </a:xfrm>
           <a:prstGeom prst="rect">
             <a:avLst/>
@@ -10142,270 +10658,32 @@
           <a:p>
             <a:pPr algn="l"/>
             <a:r>
-              <a:rPr sz="1100" b="0" i="0">
+              <a:rPr sz="1200" b="0" i="0">
                 <a:solidFill>
                   <a:srgbClr val="1A1A1A"/>
                 </a:solidFill>
               </a:rPr>
-              <a:t>• S1 (J+7) : Maîtriser l'accroche en &lt; 12 sec — chrono + feedback formateur</a:t>
-            </a:r>
-          </a:p>
-        </p:txBody>
-      </p:sp>
-      <p:sp>
-        <p:nvSpPr>
-          <p:cNvPr id="12" name="TextBox 11"/>
-          <p:cNvSpPr txBox="1"/>
-          <p:nvPr/>
-        </p:nvSpPr>
-        <p:spPr>
-          <a:xfrm>
-            <a:off x="365760" y="1645919"/>
-            <a:ext cx="5303520" cy="347472"/>
-          </a:xfrm>
-          <a:prstGeom prst="rect">
-            <a:avLst/>
-          </a:prstGeom>
-          <a:noFill/>
-        </p:spPr>
-        <p:txBody>
-          <a:bodyPr wrap="square">
-            <a:spAutoFit/>
-          </a:bodyPr>
-          <a:lstStyle/>
-          <a:p>
-            <a:pPr algn="l"/>
-            <a:r>
-              <a:rPr sz="1100" b="0" i="0">
-                <a:solidFill>
-                  <a:srgbClr val="1A1A1A"/>
-                </a:solidFill>
-              </a:rPr>
-              <a:t>• S2 (J+14) : Traiter O1 et O2 sans hésitation — 0 rupture de discours</a:t>
-            </a:r>
-          </a:p>
-        </p:txBody>
-      </p:sp>
-      <p:sp>
-        <p:nvSpPr>
-          <p:cNvPr id="13" name="TextBox 12"/>
-          <p:cNvSpPr txBox="1"/>
-          <p:nvPr/>
-        </p:nvSpPr>
-        <p:spPr>
-          <a:xfrm>
-            <a:off x="365760" y="2011679"/>
-            <a:ext cx="5303520" cy="347472"/>
-          </a:xfrm>
-          <a:prstGeom prst="rect">
-            <a:avLst/>
-          </a:prstGeom>
-          <a:noFill/>
-        </p:spPr>
-        <p:txBody>
-          <a:bodyPr wrap="square">
-            <a:spAutoFit/>
-          </a:bodyPr>
-          <a:lstStyle/>
-          <a:p>
-            <a:pPr algn="l"/>
-            <a:r>
-              <a:rPr sz="1100" b="0" i="0">
-                <a:solidFill>
-                  <a:srgbClr val="1A1A1A"/>
-                </a:solidFill>
-              </a:rPr>
-              <a:t>• S3 (J+21) : Atteindre ≥ 1 don/heure terrain</a:t>
-            </a:r>
-          </a:p>
-        </p:txBody>
-      </p:sp>
-      <p:sp>
-        <p:nvSpPr>
-          <p:cNvPr id="14" name="TextBox 13"/>
-          <p:cNvSpPr txBox="1"/>
-          <p:nvPr/>
-        </p:nvSpPr>
-        <p:spPr>
-          <a:xfrm>
-            <a:off x="365760" y="2377439"/>
-            <a:ext cx="5303520" cy="347472"/>
-          </a:xfrm>
-          <a:prstGeom prst="rect">
-            <a:avLst/>
-          </a:prstGeom>
-          <a:noFill/>
-        </p:spPr>
-        <p:txBody>
-          <a:bodyPr wrap="square">
-            <a:spAutoFit/>
-          </a:bodyPr>
-          <a:lstStyle/>
-          <a:p>
-            <a:pPr algn="l"/>
-            <a:r>
-              <a:rPr sz="1100" b="0" i="0">
-                <a:solidFill>
-                  <a:srgbClr val="1A1A1A"/>
-                </a:solidFill>
-              </a:rPr>
-              <a:t>• S4 (J+30) : Révision PAP + définition objectifs M2 avec formateur</a:t>
-            </a:r>
-          </a:p>
-        </p:txBody>
-      </p:sp>
-      <p:sp>
-        <p:nvSpPr>
-          <p:cNvPr id="15" name="TextBox 14"/>
-          <p:cNvSpPr txBox="1"/>
-          <p:nvPr/>
-        </p:nvSpPr>
-        <p:spPr>
-          <a:xfrm>
-            <a:off x="6217920" y="1280160"/>
-            <a:ext cx="5303520" cy="347472"/>
-          </a:xfrm>
-          <a:prstGeom prst="rect">
-            <a:avLst/>
-          </a:prstGeom>
-          <a:noFill/>
-        </p:spPr>
-        <p:txBody>
-          <a:bodyPr wrap="square">
-            <a:spAutoFit/>
-          </a:bodyPr>
-          <a:lstStyle/>
-          <a:p>
-            <a:pPr algn="l"/>
-            <a:r>
-              <a:rPr sz="1100" b="0" i="0">
-                <a:solidFill>
-                  <a:srgbClr val="1A1A1A"/>
-                </a:solidFill>
-              </a:rPr>
-              <a:t>• J+15 : Observation terrain supervisée (grille Niv. 3) + feedback</a:t>
-            </a:r>
-          </a:p>
-        </p:txBody>
-      </p:sp>
-      <p:sp>
-        <p:nvSpPr>
-          <p:cNvPr id="16" name="TextBox 15"/>
-          <p:cNvSpPr txBox="1"/>
-          <p:nvPr/>
-        </p:nvSpPr>
-        <p:spPr>
-          <a:xfrm>
-            <a:off x="6217920" y="1645919"/>
-            <a:ext cx="5303520" cy="347472"/>
-          </a:xfrm>
-          <a:prstGeom prst="rect">
-            <a:avLst/>
-          </a:prstGeom>
-          <a:noFill/>
-        </p:spPr>
-        <p:txBody>
-          <a:bodyPr wrap="square">
-            <a:spAutoFit/>
-          </a:bodyPr>
-          <a:lstStyle/>
-          <a:p>
-            <a:pPr algn="l"/>
-            <a:r>
-              <a:rPr sz="1100" b="0" i="0">
-                <a:solidFill>
-                  <a:srgbClr val="1A1A1A"/>
-                </a:solidFill>
-              </a:rPr>
-              <a:t>• J+30 : Revue PAP — 4 objectifs atteints ? Adaptation si besoin</a:t>
-            </a:r>
-          </a:p>
-        </p:txBody>
-      </p:sp>
-      <p:sp>
-        <p:nvSpPr>
-          <p:cNvPr id="17" name="TextBox 16"/>
-          <p:cNvSpPr txBox="1"/>
-          <p:nvPr/>
-        </p:nvSpPr>
-        <p:spPr>
-          <a:xfrm>
-            <a:off x="6217920" y="2011679"/>
-            <a:ext cx="5303520" cy="347472"/>
-          </a:xfrm>
-          <a:prstGeom prst="rect">
-            <a:avLst/>
-          </a:prstGeom>
-          <a:noFill/>
-        </p:spPr>
-        <p:txBody>
-          <a:bodyPr wrap="square">
-            <a:spAutoFit/>
-          </a:bodyPr>
-          <a:lstStyle/>
-          <a:p>
-            <a:pPr algn="l"/>
-            <a:r>
-              <a:rPr sz="1100" b="0" i="0">
-                <a:solidFill>
-                  <a:srgbClr val="1A1A1A"/>
-                </a:solidFill>
-              </a:rPr>
-              <a:t>• J+90 : KPI terrain : taux conversion, montant moyen, rétention donateur</a:t>
-            </a:r>
-          </a:p>
-        </p:txBody>
-      </p:sp>
-      <p:sp>
-        <p:nvSpPr>
-          <p:cNvPr id="18" name="TextBox 17"/>
-          <p:cNvSpPr txBox="1"/>
-          <p:nvPr/>
-        </p:nvSpPr>
-        <p:spPr>
-          <a:xfrm>
-            <a:off x="6217920" y="2377439"/>
-            <a:ext cx="5303520" cy="347472"/>
-          </a:xfrm>
-          <a:prstGeom prst="rect">
-            <a:avLst/>
-          </a:prstGeom>
-          <a:noFill/>
-        </p:spPr>
-        <p:txBody>
-          <a:bodyPr wrap="square">
-            <a:spAutoFit/>
-          </a:bodyPr>
-          <a:lstStyle/>
-          <a:p>
-            <a:pPr algn="l"/>
-            <a:r>
-              <a:rPr sz="1100" b="0" i="0">
-                <a:solidFill>
-                  <a:srgbClr val="1A1A1A"/>
-                </a:solidFill>
-              </a:rPr>
-              <a:t>• Kirkpatrick Niv. 4 : impact collecte mesuré et rapporté à SHY-Performance</a:t>
-            </a:r>
-          </a:p>
-        </p:txBody>
-      </p:sp>
-      <p:sp>
-        <p:nvSpPr>
-          <p:cNvPr id="19" name="Rectangle 18"/>
+              <a:t>Vous remplissez ce plan aujourd'hui en J5. Il vous appartient — votre formateur vous rappelle à J+15 et J+30.</a:t>
+            </a:r>
+          </a:p>
+        </p:txBody>
+      </p:sp>
+      <p:sp>
+        <p:nvSpPr>
+          <p:cNvPr id="11" name="Rectangle 10"/>
           <p:cNvSpPr/>
           <p:nvPr/>
         </p:nvSpPr>
         <p:spPr>
           <a:xfrm>
-            <a:off x="274320" y="5486400"/>
-            <a:ext cx="11612880" cy="274320"/>
-          </a:xfrm>
-          <a:prstGeom prst="rect">
-            <a:avLst/>
-          </a:prstGeom>
-          <a:solidFill>
-            <a:srgbClr val="C9A84C"/>
+            <a:off x="274320" y="1417320"/>
+            <a:ext cx="2816352" cy="566928"/>
+          </a:xfrm>
+          <a:prstGeom prst="rect">
+            <a:avLst/>
+          </a:prstGeom>
+          <a:solidFill>
+            <a:srgbClr val="005555"/>
           </a:solidFill>
           <a:ln>
             <a:noFill/>
@@ -10435,14 +10713,14 @@
       </p:sp>
       <p:sp>
         <p:nvSpPr>
-          <p:cNvPr id="20" name="TextBox 19"/>
+          <p:cNvPr id="12" name="TextBox 11"/>
           <p:cNvSpPr txBox="1"/>
           <p:nvPr/>
         </p:nvSpPr>
         <p:spPr>
           <a:xfrm>
-            <a:off x="365760" y="5522976"/>
-            <a:ext cx="11430000" cy="219456"/>
+            <a:off x="384048" y="1444752"/>
+            <a:ext cx="2596896" cy="512064"/>
           </a:xfrm>
           <a:prstGeom prst="rect">
             <a:avLst/>
@@ -10455,173 +10733,40 @@
           </a:bodyPr>
           <a:lstStyle/>
           <a:p>
-            <a:pPr algn="l"/>
-            <a:r>
-              <a:rPr sz="1000" b="1" i="0">
-                <a:solidFill>
-                  <a:srgbClr val="005050"/>
+            <a:pPr algn="ctr"/>
+            <a:r>
+              <a:rPr sz="1100" b="1" i="0">
+                <a:solidFill>
+                  <a:srgbClr val="FFFFFF"/>
                 </a:solidFill>
               </a:rPr>
-              <a:t>🎯 Évaluation sommative &amp; Kirkpatrick Niv. 1–2</a:t>
-            </a:r>
-          </a:p>
-        </p:txBody>
-      </p:sp>
-      <p:sp>
-        <p:nvSpPr>
-          <p:cNvPr id="21" name="TextBox 20"/>
-          <p:cNvSpPr txBox="1"/>
-          <p:nvPr/>
-        </p:nvSpPr>
-        <p:spPr>
-          <a:xfrm>
-            <a:off x="365760" y="5779008"/>
-            <a:ext cx="3718560" cy="502920"/>
-          </a:xfrm>
-          <a:prstGeom prst="rect">
-            <a:avLst/>
-          </a:prstGeom>
-          <a:noFill/>
-        </p:spPr>
-        <p:txBody>
-          <a:bodyPr wrap="square">
-            <a:spAutoFit/>
-          </a:bodyPr>
-          <a:lstStyle/>
-          <a:p>
-            <a:pPr algn="l"/>
-            <a:r>
-              <a:rPr sz="900" b="0" i="0">
-                <a:solidFill>
-                  <a:srgbClr val="1A1A1A"/>
-                </a:solidFill>
-              </a:rPr>
-              <a:t>✓ Questionnaire satisfaction (NPS formateur, contenu, rythme, utilité)</a:t>
-            </a:r>
-          </a:p>
-        </p:txBody>
-      </p:sp>
-      <p:sp>
-        <p:nvSpPr>
-          <p:cNvPr id="22" name="TextBox 21"/>
-          <p:cNvSpPr txBox="1"/>
-          <p:nvPr/>
-        </p:nvSpPr>
-        <p:spPr>
-          <a:xfrm>
-            <a:off x="4175760" y="5779008"/>
-            <a:ext cx="3718560" cy="502920"/>
-          </a:xfrm>
-          <a:prstGeom prst="rect">
-            <a:avLst/>
-          </a:prstGeom>
-          <a:noFill/>
-        </p:spPr>
-        <p:txBody>
-          <a:bodyPr wrap="square">
-            <a:spAutoFit/>
-          </a:bodyPr>
-          <a:lstStyle/>
-          <a:p>
-            <a:pPr algn="l"/>
-            <a:r>
-              <a:rPr sz="900" b="0" i="0">
-                <a:solidFill>
-                  <a:srgbClr val="1A1A1A"/>
-                </a:solidFill>
-              </a:rPr>
-              <a:t>✓ Grille 28 pts archivée dans le dossier apprenant CMC</a:t>
-            </a:r>
-          </a:p>
-        </p:txBody>
-      </p:sp>
-      <p:sp>
-        <p:nvSpPr>
-          <p:cNvPr id="23" name="TextBox 22"/>
-          <p:cNvSpPr txBox="1"/>
-          <p:nvPr/>
-        </p:nvSpPr>
-        <p:spPr>
-          <a:xfrm>
-            <a:off x="7985760" y="5779008"/>
-            <a:ext cx="3718560" cy="502920"/>
-          </a:xfrm>
-          <a:prstGeom prst="rect">
-            <a:avLst/>
-          </a:prstGeom>
-          <a:noFill/>
-        </p:spPr>
-        <p:txBody>
-          <a:bodyPr wrap="square">
-            <a:spAutoFit/>
-          </a:bodyPr>
-          <a:lstStyle/>
-          <a:p>
-            <a:pPr algn="l"/>
-            <a:r>
-              <a:rPr sz="900" b="0" i="0">
-                <a:solidFill>
-                  <a:srgbClr val="1A1A1A"/>
-                </a:solidFill>
-              </a:rPr>
-              <a:t>✓ PAP signé apprenant + formateur → copie dans le LFI</a:t>
-            </a:r>
-          </a:p>
-        </p:txBody>
-      </p:sp>
-      <p:sp>
-        <p:nvSpPr>
-          <p:cNvPr id="24" name="TextBox 23"/>
-          <p:cNvSpPr txBox="1"/>
-          <p:nvPr/>
-        </p:nvSpPr>
-        <p:spPr>
-          <a:xfrm>
-            <a:off x="274320" y="5047488"/>
-            <a:ext cx="2743200" cy="256032"/>
-          </a:xfrm>
-          <a:prstGeom prst="rect">
-            <a:avLst/>
-          </a:prstGeom>
-          <a:noFill/>
-        </p:spPr>
-        <p:txBody>
-          <a:bodyPr wrap="square">
-            <a:spAutoFit/>
-          </a:bodyPr>
-          <a:lstStyle/>
-          <a:p>
-            <a:pPr algn="l"/>
-            <a:r>
-              <a:rPr sz="900" b="1" i="0">
-                <a:solidFill>
-                  <a:srgbClr val="005050"/>
-                </a:solidFill>
-              </a:rPr>
-              <a:t>Taxonomie de Bloom :</a:t>
-            </a:r>
-          </a:p>
-        </p:txBody>
-      </p:sp>
-      <p:sp>
-        <p:nvSpPr>
-          <p:cNvPr id="25" name="Rectangle 24"/>
+              <a:t>SEMAINE 1
+J+7</a:t>
+            </a:r>
+          </a:p>
+        </p:txBody>
+      </p:sp>
+      <p:sp>
+        <p:nvSpPr>
+          <p:cNvPr id="13" name="Rectangle 12"/>
           <p:cNvSpPr/>
           <p:nvPr/>
         </p:nvSpPr>
         <p:spPr>
           <a:xfrm>
-            <a:off x="274320" y="5303520"/>
-            <a:ext cx="1920240" cy="320040"/>
-          </a:xfrm>
-          <a:prstGeom prst="rect">
-            <a:avLst/>
-          </a:prstGeom>
-          <a:solidFill>
-            <a:srgbClr val="78A5C5"/>
-          </a:solidFill>
-          <a:ln>
-            <a:noFill/>
+            <a:off x="274320" y="1984248"/>
+            <a:ext cx="2816352" cy="1554480"/>
+          </a:xfrm>
+          <a:prstGeom prst="rect">
+            <a:avLst/>
+          </a:prstGeom>
+          <a:solidFill>
+            <a:srgbClr val="FFFFFF"/>
+          </a:solidFill>
+          <a:ln w="19050">
+            <a:solidFill>
+              <a:srgbClr val="005555"/>
+            </a:solidFill>
           </a:ln>
         </p:spPr>
         <p:style>
@@ -10648,14 +10793,14 @@
       </p:sp>
       <p:sp>
         <p:nvSpPr>
-          <p:cNvPr id="26" name="TextBox 25"/>
+          <p:cNvPr id="14" name="TextBox 13"/>
           <p:cNvSpPr txBox="1"/>
           <p:nvPr/>
         </p:nvSpPr>
         <p:spPr>
           <a:xfrm>
-            <a:off x="320040" y="5340096"/>
-            <a:ext cx="1828800" cy="256032"/>
+            <a:off x="402336" y="2039112"/>
+            <a:ext cx="2560320" cy="1417320"/>
           </a:xfrm>
           <a:prstGeom prst="rect">
             <a:avLst/>
@@ -10668,37 +10813,40 @@
           </a:bodyPr>
           <a:lstStyle/>
           <a:p>
-            <a:pPr algn="ctr"/>
-            <a:r>
-              <a:rPr sz="800" b="1" i="0">
-                <a:solidFill>
-                  <a:srgbClr val="FFFFFF"/>
+            <a:pPr algn="l"/>
+            <a:r>
+              <a:rPr sz="1000" b="0" i="0">
+                <a:solidFill>
+                  <a:srgbClr val="1A1A1A"/>
                 </a:solidFill>
               </a:rPr>
-              <a:t>1 Se souvenir</a:t>
-            </a:r>
-          </a:p>
-        </p:txBody>
-      </p:sp>
-      <p:sp>
-        <p:nvSpPr>
-          <p:cNvPr id="27" name="Rectangle 26"/>
+              <a:t>Objectif :
+Maîtriser votre accroche en &lt; 12 secondes</a:t>
+            </a:r>
+          </a:p>
+        </p:txBody>
+      </p:sp>
+      <p:sp>
+        <p:nvSpPr>
+          <p:cNvPr id="15" name="Rectangle 14"/>
           <p:cNvSpPr/>
           <p:nvPr/>
         </p:nvSpPr>
         <p:spPr>
           <a:xfrm>
-            <a:off x="2212848" y="5303520"/>
-            <a:ext cx="1920240" cy="320040"/>
-          </a:xfrm>
-          <a:prstGeom prst="rect">
-            <a:avLst/>
-          </a:prstGeom>
-          <a:solidFill>
-            <a:srgbClr val="5D9EA6"/>
-          </a:solidFill>
-          <a:ln>
-            <a:noFill/>
+            <a:off x="274320" y="3538728"/>
+            <a:ext cx="2816352" cy="1280160"/>
+          </a:xfrm>
+          <a:prstGeom prst="rect">
+            <a:avLst/>
+          </a:prstGeom>
+          <a:solidFill>
+            <a:srgbClr val="F0F7F7"/>
+          </a:solidFill>
+          <a:ln w="12700">
+            <a:solidFill>
+              <a:srgbClr val="005555"/>
+            </a:solidFill>
           </a:ln>
         </p:spPr>
         <p:style>
@@ -10725,14 +10873,14 @@
       </p:sp>
       <p:sp>
         <p:nvSpPr>
-          <p:cNvPr id="28" name="TextBox 27"/>
+          <p:cNvPr id="16" name="TextBox 15"/>
           <p:cNvSpPr txBox="1"/>
           <p:nvPr/>
         </p:nvSpPr>
         <p:spPr>
           <a:xfrm>
-            <a:off x="2258568" y="5340096"/>
-            <a:ext cx="1828800" cy="256032"/>
+            <a:off x="402336" y="3593592"/>
+            <a:ext cx="2560320" cy="1170432"/>
           </a:xfrm>
           <a:prstGeom prst="rect">
             <a:avLst/>
@@ -10745,34 +10893,35 @@
           </a:bodyPr>
           <a:lstStyle/>
           <a:p>
-            <a:pPr algn="ctr"/>
-            <a:r>
-              <a:rPr sz="800" b="1" i="0">
-                <a:solidFill>
-                  <a:srgbClr val="FFFFFF"/>
+            <a:pPr algn="l"/>
+            <a:r>
+              <a:rPr sz="900" b="0" i="1">
+                <a:solidFill>
+                  <a:srgbClr val="555555"/>
                 </a:solidFill>
               </a:rPr>
-              <a:t>2 Comprendre</a:t>
-            </a:r>
-          </a:p>
-        </p:txBody>
-      </p:sp>
-      <p:sp>
-        <p:nvSpPr>
-          <p:cNvPr id="29" name="Rectangle 28"/>
+              <a:t>Comment mesurer :
+Chronomètre + feedback J+7</a:t>
+            </a:r>
+          </a:p>
+        </p:txBody>
+      </p:sp>
+      <p:sp>
+        <p:nvSpPr>
+          <p:cNvPr id="17" name="Rectangle 16"/>
           <p:cNvSpPr/>
           <p:nvPr/>
         </p:nvSpPr>
         <p:spPr>
           <a:xfrm>
-            <a:off x="4151376" y="5303520"/>
-            <a:ext cx="1920240" cy="320040"/>
-          </a:xfrm>
-          <a:prstGeom prst="rect">
-            <a:avLst/>
-          </a:prstGeom>
-          <a:solidFill>
-            <a:srgbClr val="4A9070"/>
+            <a:off x="3200400" y="1417320"/>
+            <a:ext cx="2816352" cy="566928"/>
+          </a:xfrm>
+          <a:prstGeom prst="rect">
+            <a:avLst/>
+          </a:prstGeom>
+          <a:solidFill>
+            <a:srgbClr val="008080"/>
           </a:solidFill>
           <a:ln>
             <a:noFill/>
@@ -10802,14 +10951,14 @@
       </p:sp>
       <p:sp>
         <p:nvSpPr>
-          <p:cNvPr id="30" name="TextBox 29"/>
+          <p:cNvPr id="18" name="TextBox 17"/>
           <p:cNvSpPr txBox="1"/>
           <p:nvPr/>
         </p:nvSpPr>
         <p:spPr>
           <a:xfrm>
-            <a:off x="4197096" y="5340096"/>
-            <a:ext cx="1828800" cy="256032"/>
+            <a:off x="3310128" y="1444752"/>
+            <a:ext cx="2596896" cy="512064"/>
           </a:xfrm>
           <a:prstGeom prst="rect">
             <a:avLst/>
@@ -10824,35 +10973,38 @@
           <a:p>
             <a:pPr algn="ctr"/>
             <a:r>
-              <a:rPr sz="800" b="1" i="0">
+              <a:rPr sz="1100" b="1" i="0">
                 <a:solidFill>
                   <a:srgbClr val="FFFFFF"/>
                 </a:solidFill>
               </a:rPr>
-              <a:t>3 Appliquer</a:t>
-            </a:r>
-          </a:p>
-        </p:txBody>
-      </p:sp>
-      <p:sp>
-        <p:nvSpPr>
-          <p:cNvPr id="31" name="Rectangle 30"/>
+              <a:t>SEMAINE 2
+J+14</a:t>
+            </a:r>
+          </a:p>
+        </p:txBody>
+      </p:sp>
+      <p:sp>
+        <p:nvSpPr>
+          <p:cNvPr id="19" name="Rectangle 18"/>
           <p:cNvSpPr/>
           <p:nvPr/>
         </p:nvSpPr>
         <p:spPr>
           <a:xfrm>
-            <a:off x="6089904" y="5303520"/>
-            <a:ext cx="1920240" cy="320040"/>
-          </a:xfrm>
-          <a:prstGeom prst="rect">
-            <a:avLst/>
-          </a:prstGeom>
-          <a:solidFill>
-            <a:srgbClr val="C9A84C"/>
-          </a:solidFill>
-          <a:ln>
-            <a:noFill/>
+            <a:off x="3200400" y="1984248"/>
+            <a:ext cx="2816352" cy="1554480"/>
+          </a:xfrm>
+          <a:prstGeom prst="rect">
+            <a:avLst/>
+          </a:prstGeom>
+          <a:solidFill>
+            <a:srgbClr val="FFFFFF"/>
+          </a:solidFill>
+          <a:ln w="19050">
+            <a:solidFill>
+              <a:srgbClr val="008080"/>
+            </a:solidFill>
           </a:ln>
         </p:spPr>
         <p:style>
@@ -10879,14 +11031,14 @@
       </p:sp>
       <p:sp>
         <p:nvSpPr>
-          <p:cNvPr id="32" name="TextBox 31"/>
+          <p:cNvPr id="20" name="TextBox 19"/>
           <p:cNvSpPr txBox="1"/>
           <p:nvPr/>
         </p:nvSpPr>
         <p:spPr>
           <a:xfrm>
-            <a:off x="6135624" y="5340096"/>
-            <a:ext cx="1828800" cy="256032"/>
+            <a:off x="3328416" y="2039112"/>
+            <a:ext cx="2560320" cy="1417320"/>
           </a:xfrm>
           <a:prstGeom prst="rect">
             <a:avLst/>
@@ -10899,37 +11051,40 @@
           </a:bodyPr>
           <a:lstStyle/>
           <a:p>
-            <a:pPr algn="ctr"/>
-            <a:r>
-              <a:rPr sz="800" b="1" i="0">
-                <a:solidFill>
-                  <a:srgbClr val="FFFFFF"/>
+            <a:pPr algn="l"/>
+            <a:r>
+              <a:rPr sz="1000" b="0" i="0">
+                <a:solidFill>
+                  <a:srgbClr val="1A1A1A"/>
                 </a:solidFill>
               </a:rPr>
-              <a:t>4 Analyser</a:t>
-            </a:r>
-          </a:p>
-        </p:txBody>
-      </p:sp>
-      <p:sp>
-        <p:nvSpPr>
-          <p:cNvPr id="33" name="Rectangle 32"/>
+              <a:t>Objectif :
+Traiter O1 et O2 sans hésitation</a:t>
+            </a:r>
+          </a:p>
+        </p:txBody>
+      </p:sp>
+      <p:sp>
+        <p:nvSpPr>
+          <p:cNvPr id="21" name="Rectangle 20"/>
           <p:cNvSpPr/>
           <p:nvPr/>
         </p:nvSpPr>
         <p:spPr>
           <a:xfrm>
-            <a:off x="8028432" y="5303520"/>
-            <a:ext cx="1920240" cy="320040"/>
-          </a:xfrm>
-          <a:prstGeom prst="rect">
-            <a:avLst/>
-          </a:prstGeom>
-          <a:solidFill>
-            <a:srgbClr val="D27A42"/>
-          </a:solidFill>
-          <a:ln>
-            <a:noFill/>
+            <a:off x="3200400" y="3538728"/>
+            <a:ext cx="2816352" cy="1280160"/>
+          </a:xfrm>
+          <a:prstGeom prst="rect">
+            <a:avLst/>
+          </a:prstGeom>
+          <a:solidFill>
+            <a:srgbClr val="F0F7F7"/>
+          </a:solidFill>
+          <a:ln w="12700">
+            <a:solidFill>
+              <a:srgbClr val="008080"/>
+            </a:solidFill>
           </a:ln>
         </p:spPr>
         <p:style>
@@ -10956,14 +11111,14 @@
       </p:sp>
       <p:sp>
         <p:nvSpPr>
-          <p:cNvPr id="34" name="TextBox 33"/>
+          <p:cNvPr id="22" name="TextBox 21"/>
           <p:cNvSpPr txBox="1"/>
           <p:nvPr/>
         </p:nvSpPr>
         <p:spPr>
           <a:xfrm>
-            <a:off x="8074152" y="5340096"/>
-            <a:ext cx="1828800" cy="256032"/>
+            <a:off x="3328416" y="3593592"/>
+            <a:ext cx="2560320" cy="1170432"/>
           </a:xfrm>
           <a:prstGeom prst="rect">
             <a:avLst/>
@@ -10976,34 +11131,35 @@
           </a:bodyPr>
           <a:lstStyle/>
           <a:p>
-            <a:pPr algn="ctr"/>
-            <a:r>
-              <a:rPr sz="800" b="1" i="0">
-                <a:solidFill>
-                  <a:srgbClr val="FFFFFF"/>
+            <a:pPr algn="l"/>
+            <a:r>
+              <a:rPr sz="900" b="0" i="1">
+                <a:solidFill>
+                  <a:srgbClr val="555555"/>
                 </a:solidFill>
               </a:rPr>
-              <a:t>5 Évaluer</a:t>
-            </a:r>
-          </a:p>
-        </p:txBody>
-      </p:sp>
-      <p:sp>
-        <p:nvSpPr>
-          <p:cNvPr id="35" name="Rectangle 34"/>
+              <a:t>Comment mesurer :
+0 rupture de discours en simulation</a:t>
+            </a:r>
+          </a:p>
+        </p:txBody>
+      </p:sp>
+      <p:sp>
+        <p:nvSpPr>
+          <p:cNvPr id="23" name="Rectangle 22"/>
           <p:cNvSpPr/>
           <p:nvPr/>
         </p:nvSpPr>
         <p:spPr>
           <a:xfrm>
-            <a:off x="9966960" y="5303520"/>
-            <a:ext cx="1920240" cy="320040"/>
-          </a:xfrm>
-          <a:prstGeom prst="rect">
-            <a:avLst/>
-          </a:prstGeom>
-          <a:solidFill>
-            <a:srgbClr val="C0392B"/>
+            <a:off x="6126480" y="1417320"/>
+            <a:ext cx="2816352" cy="566928"/>
+          </a:xfrm>
+          <a:prstGeom prst="rect">
+            <a:avLst/>
+          </a:prstGeom>
+          <a:solidFill>
+            <a:srgbClr val="2A7A50"/>
           </a:solidFill>
           <a:ln>
             <a:noFill/>
@@ -11033,14 +11189,14 @@
       </p:sp>
       <p:sp>
         <p:nvSpPr>
-          <p:cNvPr id="36" name="TextBox 35"/>
+          <p:cNvPr id="24" name="TextBox 23"/>
           <p:cNvSpPr txBox="1"/>
           <p:nvPr/>
         </p:nvSpPr>
         <p:spPr>
           <a:xfrm>
-            <a:off x="10012680" y="5340096"/>
-            <a:ext cx="1828800" cy="256032"/>
+            <a:off x="6236208" y="1444752"/>
+            <a:ext cx="2596896" cy="512064"/>
           </a:xfrm>
           <a:prstGeom prst="rect">
             <a:avLst/>
@@ -11055,12 +11211,566 @@
           <a:p>
             <a:pPr algn="ctr"/>
             <a:r>
-              <a:rPr sz="800" b="1" i="0">
+              <a:rPr sz="1100" b="1" i="0">
                 <a:solidFill>
                   <a:srgbClr val="FFFFFF"/>
                 </a:solidFill>
               </a:rPr>
-              <a:t>6 Créer</a:t>
+              <a:t>SEMAINE 3
+J+21</a:t>
+            </a:r>
+          </a:p>
+        </p:txBody>
+      </p:sp>
+      <p:sp>
+        <p:nvSpPr>
+          <p:cNvPr id="25" name="Rectangle 24"/>
+          <p:cNvSpPr/>
+          <p:nvPr/>
+        </p:nvSpPr>
+        <p:spPr>
+          <a:xfrm>
+            <a:off x="6126480" y="1984248"/>
+            <a:ext cx="2816352" cy="1554480"/>
+          </a:xfrm>
+          <a:prstGeom prst="rect">
+            <a:avLst/>
+          </a:prstGeom>
+          <a:solidFill>
+            <a:srgbClr val="FFFFFF"/>
+          </a:solidFill>
+          <a:ln w="19050">
+            <a:solidFill>
+              <a:srgbClr val="2A7A50"/>
+            </a:solidFill>
+          </a:ln>
+        </p:spPr>
+        <p:style>
+          <a:lnRef idx="1">
+            <a:schemeClr val="accent1"/>
+          </a:lnRef>
+          <a:fillRef idx="3">
+            <a:schemeClr val="accent1"/>
+          </a:fillRef>
+          <a:effectRef idx="2">
+            <a:schemeClr val="accent1"/>
+          </a:effectRef>
+          <a:fontRef idx="minor">
+            <a:schemeClr val="lt1"/>
+          </a:fontRef>
+        </p:style>
+        <p:txBody>
+          <a:bodyPr rtlCol="0" anchor="ctr"/>
+          <a:lstStyle/>
+          <a:p>
+            <a:pPr algn="ctr"/>
+          </a:p>
+        </p:txBody>
+      </p:sp>
+      <p:sp>
+        <p:nvSpPr>
+          <p:cNvPr id="26" name="TextBox 25"/>
+          <p:cNvSpPr txBox="1"/>
+          <p:nvPr/>
+        </p:nvSpPr>
+        <p:spPr>
+          <a:xfrm>
+            <a:off x="6254496" y="2039112"/>
+            <a:ext cx="2560320" cy="1417320"/>
+          </a:xfrm>
+          <a:prstGeom prst="rect">
+            <a:avLst/>
+          </a:prstGeom>
+          <a:noFill/>
+        </p:spPr>
+        <p:txBody>
+          <a:bodyPr wrap="square">
+            <a:spAutoFit/>
+          </a:bodyPr>
+          <a:lstStyle/>
+          <a:p>
+            <a:pPr algn="l"/>
+            <a:r>
+              <a:rPr sz="1000" b="0" i="0">
+                <a:solidFill>
+                  <a:srgbClr val="1A1A1A"/>
+                </a:solidFill>
+              </a:rPr>
+              <a:t>Objectif :
+Atteindre ≥ 1 don régulier par heure</a:t>
+            </a:r>
+          </a:p>
+        </p:txBody>
+      </p:sp>
+      <p:sp>
+        <p:nvSpPr>
+          <p:cNvPr id="27" name="Rectangle 26"/>
+          <p:cNvSpPr/>
+          <p:nvPr/>
+        </p:nvSpPr>
+        <p:spPr>
+          <a:xfrm>
+            <a:off x="6126480" y="3538728"/>
+            <a:ext cx="2816352" cy="1280160"/>
+          </a:xfrm>
+          <a:prstGeom prst="rect">
+            <a:avLst/>
+          </a:prstGeom>
+          <a:solidFill>
+            <a:srgbClr val="F0F7F7"/>
+          </a:solidFill>
+          <a:ln w="12700">
+            <a:solidFill>
+              <a:srgbClr val="2A7A50"/>
+            </a:solidFill>
+          </a:ln>
+        </p:spPr>
+        <p:style>
+          <a:lnRef idx="1">
+            <a:schemeClr val="accent1"/>
+          </a:lnRef>
+          <a:fillRef idx="3">
+            <a:schemeClr val="accent1"/>
+          </a:fillRef>
+          <a:effectRef idx="2">
+            <a:schemeClr val="accent1"/>
+          </a:effectRef>
+          <a:fontRef idx="minor">
+            <a:schemeClr val="lt1"/>
+          </a:fontRef>
+        </p:style>
+        <p:txBody>
+          <a:bodyPr rtlCol="0" anchor="ctr"/>
+          <a:lstStyle/>
+          <a:p>
+            <a:pPr algn="ctr"/>
+          </a:p>
+        </p:txBody>
+      </p:sp>
+      <p:sp>
+        <p:nvSpPr>
+          <p:cNvPr id="28" name="TextBox 27"/>
+          <p:cNvSpPr txBox="1"/>
+          <p:nvPr/>
+        </p:nvSpPr>
+        <p:spPr>
+          <a:xfrm>
+            <a:off x="6254496" y="3593592"/>
+            <a:ext cx="2560320" cy="1170432"/>
+          </a:xfrm>
+          <a:prstGeom prst="rect">
+            <a:avLst/>
+          </a:prstGeom>
+          <a:noFill/>
+        </p:spPr>
+        <p:txBody>
+          <a:bodyPr wrap="square">
+            <a:spAutoFit/>
+          </a:bodyPr>
+          <a:lstStyle/>
+          <a:p>
+            <a:pPr algn="l"/>
+            <a:r>
+              <a:rPr sz="900" b="0" i="1">
+                <a:solidFill>
+                  <a:srgbClr val="555555"/>
+                </a:solidFill>
+              </a:rPr>
+              <a:t>Comment mesurer :
+Feuille suivi terrain quotidienne</a:t>
+            </a:r>
+          </a:p>
+        </p:txBody>
+      </p:sp>
+      <p:sp>
+        <p:nvSpPr>
+          <p:cNvPr id="29" name="Rectangle 28"/>
+          <p:cNvSpPr/>
+          <p:nvPr/>
+        </p:nvSpPr>
+        <p:spPr>
+          <a:xfrm>
+            <a:off x="9052560" y="1417320"/>
+            <a:ext cx="2816352" cy="566928"/>
+          </a:xfrm>
+          <a:prstGeom prst="rect">
+            <a:avLst/>
+          </a:prstGeom>
+          <a:solidFill>
+            <a:srgbClr val="FF0000"/>
+          </a:solidFill>
+          <a:ln>
+            <a:noFill/>
+          </a:ln>
+        </p:spPr>
+        <p:style>
+          <a:lnRef idx="1">
+            <a:schemeClr val="accent1"/>
+          </a:lnRef>
+          <a:fillRef idx="3">
+            <a:schemeClr val="accent1"/>
+          </a:fillRef>
+          <a:effectRef idx="2">
+            <a:schemeClr val="accent1"/>
+          </a:effectRef>
+          <a:fontRef idx="minor">
+            <a:schemeClr val="lt1"/>
+          </a:fontRef>
+        </p:style>
+        <p:txBody>
+          <a:bodyPr rtlCol="0" anchor="ctr"/>
+          <a:lstStyle/>
+          <a:p>
+            <a:pPr algn="ctr"/>
+          </a:p>
+        </p:txBody>
+      </p:sp>
+      <p:sp>
+        <p:nvSpPr>
+          <p:cNvPr id="30" name="TextBox 29"/>
+          <p:cNvSpPr txBox="1"/>
+          <p:nvPr/>
+        </p:nvSpPr>
+        <p:spPr>
+          <a:xfrm>
+            <a:off x="9162288" y="1444752"/>
+            <a:ext cx="2596896" cy="512064"/>
+          </a:xfrm>
+          <a:prstGeom prst="rect">
+            <a:avLst/>
+          </a:prstGeom>
+          <a:noFill/>
+        </p:spPr>
+        <p:txBody>
+          <a:bodyPr wrap="square">
+            <a:spAutoFit/>
+          </a:bodyPr>
+          <a:lstStyle/>
+          <a:p>
+            <a:pPr algn="ctr"/>
+            <a:r>
+              <a:rPr sz="1100" b="1" i="0">
+                <a:solidFill>
+                  <a:srgbClr val="FFFFFF"/>
+                </a:solidFill>
+              </a:rPr>
+              <a:t>SEMAINE 4
+J+30</a:t>
+            </a:r>
+          </a:p>
+        </p:txBody>
+      </p:sp>
+      <p:sp>
+        <p:nvSpPr>
+          <p:cNvPr id="31" name="Rectangle 30"/>
+          <p:cNvSpPr/>
+          <p:nvPr/>
+        </p:nvSpPr>
+        <p:spPr>
+          <a:xfrm>
+            <a:off x="9052560" y="1984248"/>
+            <a:ext cx="2816352" cy="1554480"/>
+          </a:xfrm>
+          <a:prstGeom prst="rect">
+            <a:avLst/>
+          </a:prstGeom>
+          <a:solidFill>
+            <a:srgbClr val="FFFFFF"/>
+          </a:solidFill>
+          <a:ln w="19050">
+            <a:solidFill>
+              <a:srgbClr val="FF0000"/>
+            </a:solidFill>
+          </a:ln>
+        </p:spPr>
+        <p:style>
+          <a:lnRef idx="1">
+            <a:schemeClr val="accent1"/>
+          </a:lnRef>
+          <a:fillRef idx="3">
+            <a:schemeClr val="accent1"/>
+          </a:fillRef>
+          <a:effectRef idx="2">
+            <a:schemeClr val="accent1"/>
+          </a:effectRef>
+          <a:fontRef idx="minor">
+            <a:schemeClr val="lt1"/>
+          </a:fontRef>
+        </p:style>
+        <p:txBody>
+          <a:bodyPr rtlCol="0" anchor="ctr"/>
+          <a:lstStyle/>
+          <a:p>
+            <a:pPr algn="ctr"/>
+          </a:p>
+        </p:txBody>
+      </p:sp>
+      <p:sp>
+        <p:nvSpPr>
+          <p:cNvPr id="32" name="TextBox 31"/>
+          <p:cNvSpPr txBox="1"/>
+          <p:nvPr/>
+        </p:nvSpPr>
+        <p:spPr>
+          <a:xfrm>
+            <a:off x="9180576" y="2039112"/>
+            <a:ext cx="2560320" cy="1417320"/>
+          </a:xfrm>
+          <a:prstGeom prst="rect">
+            <a:avLst/>
+          </a:prstGeom>
+          <a:noFill/>
+        </p:spPr>
+        <p:txBody>
+          <a:bodyPr wrap="square">
+            <a:spAutoFit/>
+          </a:bodyPr>
+          <a:lstStyle/>
+          <a:p>
+            <a:pPr algn="l"/>
+            <a:r>
+              <a:rPr sz="1000" b="0" i="0">
+                <a:solidFill>
+                  <a:srgbClr val="1A1A1A"/>
+                </a:solidFill>
+              </a:rPr>
+              <a:t>Objectif :
+Révision PAP + objectifs M2</a:t>
+            </a:r>
+          </a:p>
+        </p:txBody>
+      </p:sp>
+      <p:sp>
+        <p:nvSpPr>
+          <p:cNvPr id="33" name="Rectangle 32"/>
+          <p:cNvSpPr/>
+          <p:nvPr/>
+        </p:nvSpPr>
+        <p:spPr>
+          <a:xfrm>
+            <a:off x="9052560" y="3538728"/>
+            <a:ext cx="2816352" cy="1280160"/>
+          </a:xfrm>
+          <a:prstGeom prst="rect">
+            <a:avLst/>
+          </a:prstGeom>
+          <a:solidFill>
+            <a:srgbClr val="F0F7F7"/>
+          </a:solidFill>
+          <a:ln w="12700">
+            <a:solidFill>
+              <a:srgbClr val="FF0000"/>
+            </a:solidFill>
+          </a:ln>
+        </p:spPr>
+        <p:style>
+          <a:lnRef idx="1">
+            <a:schemeClr val="accent1"/>
+          </a:lnRef>
+          <a:fillRef idx="3">
+            <a:schemeClr val="accent1"/>
+          </a:fillRef>
+          <a:effectRef idx="2">
+            <a:schemeClr val="accent1"/>
+          </a:effectRef>
+          <a:fontRef idx="minor">
+            <a:schemeClr val="lt1"/>
+          </a:fontRef>
+        </p:style>
+        <p:txBody>
+          <a:bodyPr rtlCol="0" anchor="ctr"/>
+          <a:lstStyle/>
+          <a:p>
+            <a:pPr algn="ctr"/>
+          </a:p>
+        </p:txBody>
+      </p:sp>
+      <p:sp>
+        <p:nvSpPr>
+          <p:cNvPr id="34" name="TextBox 33"/>
+          <p:cNvSpPr txBox="1"/>
+          <p:nvPr/>
+        </p:nvSpPr>
+        <p:spPr>
+          <a:xfrm>
+            <a:off x="9180576" y="3593592"/>
+            <a:ext cx="2560320" cy="1170432"/>
+          </a:xfrm>
+          <a:prstGeom prst="rect">
+            <a:avLst/>
+          </a:prstGeom>
+          <a:noFill/>
+        </p:spPr>
+        <p:txBody>
+          <a:bodyPr wrap="square">
+            <a:spAutoFit/>
+          </a:bodyPr>
+          <a:lstStyle/>
+          <a:p>
+            <a:pPr algn="l"/>
+            <a:r>
+              <a:rPr sz="900" b="0" i="1">
+                <a:solidFill>
+                  <a:srgbClr val="555555"/>
+                </a:solidFill>
+              </a:rPr>
+              <a:t>Comment mesurer :
+Entretien téléphonique formateur</a:t>
+            </a:r>
+          </a:p>
+        </p:txBody>
+      </p:sp>
+      <p:sp>
+        <p:nvSpPr>
+          <p:cNvPr id="35" name="Rectangle 34"/>
+          <p:cNvSpPr/>
+          <p:nvPr/>
+        </p:nvSpPr>
+        <p:spPr>
+          <a:xfrm>
+            <a:off x="274320" y="5010912"/>
+            <a:ext cx="11640312" cy="658368"/>
+          </a:xfrm>
+          <a:prstGeom prst="rect">
+            <a:avLst/>
+          </a:prstGeom>
+          <a:solidFill>
+            <a:srgbClr val="008080"/>
+          </a:solidFill>
+          <a:ln>
+            <a:noFill/>
+          </a:ln>
+        </p:spPr>
+        <p:style>
+          <a:lnRef idx="1">
+            <a:schemeClr val="accent1"/>
+          </a:lnRef>
+          <a:fillRef idx="3">
+            <a:schemeClr val="accent1"/>
+          </a:fillRef>
+          <a:effectRef idx="2">
+            <a:schemeClr val="accent1"/>
+          </a:effectRef>
+          <a:fontRef idx="minor">
+            <a:schemeClr val="lt1"/>
+          </a:fontRef>
+        </p:style>
+        <p:txBody>
+          <a:bodyPr rtlCol="0" anchor="ctr"/>
+          <a:lstStyle/>
+          <a:p>
+            <a:pPr algn="ctr"/>
+          </a:p>
+        </p:txBody>
+      </p:sp>
+      <p:sp>
+        <p:nvSpPr>
+          <p:cNvPr id="36" name="TextBox 35"/>
+          <p:cNvSpPr txBox="1"/>
+          <p:nvPr/>
+        </p:nvSpPr>
+        <p:spPr>
+          <a:xfrm>
+            <a:off x="411479" y="5084064"/>
+            <a:ext cx="11365992" cy="512063"/>
+          </a:xfrm>
+          <a:prstGeom prst="rect">
+            <a:avLst/>
+          </a:prstGeom>
+          <a:noFill/>
+        </p:spPr>
+        <p:txBody>
+          <a:bodyPr wrap="square">
+            <a:spAutoFit/>
+          </a:bodyPr>
+          <a:lstStyle/>
+          <a:p>
+            <a:pPr algn="l"/>
+            <a:r>
+              <a:rPr sz="1000" b="0" i="0">
+                <a:solidFill>
+                  <a:srgbClr val="FFFFFF"/>
+                </a:solidFill>
+              </a:rPr>
+              <a:t>Votre formateur SHY-Performance vous contacte à J+15 et J+30 pour un bilan de progression.
+À J+90 : analyse de vos KPI terrain — taux de conversion, montant moyen, rétention donateur.</a:t>
+            </a:r>
+          </a:p>
+        </p:txBody>
+      </p:sp>
+      <p:sp>
+        <p:nvSpPr>
+          <p:cNvPr id="37" name="Rectangle 36"/>
+          <p:cNvSpPr/>
+          <p:nvPr/>
+        </p:nvSpPr>
+        <p:spPr>
+          <a:xfrm>
+            <a:off x="274320" y="5779008"/>
+            <a:ext cx="11640312" cy="384048"/>
+          </a:xfrm>
+          <a:prstGeom prst="rect">
+            <a:avLst/>
+          </a:prstGeom>
+          <a:solidFill>
+            <a:srgbClr val="FF0000"/>
+          </a:solidFill>
+          <a:ln>
+            <a:noFill/>
+          </a:ln>
+        </p:spPr>
+        <p:style>
+          <a:lnRef idx="1">
+            <a:schemeClr val="accent1"/>
+          </a:lnRef>
+          <a:fillRef idx="3">
+            <a:schemeClr val="accent1"/>
+          </a:fillRef>
+          <a:effectRef idx="2">
+            <a:schemeClr val="accent1"/>
+          </a:effectRef>
+          <a:fontRef idx="minor">
+            <a:schemeClr val="lt1"/>
+          </a:fontRef>
+        </p:style>
+        <p:txBody>
+          <a:bodyPr rtlCol="0" anchor="ctr"/>
+          <a:lstStyle/>
+          <a:p>
+            <a:pPr algn="ctr"/>
+          </a:p>
+        </p:txBody>
+      </p:sp>
+      <p:sp>
+        <p:nvSpPr>
+          <p:cNvPr id="38" name="TextBox 37"/>
+          <p:cNvSpPr txBox="1"/>
+          <p:nvPr/>
+        </p:nvSpPr>
+        <p:spPr>
+          <a:xfrm>
+            <a:off x="411479" y="5852160"/>
+            <a:ext cx="11365992" cy="237744"/>
+          </a:xfrm>
+          <a:prstGeom prst="rect">
+            <a:avLst/>
+          </a:prstGeom>
+          <a:noFill/>
+        </p:spPr>
+        <p:txBody>
+          <a:bodyPr wrap="square">
+            <a:spAutoFit/>
+          </a:bodyPr>
+          <a:lstStyle/>
+          <a:p>
+            <a:pPr algn="l"/>
+            <a:r>
+              <a:rPr sz="1000" b="0" i="0">
+                <a:solidFill>
+                  <a:srgbClr val="FFFFFF"/>
+                </a:solidFill>
+              </a:rPr>
+              <a:t>Bienvenue dans la famille SHY-Performance. Vous êtes maintenant Fundraiser Impact Mission certifié(e).</a:t>
             </a:r>
           </a:p>
         </p:txBody>

--- a/FIM_BookJ5_Synthese_Simulations_V6-01062026SHY-TE.pptx
+++ b/FIM_BookJ5_Synthese_Simulations_V6-01062026SHY-TE.pptx
@@ -9,6 +9,7 @@
     <p:sldId id="257" r:id="rId8"/>
     <p:sldId id="258" r:id="rId9"/>
     <p:sldId id="259" r:id="rId10"/>
+    <p:sldId id="260" r:id="rId11"/>
   </p:sldIdLst>
   <p:sldSz cx="12188952" cy="6858000" type="screen4x3"/>
   <p:notesSz cx="6858000" cy="9144000"/>
@@ -3149,7 +3150,7 @@
             <a:avLst/>
           </a:prstGeom>
           <a:solidFill>
-            <a:srgbClr val="005555"/>
+            <a:srgbClr val="005050"/>
           </a:solidFill>
           <a:ln>
             <a:noFill/>
@@ -3229,7 +3230,7 @@
         <p:spPr>
           <a:xfrm>
             <a:off x="347472" y="91440"/>
-            <a:ext cx="3200400" cy="438912"/>
+            <a:ext cx="4572000" cy="402336"/>
           </a:xfrm>
           <a:prstGeom prst="rect">
             <a:avLst/>
@@ -3262,8 +3263,8 @@
         </p:nvSpPr>
         <p:spPr>
           <a:xfrm>
-            <a:off x="347472" y="530352"/>
-            <a:ext cx="7772400" cy="347472"/>
+            <a:off x="347472" y="493776"/>
+            <a:ext cx="8229600" cy="329184"/>
           </a:xfrm>
           <a:prstGeom prst="rect">
             <a:avLst/>
@@ -3296,8 +3297,8 @@
         </p:nvSpPr>
         <p:spPr>
           <a:xfrm>
-            <a:off x="347472" y="932688"/>
-            <a:ext cx="7772400" cy="292608"/>
+            <a:off x="347472" y="877824"/>
+            <a:ext cx="8229600" cy="274320"/>
           </a:xfrm>
           <a:prstGeom prst="rect">
             <a:avLst/>
@@ -3330,8 +3331,8 @@
         </p:nvSpPr>
         <p:spPr>
           <a:xfrm>
-            <a:off x="347472" y="1207008"/>
-            <a:ext cx="10515600" cy="914400"/>
+            <a:off x="347472" y="1188720"/>
+            <a:ext cx="10515600" cy="960120"/>
           </a:xfrm>
           <a:prstGeom prst="rect">
             <a:avLst/>
@@ -3346,7 +3347,7 @@
           <a:p>
             <a:pPr algn="l"/>
             <a:r>
-              <a:rPr sz="3000" b="1" i="0">
+              <a:rPr sz="2900" b="1" i="0">
                 <a:solidFill>
                   <a:srgbClr val="FFFFFF"/>
                 </a:solidFill>
@@ -3364,8 +3365,8 @@
         </p:nvSpPr>
         <p:spPr>
           <a:xfrm>
-            <a:off x="347472" y="1901952"/>
-            <a:ext cx="10515600" cy="402336"/>
+            <a:off x="347472" y="1920240"/>
+            <a:ext cx="10515600" cy="384048"/>
           </a:xfrm>
           <a:prstGeom prst="rect">
             <a:avLst/>
@@ -3406,8 +3407,8 @@
         </p:blipFill>
         <p:spPr>
           <a:xfrm>
-            <a:off x="11247120" y="45720"/>
-            <a:ext cx="822960" cy="804672"/>
+            <a:off x="11228832" y="0"/>
+            <a:ext cx="841248" cy="676656"/>
           </a:xfrm>
           <a:prstGeom prst="rect">
             <a:avLst/>
@@ -3429,7 +3430,7 @@
             <a:avLst/>
           </a:prstGeom>
           <a:solidFill>
-            <a:srgbClr val="005555"/>
+            <a:srgbClr val="005050"/>
           </a:solidFill>
           <a:ln>
             <a:noFill/>
@@ -3487,42 +3488,6 @@
                 </a:solidFill>
               </a:rPr>
               <a:t>SHY-Performance  ·  Formation FIM  ·  UNICEF France  ·  V6-01062026SHY-TE</a:t>
-            </a:r>
-          </a:p>
-        </p:txBody>
-      </p:sp>
-      <p:sp>
-        <p:nvSpPr>
-          <p:cNvPr id="13" name="TextBox 12"/>
-          <p:cNvSpPr txBox="1"/>
-          <p:nvPr/>
-        </p:nvSpPr>
-        <p:spPr>
-          <a:xfrm>
-            <a:off x="457200" y="2514600"/>
-            <a:ext cx="10789920" cy="1005840"/>
-          </a:xfrm>
-          <a:prstGeom prst="rect">
-            <a:avLst/>
-          </a:prstGeom>
-          <a:noFill/>
-        </p:spPr>
-        <p:txBody>
-          <a:bodyPr wrap="square">
-            <a:spAutoFit/>
-          </a:bodyPr>
-          <a:lstStyle/>
-          <a:p>
-            <a:pPr algn="l"/>
-            <a:r>
-              <a:rPr sz="1400" b="0" i="0">
-                <a:solidFill>
-                  <a:srgbClr val="1A1A1A"/>
-                </a:solidFill>
-              </a:rPr>
-              <a:t>C'est votre journée de certification.
-Vous allez démontrer que vous maîtrisez l'intégralité de la chaîne de compétences FIM :
-du script officiel UNICEF en 7 étapes au traitement des 15 objections, jusqu'au closing.</a:t>
             </a:r>
           </a:p>
         </p:txBody>
@@ -3603,7 +3568,7 @@
             <a:avLst/>
           </a:prstGeom>
           <a:solidFill>
-            <a:srgbClr val="005555"/>
+            <a:srgbClr val="005050"/>
           </a:solidFill>
           <a:ln>
             <a:noFill/>
@@ -3682,8 +3647,8 @@
         </p:nvSpPr>
         <p:spPr>
           <a:xfrm>
-            <a:off x="164592" y="73152"/>
-            <a:ext cx="2011680" cy="347472"/>
+            <a:off x="164592" y="91440"/>
+            <a:ext cx="1920240" cy="329184"/>
           </a:xfrm>
           <a:prstGeom prst="rect">
             <a:avLst/>
@@ -3716,8 +3681,8 @@
         </p:nvSpPr>
         <p:spPr>
           <a:xfrm>
-            <a:off x="2286000" y="91440"/>
-            <a:ext cx="36576" cy="502920"/>
+            <a:off x="2212848" y="109728"/>
+            <a:ext cx="36576" cy="475488"/>
           </a:xfrm>
           <a:prstGeom prst="rect">
             <a:avLst/>
@@ -3759,8 +3724,8 @@
         </p:nvSpPr>
         <p:spPr>
           <a:xfrm>
-            <a:off x="2423160" y="91440"/>
-            <a:ext cx="9235440" cy="502920"/>
+            <a:off x="2350008" y="91440"/>
+            <a:ext cx="8823960" cy="502920"/>
           </a:xfrm>
           <a:prstGeom prst="rect">
             <a:avLst/>
@@ -3780,7 +3745,7 @@
                   <a:srgbClr val="FFFFFF"/>
                 </a:solidFill>
               </a:rPr>
-              <a:t>Votre Journée 5 — Programme de Certification</a:t>
+              <a:t>Programme Journée 5 — Certification FIM</a:t>
             </a:r>
           </a:p>
         </p:txBody>
@@ -3801,8 +3766,8 @@
         </p:blipFill>
         <p:spPr>
           <a:xfrm>
-            <a:off x="11247120" y="0"/>
-            <a:ext cx="822960" cy="676656"/>
+            <a:off x="11228832" y="0"/>
+            <a:ext cx="841248" cy="676656"/>
           </a:xfrm>
           <a:prstGeom prst="rect">
             <a:avLst/>
@@ -3824,7 +3789,7 @@
             <a:avLst/>
           </a:prstGeom>
           <a:solidFill>
-            <a:srgbClr val="005555"/>
+            <a:srgbClr val="005050"/>
           </a:solidFill>
           <a:ln>
             <a:noFill/>
@@ -3895,13 +3860,13 @@
         <p:spPr>
           <a:xfrm>
             <a:off x="274320" y="804672"/>
-            <a:ext cx="1325880" cy="640080"/>
-          </a:xfrm>
-          <a:prstGeom prst="rect">
-            <a:avLst/>
-          </a:prstGeom>
-          <a:solidFill>
-            <a:srgbClr val="005555"/>
+            <a:ext cx="1261872" cy="640080"/>
+          </a:xfrm>
+          <a:prstGeom prst="rect">
+            <a:avLst/>
+          </a:prstGeom>
+          <a:solidFill>
+            <a:srgbClr val="005050"/>
           </a:solidFill>
           <a:ln>
             <a:noFill/>
@@ -3938,7 +3903,7 @@
         <p:spPr>
           <a:xfrm>
             <a:off x="292608" y="877824"/>
-            <a:ext cx="1289304" cy="512064"/>
+            <a:ext cx="1225296" cy="512064"/>
           </a:xfrm>
           <a:prstGeom prst="rect">
             <a:avLst/>
@@ -3972,7 +3937,7 @@
         </p:nvSpPr>
         <p:spPr>
           <a:xfrm>
-            <a:off x="1618488" y="804672"/>
+            <a:off x="1554480" y="804672"/>
             <a:ext cx="2743200" cy="640080"/>
           </a:xfrm>
           <a:prstGeom prst="rect">
@@ -4015,7 +3980,7 @@
         </p:nvSpPr>
         <p:spPr>
           <a:xfrm>
-            <a:off x="1719072" y="941832"/>
+            <a:off x="1645920" y="941832"/>
             <a:ext cx="2578608" cy="384048"/>
           </a:xfrm>
           <a:prstGeom prst="rect">
@@ -4049,8 +4014,8 @@
         </p:nvSpPr>
         <p:spPr>
           <a:xfrm>
-            <a:off x="4379976" y="804672"/>
-            <a:ext cx="7534656" cy="640080"/>
+            <a:off x="4315968" y="804672"/>
+            <a:ext cx="7598664" cy="640080"/>
           </a:xfrm>
           <a:prstGeom prst="rect">
             <a:avLst/>
@@ -4094,8 +4059,8 @@
         </p:nvSpPr>
         <p:spPr>
           <a:xfrm>
-            <a:off x="4498848" y="859536"/>
-            <a:ext cx="7333488" cy="548640"/>
+            <a:off x="4425696" y="868680"/>
+            <a:ext cx="7406640" cy="548640"/>
           </a:xfrm>
           <a:prstGeom prst="rect">
             <a:avLst/>
@@ -4115,7 +4080,7 @@
                   <a:srgbClr val="1A1A1A"/>
                 </a:solidFill>
               </a:rPr>
-              <a:t>Révision rapide des 5 modules FIM · Quiz flash · Météo émotionnelle du groupe</a:t>
+              <a:t>Révision des 5 modules FIM · Quiz flash · Météo émotionnelle</a:t>
             </a:r>
           </a:p>
         </p:txBody>
@@ -4129,13 +4094,13 @@
         <p:spPr>
           <a:xfrm>
             <a:off x="274320" y="1472184"/>
-            <a:ext cx="1325880" cy="640080"/>
-          </a:xfrm>
-          <a:prstGeom prst="rect">
-            <a:avLst/>
-          </a:prstGeom>
-          <a:solidFill>
-            <a:srgbClr val="005555"/>
+            <a:ext cx="1261872" cy="640080"/>
+          </a:xfrm>
+          <a:prstGeom prst="rect">
+            <a:avLst/>
+          </a:prstGeom>
+          <a:solidFill>
+            <a:srgbClr val="005050"/>
           </a:solidFill>
           <a:ln>
             <a:noFill/>
@@ -4172,7 +4137,7 @@
         <p:spPr>
           <a:xfrm>
             <a:off x="292608" y="1545336"/>
-            <a:ext cx="1289304" cy="512064"/>
+            <a:ext cx="1225296" cy="512064"/>
           </a:xfrm>
           <a:prstGeom prst="rect">
             <a:avLst/>
@@ -4206,7 +4171,7 @@
         </p:nvSpPr>
         <p:spPr>
           <a:xfrm>
-            <a:off x="1618488" y="1472184"/>
+            <a:off x="1554480" y="1472184"/>
             <a:ext cx="2743200" cy="640080"/>
           </a:xfrm>
           <a:prstGeom prst="rect">
@@ -4249,7 +4214,7 @@
         </p:nvSpPr>
         <p:spPr>
           <a:xfrm>
-            <a:off x="1719072" y="1609343"/>
+            <a:off x="1645920" y="1609343"/>
             <a:ext cx="2578608" cy="384048"/>
           </a:xfrm>
           <a:prstGeom prst="rect">
@@ -4283,8 +4248,8 @@
         </p:nvSpPr>
         <p:spPr>
           <a:xfrm>
-            <a:off x="4379976" y="1472184"/>
-            <a:ext cx="7534656" cy="640080"/>
+            <a:off x="4315968" y="1472184"/>
+            <a:ext cx="7598664" cy="640080"/>
           </a:xfrm>
           <a:prstGeom prst="rect">
             <a:avLst/>
@@ -4328,8 +4293,8 @@
         </p:nvSpPr>
         <p:spPr>
           <a:xfrm>
-            <a:off x="4498848" y="1527048"/>
-            <a:ext cx="7333488" cy="548640"/>
+            <a:off x="4425696" y="1536192"/>
+            <a:ext cx="7406640" cy="548640"/>
           </a:xfrm>
           <a:prstGeom prst="rect">
             <a:avLst/>
@@ -4349,8 +4314,7 @@
                   <a:srgbClr val="1A1A1A"/>
                 </a:solidFill>
               </a:rPr>
-              <a:t>Appels simulés chronométrés : script complet + objections + closing en conditions réelles
-Jeux de rôle fundraiser vs prospect · Rotation des rôles · Grille d'observation</a:t>
+              <a:t>Script + objections + closing chronométrés · Jeux de rôle fundraiser vs prospect</a:t>
             </a:r>
           </a:p>
         </p:txBody>
@@ -4364,13 +4328,13 @@
         <p:spPr>
           <a:xfrm>
             <a:off x="274320" y="2139696"/>
-            <a:ext cx="1325880" cy="640080"/>
-          </a:xfrm>
-          <a:prstGeom prst="rect">
-            <a:avLst/>
-          </a:prstGeom>
-          <a:solidFill>
-            <a:srgbClr val="005555"/>
+            <a:ext cx="1261872" cy="640080"/>
+          </a:xfrm>
+          <a:prstGeom prst="rect">
+            <a:avLst/>
+          </a:prstGeom>
+          <a:solidFill>
+            <a:srgbClr val="005050"/>
           </a:solidFill>
           <a:ln>
             <a:noFill/>
@@ -4407,7 +4371,7 @@
         <p:spPr>
           <a:xfrm>
             <a:off x="292608" y="2212848"/>
-            <a:ext cx="1289304" cy="512064"/>
+            <a:ext cx="1225296" cy="512064"/>
           </a:xfrm>
           <a:prstGeom prst="rect">
             <a:avLst/>
@@ -4441,7 +4405,7 @@
         </p:nvSpPr>
         <p:spPr>
           <a:xfrm>
-            <a:off x="1618488" y="2139696"/>
+            <a:off x="1554480" y="2139696"/>
             <a:ext cx="2743200" cy="640080"/>
           </a:xfrm>
           <a:prstGeom prst="rect">
@@ -4484,7 +4448,7 @@
         </p:nvSpPr>
         <p:spPr>
           <a:xfrm>
-            <a:off x="1719072" y="2276856"/>
+            <a:off x="1645920" y="2276856"/>
             <a:ext cx="2578608" cy="384048"/>
           </a:xfrm>
           <a:prstGeom prst="rect">
@@ -4518,8 +4482,8 @@
         </p:nvSpPr>
         <p:spPr>
           <a:xfrm>
-            <a:off x="4379976" y="2139696"/>
-            <a:ext cx="7534656" cy="640080"/>
+            <a:off x="4315968" y="2139696"/>
+            <a:ext cx="7598664" cy="640080"/>
           </a:xfrm>
           <a:prstGeom prst="rect">
             <a:avLst/>
@@ -4563,8 +4527,8 @@
         </p:nvSpPr>
         <p:spPr>
           <a:xfrm>
-            <a:off x="4498848" y="2194560"/>
-            <a:ext cx="7333488" cy="548640"/>
+            <a:off x="4425696" y="2203703"/>
+            <a:ext cx="7406640" cy="548640"/>
           </a:xfrm>
           <a:prstGeom prst="rect">
             <a:avLst/>
@@ -4584,7 +4548,7 @@
                   <a:srgbClr val="1A1A1A"/>
                 </a:solidFill>
               </a:rPr>
-              <a:t>Retour sur les simulations · Célébration des progrès · 3 apprentissages collectifs de la semaine</a:t>
+              <a:t>Retour simulations · Célébration progrès · 3 apprentissages collectifs de la semaine</a:t>
             </a:r>
           </a:p>
         </p:txBody>
@@ -4598,13 +4562,13 @@
         <p:spPr>
           <a:xfrm>
             <a:off x="274320" y="2807208"/>
-            <a:ext cx="1325880" cy="640080"/>
-          </a:xfrm>
-          <a:prstGeom prst="rect">
-            <a:avLst/>
-          </a:prstGeom>
-          <a:solidFill>
-            <a:srgbClr val="005555"/>
+            <a:ext cx="1261872" cy="640080"/>
+          </a:xfrm>
+          <a:prstGeom prst="rect">
+            <a:avLst/>
+          </a:prstGeom>
+          <a:solidFill>
+            <a:srgbClr val="005050"/>
           </a:solidFill>
           <a:ln>
             <a:noFill/>
@@ -4641,7 +4605,7 @@
         <p:spPr>
           <a:xfrm>
             <a:off x="292608" y="2880360"/>
-            <a:ext cx="1289304" cy="512064"/>
+            <a:ext cx="1225296" cy="512064"/>
           </a:xfrm>
           <a:prstGeom prst="rect">
             <a:avLst/>
@@ -4675,7 +4639,7 @@
         </p:nvSpPr>
         <p:spPr>
           <a:xfrm>
-            <a:off x="1618488" y="2807208"/>
+            <a:off x="1554480" y="2807208"/>
             <a:ext cx="2743200" cy="640080"/>
           </a:xfrm>
           <a:prstGeom prst="rect">
@@ -4718,7 +4682,7 @@
         </p:nvSpPr>
         <p:spPr>
           <a:xfrm>
-            <a:off x="1719072" y="2944368"/>
+            <a:off x="1645920" y="2944368"/>
             <a:ext cx="2578608" cy="384048"/>
           </a:xfrm>
           <a:prstGeom prst="rect">
@@ -4739,7 +4703,7 @@
                   <a:srgbClr val="FFFFFF"/>
                 </a:solidFill>
               </a:rPr>
-              <a:t>Grille d'évaluation finale</a:t>
+              <a:t>Grille 24 critères</a:t>
             </a:r>
           </a:p>
         </p:txBody>
@@ -4752,8 +4716,8 @@
         </p:nvSpPr>
         <p:spPr>
           <a:xfrm>
-            <a:off x="4379976" y="2807208"/>
-            <a:ext cx="7534656" cy="640080"/>
+            <a:off x="4315968" y="2807208"/>
+            <a:ext cx="7598664" cy="640080"/>
           </a:xfrm>
           <a:prstGeom prst="rect">
             <a:avLst/>
@@ -4797,8 +4761,8 @@
         </p:nvSpPr>
         <p:spPr>
           <a:xfrm>
-            <a:off x="4498848" y="2862072"/>
-            <a:ext cx="7333488" cy="548640"/>
+            <a:off x="4425696" y="2871215"/>
+            <a:ext cx="7406640" cy="548640"/>
           </a:xfrm>
           <a:prstGeom prst="rect">
             <a:avLst/>
@@ -4818,7 +4782,7 @@
                   <a:srgbClr val="1A1A1A"/>
                 </a:solidFill>
               </a:rPr>
-              <a:t>Évaluation individuelle sur 24 critères · Entretien formateur 5 min · Feedback personnalisé</a:t>
+              <a:t>Évaluation individuelle · Entretien formateur 5 min · Feedback personnalisé</a:t>
             </a:r>
           </a:p>
         </p:txBody>
@@ -4832,13 +4796,13 @@
         <p:spPr>
           <a:xfrm>
             <a:off x="274320" y="3474720"/>
-            <a:ext cx="1325880" cy="640080"/>
-          </a:xfrm>
-          <a:prstGeom prst="rect">
-            <a:avLst/>
-          </a:prstGeom>
-          <a:solidFill>
-            <a:srgbClr val="005555"/>
+            <a:ext cx="1261872" cy="640080"/>
+          </a:xfrm>
+          <a:prstGeom prst="rect">
+            <a:avLst/>
+          </a:prstGeom>
+          <a:solidFill>
+            <a:srgbClr val="005050"/>
           </a:solidFill>
           <a:ln>
             <a:noFill/>
@@ -4875,7 +4839,7 @@
         <p:spPr>
           <a:xfrm>
             <a:off x="292608" y="3547872"/>
-            <a:ext cx="1289304" cy="512064"/>
+            <a:ext cx="1225296" cy="512064"/>
           </a:xfrm>
           <a:prstGeom prst="rect">
             <a:avLst/>
@@ -4909,7 +4873,7 @@
         </p:nvSpPr>
         <p:spPr>
           <a:xfrm>
-            <a:off x="1618488" y="3474720"/>
+            <a:off x="1554480" y="3474720"/>
             <a:ext cx="2743200" cy="640080"/>
           </a:xfrm>
           <a:prstGeom prst="rect">
@@ -4952,7 +4916,7 @@
         </p:nvSpPr>
         <p:spPr>
           <a:xfrm>
-            <a:off x="1719072" y="3611879"/>
+            <a:off x="1645920" y="3611879"/>
             <a:ext cx="2578608" cy="384048"/>
           </a:xfrm>
           <a:prstGeom prst="rect">
@@ -4986,8 +4950,8 @@
         </p:nvSpPr>
         <p:spPr>
           <a:xfrm>
-            <a:off x="4379976" y="3474720"/>
-            <a:ext cx="7534656" cy="640080"/>
+            <a:off x="4315968" y="3474720"/>
+            <a:ext cx="7598664" cy="640080"/>
           </a:xfrm>
           <a:prstGeom prst="rect">
             <a:avLst/>
@@ -5031,8 +4995,8 @@
         </p:nvSpPr>
         <p:spPr>
           <a:xfrm>
-            <a:off x="4498848" y="3529584"/>
-            <a:ext cx="7333488" cy="548640"/>
+            <a:off x="4425696" y="3538727"/>
+            <a:ext cx="7406640" cy="548640"/>
           </a:xfrm>
           <a:prstGeom prst="rect">
             <a:avLst/>
@@ -5052,7 +5016,7 @@
                   <a:srgbClr val="1A1A1A"/>
                 </a:solidFill>
               </a:rPr>
-              <a:t>Évaluation finale des connaissances : UNICEF, secteur associatif, script, objections, KPI FIDELIS</a:t>
+              <a:t>Évaluation finale des connaissances · Seuil 28/40 · Corrigé collectif</a:t>
             </a:r>
           </a:p>
         </p:txBody>
@@ -5066,13 +5030,13 @@
         <p:spPr>
           <a:xfrm>
             <a:off x="274320" y="4142231"/>
-            <a:ext cx="1325880" cy="640080"/>
-          </a:xfrm>
-          <a:prstGeom prst="rect">
-            <a:avLst/>
-          </a:prstGeom>
-          <a:solidFill>
-            <a:srgbClr val="005555"/>
+            <a:ext cx="1261872" cy="640080"/>
+          </a:xfrm>
+          <a:prstGeom prst="rect">
+            <a:avLst/>
+          </a:prstGeom>
+          <a:solidFill>
+            <a:srgbClr val="005050"/>
           </a:solidFill>
           <a:ln>
             <a:noFill/>
@@ -5109,7 +5073,7 @@
         <p:spPr>
           <a:xfrm>
             <a:off x="292608" y="4215383"/>
-            <a:ext cx="1289304" cy="512064"/>
+            <a:ext cx="1225296" cy="512064"/>
           </a:xfrm>
           <a:prstGeom prst="rect">
             <a:avLst/>
@@ -5143,7 +5107,7 @@
         </p:nvSpPr>
         <p:spPr>
           <a:xfrm>
-            <a:off x="1618488" y="4142231"/>
+            <a:off x="1554480" y="4142231"/>
             <a:ext cx="2743200" cy="640080"/>
           </a:xfrm>
           <a:prstGeom prst="rect">
@@ -5186,7 +5150,7 @@
         </p:nvSpPr>
         <p:spPr>
           <a:xfrm>
-            <a:off x="1719072" y="4279392"/>
+            <a:off x="1645920" y="4279392"/>
             <a:ext cx="2578608" cy="384048"/>
           </a:xfrm>
           <a:prstGeom prst="rect">
@@ -5207,7 +5171,7 @@
                   <a:srgbClr val="FFFFFF"/>
                 </a:solidFill>
               </a:rPr>
-              <a:t>Remise des certifications</a:t>
+              <a:t>Remise certifications</a:t>
             </a:r>
           </a:p>
         </p:txBody>
@@ -5220,8 +5184,8 @@
         </p:nvSpPr>
         <p:spPr>
           <a:xfrm>
-            <a:off x="4379976" y="4142231"/>
-            <a:ext cx="7534656" cy="640080"/>
+            <a:off x="4315968" y="4142231"/>
+            <a:ext cx="7598664" cy="640080"/>
           </a:xfrm>
           <a:prstGeom prst="rect">
             <a:avLst/>
@@ -5265,8 +5229,8 @@
         </p:nvSpPr>
         <p:spPr>
           <a:xfrm>
-            <a:off x="4498848" y="4197095"/>
-            <a:ext cx="7333488" cy="548640"/>
+            <a:off x="4425696" y="4206240"/>
+            <a:ext cx="7406640" cy="548640"/>
           </a:xfrm>
           <a:prstGeom prst="rect">
             <a:avLst/>
@@ -5286,7 +5250,7 @@
                   <a:srgbClr val="1A1A1A"/>
                 </a:solidFill>
               </a:rPr>
-              <a:t>Remise officielle des certifications FIM · Votre plan d'action terrain · Premier appel demain</a:t>
+              <a:t>Attestations officielles FIM · Plan d'action terrain · 1er appel de production demain</a:t>
             </a:r>
           </a:p>
         </p:txBody>
@@ -5367,7 +5331,7 @@
             <a:avLst/>
           </a:prstGeom>
           <a:solidFill>
-            <a:srgbClr val="005555"/>
+            <a:srgbClr val="005050"/>
           </a:solidFill>
           <a:ln>
             <a:noFill/>
@@ -5446,8 +5410,8 @@
         </p:nvSpPr>
         <p:spPr>
           <a:xfrm>
-            <a:off x="164592" y="73152"/>
-            <a:ext cx="2011680" cy="347472"/>
+            <a:off x="164592" y="91440"/>
+            <a:ext cx="1920240" cy="329184"/>
           </a:xfrm>
           <a:prstGeom prst="rect">
             <a:avLst/>
@@ -5480,8 +5444,8 @@
         </p:nvSpPr>
         <p:spPr>
           <a:xfrm>
-            <a:off x="2286000" y="91440"/>
-            <a:ext cx="36576" cy="502920"/>
+            <a:off x="2212848" y="109728"/>
+            <a:ext cx="36576" cy="475488"/>
           </a:xfrm>
           <a:prstGeom prst="rect">
             <a:avLst/>
@@ -5523,8 +5487,8 @@
         </p:nvSpPr>
         <p:spPr>
           <a:xfrm>
-            <a:off x="2423160" y="91440"/>
-            <a:ext cx="9235440" cy="502920"/>
+            <a:off x="2350008" y="91440"/>
+            <a:ext cx="8823960" cy="502920"/>
           </a:xfrm>
           <a:prstGeom prst="rect">
             <a:avLst/>
@@ -5544,7 +5508,7 @@
                   <a:srgbClr val="FFFFFF"/>
                 </a:solidFill>
               </a:rPr>
-              <a:t>Votre Grille d'Évaluation Finale — 24 Critères</a:t>
+              <a:t>Grille de Certification — 24 Critères</a:t>
             </a:r>
           </a:p>
         </p:txBody>
@@ -5565,8 +5529,8 @@
         </p:blipFill>
         <p:spPr>
           <a:xfrm>
-            <a:off x="11247120" y="0"/>
-            <a:ext cx="822960" cy="676656"/>
+            <a:off x="11228832" y="0"/>
+            <a:ext cx="841248" cy="676656"/>
           </a:xfrm>
           <a:prstGeom prst="rect">
             <a:avLst/>
@@ -5588,7 +5552,7 @@
             <a:avLst/>
           </a:prstGeom>
           <a:solidFill>
-            <a:srgbClr val="005555"/>
+            <a:srgbClr val="005050"/>
           </a:solidFill>
           <a:ln>
             <a:noFill/>
@@ -5676,7 +5640,7 @@
             <a:r>
               <a:rPr sz="1100" b="1" i="0">
                 <a:solidFill>
-                  <a:srgbClr val="005555"/>
+                  <a:srgbClr val="005050"/>
                 </a:solidFill>
               </a:rPr>
               <a:t>Voici exactement ce sur quoi vous serez évalué(e) — aucune surprise :</a:t>
@@ -5699,7 +5663,7 @@
             <a:avLst/>
           </a:prstGeom>
           <a:solidFill>
-            <a:srgbClr val="005555"/>
+            <a:srgbClr val="005050"/>
           </a:solidFill>
           <a:ln>
             <a:noFill/>
@@ -5776,7 +5740,7 @@
             <a:avLst/>
           </a:prstGeom>
           <a:solidFill>
-            <a:srgbClr val="005555"/>
+            <a:srgbClr val="005050"/>
           </a:solidFill>
           <a:ln>
             <a:noFill/>
@@ -5853,7 +5817,7 @@
             <a:avLst/>
           </a:prstGeom>
           <a:solidFill>
-            <a:srgbClr val="005555"/>
+            <a:srgbClr val="005050"/>
           </a:solidFill>
           <a:ln>
             <a:noFill/>
@@ -5930,7 +5894,7 @@
             <a:avLst/>
           </a:prstGeom>
           <a:solidFill>
-            <a:srgbClr val="005555"/>
+            <a:srgbClr val="005050"/>
           </a:solidFill>
           <a:ln>
             <a:noFill/>
@@ -6007,7 +5971,7 @@
             <a:avLst/>
           </a:prstGeom>
           <a:solidFill>
-            <a:srgbClr val="005555"/>
+            <a:srgbClr val="005050"/>
           </a:solidFill>
           <a:ln>
             <a:noFill/>
@@ -6084,7 +6048,7 @@
             <a:avLst/>
           </a:prstGeom>
           <a:solidFill>
-            <a:srgbClr val="005555"/>
+            <a:srgbClr val="005050"/>
           </a:solidFill>
           <a:ln>
             <a:noFill/>
@@ -6161,7 +6125,7 @@
             <a:avLst/>
           </a:prstGeom>
           <a:solidFill>
-            <a:srgbClr val="005555"/>
+            <a:srgbClr val="005050"/>
           </a:solidFill>
           <a:ln>
             <a:noFill/>
@@ -6232,13 +6196,13 @@
         <p:spPr>
           <a:xfrm>
             <a:off x="274320" y="1389888"/>
-            <a:ext cx="393192" cy="329184"/>
-          </a:xfrm>
-          <a:prstGeom prst="rect">
-            <a:avLst/>
-          </a:prstGeom>
-          <a:solidFill>
-            <a:srgbClr val="005555"/>
+            <a:ext cx="393192" cy="310896"/>
+          </a:xfrm>
+          <a:prstGeom prst="rect">
+            <a:avLst/>
+          </a:prstGeom>
+          <a:solidFill>
+            <a:srgbClr val="005050"/>
           </a:solidFill>
           <a:ln>
             <a:noFill/>
@@ -6275,7 +6239,7 @@
         <p:spPr>
           <a:xfrm>
             <a:off x="310896" y="1444752"/>
-            <a:ext cx="338328" cy="237744"/>
+            <a:ext cx="338328" cy="219456"/>
           </a:xfrm>
           <a:prstGeom prst="rect">
             <a:avLst/>
@@ -6309,7 +6273,7 @@
         <p:spPr>
           <a:xfrm>
             <a:off x="694944" y="1389888"/>
-            <a:ext cx="5687568" cy="329184"/>
+            <a:ext cx="5687568" cy="310896"/>
           </a:xfrm>
           <a:prstGeom prst="rect">
             <a:avLst/>
@@ -6352,7 +6316,7 @@
         <p:spPr>
           <a:xfrm>
             <a:off x="768096" y="1444752"/>
-            <a:ext cx="5577840" cy="256031"/>
+            <a:ext cx="5577840" cy="237744"/>
           </a:xfrm>
           <a:prstGeom prst="rect">
             <a:avLst/>
@@ -6386,13 +6350,13 @@
         <p:spPr>
           <a:xfrm>
             <a:off x="6400800" y="1389888"/>
-            <a:ext cx="2624328" cy="329184"/>
-          </a:xfrm>
-          <a:prstGeom prst="rect">
-            <a:avLst/>
-          </a:prstGeom>
-          <a:solidFill>
-            <a:srgbClr val="005555"/>
+            <a:ext cx="2624328" cy="310896"/>
+          </a:xfrm>
+          <a:prstGeom prst="rect">
+            <a:avLst/>
+          </a:prstGeom>
+          <a:solidFill>
+            <a:srgbClr val="005050"/>
           </a:solidFill>
           <a:ln>
             <a:noFill/>
@@ -6429,7 +6393,7 @@
         <p:spPr>
           <a:xfrm>
             <a:off x="6455664" y="1444752"/>
-            <a:ext cx="2532888" cy="256031"/>
+            <a:ext cx="2532888" cy="237744"/>
           </a:xfrm>
           <a:prstGeom prst="rect">
             <a:avLst/>
@@ -6463,7 +6427,7 @@
         <p:spPr>
           <a:xfrm>
             <a:off x="9052560" y="1389888"/>
-            <a:ext cx="713232" cy="329184"/>
+            <a:ext cx="713232" cy="310896"/>
           </a:xfrm>
           <a:prstGeom prst="rect">
             <a:avLst/>
@@ -6508,7 +6472,7 @@
         <p:spPr>
           <a:xfrm>
             <a:off x="9784080" y="1389888"/>
-            <a:ext cx="713232" cy="329184"/>
+            <a:ext cx="713232" cy="310896"/>
           </a:xfrm>
           <a:prstGeom prst="rect">
             <a:avLst/>
@@ -6553,7 +6517,7 @@
         <p:spPr>
           <a:xfrm>
             <a:off x="10515600" y="1389888"/>
-            <a:ext cx="713232" cy="329184"/>
+            <a:ext cx="713232" cy="310896"/>
           </a:xfrm>
           <a:prstGeom prst="rect">
             <a:avLst/>
@@ -6598,7 +6562,7 @@
         <p:spPr>
           <a:xfrm>
             <a:off x="11247120" y="1389888"/>
-            <a:ext cx="685800" cy="329184"/>
+            <a:ext cx="685800" cy="310896"/>
           </a:xfrm>
           <a:prstGeom prst="rect">
             <a:avLst/>
@@ -6642,14 +6606,14 @@
         </p:nvSpPr>
         <p:spPr>
           <a:xfrm>
-            <a:off x="274320" y="1728216"/>
-            <a:ext cx="393192" cy="329184"/>
-          </a:xfrm>
-          <a:prstGeom prst="rect">
-            <a:avLst/>
-          </a:prstGeom>
-          <a:solidFill>
-            <a:srgbClr val="005555"/>
+            <a:off x="274320" y="1709928"/>
+            <a:ext cx="393192" cy="310896"/>
+          </a:xfrm>
+          <a:prstGeom prst="rect">
+            <a:avLst/>
+          </a:prstGeom>
+          <a:solidFill>
+            <a:srgbClr val="005050"/>
           </a:solidFill>
           <a:ln>
             <a:noFill/>
@@ -6685,8 +6649,8 @@
         </p:nvSpPr>
         <p:spPr>
           <a:xfrm>
-            <a:off x="310896" y="1783080"/>
-            <a:ext cx="338328" cy="237744"/>
+            <a:off x="310896" y="1764792"/>
+            <a:ext cx="338328" cy="219456"/>
           </a:xfrm>
           <a:prstGeom prst="rect">
             <a:avLst/>
@@ -6719,8 +6683,8 @@
         </p:nvSpPr>
         <p:spPr>
           <a:xfrm>
-            <a:off x="694944" y="1728216"/>
-            <a:ext cx="5687568" cy="329184"/>
+            <a:off x="694944" y="1709928"/>
+            <a:ext cx="5687568" cy="310896"/>
           </a:xfrm>
           <a:prstGeom prst="rect">
             <a:avLst/>
@@ -6762,8 +6726,8 @@
         </p:nvSpPr>
         <p:spPr>
           <a:xfrm>
-            <a:off x="768096" y="1783080"/>
-            <a:ext cx="5577840" cy="256031"/>
+            <a:off x="768096" y="1764792"/>
+            <a:ext cx="5577840" cy="237744"/>
           </a:xfrm>
           <a:prstGeom prst="rect">
             <a:avLst/>
@@ -6796,14 +6760,14 @@
         </p:nvSpPr>
         <p:spPr>
           <a:xfrm>
-            <a:off x="6400800" y="1728216"/>
-            <a:ext cx="2624328" cy="329184"/>
-          </a:xfrm>
-          <a:prstGeom prst="rect">
-            <a:avLst/>
-          </a:prstGeom>
-          <a:solidFill>
-            <a:srgbClr val="005555"/>
+            <a:off x="6400800" y="1709928"/>
+            <a:ext cx="2624328" cy="310896"/>
+          </a:xfrm>
+          <a:prstGeom prst="rect">
+            <a:avLst/>
+          </a:prstGeom>
+          <a:solidFill>
+            <a:srgbClr val="005050"/>
           </a:solidFill>
           <a:ln>
             <a:noFill/>
@@ -6839,8 +6803,8 @@
         </p:nvSpPr>
         <p:spPr>
           <a:xfrm>
-            <a:off x="6455664" y="1783080"/>
-            <a:ext cx="2532888" cy="256031"/>
+            <a:off x="6455664" y="1764792"/>
+            <a:ext cx="2532888" cy="237744"/>
           </a:xfrm>
           <a:prstGeom prst="rect">
             <a:avLst/>
@@ -6873,8 +6837,8 @@
         </p:nvSpPr>
         <p:spPr>
           <a:xfrm>
-            <a:off x="9052560" y="1728216"/>
-            <a:ext cx="713232" cy="329184"/>
+            <a:off x="9052560" y="1709928"/>
+            <a:ext cx="713232" cy="310896"/>
           </a:xfrm>
           <a:prstGeom prst="rect">
             <a:avLst/>
@@ -6918,8 +6882,8 @@
         </p:nvSpPr>
         <p:spPr>
           <a:xfrm>
-            <a:off x="9784080" y="1728216"/>
-            <a:ext cx="713232" cy="329184"/>
+            <a:off x="9784080" y="1709928"/>
+            <a:ext cx="713232" cy="310896"/>
           </a:xfrm>
           <a:prstGeom prst="rect">
             <a:avLst/>
@@ -6963,8 +6927,8 @@
         </p:nvSpPr>
         <p:spPr>
           <a:xfrm>
-            <a:off x="10515600" y="1728216"/>
-            <a:ext cx="713232" cy="329184"/>
+            <a:off x="10515600" y="1709928"/>
+            <a:ext cx="713232" cy="310896"/>
           </a:xfrm>
           <a:prstGeom prst="rect">
             <a:avLst/>
@@ -7008,8 +6972,8 @@
         </p:nvSpPr>
         <p:spPr>
           <a:xfrm>
-            <a:off x="11247120" y="1728216"/>
-            <a:ext cx="685800" cy="329184"/>
+            <a:off x="11247120" y="1709928"/>
+            <a:ext cx="685800" cy="310896"/>
           </a:xfrm>
           <a:prstGeom prst="rect">
             <a:avLst/>
@@ -7053,14 +7017,14 @@
         </p:nvSpPr>
         <p:spPr>
           <a:xfrm>
-            <a:off x="274320" y="2066544"/>
-            <a:ext cx="393192" cy="329184"/>
-          </a:xfrm>
-          <a:prstGeom prst="rect">
-            <a:avLst/>
-          </a:prstGeom>
-          <a:solidFill>
-            <a:srgbClr val="005555"/>
+            <a:off x="274320" y="2029968"/>
+            <a:ext cx="393192" cy="310896"/>
+          </a:xfrm>
+          <a:prstGeom prst="rect">
+            <a:avLst/>
+          </a:prstGeom>
+          <a:solidFill>
+            <a:srgbClr val="005050"/>
           </a:solidFill>
           <a:ln>
             <a:noFill/>
@@ -7096,8 +7060,8 @@
         </p:nvSpPr>
         <p:spPr>
           <a:xfrm>
-            <a:off x="310896" y="2121408"/>
-            <a:ext cx="338328" cy="237744"/>
+            <a:off x="310896" y="2084832"/>
+            <a:ext cx="338328" cy="219456"/>
           </a:xfrm>
           <a:prstGeom prst="rect">
             <a:avLst/>
@@ -7130,8 +7094,8 @@
         </p:nvSpPr>
         <p:spPr>
           <a:xfrm>
-            <a:off x="694944" y="2066544"/>
-            <a:ext cx="5687568" cy="329184"/>
+            <a:off x="694944" y="2029968"/>
+            <a:ext cx="5687568" cy="310896"/>
           </a:xfrm>
           <a:prstGeom prst="rect">
             <a:avLst/>
@@ -7173,8 +7137,8 @@
         </p:nvSpPr>
         <p:spPr>
           <a:xfrm>
-            <a:off x="768096" y="2121408"/>
-            <a:ext cx="5577840" cy="256031"/>
+            <a:off x="768096" y="2084832"/>
+            <a:ext cx="5577840" cy="237744"/>
           </a:xfrm>
           <a:prstGeom prst="rect">
             <a:avLst/>
@@ -7207,14 +7171,14 @@
         </p:nvSpPr>
         <p:spPr>
           <a:xfrm>
-            <a:off x="6400800" y="2066544"/>
-            <a:ext cx="2624328" cy="329184"/>
-          </a:xfrm>
-          <a:prstGeom prst="rect">
-            <a:avLst/>
-          </a:prstGeom>
-          <a:solidFill>
-            <a:srgbClr val="005555"/>
+            <a:off x="6400800" y="2029968"/>
+            <a:ext cx="2624328" cy="310896"/>
+          </a:xfrm>
+          <a:prstGeom prst="rect">
+            <a:avLst/>
+          </a:prstGeom>
+          <a:solidFill>
+            <a:srgbClr val="005050"/>
           </a:solidFill>
           <a:ln>
             <a:noFill/>
@@ -7250,8 +7214,8 @@
         </p:nvSpPr>
         <p:spPr>
           <a:xfrm>
-            <a:off x="6455664" y="2121408"/>
-            <a:ext cx="2532888" cy="256031"/>
+            <a:off x="6455664" y="2084832"/>
+            <a:ext cx="2532888" cy="237744"/>
           </a:xfrm>
           <a:prstGeom prst="rect">
             <a:avLst/>
@@ -7284,8 +7248,8 @@
         </p:nvSpPr>
         <p:spPr>
           <a:xfrm>
-            <a:off x="9052560" y="2066544"/>
-            <a:ext cx="713232" cy="329184"/>
+            <a:off x="9052560" y="2029968"/>
+            <a:ext cx="713232" cy="310896"/>
           </a:xfrm>
           <a:prstGeom prst="rect">
             <a:avLst/>
@@ -7329,8 +7293,8 @@
         </p:nvSpPr>
         <p:spPr>
           <a:xfrm>
-            <a:off x="9784080" y="2066544"/>
-            <a:ext cx="713232" cy="329184"/>
+            <a:off x="9784080" y="2029968"/>
+            <a:ext cx="713232" cy="310896"/>
           </a:xfrm>
           <a:prstGeom prst="rect">
             <a:avLst/>
@@ -7374,8 +7338,8 @@
         </p:nvSpPr>
         <p:spPr>
           <a:xfrm>
-            <a:off x="10515600" y="2066544"/>
-            <a:ext cx="713232" cy="329184"/>
+            <a:off x="10515600" y="2029968"/>
+            <a:ext cx="713232" cy="310896"/>
           </a:xfrm>
           <a:prstGeom prst="rect">
             <a:avLst/>
@@ -7419,8 +7383,8 @@
         </p:nvSpPr>
         <p:spPr>
           <a:xfrm>
-            <a:off x="11247120" y="2066544"/>
-            <a:ext cx="685800" cy="329184"/>
+            <a:off x="11247120" y="2029968"/>
+            <a:ext cx="685800" cy="310896"/>
           </a:xfrm>
           <a:prstGeom prst="rect">
             <a:avLst/>
@@ -7464,14 +7428,14 @@
         </p:nvSpPr>
         <p:spPr>
           <a:xfrm>
-            <a:off x="274320" y="2404872"/>
-            <a:ext cx="393192" cy="329184"/>
-          </a:xfrm>
-          <a:prstGeom prst="rect">
-            <a:avLst/>
-          </a:prstGeom>
-          <a:solidFill>
-            <a:srgbClr val="005555"/>
+            <a:off x="274320" y="2350008"/>
+            <a:ext cx="393192" cy="310896"/>
+          </a:xfrm>
+          <a:prstGeom prst="rect">
+            <a:avLst/>
+          </a:prstGeom>
+          <a:solidFill>
+            <a:srgbClr val="005050"/>
           </a:solidFill>
           <a:ln>
             <a:noFill/>
@@ -7507,8 +7471,8 @@
         </p:nvSpPr>
         <p:spPr>
           <a:xfrm>
-            <a:off x="310896" y="2459736"/>
-            <a:ext cx="338328" cy="237744"/>
+            <a:off x="310896" y="2404872"/>
+            <a:ext cx="338328" cy="219456"/>
           </a:xfrm>
           <a:prstGeom prst="rect">
             <a:avLst/>
@@ -7541,8 +7505,8 @@
         </p:nvSpPr>
         <p:spPr>
           <a:xfrm>
-            <a:off x="694944" y="2404872"/>
-            <a:ext cx="5687568" cy="329184"/>
+            <a:off x="694944" y="2350008"/>
+            <a:ext cx="5687568" cy="310896"/>
           </a:xfrm>
           <a:prstGeom prst="rect">
             <a:avLst/>
@@ -7584,8 +7548,8 @@
         </p:nvSpPr>
         <p:spPr>
           <a:xfrm>
-            <a:off x="768096" y="2459736"/>
-            <a:ext cx="5577840" cy="256031"/>
+            <a:off x="768096" y="2404872"/>
+            <a:ext cx="5577840" cy="237744"/>
           </a:xfrm>
           <a:prstGeom prst="rect">
             <a:avLst/>
@@ -7618,8 +7582,8 @@
         </p:nvSpPr>
         <p:spPr>
           <a:xfrm>
-            <a:off x="6400800" y="2404872"/>
-            <a:ext cx="2624328" cy="329184"/>
+            <a:off x="6400800" y="2350008"/>
+            <a:ext cx="2624328" cy="310896"/>
           </a:xfrm>
           <a:prstGeom prst="rect">
             <a:avLst/>
@@ -7661,8 +7625,8 @@
         </p:nvSpPr>
         <p:spPr>
           <a:xfrm>
-            <a:off x="6455664" y="2459736"/>
-            <a:ext cx="2532888" cy="256031"/>
+            <a:off x="6455664" y="2404872"/>
+            <a:ext cx="2532888" cy="237744"/>
           </a:xfrm>
           <a:prstGeom prst="rect">
             <a:avLst/>
@@ -7695,8 +7659,8 @@
         </p:nvSpPr>
         <p:spPr>
           <a:xfrm>
-            <a:off x="9052560" y="2404872"/>
-            <a:ext cx="713232" cy="329184"/>
+            <a:off x="9052560" y="2350008"/>
+            <a:ext cx="713232" cy="310896"/>
           </a:xfrm>
           <a:prstGeom prst="rect">
             <a:avLst/>
@@ -7740,8 +7704,8 @@
         </p:nvSpPr>
         <p:spPr>
           <a:xfrm>
-            <a:off x="9784080" y="2404872"/>
-            <a:ext cx="713232" cy="329184"/>
+            <a:off x="9784080" y="2350008"/>
+            <a:ext cx="713232" cy="310896"/>
           </a:xfrm>
           <a:prstGeom prst="rect">
             <a:avLst/>
@@ -7785,8 +7749,8 @@
         </p:nvSpPr>
         <p:spPr>
           <a:xfrm>
-            <a:off x="10515600" y="2404872"/>
-            <a:ext cx="713232" cy="329184"/>
+            <a:off x="10515600" y="2350008"/>
+            <a:ext cx="713232" cy="310896"/>
           </a:xfrm>
           <a:prstGeom prst="rect">
             <a:avLst/>
@@ -7830,8 +7794,8 @@
         </p:nvSpPr>
         <p:spPr>
           <a:xfrm>
-            <a:off x="11247120" y="2404872"/>
-            <a:ext cx="685800" cy="329184"/>
+            <a:off x="11247120" y="2350008"/>
+            <a:ext cx="685800" cy="310896"/>
           </a:xfrm>
           <a:prstGeom prst="rect">
             <a:avLst/>
@@ -7875,14 +7839,14 @@
         </p:nvSpPr>
         <p:spPr>
           <a:xfrm>
-            <a:off x="274320" y="2743200"/>
-            <a:ext cx="393192" cy="329184"/>
-          </a:xfrm>
-          <a:prstGeom prst="rect">
-            <a:avLst/>
-          </a:prstGeom>
-          <a:solidFill>
-            <a:srgbClr val="005555"/>
+            <a:off x="274320" y="2670048"/>
+            <a:ext cx="393192" cy="310896"/>
+          </a:xfrm>
+          <a:prstGeom prst="rect">
+            <a:avLst/>
+          </a:prstGeom>
+          <a:solidFill>
+            <a:srgbClr val="005050"/>
           </a:solidFill>
           <a:ln>
             <a:noFill/>
@@ -7918,8 +7882,8 @@
         </p:nvSpPr>
         <p:spPr>
           <a:xfrm>
-            <a:off x="310896" y="2798064"/>
-            <a:ext cx="338328" cy="237744"/>
+            <a:off x="310896" y="2724912"/>
+            <a:ext cx="338328" cy="219456"/>
           </a:xfrm>
           <a:prstGeom prst="rect">
             <a:avLst/>
@@ -7952,8 +7916,8 @@
         </p:nvSpPr>
         <p:spPr>
           <a:xfrm>
-            <a:off x="694944" y="2743200"/>
-            <a:ext cx="5687568" cy="329184"/>
+            <a:off x="694944" y="2670048"/>
+            <a:ext cx="5687568" cy="310896"/>
           </a:xfrm>
           <a:prstGeom prst="rect">
             <a:avLst/>
@@ -7995,8 +7959,8 @@
         </p:nvSpPr>
         <p:spPr>
           <a:xfrm>
-            <a:off x="768096" y="2798064"/>
-            <a:ext cx="5577840" cy="256031"/>
+            <a:off x="768096" y="2724912"/>
+            <a:ext cx="5577840" cy="237744"/>
           </a:xfrm>
           <a:prstGeom prst="rect">
             <a:avLst/>
@@ -8029,8 +7993,8 @@
         </p:nvSpPr>
         <p:spPr>
           <a:xfrm>
-            <a:off x="6400800" y="2743200"/>
-            <a:ext cx="2624328" cy="329184"/>
+            <a:off x="6400800" y="2670048"/>
+            <a:ext cx="2624328" cy="310896"/>
           </a:xfrm>
           <a:prstGeom prst="rect">
             <a:avLst/>
@@ -8072,8 +8036,8 @@
         </p:nvSpPr>
         <p:spPr>
           <a:xfrm>
-            <a:off x="6455664" y="2798064"/>
-            <a:ext cx="2532888" cy="256031"/>
+            <a:off x="6455664" y="2724912"/>
+            <a:ext cx="2532888" cy="237744"/>
           </a:xfrm>
           <a:prstGeom prst="rect">
             <a:avLst/>
@@ -8106,8 +8070,8 @@
         </p:nvSpPr>
         <p:spPr>
           <a:xfrm>
-            <a:off x="9052560" y="2743200"/>
-            <a:ext cx="713232" cy="329184"/>
+            <a:off x="9052560" y="2670048"/>
+            <a:ext cx="713232" cy="310896"/>
           </a:xfrm>
           <a:prstGeom prst="rect">
             <a:avLst/>
@@ -8151,8 +8115,8 @@
         </p:nvSpPr>
         <p:spPr>
           <a:xfrm>
-            <a:off x="9784080" y="2743200"/>
-            <a:ext cx="713232" cy="329184"/>
+            <a:off x="9784080" y="2670048"/>
+            <a:ext cx="713232" cy="310896"/>
           </a:xfrm>
           <a:prstGeom prst="rect">
             <a:avLst/>
@@ -8196,8 +8160,8 @@
         </p:nvSpPr>
         <p:spPr>
           <a:xfrm>
-            <a:off x="10515600" y="2743200"/>
-            <a:ext cx="713232" cy="329184"/>
+            <a:off x="10515600" y="2670048"/>
+            <a:ext cx="713232" cy="310896"/>
           </a:xfrm>
           <a:prstGeom prst="rect">
             <a:avLst/>
@@ -8241,8 +8205,8 @@
         </p:nvSpPr>
         <p:spPr>
           <a:xfrm>
-            <a:off x="11247120" y="2743200"/>
-            <a:ext cx="685800" cy="329184"/>
+            <a:off x="11247120" y="2670048"/>
+            <a:ext cx="685800" cy="310896"/>
           </a:xfrm>
           <a:prstGeom prst="rect">
             <a:avLst/>
@@ -8286,14 +8250,14 @@
         </p:nvSpPr>
         <p:spPr>
           <a:xfrm>
-            <a:off x="274320" y="3081528"/>
-            <a:ext cx="393192" cy="329184"/>
-          </a:xfrm>
-          <a:prstGeom prst="rect">
-            <a:avLst/>
-          </a:prstGeom>
-          <a:solidFill>
-            <a:srgbClr val="005555"/>
+            <a:off x="274320" y="2990088"/>
+            <a:ext cx="393192" cy="310896"/>
+          </a:xfrm>
+          <a:prstGeom prst="rect">
+            <a:avLst/>
+          </a:prstGeom>
+          <a:solidFill>
+            <a:srgbClr val="005050"/>
           </a:solidFill>
           <a:ln>
             <a:noFill/>
@@ -8329,8 +8293,8 @@
         </p:nvSpPr>
         <p:spPr>
           <a:xfrm>
-            <a:off x="310896" y="3136392"/>
-            <a:ext cx="338328" cy="237744"/>
+            <a:off x="310896" y="3044952"/>
+            <a:ext cx="338328" cy="219456"/>
           </a:xfrm>
           <a:prstGeom prst="rect">
             <a:avLst/>
@@ -8363,8 +8327,8 @@
         </p:nvSpPr>
         <p:spPr>
           <a:xfrm>
-            <a:off x="694944" y="3081528"/>
-            <a:ext cx="5687568" cy="329184"/>
+            <a:off x="694944" y="2990088"/>
+            <a:ext cx="5687568" cy="310896"/>
           </a:xfrm>
           <a:prstGeom prst="rect">
             <a:avLst/>
@@ -8406,8 +8370,8 @@
         </p:nvSpPr>
         <p:spPr>
           <a:xfrm>
-            <a:off x="768096" y="3136392"/>
-            <a:ext cx="5577840" cy="256031"/>
+            <a:off x="768096" y="3044952"/>
+            <a:ext cx="5577840" cy="237744"/>
           </a:xfrm>
           <a:prstGeom prst="rect">
             <a:avLst/>
@@ -8440,8 +8404,8 @@
         </p:nvSpPr>
         <p:spPr>
           <a:xfrm>
-            <a:off x="6400800" y="3081528"/>
-            <a:ext cx="2624328" cy="329184"/>
+            <a:off x="6400800" y="2990088"/>
+            <a:ext cx="2624328" cy="310896"/>
           </a:xfrm>
           <a:prstGeom prst="rect">
             <a:avLst/>
@@ -8483,8 +8447,8 @@
         </p:nvSpPr>
         <p:spPr>
           <a:xfrm>
-            <a:off x="6455664" y="3136392"/>
-            <a:ext cx="2532888" cy="256031"/>
+            <a:off x="6455664" y="3044952"/>
+            <a:ext cx="2532888" cy="237744"/>
           </a:xfrm>
           <a:prstGeom prst="rect">
             <a:avLst/>
@@ -8517,8 +8481,8 @@
         </p:nvSpPr>
         <p:spPr>
           <a:xfrm>
-            <a:off x="9052560" y="3081528"/>
-            <a:ext cx="713232" cy="329184"/>
+            <a:off x="9052560" y="2990088"/>
+            <a:ext cx="713232" cy="310896"/>
           </a:xfrm>
           <a:prstGeom prst="rect">
             <a:avLst/>
@@ -8562,8 +8526,8 @@
         </p:nvSpPr>
         <p:spPr>
           <a:xfrm>
-            <a:off x="9784080" y="3081528"/>
-            <a:ext cx="713232" cy="329184"/>
+            <a:off x="9784080" y="2990088"/>
+            <a:ext cx="713232" cy="310896"/>
           </a:xfrm>
           <a:prstGeom prst="rect">
             <a:avLst/>
@@ -8607,8 +8571,8 @@
         </p:nvSpPr>
         <p:spPr>
           <a:xfrm>
-            <a:off x="10515600" y="3081528"/>
-            <a:ext cx="713232" cy="329184"/>
+            <a:off x="10515600" y="2990088"/>
+            <a:ext cx="713232" cy="310896"/>
           </a:xfrm>
           <a:prstGeom prst="rect">
             <a:avLst/>
@@ -8652,8 +8616,8 @@
         </p:nvSpPr>
         <p:spPr>
           <a:xfrm>
-            <a:off x="11247120" y="3081528"/>
-            <a:ext cx="685800" cy="329184"/>
+            <a:off x="11247120" y="2990088"/>
+            <a:ext cx="685800" cy="310896"/>
           </a:xfrm>
           <a:prstGeom prst="rect">
             <a:avLst/>
@@ -8697,14 +8661,14 @@
         </p:nvSpPr>
         <p:spPr>
           <a:xfrm>
-            <a:off x="274320" y="3419856"/>
-            <a:ext cx="393192" cy="329184"/>
-          </a:xfrm>
-          <a:prstGeom prst="rect">
-            <a:avLst/>
-          </a:prstGeom>
-          <a:solidFill>
-            <a:srgbClr val="005555"/>
+            <a:off x="274320" y="3310128"/>
+            <a:ext cx="393192" cy="310896"/>
+          </a:xfrm>
+          <a:prstGeom prst="rect">
+            <a:avLst/>
+          </a:prstGeom>
+          <a:solidFill>
+            <a:srgbClr val="005050"/>
           </a:solidFill>
           <a:ln>
             <a:noFill/>
@@ -8740,8 +8704,8 @@
         </p:nvSpPr>
         <p:spPr>
           <a:xfrm>
-            <a:off x="310896" y="3474720"/>
-            <a:ext cx="338328" cy="237744"/>
+            <a:off x="310896" y="3364992"/>
+            <a:ext cx="338328" cy="219456"/>
           </a:xfrm>
           <a:prstGeom prst="rect">
             <a:avLst/>
@@ -8774,8 +8738,8 @@
         </p:nvSpPr>
         <p:spPr>
           <a:xfrm>
-            <a:off x="694944" y="3419856"/>
-            <a:ext cx="5687568" cy="329184"/>
+            <a:off x="694944" y="3310128"/>
+            <a:ext cx="5687568" cy="310896"/>
           </a:xfrm>
           <a:prstGeom prst="rect">
             <a:avLst/>
@@ -8817,8 +8781,8 @@
         </p:nvSpPr>
         <p:spPr>
           <a:xfrm>
-            <a:off x="768096" y="3474720"/>
-            <a:ext cx="5577840" cy="256031"/>
+            <a:off x="768096" y="3364992"/>
+            <a:ext cx="5577840" cy="237744"/>
           </a:xfrm>
           <a:prstGeom prst="rect">
             <a:avLst/>
@@ -8838,7 +8802,7 @@
                   <a:srgbClr val="1A1A1A"/>
                 </a:solidFill>
               </a:rPr>
-              <a:t>Gestion du don ponctuel → réorientation PA</a:t>
+              <a:t>Gestion don ponctuel → réorientation PA</a:t>
             </a:r>
           </a:p>
         </p:txBody>
@@ -8851,8 +8815,8 @@
         </p:nvSpPr>
         <p:spPr>
           <a:xfrm>
-            <a:off x="6400800" y="3419856"/>
-            <a:ext cx="2624328" cy="329184"/>
+            <a:off x="6400800" y="3310128"/>
+            <a:ext cx="2624328" cy="310896"/>
           </a:xfrm>
           <a:prstGeom prst="rect">
             <a:avLst/>
@@ -8894,8 +8858,8 @@
         </p:nvSpPr>
         <p:spPr>
           <a:xfrm>
-            <a:off x="6455664" y="3474720"/>
-            <a:ext cx="2532888" cy="256031"/>
+            <a:off x="6455664" y="3364992"/>
+            <a:ext cx="2532888" cy="237744"/>
           </a:xfrm>
           <a:prstGeom prst="rect">
             <a:avLst/>
@@ -8928,8 +8892,8 @@
         </p:nvSpPr>
         <p:spPr>
           <a:xfrm>
-            <a:off x="9052560" y="3419856"/>
-            <a:ext cx="713232" cy="329184"/>
+            <a:off x="9052560" y="3310128"/>
+            <a:ext cx="713232" cy="310896"/>
           </a:xfrm>
           <a:prstGeom prst="rect">
             <a:avLst/>
@@ -8973,8 +8937,8 @@
         </p:nvSpPr>
         <p:spPr>
           <a:xfrm>
-            <a:off x="9784080" y="3419856"/>
-            <a:ext cx="713232" cy="329184"/>
+            <a:off x="9784080" y="3310128"/>
+            <a:ext cx="713232" cy="310896"/>
           </a:xfrm>
           <a:prstGeom prst="rect">
             <a:avLst/>
@@ -9018,8 +8982,8 @@
         </p:nvSpPr>
         <p:spPr>
           <a:xfrm>
-            <a:off x="10515600" y="3419856"/>
-            <a:ext cx="713232" cy="329184"/>
+            <a:off x="10515600" y="3310128"/>
+            <a:ext cx="713232" cy="310896"/>
           </a:xfrm>
           <a:prstGeom prst="rect">
             <a:avLst/>
@@ -9063,8 +9027,8 @@
         </p:nvSpPr>
         <p:spPr>
           <a:xfrm>
-            <a:off x="11247120" y="3419856"/>
-            <a:ext cx="685800" cy="329184"/>
+            <a:off x="11247120" y="3310128"/>
+            <a:ext cx="685800" cy="310896"/>
           </a:xfrm>
           <a:prstGeom prst="rect">
             <a:avLst/>
@@ -9108,14 +9072,14 @@
         </p:nvSpPr>
         <p:spPr>
           <a:xfrm>
-            <a:off x="274320" y="3758184"/>
-            <a:ext cx="393192" cy="329184"/>
-          </a:xfrm>
-          <a:prstGeom prst="rect">
-            <a:avLst/>
-          </a:prstGeom>
-          <a:solidFill>
-            <a:srgbClr val="005555"/>
+            <a:off x="274320" y="3630168"/>
+            <a:ext cx="393192" cy="310896"/>
+          </a:xfrm>
+          <a:prstGeom prst="rect">
+            <a:avLst/>
+          </a:prstGeom>
+          <a:solidFill>
+            <a:srgbClr val="005050"/>
           </a:solidFill>
           <a:ln>
             <a:noFill/>
@@ -9151,8 +9115,8 @@
         </p:nvSpPr>
         <p:spPr>
           <a:xfrm>
-            <a:off x="310896" y="3813048"/>
-            <a:ext cx="338328" cy="237744"/>
+            <a:off x="310896" y="3685032"/>
+            <a:ext cx="338328" cy="219456"/>
           </a:xfrm>
           <a:prstGeom prst="rect">
             <a:avLst/>
@@ -9185,8 +9149,8 @@
         </p:nvSpPr>
         <p:spPr>
           <a:xfrm>
-            <a:off x="694944" y="3758184"/>
-            <a:ext cx="5687568" cy="329184"/>
+            <a:off x="694944" y="3630168"/>
+            <a:ext cx="5687568" cy="310896"/>
           </a:xfrm>
           <a:prstGeom prst="rect">
             <a:avLst/>
@@ -9228,8 +9192,8 @@
         </p:nvSpPr>
         <p:spPr>
           <a:xfrm>
-            <a:off x="768096" y="3813048"/>
-            <a:ext cx="5577840" cy="256031"/>
+            <a:off x="768096" y="3685032"/>
+            <a:ext cx="5577840" cy="237744"/>
           </a:xfrm>
           <a:prstGeom prst="rect">
             <a:avLst/>
@@ -9249,7 +9213,7 @@
                   <a:srgbClr val="1A1A1A"/>
                 </a:solidFill>
               </a:rPr>
-              <a:t>Gestion de l'indécis — relance constructive</a:t>
+              <a:t>Gestion indécis — relance constructive</a:t>
             </a:r>
           </a:p>
         </p:txBody>
@@ -9262,8 +9226,8 @@
         </p:nvSpPr>
         <p:spPr>
           <a:xfrm>
-            <a:off x="6400800" y="3758184"/>
-            <a:ext cx="2624328" cy="329184"/>
+            <a:off x="6400800" y="3630168"/>
+            <a:ext cx="2624328" cy="310896"/>
           </a:xfrm>
           <a:prstGeom prst="rect">
             <a:avLst/>
@@ -9305,8 +9269,8 @@
         </p:nvSpPr>
         <p:spPr>
           <a:xfrm>
-            <a:off x="6455664" y="3813048"/>
-            <a:ext cx="2532888" cy="256031"/>
+            <a:off x="6455664" y="3685032"/>
+            <a:ext cx="2532888" cy="237744"/>
           </a:xfrm>
           <a:prstGeom prst="rect">
             <a:avLst/>
@@ -9339,8 +9303,8 @@
         </p:nvSpPr>
         <p:spPr>
           <a:xfrm>
-            <a:off x="9052560" y="3758184"/>
-            <a:ext cx="713232" cy="329184"/>
+            <a:off x="9052560" y="3630168"/>
+            <a:ext cx="713232" cy="310896"/>
           </a:xfrm>
           <a:prstGeom prst="rect">
             <a:avLst/>
@@ -9384,8 +9348,8 @@
         </p:nvSpPr>
         <p:spPr>
           <a:xfrm>
-            <a:off x="9784080" y="3758184"/>
-            <a:ext cx="713232" cy="329184"/>
+            <a:off x="9784080" y="3630168"/>
+            <a:ext cx="713232" cy="310896"/>
           </a:xfrm>
           <a:prstGeom prst="rect">
             <a:avLst/>
@@ -9429,8 +9393,8 @@
         </p:nvSpPr>
         <p:spPr>
           <a:xfrm>
-            <a:off x="10515600" y="3758184"/>
-            <a:ext cx="713232" cy="329184"/>
+            <a:off x="10515600" y="3630168"/>
+            <a:ext cx="713232" cy="310896"/>
           </a:xfrm>
           <a:prstGeom prst="rect">
             <a:avLst/>
@@ -9474,8 +9438,8 @@
         </p:nvSpPr>
         <p:spPr>
           <a:xfrm>
-            <a:off x="11247120" y="3758184"/>
-            <a:ext cx="685800" cy="329184"/>
+            <a:off x="11247120" y="3630168"/>
+            <a:ext cx="685800" cy="310896"/>
           </a:xfrm>
           <a:prstGeom prst="rect">
             <a:avLst/>
@@ -9519,14 +9483,14 @@
         </p:nvSpPr>
         <p:spPr>
           <a:xfrm>
-            <a:off x="274320" y="4096512"/>
-            <a:ext cx="393192" cy="329184"/>
-          </a:xfrm>
-          <a:prstGeom prst="rect">
-            <a:avLst/>
-          </a:prstGeom>
-          <a:solidFill>
-            <a:srgbClr val="005555"/>
+            <a:off x="274320" y="3950208"/>
+            <a:ext cx="393192" cy="310896"/>
+          </a:xfrm>
+          <a:prstGeom prst="rect">
+            <a:avLst/>
+          </a:prstGeom>
+          <a:solidFill>
+            <a:srgbClr val="005050"/>
           </a:solidFill>
           <a:ln>
             <a:noFill/>
@@ -9562,8 +9526,8 @@
         </p:nvSpPr>
         <p:spPr>
           <a:xfrm>
-            <a:off x="310896" y="4151376"/>
-            <a:ext cx="338328" cy="237744"/>
+            <a:off x="310896" y="4005072"/>
+            <a:ext cx="338328" cy="219456"/>
           </a:xfrm>
           <a:prstGeom prst="rect">
             <a:avLst/>
@@ -9596,8 +9560,8 @@
         </p:nvSpPr>
         <p:spPr>
           <a:xfrm>
-            <a:off x="694944" y="4096512"/>
-            <a:ext cx="5687568" cy="329184"/>
+            <a:off x="694944" y="3950208"/>
+            <a:ext cx="5687568" cy="310896"/>
           </a:xfrm>
           <a:prstGeom prst="rect">
             <a:avLst/>
@@ -9639,8 +9603,8 @@
         </p:nvSpPr>
         <p:spPr>
           <a:xfrm>
-            <a:off x="768096" y="4151376"/>
-            <a:ext cx="5577840" cy="256031"/>
+            <a:off x="768096" y="4005072"/>
+            <a:ext cx="5577840" cy="237744"/>
           </a:xfrm>
           <a:prstGeom prst="rect">
             <a:avLst/>
@@ -9660,7 +9624,7 @@
                   <a:srgbClr val="1A1A1A"/>
                 </a:solidFill>
               </a:rPr>
-              <a:t>Validation coordonnées — mode de paiement choisi</a:t>
+              <a:t>Validation coordonnées — mode paiement</a:t>
             </a:r>
           </a:p>
         </p:txBody>
@@ -9673,8 +9637,8 @@
         </p:nvSpPr>
         <p:spPr>
           <a:xfrm>
-            <a:off x="6400800" y="4096512"/>
-            <a:ext cx="2624328" cy="329184"/>
+            <a:off x="6400800" y="3950208"/>
+            <a:ext cx="2624328" cy="310896"/>
           </a:xfrm>
           <a:prstGeom prst="rect">
             <a:avLst/>
@@ -9716,8 +9680,8 @@
         </p:nvSpPr>
         <p:spPr>
           <a:xfrm>
-            <a:off x="6455664" y="4151376"/>
-            <a:ext cx="2532888" cy="256031"/>
+            <a:off x="6455664" y="4005072"/>
+            <a:ext cx="2532888" cy="237744"/>
           </a:xfrm>
           <a:prstGeom prst="rect">
             <a:avLst/>
@@ -9750,8 +9714,8 @@
         </p:nvSpPr>
         <p:spPr>
           <a:xfrm>
-            <a:off x="9052560" y="4096512"/>
-            <a:ext cx="713232" cy="329184"/>
+            <a:off x="9052560" y="3950208"/>
+            <a:ext cx="713232" cy="310896"/>
           </a:xfrm>
           <a:prstGeom prst="rect">
             <a:avLst/>
@@ -9795,8 +9759,8 @@
         </p:nvSpPr>
         <p:spPr>
           <a:xfrm>
-            <a:off x="9784080" y="4096512"/>
-            <a:ext cx="713232" cy="329184"/>
+            <a:off x="9784080" y="3950208"/>
+            <a:ext cx="713232" cy="310896"/>
           </a:xfrm>
           <a:prstGeom prst="rect">
             <a:avLst/>
@@ -9840,8 +9804,8 @@
         </p:nvSpPr>
         <p:spPr>
           <a:xfrm>
-            <a:off x="10515600" y="4096512"/>
-            <a:ext cx="713232" cy="329184"/>
+            <a:off x="10515600" y="3950208"/>
+            <a:ext cx="713232" cy="310896"/>
           </a:xfrm>
           <a:prstGeom prst="rect">
             <a:avLst/>
@@ -9885,8 +9849,8 @@
         </p:nvSpPr>
         <p:spPr>
           <a:xfrm>
-            <a:off x="11247120" y="4096512"/>
-            <a:ext cx="685800" cy="329184"/>
+            <a:off x="11247120" y="3950208"/>
+            <a:ext cx="685800" cy="310896"/>
           </a:xfrm>
           <a:prstGeom prst="rect">
             <a:avLst/>
@@ -9930,14 +9894,14 @@
         </p:nvSpPr>
         <p:spPr>
           <a:xfrm>
-            <a:off x="274320" y="4434840"/>
-            <a:ext cx="393192" cy="329184"/>
-          </a:xfrm>
-          <a:prstGeom prst="rect">
-            <a:avLst/>
-          </a:prstGeom>
-          <a:solidFill>
-            <a:srgbClr val="005555"/>
+            <a:off x="274320" y="4270248"/>
+            <a:ext cx="393192" cy="310896"/>
+          </a:xfrm>
+          <a:prstGeom prst="rect">
+            <a:avLst/>
+          </a:prstGeom>
+          <a:solidFill>
+            <a:srgbClr val="005050"/>
           </a:solidFill>
           <a:ln>
             <a:noFill/>
@@ -9973,8 +9937,8 @@
         </p:nvSpPr>
         <p:spPr>
           <a:xfrm>
-            <a:off x="310896" y="4489704"/>
-            <a:ext cx="338328" cy="237744"/>
+            <a:off x="310896" y="4325112"/>
+            <a:ext cx="338328" cy="219456"/>
           </a:xfrm>
           <a:prstGeom prst="rect">
             <a:avLst/>
@@ -10007,8 +9971,8 @@
         </p:nvSpPr>
         <p:spPr>
           <a:xfrm>
-            <a:off x="694944" y="4434840"/>
-            <a:ext cx="5687568" cy="329184"/>
+            <a:off x="694944" y="4270248"/>
+            <a:ext cx="5687568" cy="310896"/>
           </a:xfrm>
           <a:prstGeom prst="rect">
             <a:avLst/>
@@ -10050,8 +10014,8 @@
         </p:nvSpPr>
         <p:spPr>
           <a:xfrm>
-            <a:off x="768096" y="4489704"/>
-            <a:ext cx="5577840" cy="256031"/>
+            <a:off x="768096" y="4325112"/>
+            <a:ext cx="5577840" cy="237744"/>
           </a:xfrm>
           <a:prstGeom prst="rect">
             <a:avLst/>
@@ -10071,7 +10035,7 @@
                   <a:srgbClr val="1A1A1A"/>
                 </a:solidFill>
               </a:rPr>
-              <a:t>Accusé réception sincère des objections Cat.1</a:t>
+              <a:t>Accusé réception objections Cat.1</a:t>
             </a:r>
           </a:p>
         </p:txBody>
@@ -10084,8 +10048,8 @@
         </p:nvSpPr>
         <p:spPr>
           <a:xfrm>
-            <a:off x="6400800" y="4434840"/>
-            <a:ext cx="2624328" cy="329184"/>
+            <a:off x="6400800" y="4270248"/>
+            <a:ext cx="2624328" cy="310896"/>
           </a:xfrm>
           <a:prstGeom prst="rect">
             <a:avLst/>
@@ -10127,8 +10091,8 @@
         </p:nvSpPr>
         <p:spPr>
           <a:xfrm>
-            <a:off x="6455664" y="4489704"/>
-            <a:ext cx="2532888" cy="256031"/>
+            <a:off x="6455664" y="4325112"/>
+            <a:ext cx="2532888" cy="237744"/>
           </a:xfrm>
           <a:prstGeom prst="rect">
             <a:avLst/>
@@ -10161,8 +10125,8 @@
         </p:nvSpPr>
         <p:spPr>
           <a:xfrm>
-            <a:off x="9052560" y="4434840"/>
-            <a:ext cx="713232" cy="329184"/>
+            <a:off x="9052560" y="4270248"/>
+            <a:ext cx="713232" cy="310896"/>
           </a:xfrm>
           <a:prstGeom prst="rect">
             <a:avLst/>
@@ -10206,8 +10170,8 @@
         </p:nvSpPr>
         <p:spPr>
           <a:xfrm>
-            <a:off x="9784080" y="4434840"/>
-            <a:ext cx="713232" cy="329184"/>
+            <a:off x="9784080" y="4270248"/>
+            <a:ext cx="713232" cy="310896"/>
           </a:xfrm>
           <a:prstGeom prst="rect">
             <a:avLst/>
@@ -10251,8 +10215,8 @@
         </p:nvSpPr>
         <p:spPr>
           <a:xfrm>
-            <a:off x="10515600" y="4434840"/>
-            <a:ext cx="713232" cy="329184"/>
+            <a:off x="10515600" y="4270248"/>
+            <a:ext cx="713232" cy="310896"/>
           </a:xfrm>
           <a:prstGeom prst="rect">
             <a:avLst/>
@@ -10296,8 +10260,8 @@
         </p:nvSpPr>
         <p:spPr>
           <a:xfrm>
-            <a:off x="11247120" y="4434840"/>
-            <a:ext cx="685800" cy="329184"/>
+            <a:off x="11247120" y="4270248"/>
+            <a:ext cx="685800" cy="310896"/>
           </a:xfrm>
           <a:prstGeom prst="rect">
             <a:avLst/>
@@ -10341,14 +10305,14 @@
         </p:nvSpPr>
         <p:spPr>
           <a:xfrm>
-            <a:off x="274320" y="4773168"/>
-            <a:ext cx="393192" cy="329184"/>
-          </a:xfrm>
-          <a:prstGeom prst="rect">
-            <a:avLst/>
-          </a:prstGeom>
-          <a:solidFill>
-            <a:srgbClr val="005555"/>
+            <a:off x="274320" y="4590288"/>
+            <a:ext cx="393192" cy="310896"/>
+          </a:xfrm>
+          <a:prstGeom prst="rect">
+            <a:avLst/>
+          </a:prstGeom>
+          <a:solidFill>
+            <a:srgbClr val="005050"/>
           </a:solidFill>
           <a:ln>
             <a:noFill/>
@@ -10384,8 +10348,8 @@
         </p:nvSpPr>
         <p:spPr>
           <a:xfrm>
-            <a:off x="310896" y="4828032"/>
-            <a:ext cx="338328" cy="237744"/>
+            <a:off x="310896" y="4645151"/>
+            <a:ext cx="338328" cy="219456"/>
           </a:xfrm>
           <a:prstGeom prst="rect">
             <a:avLst/>
@@ -10418,8 +10382,8 @@
         </p:nvSpPr>
         <p:spPr>
           <a:xfrm>
-            <a:off x="694944" y="4773168"/>
-            <a:ext cx="5687568" cy="329184"/>
+            <a:off x="694944" y="4590288"/>
+            <a:ext cx="5687568" cy="310896"/>
           </a:xfrm>
           <a:prstGeom prst="rect">
             <a:avLst/>
@@ -10461,8 +10425,8 @@
         </p:nvSpPr>
         <p:spPr>
           <a:xfrm>
-            <a:off x="768096" y="4828032"/>
-            <a:ext cx="5577840" cy="256031"/>
+            <a:off x="768096" y="4645151"/>
+            <a:ext cx="5577840" cy="237744"/>
           </a:xfrm>
           <a:prstGeom prst="rect">
             <a:avLst/>
@@ -10482,7 +10446,7 @@
                   <a:srgbClr val="1A1A1A"/>
                 </a:solidFill>
               </a:rPr>
-              <a:t>Argument financier précis + preuve concrète</a:t>
+              <a:t>Argument financier + preuve concrète</a:t>
             </a:r>
           </a:p>
         </p:txBody>
@@ -10495,8 +10459,8 @@
         </p:nvSpPr>
         <p:spPr>
           <a:xfrm>
-            <a:off x="6400800" y="4773168"/>
-            <a:ext cx="2624328" cy="329184"/>
+            <a:off x="6400800" y="4590288"/>
+            <a:ext cx="2624328" cy="310896"/>
           </a:xfrm>
           <a:prstGeom prst="rect">
             <a:avLst/>
@@ -10538,8 +10502,8 @@
         </p:nvSpPr>
         <p:spPr>
           <a:xfrm>
-            <a:off x="6455664" y="4828032"/>
-            <a:ext cx="2532888" cy="256031"/>
+            <a:off x="6455664" y="4645151"/>
+            <a:ext cx="2532888" cy="237744"/>
           </a:xfrm>
           <a:prstGeom prst="rect">
             <a:avLst/>
@@ -10572,8 +10536,8 @@
         </p:nvSpPr>
         <p:spPr>
           <a:xfrm>
-            <a:off x="9052560" y="4773168"/>
-            <a:ext cx="713232" cy="329184"/>
+            <a:off x="9052560" y="4590288"/>
+            <a:ext cx="713232" cy="310896"/>
           </a:xfrm>
           <a:prstGeom prst="rect">
             <a:avLst/>
@@ -10617,8 +10581,8 @@
         </p:nvSpPr>
         <p:spPr>
           <a:xfrm>
-            <a:off x="9784080" y="4773168"/>
-            <a:ext cx="713232" cy="329184"/>
+            <a:off x="9784080" y="4590288"/>
+            <a:ext cx="713232" cy="310896"/>
           </a:xfrm>
           <a:prstGeom prst="rect">
             <a:avLst/>
@@ -10662,8 +10626,8 @@
         </p:nvSpPr>
         <p:spPr>
           <a:xfrm>
-            <a:off x="10515600" y="4773168"/>
-            <a:ext cx="713232" cy="329184"/>
+            <a:off x="10515600" y="4590288"/>
+            <a:ext cx="713232" cy="310896"/>
           </a:xfrm>
           <a:prstGeom prst="rect">
             <a:avLst/>
@@ -10707,8 +10671,8 @@
         </p:nvSpPr>
         <p:spPr>
           <a:xfrm>
-            <a:off x="11247120" y="4773168"/>
-            <a:ext cx="685800" cy="329184"/>
+            <a:off x="11247120" y="4590288"/>
+            <a:ext cx="685800" cy="310896"/>
           </a:xfrm>
           <a:prstGeom prst="rect">
             <a:avLst/>
@@ -10752,14 +10716,14 @@
         </p:nvSpPr>
         <p:spPr>
           <a:xfrm>
-            <a:off x="274320" y="5111496"/>
-            <a:ext cx="393192" cy="329184"/>
-          </a:xfrm>
-          <a:prstGeom prst="rect">
-            <a:avLst/>
-          </a:prstGeom>
-          <a:solidFill>
-            <a:srgbClr val="005555"/>
+            <a:off x="274320" y="4910327"/>
+            <a:ext cx="393192" cy="310896"/>
+          </a:xfrm>
+          <a:prstGeom prst="rect">
+            <a:avLst/>
+          </a:prstGeom>
+          <a:solidFill>
+            <a:srgbClr val="005050"/>
           </a:solidFill>
           <a:ln>
             <a:noFill/>
@@ -10795,8 +10759,8 @@
         </p:nvSpPr>
         <p:spPr>
           <a:xfrm>
-            <a:off x="310896" y="5166360"/>
-            <a:ext cx="338328" cy="237744"/>
+            <a:off x="310896" y="4965191"/>
+            <a:ext cx="338328" cy="219456"/>
           </a:xfrm>
           <a:prstGeom prst="rect">
             <a:avLst/>
@@ -10829,8 +10793,8 @@
         </p:nvSpPr>
         <p:spPr>
           <a:xfrm>
-            <a:off x="694944" y="5111496"/>
-            <a:ext cx="5687568" cy="329184"/>
+            <a:off x="694944" y="4910327"/>
+            <a:ext cx="5687568" cy="310896"/>
           </a:xfrm>
           <a:prstGeom prst="rect">
             <a:avLst/>
@@ -10872,8 +10836,8 @@
         </p:nvSpPr>
         <p:spPr>
           <a:xfrm>
-            <a:off x="768096" y="5166360"/>
-            <a:ext cx="5577840" cy="256031"/>
+            <a:off x="768096" y="4965191"/>
+            <a:ext cx="5577840" cy="237744"/>
           </a:xfrm>
           <a:prstGeom prst="rect">
             <a:avLst/>
@@ -10893,7 +10857,7 @@
                   <a:srgbClr val="1A1A1A"/>
                 </a:solidFill>
               </a:rPr>
-              <a:t>Réorientation PA après objection ponctuel</a:t>
+              <a:t>Réorientation PA après refus ponctuel</a:t>
             </a:r>
           </a:p>
         </p:txBody>
@@ -10906,8 +10870,8 @@
         </p:nvSpPr>
         <p:spPr>
           <a:xfrm>
-            <a:off x="6400800" y="5111496"/>
-            <a:ext cx="2624328" cy="329184"/>
+            <a:off x="6400800" y="4910327"/>
+            <a:ext cx="2624328" cy="310896"/>
           </a:xfrm>
           <a:prstGeom prst="rect">
             <a:avLst/>
@@ -10949,8 +10913,8 @@
         </p:nvSpPr>
         <p:spPr>
           <a:xfrm>
-            <a:off x="6455664" y="5166360"/>
-            <a:ext cx="2532888" cy="256031"/>
+            <a:off x="6455664" y="4965191"/>
+            <a:ext cx="2532888" cy="237744"/>
           </a:xfrm>
           <a:prstGeom prst="rect">
             <a:avLst/>
@@ -10983,8 +10947,8 @@
         </p:nvSpPr>
         <p:spPr>
           <a:xfrm>
-            <a:off x="9052560" y="5111496"/>
-            <a:ext cx="713232" cy="329184"/>
+            <a:off x="9052560" y="4910327"/>
+            <a:ext cx="713232" cy="310896"/>
           </a:xfrm>
           <a:prstGeom prst="rect">
             <a:avLst/>
@@ -11028,8 +10992,8 @@
         </p:nvSpPr>
         <p:spPr>
           <a:xfrm>
-            <a:off x="9784080" y="5111496"/>
-            <a:ext cx="713232" cy="329184"/>
+            <a:off x="9784080" y="4910327"/>
+            <a:ext cx="713232" cy="310896"/>
           </a:xfrm>
           <a:prstGeom prst="rect">
             <a:avLst/>
@@ -11073,8 +11037,8 @@
         </p:nvSpPr>
         <p:spPr>
           <a:xfrm>
-            <a:off x="10515600" y="5111496"/>
-            <a:ext cx="713232" cy="329184"/>
+            <a:off x="10515600" y="4910327"/>
+            <a:ext cx="713232" cy="310896"/>
           </a:xfrm>
           <a:prstGeom prst="rect">
             <a:avLst/>
@@ -11118,8 +11082,8 @@
         </p:nvSpPr>
         <p:spPr>
           <a:xfrm>
-            <a:off x="11247120" y="5111496"/>
-            <a:ext cx="685800" cy="329184"/>
+            <a:off x="11247120" y="4910327"/>
+            <a:ext cx="685800" cy="310896"/>
           </a:xfrm>
           <a:prstGeom prst="rect">
             <a:avLst/>
@@ -11163,14 +11127,14 @@
         </p:nvSpPr>
         <p:spPr>
           <a:xfrm>
-            <a:off x="274320" y="5449824"/>
-            <a:ext cx="393192" cy="329184"/>
-          </a:xfrm>
-          <a:prstGeom prst="rect">
-            <a:avLst/>
-          </a:prstGeom>
-          <a:solidFill>
-            <a:srgbClr val="005555"/>
+            <a:off x="274320" y="5230367"/>
+            <a:ext cx="393192" cy="310896"/>
+          </a:xfrm>
+          <a:prstGeom prst="rect">
+            <a:avLst/>
+          </a:prstGeom>
+          <a:solidFill>
+            <a:srgbClr val="005050"/>
           </a:solidFill>
           <a:ln>
             <a:noFill/>
@@ -11206,8 +11170,8 @@
         </p:nvSpPr>
         <p:spPr>
           <a:xfrm>
-            <a:off x="310896" y="5504688"/>
-            <a:ext cx="338328" cy="237744"/>
+            <a:off x="310896" y="5285231"/>
+            <a:ext cx="338328" cy="219456"/>
           </a:xfrm>
           <a:prstGeom prst="rect">
             <a:avLst/>
@@ -11240,8 +11204,8 @@
         </p:nvSpPr>
         <p:spPr>
           <a:xfrm>
-            <a:off x="694944" y="5449824"/>
-            <a:ext cx="5687568" cy="329184"/>
+            <a:off x="694944" y="5230367"/>
+            <a:ext cx="5687568" cy="310896"/>
           </a:xfrm>
           <a:prstGeom prst="rect">
             <a:avLst/>
@@ -11283,8 +11247,8 @@
         </p:nvSpPr>
         <p:spPr>
           <a:xfrm>
-            <a:off x="768096" y="5504688"/>
-            <a:ext cx="5577840" cy="256031"/>
+            <a:off x="768096" y="5285231"/>
+            <a:ext cx="5577840" cy="237744"/>
           </a:xfrm>
           <a:prstGeom prst="rect">
             <a:avLst/>
@@ -11317,8 +11281,8 @@
         </p:nvSpPr>
         <p:spPr>
           <a:xfrm>
-            <a:off x="6400800" y="5449824"/>
-            <a:ext cx="2624328" cy="329184"/>
+            <a:off x="6400800" y="5230367"/>
+            <a:ext cx="2624328" cy="310896"/>
           </a:xfrm>
           <a:prstGeom prst="rect">
             <a:avLst/>
@@ -11360,8 +11324,8 @@
         </p:nvSpPr>
         <p:spPr>
           <a:xfrm>
-            <a:off x="6455664" y="5504688"/>
-            <a:ext cx="2532888" cy="256031"/>
+            <a:off x="6455664" y="5285231"/>
+            <a:ext cx="2532888" cy="237744"/>
           </a:xfrm>
           <a:prstGeom prst="rect">
             <a:avLst/>
@@ -11394,8 +11358,8 @@
         </p:nvSpPr>
         <p:spPr>
           <a:xfrm>
-            <a:off x="9052560" y="5449824"/>
-            <a:ext cx="713232" cy="329184"/>
+            <a:off x="9052560" y="5230367"/>
+            <a:ext cx="713232" cy="310896"/>
           </a:xfrm>
           <a:prstGeom prst="rect">
             <a:avLst/>
@@ -11439,8 +11403,8 @@
         </p:nvSpPr>
         <p:spPr>
           <a:xfrm>
-            <a:off x="9784080" y="5449824"/>
-            <a:ext cx="713232" cy="329184"/>
+            <a:off x="9784080" y="5230367"/>
+            <a:ext cx="713232" cy="310896"/>
           </a:xfrm>
           <a:prstGeom prst="rect">
             <a:avLst/>
@@ -11484,8 +11448,8 @@
         </p:nvSpPr>
         <p:spPr>
           <a:xfrm>
-            <a:off x="10515600" y="5449824"/>
-            <a:ext cx="713232" cy="329184"/>
+            <a:off x="10515600" y="5230367"/>
+            <a:ext cx="713232" cy="310896"/>
           </a:xfrm>
           <a:prstGeom prst="rect">
             <a:avLst/>
@@ -11529,8 +11493,8 @@
         </p:nvSpPr>
         <p:spPr>
           <a:xfrm>
-            <a:off x="11247120" y="5449824"/>
-            <a:ext cx="685800" cy="329184"/>
+            <a:off x="11247120" y="5230367"/>
+            <a:ext cx="685800" cy="310896"/>
           </a:xfrm>
           <a:prstGeom prst="rect">
             <a:avLst/>
@@ -11574,14 +11538,14 @@
         </p:nvSpPr>
         <p:spPr>
           <a:xfrm>
-            <a:off x="274320" y="5788152"/>
-            <a:ext cx="393192" cy="329184"/>
-          </a:xfrm>
-          <a:prstGeom prst="rect">
-            <a:avLst/>
-          </a:prstGeom>
-          <a:solidFill>
-            <a:srgbClr val="005555"/>
+            <a:off x="274320" y="5550407"/>
+            <a:ext cx="393192" cy="310896"/>
+          </a:xfrm>
+          <a:prstGeom prst="rect">
+            <a:avLst/>
+          </a:prstGeom>
+          <a:solidFill>
+            <a:srgbClr val="005050"/>
           </a:solidFill>
           <a:ln>
             <a:noFill/>
@@ -11617,8 +11581,8 @@
         </p:nvSpPr>
         <p:spPr>
           <a:xfrm>
-            <a:off x="310896" y="5843016"/>
-            <a:ext cx="338328" cy="237744"/>
+            <a:off x="310896" y="5605271"/>
+            <a:ext cx="338328" cy="219456"/>
           </a:xfrm>
           <a:prstGeom prst="rect">
             <a:avLst/>
@@ -11651,8 +11615,8 @@
         </p:nvSpPr>
         <p:spPr>
           <a:xfrm>
-            <a:off x="694944" y="5788152"/>
-            <a:ext cx="5687568" cy="329184"/>
+            <a:off x="694944" y="5550407"/>
+            <a:ext cx="5687568" cy="310896"/>
           </a:xfrm>
           <a:prstGeom prst="rect">
             <a:avLst/>
@@ -11694,8 +11658,8 @@
         </p:nvSpPr>
         <p:spPr>
           <a:xfrm>
-            <a:off x="768096" y="5843016"/>
-            <a:ext cx="5577840" cy="256031"/>
+            <a:off x="768096" y="5605271"/>
+            <a:ext cx="5577840" cy="237744"/>
           </a:xfrm>
           <a:prstGeom prst="rect">
             <a:avLst/>
@@ -11715,7 +11679,7 @@
                   <a:srgbClr val="1A1A1A"/>
                 </a:solidFill>
               </a:rPr>
-              <a:t>Gestion calme des objections conflictuelles</a:t>
+              <a:t>Gestion calme des objections Cat.5</a:t>
             </a:r>
           </a:p>
         </p:txBody>
@@ -11728,8 +11692,8 @@
         </p:nvSpPr>
         <p:spPr>
           <a:xfrm>
-            <a:off x="6400800" y="5788152"/>
-            <a:ext cx="2624328" cy="329184"/>
+            <a:off x="6400800" y="5550407"/>
+            <a:ext cx="2624328" cy="310896"/>
           </a:xfrm>
           <a:prstGeom prst="rect">
             <a:avLst/>
@@ -11771,8 +11735,8 @@
         </p:nvSpPr>
         <p:spPr>
           <a:xfrm>
-            <a:off x="6455664" y="5843016"/>
-            <a:ext cx="2532888" cy="256031"/>
+            <a:off x="6455664" y="5605271"/>
+            <a:ext cx="2532888" cy="237744"/>
           </a:xfrm>
           <a:prstGeom prst="rect">
             <a:avLst/>
@@ -11805,8 +11769,8 @@
         </p:nvSpPr>
         <p:spPr>
           <a:xfrm>
-            <a:off x="9052560" y="5788152"/>
-            <a:ext cx="713232" cy="329184"/>
+            <a:off x="9052560" y="5550407"/>
+            <a:ext cx="713232" cy="310896"/>
           </a:xfrm>
           <a:prstGeom prst="rect">
             <a:avLst/>
@@ -11850,8 +11814,8 @@
         </p:nvSpPr>
         <p:spPr>
           <a:xfrm>
-            <a:off x="9784080" y="5788152"/>
-            <a:ext cx="713232" cy="329184"/>
+            <a:off x="9784080" y="5550407"/>
+            <a:ext cx="713232" cy="310896"/>
           </a:xfrm>
           <a:prstGeom prst="rect">
             <a:avLst/>
@@ -11895,8 +11859,8 @@
         </p:nvSpPr>
         <p:spPr>
           <a:xfrm>
-            <a:off x="10515600" y="5788152"/>
-            <a:ext cx="713232" cy="329184"/>
+            <a:off x="10515600" y="5550407"/>
+            <a:ext cx="713232" cy="310896"/>
           </a:xfrm>
           <a:prstGeom prst="rect">
             <a:avLst/>
@@ -11940,8 +11904,8 @@
         </p:nvSpPr>
         <p:spPr>
           <a:xfrm>
-            <a:off x="11247120" y="5788152"/>
-            <a:ext cx="685800" cy="329184"/>
+            <a:off x="11247120" y="5550407"/>
+            <a:ext cx="685800" cy="310896"/>
           </a:xfrm>
           <a:prstGeom prst="rect">
             <a:avLst/>
@@ -11985,14 +11949,14 @@
         </p:nvSpPr>
         <p:spPr>
           <a:xfrm>
-            <a:off x="274320" y="6126480"/>
-            <a:ext cx="393192" cy="329184"/>
-          </a:xfrm>
-          <a:prstGeom prst="rect">
-            <a:avLst/>
-          </a:prstGeom>
-          <a:solidFill>
-            <a:srgbClr val="005555"/>
+            <a:off x="274320" y="5870447"/>
+            <a:ext cx="393192" cy="310896"/>
+          </a:xfrm>
+          <a:prstGeom prst="rect">
+            <a:avLst/>
+          </a:prstGeom>
+          <a:solidFill>
+            <a:srgbClr val="005050"/>
           </a:solidFill>
           <a:ln>
             <a:noFill/>
@@ -12028,8 +11992,8 @@
         </p:nvSpPr>
         <p:spPr>
           <a:xfrm>
-            <a:off x="310896" y="6181344"/>
-            <a:ext cx="338328" cy="237744"/>
+            <a:off x="310896" y="5925311"/>
+            <a:ext cx="338328" cy="219456"/>
           </a:xfrm>
           <a:prstGeom prst="rect">
             <a:avLst/>
@@ -12062,8 +12026,8 @@
         </p:nvSpPr>
         <p:spPr>
           <a:xfrm>
-            <a:off x="694944" y="6126480"/>
-            <a:ext cx="5687568" cy="329184"/>
+            <a:off x="694944" y="5870447"/>
+            <a:ext cx="5687568" cy="310896"/>
           </a:xfrm>
           <a:prstGeom prst="rect">
             <a:avLst/>
@@ -12105,8 +12069,8 @@
         </p:nvSpPr>
         <p:spPr>
           <a:xfrm>
-            <a:off x="768096" y="6181344"/>
-            <a:ext cx="5577840" cy="256031"/>
+            <a:off x="768096" y="5925311"/>
+            <a:ext cx="5577840" cy="237744"/>
           </a:xfrm>
           <a:prstGeom prst="rect">
             <a:avLst/>
@@ -12126,7 +12090,7 @@
                   <a:srgbClr val="1A1A1A"/>
                 </a:solidFill>
               </a:rPr>
-              <a:t>Ton maintenu chaleureux sur toute la durée</a:t>
+              <a:t>Ton chaleureux maintenu sur toute la durée</a:t>
             </a:r>
           </a:p>
         </p:txBody>
@@ -12139,8 +12103,8 @@
         </p:nvSpPr>
         <p:spPr>
           <a:xfrm>
-            <a:off x="6400800" y="6126480"/>
-            <a:ext cx="2624328" cy="329184"/>
+            <a:off x="6400800" y="5870447"/>
+            <a:ext cx="2624328" cy="310896"/>
           </a:xfrm>
           <a:prstGeom prst="rect">
             <a:avLst/>
@@ -12182,8 +12146,8 @@
         </p:nvSpPr>
         <p:spPr>
           <a:xfrm>
-            <a:off x="6455664" y="6181344"/>
-            <a:ext cx="2532888" cy="256031"/>
+            <a:off x="6455664" y="5925311"/>
+            <a:ext cx="2532888" cy="237744"/>
           </a:xfrm>
           <a:prstGeom prst="rect">
             <a:avLst/>
@@ -12216,8 +12180,8 @@
         </p:nvSpPr>
         <p:spPr>
           <a:xfrm>
-            <a:off x="9052560" y="6126480"/>
-            <a:ext cx="713232" cy="329184"/>
+            <a:off x="9052560" y="5870447"/>
+            <a:ext cx="713232" cy="310896"/>
           </a:xfrm>
           <a:prstGeom prst="rect">
             <a:avLst/>
@@ -12261,8 +12225,8 @@
         </p:nvSpPr>
         <p:spPr>
           <a:xfrm>
-            <a:off x="9784080" y="6126480"/>
-            <a:ext cx="713232" cy="329184"/>
+            <a:off x="9784080" y="5870447"/>
+            <a:ext cx="713232" cy="310896"/>
           </a:xfrm>
           <a:prstGeom prst="rect">
             <a:avLst/>
@@ -12306,8 +12270,8 @@
         </p:nvSpPr>
         <p:spPr>
           <a:xfrm>
-            <a:off x="10515600" y="6126480"/>
-            <a:ext cx="713232" cy="329184"/>
+            <a:off x="10515600" y="5870447"/>
+            <a:ext cx="713232" cy="310896"/>
           </a:xfrm>
           <a:prstGeom prst="rect">
             <a:avLst/>
@@ -12351,8 +12315,8 @@
         </p:nvSpPr>
         <p:spPr>
           <a:xfrm>
-            <a:off x="11247120" y="6126480"/>
-            <a:ext cx="685800" cy="329184"/>
+            <a:off x="11247120" y="5870447"/>
+            <a:ext cx="685800" cy="310896"/>
           </a:xfrm>
           <a:prstGeom prst="rect">
             <a:avLst/>
@@ -12396,14 +12360,14 @@
         </p:nvSpPr>
         <p:spPr>
           <a:xfrm>
-            <a:off x="274320" y="6464808"/>
-            <a:ext cx="393192" cy="329184"/>
-          </a:xfrm>
-          <a:prstGeom prst="rect">
-            <a:avLst/>
-          </a:prstGeom>
-          <a:solidFill>
-            <a:srgbClr val="005555"/>
+            <a:off x="274320" y="6190487"/>
+            <a:ext cx="393192" cy="310896"/>
+          </a:xfrm>
+          <a:prstGeom prst="rect">
+            <a:avLst/>
+          </a:prstGeom>
+          <a:solidFill>
+            <a:srgbClr val="005050"/>
           </a:solidFill>
           <a:ln>
             <a:noFill/>
@@ -12439,8 +12403,8 @@
         </p:nvSpPr>
         <p:spPr>
           <a:xfrm>
-            <a:off x="310896" y="6519672"/>
-            <a:ext cx="338328" cy="237744"/>
+            <a:off x="310896" y="6245351"/>
+            <a:ext cx="338328" cy="219456"/>
           </a:xfrm>
           <a:prstGeom prst="rect">
             <a:avLst/>
@@ -12473,8 +12437,8 @@
         </p:nvSpPr>
         <p:spPr>
           <a:xfrm>
-            <a:off x="694944" y="6464808"/>
-            <a:ext cx="5687568" cy="329184"/>
+            <a:off x="694944" y="6190487"/>
+            <a:ext cx="5687568" cy="310896"/>
           </a:xfrm>
           <a:prstGeom prst="rect">
             <a:avLst/>
@@ -12516,8 +12480,8 @@
         </p:nvSpPr>
         <p:spPr>
           <a:xfrm>
-            <a:off x="768096" y="6519672"/>
-            <a:ext cx="5577840" cy="256031"/>
+            <a:off x="768096" y="6245351"/>
+            <a:ext cx="5577840" cy="237744"/>
           </a:xfrm>
           <a:prstGeom prst="rect">
             <a:avLst/>
@@ -12550,8 +12514,8 @@
         </p:nvSpPr>
         <p:spPr>
           <a:xfrm>
-            <a:off x="6400800" y="6464808"/>
-            <a:ext cx="2624328" cy="329184"/>
+            <a:off x="6400800" y="6190487"/>
+            <a:ext cx="2624328" cy="310896"/>
           </a:xfrm>
           <a:prstGeom prst="rect">
             <a:avLst/>
@@ -12593,8 +12557,8 @@
         </p:nvSpPr>
         <p:spPr>
           <a:xfrm>
-            <a:off x="6455664" y="6519672"/>
-            <a:ext cx="2532888" cy="256031"/>
+            <a:off x="6455664" y="6245351"/>
+            <a:ext cx="2532888" cy="237744"/>
           </a:xfrm>
           <a:prstGeom prst="rect">
             <a:avLst/>
@@ -12627,8 +12591,8 @@
         </p:nvSpPr>
         <p:spPr>
           <a:xfrm>
-            <a:off x="9052560" y="6464808"/>
-            <a:ext cx="713232" cy="329184"/>
+            <a:off x="9052560" y="6190487"/>
+            <a:ext cx="713232" cy="310896"/>
           </a:xfrm>
           <a:prstGeom prst="rect">
             <a:avLst/>
@@ -12672,8 +12636,8 @@
         </p:nvSpPr>
         <p:spPr>
           <a:xfrm>
-            <a:off x="9784080" y="6464808"/>
-            <a:ext cx="713232" cy="329184"/>
+            <a:off x="9784080" y="6190487"/>
+            <a:ext cx="713232" cy="310896"/>
           </a:xfrm>
           <a:prstGeom prst="rect">
             <a:avLst/>
@@ -12717,8 +12681,8 @@
         </p:nvSpPr>
         <p:spPr>
           <a:xfrm>
-            <a:off x="10515600" y="6464808"/>
-            <a:ext cx="713232" cy="329184"/>
+            <a:off x="10515600" y="6190487"/>
+            <a:ext cx="713232" cy="310896"/>
           </a:xfrm>
           <a:prstGeom prst="rect">
             <a:avLst/>
@@ -12762,8 +12726,8 @@
         </p:nvSpPr>
         <p:spPr>
           <a:xfrm>
-            <a:off x="11247120" y="6464808"/>
-            <a:ext cx="685800" cy="329184"/>
+            <a:off x="11247120" y="6190487"/>
+            <a:ext cx="685800" cy="310896"/>
           </a:xfrm>
           <a:prstGeom prst="rect">
             <a:avLst/>
@@ -12807,14 +12771,14 @@
         </p:nvSpPr>
         <p:spPr>
           <a:xfrm>
-            <a:off x="274320" y="6803136"/>
-            <a:ext cx="393192" cy="329184"/>
-          </a:xfrm>
-          <a:prstGeom prst="rect">
-            <a:avLst/>
-          </a:prstGeom>
-          <a:solidFill>
-            <a:srgbClr val="005555"/>
+            <a:off x="274320" y="6510527"/>
+            <a:ext cx="393192" cy="310896"/>
+          </a:xfrm>
+          <a:prstGeom prst="rect">
+            <a:avLst/>
+          </a:prstGeom>
+          <a:solidFill>
+            <a:srgbClr val="005050"/>
           </a:solidFill>
           <a:ln>
             <a:noFill/>
@@ -12850,8 +12814,8 @@
         </p:nvSpPr>
         <p:spPr>
           <a:xfrm>
-            <a:off x="310896" y="6858000"/>
-            <a:ext cx="338328" cy="237744"/>
+            <a:off x="310896" y="6565391"/>
+            <a:ext cx="338328" cy="219456"/>
           </a:xfrm>
           <a:prstGeom prst="rect">
             <a:avLst/>
@@ -12884,8 +12848,8 @@
         </p:nvSpPr>
         <p:spPr>
           <a:xfrm>
-            <a:off x="694944" y="6803136"/>
-            <a:ext cx="5687568" cy="329184"/>
+            <a:off x="694944" y="6510527"/>
+            <a:ext cx="5687568" cy="310896"/>
           </a:xfrm>
           <a:prstGeom prst="rect">
             <a:avLst/>
@@ -12927,8 +12891,8 @@
         </p:nvSpPr>
         <p:spPr>
           <a:xfrm>
-            <a:off x="768096" y="6858000"/>
-            <a:ext cx="5577840" cy="256031"/>
+            <a:off x="768096" y="6565391"/>
+            <a:ext cx="5577840" cy="237744"/>
           </a:xfrm>
           <a:prstGeom prst="rect">
             <a:avLst/>
@@ -12948,7 +12912,7 @@
                   <a:srgbClr val="1A1A1A"/>
                 </a:solidFill>
               </a:rPr>
-              <a:t>Absence d'hésitations et de tics verbaux</a:t>
+              <a:t>Absence d'hésitations et tics verbaux</a:t>
             </a:r>
           </a:p>
         </p:txBody>
@@ -12961,8 +12925,8 @@
         </p:nvSpPr>
         <p:spPr>
           <a:xfrm>
-            <a:off x="6400800" y="6803136"/>
-            <a:ext cx="2624328" cy="329184"/>
+            <a:off x="6400800" y="6510527"/>
+            <a:ext cx="2624328" cy="310896"/>
           </a:xfrm>
           <a:prstGeom prst="rect">
             <a:avLst/>
@@ -13004,8 +12968,8 @@
         </p:nvSpPr>
         <p:spPr>
           <a:xfrm>
-            <a:off x="6455664" y="6858000"/>
-            <a:ext cx="2532888" cy="256031"/>
+            <a:off x="6455664" y="6565391"/>
+            <a:ext cx="2532888" cy="237744"/>
           </a:xfrm>
           <a:prstGeom prst="rect">
             <a:avLst/>
@@ -13038,8 +13002,8 @@
         </p:nvSpPr>
         <p:spPr>
           <a:xfrm>
-            <a:off x="9052560" y="6803136"/>
-            <a:ext cx="713232" cy="329184"/>
+            <a:off x="9052560" y="6510527"/>
+            <a:ext cx="713232" cy="310896"/>
           </a:xfrm>
           <a:prstGeom prst="rect">
             <a:avLst/>
@@ -13083,8 +13047,8 @@
         </p:nvSpPr>
         <p:spPr>
           <a:xfrm>
-            <a:off x="9784080" y="6803136"/>
-            <a:ext cx="713232" cy="329184"/>
+            <a:off x="9784080" y="6510527"/>
+            <a:ext cx="713232" cy="310896"/>
           </a:xfrm>
           <a:prstGeom prst="rect">
             <a:avLst/>
@@ -13128,8 +13092,8 @@
         </p:nvSpPr>
         <p:spPr>
           <a:xfrm>
-            <a:off x="10515600" y="6803136"/>
-            <a:ext cx="713232" cy="329184"/>
+            <a:off x="10515600" y="6510527"/>
+            <a:ext cx="713232" cy="310896"/>
           </a:xfrm>
           <a:prstGeom prst="rect">
             <a:avLst/>
@@ -13173,8 +13137,8 @@
         </p:nvSpPr>
         <p:spPr>
           <a:xfrm>
-            <a:off x="11247120" y="6803136"/>
-            <a:ext cx="685800" cy="329184"/>
+            <a:off x="11247120" y="6510527"/>
+            <a:ext cx="685800" cy="310896"/>
           </a:xfrm>
           <a:prstGeom prst="rect">
             <a:avLst/>
@@ -13218,14 +13182,14 @@
         </p:nvSpPr>
         <p:spPr>
           <a:xfrm>
-            <a:off x="274320" y="7141464"/>
-            <a:ext cx="393192" cy="329184"/>
-          </a:xfrm>
-          <a:prstGeom prst="rect">
-            <a:avLst/>
-          </a:prstGeom>
-          <a:solidFill>
-            <a:srgbClr val="005555"/>
+            <a:off x="274320" y="6830567"/>
+            <a:ext cx="393192" cy="310896"/>
+          </a:xfrm>
+          <a:prstGeom prst="rect">
+            <a:avLst/>
+          </a:prstGeom>
+          <a:solidFill>
+            <a:srgbClr val="005050"/>
           </a:solidFill>
           <a:ln>
             <a:noFill/>
@@ -13261,8 +13225,8 @@
         </p:nvSpPr>
         <p:spPr>
           <a:xfrm>
-            <a:off x="310896" y="7196328"/>
-            <a:ext cx="338328" cy="237744"/>
+            <a:off x="310896" y="6885431"/>
+            <a:ext cx="338328" cy="219456"/>
           </a:xfrm>
           <a:prstGeom prst="rect">
             <a:avLst/>
@@ -13295,8 +13259,8 @@
         </p:nvSpPr>
         <p:spPr>
           <a:xfrm>
-            <a:off x="694944" y="7141464"/>
-            <a:ext cx="5687568" cy="329184"/>
+            <a:off x="694944" y="6830567"/>
+            <a:ext cx="5687568" cy="310896"/>
           </a:xfrm>
           <a:prstGeom prst="rect">
             <a:avLst/>
@@ -13338,8 +13302,8 @@
         </p:nvSpPr>
         <p:spPr>
           <a:xfrm>
-            <a:off x="768096" y="7196328"/>
-            <a:ext cx="5577840" cy="256031"/>
+            <a:off x="768096" y="6885431"/>
+            <a:ext cx="5577840" cy="237744"/>
           </a:xfrm>
           <a:prstGeom prst="rect">
             <a:avLst/>
@@ -13372,8 +13336,8 @@
         </p:nvSpPr>
         <p:spPr>
           <a:xfrm>
-            <a:off x="6400800" y="7141464"/>
-            <a:ext cx="2624328" cy="329184"/>
+            <a:off x="6400800" y="6830567"/>
+            <a:ext cx="2624328" cy="310896"/>
           </a:xfrm>
           <a:prstGeom prst="rect">
             <a:avLst/>
@@ -13415,8 +13379,8 @@
         </p:nvSpPr>
         <p:spPr>
           <a:xfrm>
-            <a:off x="6455664" y="7196328"/>
-            <a:ext cx="2532888" cy="256031"/>
+            <a:off x="6455664" y="6885431"/>
+            <a:ext cx="2532888" cy="237744"/>
           </a:xfrm>
           <a:prstGeom prst="rect">
             <a:avLst/>
@@ -13449,8 +13413,8 @@
         </p:nvSpPr>
         <p:spPr>
           <a:xfrm>
-            <a:off x="9052560" y="7141464"/>
-            <a:ext cx="713232" cy="329184"/>
+            <a:off x="9052560" y="6830567"/>
+            <a:ext cx="713232" cy="310896"/>
           </a:xfrm>
           <a:prstGeom prst="rect">
             <a:avLst/>
@@ -13494,8 +13458,8 @@
         </p:nvSpPr>
         <p:spPr>
           <a:xfrm>
-            <a:off x="9784080" y="7141464"/>
-            <a:ext cx="713232" cy="329184"/>
+            <a:off x="9784080" y="6830567"/>
+            <a:ext cx="713232" cy="310896"/>
           </a:xfrm>
           <a:prstGeom prst="rect">
             <a:avLst/>
@@ -13539,8 +13503,8 @@
         </p:nvSpPr>
         <p:spPr>
           <a:xfrm>
-            <a:off x="10515600" y="7141464"/>
-            <a:ext cx="713232" cy="329184"/>
+            <a:off x="10515600" y="6830567"/>
+            <a:ext cx="713232" cy="310896"/>
           </a:xfrm>
           <a:prstGeom prst="rect">
             <a:avLst/>
@@ -13584,8 +13548,8 @@
         </p:nvSpPr>
         <p:spPr>
           <a:xfrm>
-            <a:off x="11247120" y="7141464"/>
-            <a:ext cx="685800" cy="329184"/>
+            <a:off x="11247120" y="6830567"/>
+            <a:ext cx="685800" cy="310896"/>
           </a:xfrm>
           <a:prstGeom prst="rect">
             <a:avLst/>
@@ -13629,14 +13593,14 @@
         </p:nvSpPr>
         <p:spPr>
           <a:xfrm>
-            <a:off x="274320" y="7479792"/>
-            <a:ext cx="393192" cy="329184"/>
-          </a:xfrm>
-          <a:prstGeom prst="rect">
-            <a:avLst/>
-          </a:prstGeom>
-          <a:solidFill>
-            <a:srgbClr val="005555"/>
+            <a:off x="274320" y="7150607"/>
+            <a:ext cx="393192" cy="310896"/>
+          </a:xfrm>
+          <a:prstGeom prst="rect">
+            <a:avLst/>
+          </a:prstGeom>
+          <a:solidFill>
+            <a:srgbClr val="005050"/>
           </a:solidFill>
           <a:ln>
             <a:noFill/>
@@ -13672,8 +13636,8 @@
         </p:nvSpPr>
         <p:spPr>
           <a:xfrm>
-            <a:off x="310896" y="7534656"/>
-            <a:ext cx="338328" cy="237744"/>
+            <a:off x="310896" y="7205471"/>
+            <a:ext cx="338328" cy="219456"/>
           </a:xfrm>
           <a:prstGeom prst="rect">
             <a:avLst/>
@@ -13706,8 +13670,8 @@
         </p:nvSpPr>
         <p:spPr>
           <a:xfrm>
-            <a:off x="694944" y="7479792"/>
-            <a:ext cx="5687568" cy="329184"/>
+            <a:off x="694944" y="7150607"/>
+            <a:ext cx="5687568" cy="310896"/>
           </a:xfrm>
           <a:prstGeom prst="rect">
             <a:avLst/>
@@ -13749,8 +13713,8 @@
         </p:nvSpPr>
         <p:spPr>
           <a:xfrm>
-            <a:off x="768096" y="7534656"/>
-            <a:ext cx="5577840" cy="256031"/>
+            <a:off x="768096" y="7205471"/>
+            <a:ext cx="5577840" cy="237744"/>
           </a:xfrm>
           <a:prstGeom prst="rect">
             <a:avLst/>
@@ -13783,8 +13747,8 @@
         </p:nvSpPr>
         <p:spPr>
           <a:xfrm>
-            <a:off x="6400800" y="7479792"/>
-            <a:ext cx="2624328" cy="329184"/>
+            <a:off x="6400800" y="7150607"/>
+            <a:ext cx="2624328" cy="310896"/>
           </a:xfrm>
           <a:prstGeom prst="rect">
             <a:avLst/>
@@ -13826,8 +13790,8 @@
         </p:nvSpPr>
         <p:spPr>
           <a:xfrm>
-            <a:off x="6455664" y="7534656"/>
-            <a:ext cx="2532888" cy="256031"/>
+            <a:off x="6455664" y="7205471"/>
+            <a:ext cx="2532888" cy="237744"/>
           </a:xfrm>
           <a:prstGeom prst="rect">
             <a:avLst/>
@@ -13860,8 +13824,8 @@
         </p:nvSpPr>
         <p:spPr>
           <a:xfrm>
-            <a:off x="9052560" y="7479792"/>
-            <a:ext cx="713232" cy="329184"/>
+            <a:off x="9052560" y="7150607"/>
+            <a:ext cx="713232" cy="310896"/>
           </a:xfrm>
           <a:prstGeom prst="rect">
             <a:avLst/>
@@ -13905,8 +13869,8 @@
         </p:nvSpPr>
         <p:spPr>
           <a:xfrm>
-            <a:off x="9784080" y="7479792"/>
-            <a:ext cx="713232" cy="329184"/>
+            <a:off x="9784080" y="7150607"/>
+            <a:ext cx="713232" cy="310896"/>
           </a:xfrm>
           <a:prstGeom prst="rect">
             <a:avLst/>
@@ -13950,8 +13914,8 @@
         </p:nvSpPr>
         <p:spPr>
           <a:xfrm>
-            <a:off x="10515600" y="7479792"/>
-            <a:ext cx="713232" cy="329184"/>
+            <a:off x="10515600" y="7150607"/>
+            <a:ext cx="713232" cy="310896"/>
           </a:xfrm>
           <a:prstGeom prst="rect">
             <a:avLst/>
@@ -13995,8 +13959,8 @@
         </p:nvSpPr>
         <p:spPr>
           <a:xfrm>
-            <a:off x="11247120" y="7479792"/>
-            <a:ext cx="685800" cy="329184"/>
+            <a:off x="11247120" y="7150607"/>
+            <a:ext cx="685800" cy="310896"/>
           </a:xfrm>
           <a:prstGeom prst="rect">
             <a:avLst/>
@@ -14040,14 +14004,14 @@
         </p:nvSpPr>
         <p:spPr>
           <a:xfrm>
-            <a:off x="274320" y="7818120"/>
-            <a:ext cx="393192" cy="329184"/>
-          </a:xfrm>
-          <a:prstGeom prst="rect">
-            <a:avLst/>
-          </a:prstGeom>
-          <a:solidFill>
-            <a:srgbClr val="005555"/>
+            <a:off x="274320" y="7470647"/>
+            <a:ext cx="393192" cy="310896"/>
+          </a:xfrm>
+          <a:prstGeom prst="rect">
+            <a:avLst/>
+          </a:prstGeom>
+          <a:solidFill>
+            <a:srgbClr val="005050"/>
           </a:solidFill>
           <a:ln>
             <a:noFill/>
@@ -14083,8 +14047,8 @@
         </p:nvSpPr>
         <p:spPr>
           <a:xfrm>
-            <a:off x="310896" y="7872984"/>
-            <a:ext cx="338328" cy="237744"/>
+            <a:off x="310896" y="7525511"/>
+            <a:ext cx="338328" cy="219456"/>
           </a:xfrm>
           <a:prstGeom prst="rect">
             <a:avLst/>
@@ -14117,8 +14081,8 @@
         </p:nvSpPr>
         <p:spPr>
           <a:xfrm>
-            <a:off x="694944" y="7818120"/>
-            <a:ext cx="5687568" cy="329184"/>
+            <a:off x="694944" y="7470647"/>
+            <a:ext cx="5687568" cy="310896"/>
           </a:xfrm>
           <a:prstGeom prst="rect">
             <a:avLst/>
@@ -14160,8 +14124,8 @@
         </p:nvSpPr>
         <p:spPr>
           <a:xfrm>
-            <a:off x="768096" y="7872984"/>
-            <a:ext cx="5577840" cy="256031"/>
+            <a:off x="768096" y="7525511"/>
+            <a:ext cx="5577840" cy="237744"/>
           </a:xfrm>
           <a:prstGeom prst="rect">
             <a:avLst/>
@@ -14194,8 +14158,8 @@
         </p:nvSpPr>
         <p:spPr>
           <a:xfrm>
-            <a:off x="6400800" y="7818120"/>
-            <a:ext cx="2624328" cy="329184"/>
+            <a:off x="6400800" y="7470647"/>
+            <a:ext cx="2624328" cy="310896"/>
           </a:xfrm>
           <a:prstGeom prst="rect">
             <a:avLst/>
@@ -14237,8 +14201,8 @@
         </p:nvSpPr>
         <p:spPr>
           <a:xfrm>
-            <a:off x="6455664" y="7872984"/>
-            <a:ext cx="2532888" cy="256031"/>
+            <a:off x="6455664" y="7525511"/>
+            <a:ext cx="2532888" cy="237744"/>
           </a:xfrm>
           <a:prstGeom prst="rect">
             <a:avLst/>
@@ -14271,8 +14235,8 @@
         </p:nvSpPr>
         <p:spPr>
           <a:xfrm>
-            <a:off x="9052560" y="7818120"/>
-            <a:ext cx="713232" cy="329184"/>
+            <a:off x="9052560" y="7470647"/>
+            <a:ext cx="713232" cy="310896"/>
           </a:xfrm>
           <a:prstGeom prst="rect">
             <a:avLst/>
@@ -14316,8 +14280,8 @@
         </p:nvSpPr>
         <p:spPr>
           <a:xfrm>
-            <a:off x="9784080" y="7818120"/>
-            <a:ext cx="713232" cy="329184"/>
+            <a:off x="9784080" y="7470647"/>
+            <a:ext cx="713232" cy="310896"/>
           </a:xfrm>
           <a:prstGeom prst="rect">
             <a:avLst/>
@@ -14361,8 +14325,8 @@
         </p:nvSpPr>
         <p:spPr>
           <a:xfrm>
-            <a:off x="10515600" y="7818120"/>
-            <a:ext cx="713232" cy="329184"/>
+            <a:off x="10515600" y="7470647"/>
+            <a:ext cx="713232" cy="310896"/>
           </a:xfrm>
           <a:prstGeom prst="rect">
             <a:avLst/>
@@ -14406,8 +14370,8 @@
         </p:nvSpPr>
         <p:spPr>
           <a:xfrm>
-            <a:off x="11247120" y="7818120"/>
-            <a:ext cx="685800" cy="329184"/>
+            <a:off x="11247120" y="7470647"/>
+            <a:ext cx="685800" cy="310896"/>
           </a:xfrm>
           <a:prstGeom prst="rect">
             <a:avLst/>
@@ -14451,14 +14415,14 @@
         </p:nvSpPr>
         <p:spPr>
           <a:xfrm>
-            <a:off x="274320" y="8156448"/>
-            <a:ext cx="393192" cy="329184"/>
-          </a:xfrm>
-          <a:prstGeom prst="rect">
-            <a:avLst/>
-          </a:prstGeom>
-          <a:solidFill>
-            <a:srgbClr val="005555"/>
+            <a:off x="274320" y="7790687"/>
+            <a:ext cx="393192" cy="310896"/>
+          </a:xfrm>
+          <a:prstGeom prst="rect">
+            <a:avLst/>
+          </a:prstGeom>
+          <a:solidFill>
+            <a:srgbClr val="005050"/>
           </a:solidFill>
           <a:ln>
             <a:noFill/>
@@ -14494,8 +14458,8 @@
         </p:nvSpPr>
         <p:spPr>
           <a:xfrm>
-            <a:off x="310896" y="8211312"/>
-            <a:ext cx="338328" cy="237744"/>
+            <a:off x="310896" y="7845551"/>
+            <a:ext cx="338328" cy="219456"/>
           </a:xfrm>
           <a:prstGeom prst="rect">
             <a:avLst/>
@@ -14528,8 +14492,8 @@
         </p:nvSpPr>
         <p:spPr>
           <a:xfrm>
-            <a:off x="694944" y="8156448"/>
-            <a:ext cx="5687568" cy="329184"/>
+            <a:off x="694944" y="7790687"/>
+            <a:ext cx="5687568" cy="310896"/>
           </a:xfrm>
           <a:prstGeom prst="rect">
             <a:avLst/>
@@ -14571,8 +14535,8 @@
         </p:nvSpPr>
         <p:spPr>
           <a:xfrm>
-            <a:off x="768096" y="8211312"/>
-            <a:ext cx="5577840" cy="256031"/>
+            <a:off x="768096" y="7845551"/>
+            <a:ext cx="5577840" cy="237744"/>
           </a:xfrm>
           <a:prstGeom prst="rect">
             <a:avLst/>
@@ -14592,7 +14556,7 @@
                   <a:srgbClr val="1A1A1A"/>
                 </a:solidFill>
               </a:rPr>
-              <a:t>Qualification conforme FIDELIS (DON/IND/REFUS)</a:t>
+              <a:t>Qualification conforme FIDELIS (DON/IND/REF)</a:t>
             </a:r>
           </a:p>
         </p:txBody>
@@ -14605,8 +14569,8 @@
         </p:nvSpPr>
         <p:spPr>
           <a:xfrm>
-            <a:off x="6400800" y="8156448"/>
-            <a:ext cx="2624328" cy="329184"/>
+            <a:off x="6400800" y="7790687"/>
+            <a:ext cx="2624328" cy="310896"/>
           </a:xfrm>
           <a:prstGeom prst="rect">
             <a:avLst/>
@@ -14648,8 +14612,8 @@
         </p:nvSpPr>
         <p:spPr>
           <a:xfrm>
-            <a:off x="6455664" y="8211312"/>
-            <a:ext cx="2532888" cy="256031"/>
+            <a:off x="6455664" y="7845551"/>
+            <a:ext cx="2532888" cy="237744"/>
           </a:xfrm>
           <a:prstGeom prst="rect">
             <a:avLst/>
@@ -14682,8 +14646,8 @@
         </p:nvSpPr>
         <p:spPr>
           <a:xfrm>
-            <a:off x="9052560" y="8156448"/>
-            <a:ext cx="713232" cy="329184"/>
+            <a:off x="9052560" y="7790687"/>
+            <a:ext cx="713232" cy="310896"/>
           </a:xfrm>
           <a:prstGeom prst="rect">
             <a:avLst/>
@@ -14727,8 +14691,8 @@
         </p:nvSpPr>
         <p:spPr>
           <a:xfrm>
-            <a:off x="9784080" y="8156448"/>
-            <a:ext cx="713232" cy="329184"/>
+            <a:off x="9784080" y="7790687"/>
+            <a:ext cx="713232" cy="310896"/>
           </a:xfrm>
           <a:prstGeom prst="rect">
             <a:avLst/>
@@ -14772,8 +14736,8 @@
         </p:nvSpPr>
         <p:spPr>
           <a:xfrm>
-            <a:off x="10515600" y="8156448"/>
-            <a:ext cx="713232" cy="329184"/>
+            <a:off x="10515600" y="7790687"/>
+            <a:ext cx="713232" cy="310896"/>
           </a:xfrm>
           <a:prstGeom prst="rect">
             <a:avLst/>
@@ -14817,8 +14781,8 @@
         </p:nvSpPr>
         <p:spPr>
           <a:xfrm>
-            <a:off x="11247120" y="8156448"/>
-            <a:ext cx="685800" cy="329184"/>
+            <a:off x="11247120" y="7790687"/>
+            <a:ext cx="685800" cy="310896"/>
           </a:xfrm>
           <a:prstGeom prst="rect">
             <a:avLst/>
@@ -14862,14 +14826,14 @@
         </p:nvSpPr>
         <p:spPr>
           <a:xfrm>
-            <a:off x="274320" y="8494776"/>
-            <a:ext cx="393192" cy="329184"/>
-          </a:xfrm>
-          <a:prstGeom prst="rect">
-            <a:avLst/>
-          </a:prstGeom>
-          <a:solidFill>
-            <a:srgbClr val="005555"/>
+            <a:off x="274320" y="8110727"/>
+            <a:ext cx="393192" cy="310896"/>
+          </a:xfrm>
+          <a:prstGeom prst="rect">
+            <a:avLst/>
+          </a:prstGeom>
+          <a:solidFill>
+            <a:srgbClr val="005050"/>
           </a:solidFill>
           <a:ln>
             <a:noFill/>
@@ -14905,8 +14869,8 @@
         </p:nvSpPr>
         <p:spPr>
           <a:xfrm>
-            <a:off x="310896" y="8549640"/>
-            <a:ext cx="338328" cy="237744"/>
+            <a:off x="310896" y="8165591"/>
+            <a:ext cx="338328" cy="219456"/>
           </a:xfrm>
           <a:prstGeom prst="rect">
             <a:avLst/>
@@ -14939,8 +14903,8 @@
         </p:nvSpPr>
         <p:spPr>
           <a:xfrm>
-            <a:off x="694944" y="8494776"/>
-            <a:ext cx="5687568" cy="329184"/>
+            <a:off x="694944" y="8110727"/>
+            <a:ext cx="5687568" cy="310896"/>
           </a:xfrm>
           <a:prstGeom prst="rect">
             <a:avLst/>
@@ -14982,8 +14946,8 @@
         </p:nvSpPr>
         <p:spPr>
           <a:xfrm>
-            <a:off x="768096" y="8549640"/>
-            <a:ext cx="5577840" cy="256031"/>
+            <a:off x="768096" y="8165591"/>
+            <a:ext cx="5577840" cy="237744"/>
           </a:xfrm>
           <a:prstGeom prst="rect">
             <a:avLst/>
@@ -15016,8 +14980,8 @@
         </p:nvSpPr>
         <p:spPr>
           <a:xfrm>
-            <a:off x="6400800" y="8494776"/>
-            <a:ext cx="2624328" cy="329184"/>
+            <a:off x="6400800" y="8110727"/>
+            <a:ext cx="2624328" cy="310896"/>
           </a:xfrm>
           <a:prstGeom prst="rect">
             <a:avLst/>
@@ -15059,8 +15023,8 @@
         </p:nvSpPr>
         <p:spPr>
           <a:xfrm>
-            <a:off x="6455664" y="8549640"/>
-            <a:ext cx="2532888" cy="256031"/>
+            <a:off x="6455664" y="8165591"/>
+            <a:ext cx="2532888" cy="237744"/>
           </a:xfrm>
           <a:prstGeom prst="rect">
             <a:avLst/>
@@ -15093,8 +15057,8 @@
         </p:nvSpPr>
         <p:spPr>
           <a:xfrm>
-            <a:off x="9052560" y="8494776"/>
-            <a:ext cx="713232" cy="329184"/>
+            <a:off x="9052560" y="8110727"/>
+            <a:ext cx="713232" cy="310896"/>
           </a:xfrm>
           <a:prstGeom prst="rect">
             <a:avLst/>
@@ -15138,8 +15102,8 @@
         </p:nvSpPr>
         <p:spPr>
           <a:xfrm>
-            <a:off x="9784080" y="8494776"/>
-            <a:ext cx="713232" cy="329184"/>
+            <a:off x="9784080" y="8110727"/>
+            <a:ext cx="713232" cy="310896"/>
           </a:xfrm>
           <a:prstGeom prst="rect">
             <a:avLst/>
@@ -15183,8 +15147,8 @@
         </p:nvSpPr>
         <p:spPr>
           <a:xfrm>
-            <a:off x="10515600" y="8494776"/>
-            <a:ext cx="713232" cy="329184"/>
+            <a:off x="10515600" y="8110727"/>
+            <a:ext cx="713232" cy="310896"/>
           </a:xfrm>
           <a:prstGeom prst="rect">
             <a:avLst/>
@@ -15228,8 +15192,8 @@
         </p:nvSpPr>
         <p:spPr>
           <a:xfrm>
-            <a:off x="11247120" y="8494776"/>
-            <a:ext cx="685800" cy="329184"/>
+            <a:off x="11247120" y="8110727"/>
+            <a:ext cx="685800" cy="310896"/>
           </a:xfrm>
           <a:prstGeom prst="rect">
             <a:avLst/>
@@ -15273,14 +15237,14 @@
         </p:nvSpPr>
         <p:spPr>
           <a:xfrm>
-            <a:off x="274320" y="8833103"/>
-            <a:ext cx="393192" cy="329184"/>
-          </a:xfrm>
-          <a:prstGeom prst="rect">
-            <a:avLst/>
-          </a:prstGeom>
-          <a:solidFill>
-            <a:srgbClr val="005555"/>
+            <a:off x="274320" y="8430767"/>
+            <a:ext cx="393192" cy="310896"/>
+          </a:xfrm>
+          <a:prstGeom prst="rect">
+            <a:avLst/>
+          </a:prstGeom>
+          <a:solidFill>
+            <a:srgbClr val="005050"/>
           </a:solidFill>
           <a:ln>
             <a:noFill/>
@@ -15316,8 +15280,8 @@
         </p:nvSpPr>
         <p:spPr>
           <a:xfrm>
-            <a:off x="310896" y="8887967"/>
-            <a:ext cx="338328" cy="237744"/>
+            <a:off x="310896" y="8485631"/>
+            <a:ext cx="338328" cy="219456"/>
           </a:xfrm>
           <a:prstGeom prst="rect">
             <a:avLst/>
@@ -15350,8 +15314,8 @@
         </p:nvSpPr>
         <p:spPr>
           <a:xfrm>
-            <a:off x="694944" y="8833103"/>
-            <a:ext cx="5687568" cy="329184"/>
+            <a:off x="694944" y="8430767"/>
+            <a:ext cx="5687568" cy="310896"/>
           </a:xfrm>
           <a:prstGeom prst="rect">
             <a:avLst/>
@@ -15393,8 +15357,8 @@
         </p:nvSpPr>
         <p:spPr>
           <a:xfrm>
-            <a:off x="768096" y="8887967"/>
-            <a:ext cx="5577840" cy="256031"/>
+            <a:off x="768096" y="8485631"/>
+            <a:ext cx="5577840" cy="237744"/>
           </a:xfrm>
           <a:prstGeom prst="rect">
             <a:avLst/>
@@ -15427,8 +15391,8 @@
         </p:nvSpPr>
         <p:spPr>
           <a:xfrm>
-            <a:off x="6400800" y="8833103"/>
-            <a:ext cx="2624328" cy="329184"/>
+            <a:off x="6400800" y="8430767"/>
+            <a:ext cx="2624328" cy="310896"/>
           </a:xfrm>
           <a:prstGeom prst="rect">
             <a:avLst/>
@@ -15470,8 +15434,8 @@
         </p:nvSpPr>
         <p:spPr>
           <a:xfrm>
-            <a:off x="6455664" y="8887967"/>
-            <a:ext cx="2532888" cy="256031"/>
+            <a:off x="6455664" y="8485631"/>
+            <a:ext cx="2532888" cy="237744"/>
           </a:xfrm>
           <a:prstGeom prst="rect">
             <a:avLst/>
@@ -15504,8 +15468,8 @@
         </p:nvSpPr>
         <p:spPr>
           <a:xfrm>
-            <a:off x="9052560" y="8833103"/>
-            <a:ext cx="713232" cy="329184"/>
+            <a:off x="9052560" y="8430767"/>
+            <a:ext cx="713232" cy="310896"/>
           </a:xfrm>
           <a:prstGeom prst="rect">
             <a:avLst/>
@@ -15549,8 +15513,8 @@
         </p:nvSpPr>
         <p:spPr>
           <a:xfrm>
-            <a:off x="9784080" y="8833103"/>
-            <a:ext cx="713232" cy="329184"/>
+            <a:off x="9784080" y="8430767"/>
+            <a:ext cx="713232" cy="310896"/>
           </a:xfrm>
           <a:prstGeom prst="rect">
             <a:avLst/>
@@ -15594,8 +15558,8 @@
         </p:nvSpPr>
         <p:spPr>
           <a:xfrm>
-            <a:off x="10515600" y="8833103"/>
-            <a:ext cx="713232" cy="329184"/>
+            <a:off x="10515600" y="8430767"/>
+            <a:ext cx="713232" cy="310896"/>
           </a:xfrm>
           <a:prstGeom prst="rect">
             <a:avLst/>
@@ -15639,8 +15603,8 @@
         </p:nvSpPr>
         <p:spPr>
           <a:xfrm>
-            <a:off x="11247120" y="8833103"/>
-            <a:ext cx="685800" cy="329184"/>
+            <a:off x="11247120" y="8430767"/>
+            <a:ext cx="685800" cy="310896"/>
           </a:xfrm>
           <a:prstGeom prst="rect">
             <a:avLst/>
@@ -15684,14 +15648,14 @@
         </p:nvSpPr>
         <p:spPr>
           <a:xfrm>
-            <a:off x="274320" y="9171431"/>
-            <a:ext cx="393192" cy="329184"/>
-          </a:xfrm>
-          <a:prstGeom prst="rect">
-            <a:avLst/>
-          </a:prstGeom>
-          <a:solidFill>
-            <a:srgbClr val="005555"/>
+            <a:off x="274320" y="8750807"/>
+            <a:ext cx="393192" cy="310896"/>
+          </a:xfrm>
+          <a:prstGeom prst="rect">
+            <a:avLst/>
+          </a:prstGeom>
+          <a:solidFill>
+            <a:srgbClr val="005050"/>
           </a:solidFill>
           <a:ln>
             <a:noFill/>
@@ -15727,8 +15691,8 @@
         </p:nvSpPr>
         <p:spPr>
           <a:xfrm>
-            <a:off x="310896" y="9226295"/>
-            <a:ext cx="338328" cy="237744"/>
+            <a:off x="310896" y="8805671"/>
+            <a:ext cx="338328" cy="219456"/>
           </a:xfrm>
           <a:prstGeom prst="rect">
             <a:avLst/>
@@ -15761,8 +15725,8 @@
         </p:nvSpPr>
         <p:spPr>
           <a:xfrm>
-            <a:off x="694944" y="9171431"/>
-            <a:ext cx="5687568" cy="329184"/>
+            <a:off x="694944" y="8750807"/>
+            <a:ext cx="5687568" cy="310896"/>
           </a:xfrm>
           <a:prstGeom prst="rect">
             <a:avLst/>
@@ -15804,8 +15768,8 @@
         </p:nvSpPr>
         <p:spPr>
           <a:xfrm>
-            <a:off x="768096" y="9226295"/>
-            <a:ext cx="5577840" cy="256031"/>
+            <a:off x="768096" y="8805671"/>
+            <a:ext cx="5577840" cy="237744"/>
           </a:xfrm>
           <a:prstGeom prst="rect">
             <a:avLst/>
@@ -15838,8 +15802,8 @@
         </p:nvSpPr>
         <p:spPr>
           <a:xfrm>
-            <a:off x="6400800" y="9171431"/>
-            <a:ext cx="2624328" cy="329184"/>
+            <a:off x="6400800" y="8750807"/>
+            <a:ext cx="2624328" cy="310896"/>
           </a:xfrm>
           <a:prstGeom prst="rect">
             <a:avLst/>
@@ -15881,8 +15845,8 @@
         </p:nvSpPr>
         <p:spPr>
           <a:xfrm>
-            <a:off x="6455664" y="9226295"/>
-            <a:ext cx="2532888" cy="256031"/>
+            <a:off x="6455664" y="8805671"/>
+            <a:ext cx="2532888" cy="237744"/>
           </a:xfrm>
           <a:prstGeom prst="rect">
             <a:avLst/>
@@ -15915,8 +15879,8 @@
         </p:nvSpPr>
         <p:spPr>
           <a:xfrm>
-            <a:off x="9052560" y="9171431"/>
-            <a:ext cx="713232" cy="329184"/>
+            <a:off x="9052560" y="8750807"/>
+            <a:ext cx="713232" cy="310896"/>
           </a:xfrm>
           <a:prstGeom prst="rect">
             <a:avLst/>
@@ -15960,8 +15924,8 @@
         </p:nvSpPr>
         <p:spPr>
           <a:xfrm>
-            <a:off x="9784080" y="9171431"/>
-            <a:ext cx="713232" cy="329184"/>
+            <a:off x="9784080" y="8750807"/>
+            <a:ext cx="713232" cy="310896"/>
           </a:xfrm>
           <a:prstGeom prst="rect">
             <a:avLst/>
@@ -16005,8 +15969,8 @@
         </p:nvSpPr>
         <p:spPr>
           <a:xfrm>
-            <a:off x="10515600" y="9171431"/>
-            <a:ext cx="713232" cy="329184"/>
+            <a:off x="10515600" y="8750807"/>
+            <a:ext cx="713232" cy="310896"/>
           </a:xfrm>
           <a:prstGeom prst="rect">
             <a:avLst/>
@@ -16050,8 +16014,8 @@
         </p:nvSpPr>
         <p:spPr>
           <a:xfrm>
-            <a:off x="11247120" y="9171431"/>
-            <a:ext cx="685800" cy="329184"/>
+            <a:off x="11247120" y="8750807"/>
+            <a:ext cx="685800" cy="310896"/>
           </a:xfrm>
           <a:prstGeom prst="rect">
             <a:avLst/>
@@ -16095,14 +16059,14 @@
         </p:nvSpPr>
         <p:spPr>
           <a:xfrm>
-            <a:off x="274320" y="9509759"/>
-            <a:ext cx="8741663" cy="310896"/>
-          </a:xfrm>
-          <a:prstGeom prst="rect">
-            <a:avLst/>
-          </a:prstGeom>
-          <a:solidFill>
-            <a:srgbClr val="005555"/>
+            <a:off x="274320" y="9070847"/>
+            <a:ext cx="8741663" cy="292608"/>
+          </a:xfrm>
+          <a:prstGeom prst="rect">
+            <a:avLst/>
+          </a:prstGeom>
+          <a:solidFill>
+            <a:srgbClr val="005050"/>
           </a:solidFill>
           <a:ln>
             <a:noFill/>
@@ -16138,8 +16102,8 @@
         </p:nvSpPr>
         <p:spPr>
           <a:xfrm>
-            <a:off x="384048" y="9564623"/>
-            <a:ext cx="8412480" cy="228600"/>
+            <a:off x="384048" y="9125711"/>
+            <a:ext cx="8412480" cy="201168"/>
           </a:xfrm>
           <a:prstGeom prst="rect">
             <a:avLst/>
@@ -16172,8 +16136,8 @@
         </p:nvSpPr>
         <p:spPr>
           <a:xfrm>
-            <a:off x="9052560" y="9509759"/>
-            <a:ext cx="2862072" cy="310896"/>
+            <a:off x="9052560" y="9070847"/>
+            <a:ext cx="2862072" cy="292608"/>
           </a:xfrm>
           <a:prstGeom prst="rect">
             <a:avLst/>
@@ -16183,7 +16147,7 @@
           </a:solidFill>
           <a:ln w="25400">
             <a:solidFill>
-              <a:srgbClr val="005555"/>
+              <a:srgbClr val="005050"/>
             </a:solidFill>
           </a:ln>
         </p:spPr>
@@ -16217,8 +16181,8 @@
         </p:nvSpPr>
         <p:spPr>
           <a:xfrm>
-            <a:off x="9144000" y="9564623"/>
-            <a:ext cx="2194560" cy="219456"/>
+            <a:off x="9144000" y="9125711"/>
+            <a:ext cx="2194560" cy="201168"/>
           </a:xfrm>
           <a:prstGeom prst="rect">
             <a:avLst/>
@@ -16235,10 +16199,87 @@
             <a:r>
               <a:rPr sz="1100" b="1" i="0">
                 <a:solidFill>
-                  <a:srgbClr val="005555"/>
+                  <a:srgbClr val="005050"/>
                 </a:solidFill>
               </a:rPr>
               <a:t>__ / 24</a:t>
+            </a:r>
+          </a:p>
+        </p:txBody>
+      </p:sp>
+      <p:sp>
+        <p:nvSpPr>
+          <p:cNvPr id="270" name="Rectangle 269"/>
+          <p:cNvSpPr/>
+          <p:nvPr/>
+        </p:nvSpPr>
+        <p:spPr>
+          <a:xfrm>
+            <a:off x="274320" y="9436607"/>
+            <a:ext cx="11640312" cy="329184"/>
+          </a:xfrm>
+          <a:prstGeom prst="rect">
+            <a:avLst/>
+          </a:prstGeom>
+          <a:solidFill>
+            <a:srgbClr val="005050"/>
+          </a:solidFill>
+          <a:ln>
+            <a:noFill/>
+          </a:ln>
+        </p:spPr>
+        <p:style>
+          <a:lnRef idx="1">
+            <a:schemeClr val="accent1"/>
+          </a:lnRef>
+          <a:fillRef idx="3">
+            <a:schemeClr val="accent1"/>
+          </a:fillRef>
+          <a:effectRef idx="2">
+            <a:schemeClr val="accent1"/>
+          </a:effectRef>
+          <a:fontRef idx="minor">
+            <a:schemeClr val="lt1"/>
+          </a:fontRef>
+        </p:style>
+        <p:txBody>
+          <a:bodyPr rtlCol="0" anchor="ctr"/>
+          <a:lstStyle/>
+          <a:p>
+            <a:pPr algn="ctr"/>
+          </a:p>
+        </p:txBody>
+      </p:sp>
+      <p:sp>
+        <p:nvSpPr>
+          <p:cNvPr id="271" name="TextBox 270"/>
+          <p:cNvSpPr txBox="1"/>
+          <p:nvPr/>
+        </p:nvSpPr>
+        <p:spPr>
+          <a:xfrm>
+            <a:off x="411479" y="9509759"/>
+            <a:ext cx="11365992" cy="182879"/>
+          </a:xfrm>
+          <a:prstGeom prst="rect">
+            <a:avLst/>
+          </a:prstGeom>
+          <a:noFill/>
+        </p:spPr>
+        <p:txBody>
+          <a:bodyPr wrap="square">
+            <a:spAutoFit/>
+          </a:bodyPr>
+          <a:lstStyle/>
+          <a:p>
+            <a:pPr algn="l"/>
+            <a:r>
+              <a:rPr sz="1000" b="0" i="0">
+                <a:solidFill>
+                  <a:srgbClr val="FFFFFF"/>
+                </a:solidFill>
+              </a:rPr>
+              <a:t>✅ Certifié(e) FIM : ≥ 17/24  ·  ⚠ Formation complémentaire : 12–16/24  ·  🔄 Rattrapage J+15 : &lt; 12/24</a:t>
             </a:r>
           </a:p>
         </p:txBody>
@@ -16319,7 +16360,7 @@
             <a:avLst/>
           </a:prstGeom>
           <a:solidFill>
-            <a:srgbClr val="005555"/>
+            <a:srgbClr val="005050"/>
           </a:solidFill>
           <a:ln>
             <a:noFill/>
@@ -16398,8 +16439,8 @@
         </p:nvSpPr>
         <p:spPr>
           <a:xfrm>
-            <a:off x="164592" y="73152"/>
-            <a:ext cx="2011680" cy="347472"/>
+            <a:off x="164592" y="91440"/>
+            <a:ext cx="1920240" cy="329184"/>
           </a:xfrm>
           <a:prstGeom prst="rect">
             <a:avLst/>
@@ -16432,8 +16473,8 @@
         </p:nvSpPr>
         <p:spPr>
           <a:xfrm>
-            <a:off x="2286000" y="91440"/>
-            <a:ext cx="36576" cy="502920"/>
+            <a:off x="2212848" y="109728"/>
+            <a:ext cx="36576" cy="475488"/>
           </a:xfrm>
           <a:prstGeom prst="rect">
             <a:avLst/>
@@ -16475,8 +16516,8 @@
         </p:nvSpPr>
         <p:spPr>
           <a:xfrm>
-            <a:off x="2423160" y="91440"/>
-            <a:ext cx="9235440" cy="502920"/>
+            <a:off x="2350008" y="91440"/>
+            <a:ext cx="8823960" cy="502920"/>
           </a:xfrm>
           <a:prstGeom prst="rect">
             <a:avLst/>
@@ -16496,7 +16537,7 @@
                   <a:srgbClr val="FFFFFF"/>
                 </a:solidFill>
               </a:rPr>
-              <a:t>Quiz 40 Questions &amp; Votre Plan d'Action Terrain</a:t>
+              <a:t>Votre Plan d'Action — 4 Semaines Terrain</a:t>
             </a:r>
           </a:p>
         </p:txBody>
@@ -16517,8 +16558,8 @@
         </p:blipFill>
         <p:spPr>
           <a:xfrm>
-            <a:off x="11247120" y="0"/>
-            <a:ext cx="822960" cy="676656"/>
+            <a:off x="11228832" y="0"/>
+            <a:ext cx="841248" cy="676656"/>
           </a:xfrm>
           <a:prstGeom prst="rect">
             <a:avLst/>
@@ -16540,7 +16581,7 @@
             <a:avLst/>
           </a:prstGeom>
           <a:solidFill>
-            <a:srgbClr val="005555"/>
+            <a:srgbClr val="005050"/>
           </a:solidFill>
           <a:ln>
             <a:noFill/>
@@ -16674,7 +16715,7 @@
                   <a:srgbClr val="FFFFFF"/>
                 </a:solidFill>
               </a:rPr>
-              <a:t>Quiz final — 40 questions · 5 parties</a:t>
+              <a:t>Quiz final — 40 questions réparties en 6 parties</a:t>
             </a:r>
           </a:p>
         </p:txBody>
@@ -16911,7 +16952,7 @@
                   <a:srgbClr val="1A1A1A"/>
                 </a:solidFill>
               </a:rPr>
-              <a:t>• Partie C (Q16–Q23) : Script officiel &amp; règles d'accroche</a:t>
+              <a:t>• Partie C (Q16–Q22) : Script officiel &amp; règles d'accroche</a:t>
             </a:r>
           </a:p>
         </p:txBody>
@@ -16990,7 +17031,7 @@
                   <a:srgbClr val="1A1A1A"/>
                 </a:solidFill>
               </a:rPr>
-              <a:t>• Partie D (Q24–Q32) : Traitement des objections &amp; méthode AAR</a:t>
+              <a:t>• Partie D (Q23–Q28) : KPI FIDELIS, nomenclature &amp; production</a:t>
             </a:r>
           </a:p>
         </p:txBody>
@@ -17069,7 +17110,7 @@
                   <a:srgbClr val="1A1A1A"/>
                 </a:solidFill>
               </a:rPr>
-              <a:t>• Partie E (Q33–Q40) : KPI FIDELIS, nomenclature &amp; modes de validation</a:t>
+              <a:t>• Partie E (Q29–Q35) : Traitement des objections &amp; méthode AAR</a:t>
             </a:r>
           </a:p>
         </p:txBody>
@@ -17148,7 +17189,7 @@
                   <a:srgbClr val="1A1A1A"/>
                 </a:solidFill>
               </a:rPr>
-              <a:t>• Seuil de validation : 28/40 (70%)</a:t>
+              <a:t>• Partie F (Q36–Q40) : Éthique, posture &amp; vocabulaire métier</a:t>
             </a:r>
           </a:p>
         </p:txBody>
@@ -17304,7 +17345,7 @@
                   <a:srgbClr val="1A1A1A"/>
                 </a:solidFill>
               </a:rPr>
-              <a:t>• Semaine 1 (J+7) : Objectif 9 CU/H atteint et stable</a:t>
+              <a:t>• S1 (J+7) : 9 CU/H atteint et stable</a:t>
             </a:r>
           </a:p>
         </p:txBody>
@@ -17383,7 +17424,7 @@
                   <a:srgbClr val="1A1A1A"/>
                 </a:solidFill>
               </a:rPr>
-              <a:t>• Semaine 2 (J+14) : TX Transfo ≥ cible FIDELIS première mesure</a:t>
+              <a:t>• S2 (J+14) : TX Transfo ≥ cible FIDELIS première mesure</a:t>
             </a:r>
           </a:p>
         </p:txBody>
@@ -17462,7 +17503,7 @@
                   <a:srgbClr val="1A1A1A"/>
                 </a:solidFill>
               </a:rPr>
-              <a:t>• Semaine 3 (J+21) : 0 disqualification nomenclature FIDELIS</a:t>
+              <a:t>• S3 (J+21) : 0 disqualification nomenclature FIDELIS</a:t>
             </a:r>
           </a:p>
         </p:txBody>
@@ -17541,7 +17582,7 @@
                   <a:srgbClr val="1A1A1A"/>
                 </a:solidFill>
               </a:rPr>
-              <a:t>• Semaine 4 (J+30) : Bilan formateur SHY-Performance + objectifs M2</a:t>
+              <a:t>• S4 (J+30) : Bilan formateur SHY-Performance + objectifs M2</a:t>
             </a:r>
           </a:p>
         </p:txBody>
@@ -17620,7 +17661,7 @@
                   <a:srgbClr val="1A1A1A"/>
                 </a:solidFill>
               </a:rPr>
-              <a:t>• J+15 : Observation supervisée par SHY-Performance</a:t>
+              <a:t>• J+15 : Observation supervisée SHY-Performance</a:t>
             </a:r>
           </a:p>
         </p:txBody>
@@ -17699,7 +17740,7 @@
                   <a:srgbClr val="1A1A1A"/>
                 </a:solidFill>
               </a:rPr>
-              <a:t>• J+90 : Analyse KPI terrain consolidée</a:t>
+              <a:t>• J+90 : Analyse KPI terrain FIDELIS × UNICEF France</a:t>
             </a:r>
           </a:p>
         </p:txBody>
@@ -17713,7 +17754,7 @@
         <p:spPr>
           <a:xfrm>
             <a:off x="274320" y="5504688"/>
-            <a:ext cx="11640312" cy="566928"/>
+            <a:ext cx="11640312" cy="402336"/>
           </a:xfrm>
           <a:prstGeom prst="rect">
             <a:avLst/>
@@ -17756,7 +17797,7 @@
         <p:spPr>
           <a:xfrm>
             <a:off x="411479" y="5577840"/>
-            <a:ext cx="11365992" cy="420623"/>
+            <a:ext cx="11365992" cy="256032"/>
           </a:xfrm>
           <a:prstGeom prst="rect">
             <a:avLst/>
@@ -17776,8 +17817,459 @@
                   <a:srgbClr val="FFFFFF"/>
                 </a:solidFill>
               </a:rPr>
-              <a:t>Bienvenue dans la famille SHY-Performance × FIDELIS × UNICEF France.
-Vous êtes maintenant Fundraiser Impact Mission certifié(e). Votre premier appel de production commence demain.</a:t>
+              <a:t>Bienvenue dans la famille SHY-Performance × FIDELIS × UNICEF France — Certifié(e) FIM.</a:t>
+            </a:r>
+          </a:p>
+        </p:txBody>
+      </p:sp>
+    </p:spTree>
+  </p:cSld>
+  <p:clrMapOvr>
+    <a:masterClrMapping/>
+  </p:clrMapOvr>
+</p:sld>
+</file>
+
+<file path=ppt/slides/slide5.xml><?xml version="1.0" encoding="utf-8"?>
+<p:sld xmlns:a="http://schemas.openxmlformats.org/drawingml/2006/main" xmlns:p="http://schemas.openxmlformats.org/presentationml/2006/main" xmlns:r="http://schemas.openxmlformats.org/officeDocument/2006/relationships">
+  <p:cSld>
+    <p:spTree>
+      <p:nvGrpSpPr>
+        <p:cNvPr id="1" name=""/>
+        <p:cNvGrpSpPr/>
+        <p:nvPr/>
+      </p:nvGrpSpPr>
+      <p:grpSpPr/>
+      <p:sp>
+        <p:nvSpPr>
+          <p:cNvPr id="2" name="Rectangle 1"/>
+          <p:cNvSpPr/>
+          <p:nvPr/>
+        </p:nvSpPr>
+        <p:spPr>
+          <a:xfrm>
+            <a:off x="0" y="0"/>
+            <a:ext cx="12188952" cy="6858000"/>
+          </a:xfrm>
+          <a:prstGeom prst="rect">
+            <a:avLst/>
+          </a:prstGeom>
+          <a:solidFill>
+            <a:srgbClr val="005050"/>
+          </a:solidFill>
+          <a:ln>
+            <a:noFill/>
+          </a:ln>
+        </p:spPr>
+        <p:style>
+          <a:lnRef idx="1">
+            <a:schemeClr val="accent1"/>
+          </a:lnRef>
+          <a:fillRef idx="3">
+            <a:schemeClr val="accent1"/>
+          </a:fillRef>
+          <a:effectRef idx="2">
+            <a:schemeClr val="accent1"/>
+          </a:effectRef>
+          <a:fontRef idx="minor">
+            <a:schemeClr val="lt1"/>
+          </a:fontRef>
+        </p:style>
+        <p:txBody>
+          <a:bodyPr rtlCol="0" anchor="ctr"/>
+          <a:lstStyle/>
+          <a:p>
+            <a:pPr algn="ctr"/>
+          </a:p>
+        </p:txBody>
+      </p:sp>
+      <p:sp>
+        <p:nvSpPr>
+          <p:cNvPr id="3" name="Rectangle 2"/>
+          <p:cNvSpPr/>
+          <p:nvPr/>
+        </p:nvSpPr>
+        <p:spPr>
+          <a:xfrm>
+            <a:off x="0" y="0"/>
+            <a:ext cx="12188952" cy="73152"/>
+          </a:xfrm>
+          <a:prstGeom prst="rect">
+            <a:avLst/>
+          </a:prstGeom>
+          <a:solidFill>
+            <a:srgbClr val="00AAAA"/>
+          </a:solidFill>
+          <a:ln>
+            <a:noFill/>
+          </a:ln>
+        </p:spPr>
+        <p:style>
+          <a:lnRef idx="1">
+            <a:schemeClr val="accent1"/>
+          </a:lnRef>
+          <a:fillRef idx="3">
+            <a:schemeClr val="accent1"/>
+          </a:fillRef>
+          <a:effectRef idx="2">
+            <a:schemeClr val="accent1"/>
+          </a:effectRef>
+          <a:fontRef idx="minor">
+            <a:schemeClr val="lt1"/>
+          </a:fontRef>
+        </p:style>
+        <p:txBody>
+          <a:bodyPr rtlCol="0" anchor="ctr"/>
+          <a:lstStyle/>
+          <a:p>
+            <a:pPr algn="ctr"/>
+          </a:p>
+        </p:txBody>
+      </p:sp>
+      <p:sp>
+        <p:nvSpPr>
+          <p:cNvPr id="4" name="Rectangle 3"/>
+          <p:cNvSpPr/>
+          <p:nvPr/>
+        </p:nvSpPr>
+        <p:spPr>
+          <a:xfrm>
+            <a:off x="0" y="6784848"/>
+            <a:ext cx="12188952" cy="73152"/>
+          </a:xfrm>
+          <a:prstGeom prst="rect">
+            <a:avLst/>
+          </a:prstGeom>
+          <a:solidFill>
+            <a:srgbClr val="00AAAA"/>
+          </a:solidFill>
+          <a:ln>
+            <a:noFill/>
+          </a:ln>
+        </p:spPr>
+        <p:style>
+          <a:lnRef idx="1">
+            <a:schemeClr val="accent1"/>
+          </a:lnRef>
+          <a:fillRef idx="3">
+            <a:schemeClr val="accent1"/>
+          </a:fillRef>
+          <a:effectRef idx="2">
+            <a:schemeClr val="accent1"/>
+          </a:effectRef>
+          <a:fontRef idx="minor">
+            <a:schemeClr val="lt1"/>
+          </a:fontRef>
+        </p:style>
+        <p:txBody>
+          <a:bodyPr rtlCol="0" anchor="ctr"/>
+          <a:lstStyle/>
+          <a:p>
+            <a:pPr algn="ctr"/>
+          </a:p>
+        </p:txBody>
+      </p:sp>
+      <p:sp>
+        <p:nvSpPr>
+          <p:cNvPr id="5" name="Oval 4"/>
+          <p:cNvSpPr/>
+          <p:nvPr/>
+        </p:nvSpPr>
+        <p:spPr>
+          <a:xfrm>
+            <a:off x="4114800" y="1097280"/>
+            <a:ext cx="3931920" cy="3931920"/>
+          </a:xfrm>
+          <a:prstGeom prst="ellipse">
+            <a:avLst/>
+          </a:prstGeom>
+          <a:solidFill>
+            <a:srgbClr val="006A6A"/>
+          </a:solidFill>
+          <a:ln>
+            <a:noFill/>
+          </a:ln>
+        </p:spPr>
+        <p:style>
+          <a:lnRef idx="1">
+            <a:schemeClr val="accent1"/>
+          </a:lnRef>
+          <a:fillRef idx="3">
+            <a:schemeClr val="accent1"/>
+          </a:fillRef>
+          <a:effectRef idx="2">
+            <a:schemeClr val="accent1"/>
+          </a:effectRef>
+          <a:fontRef idx="minor">
+            <a:schemeClr val="lt1"/>
+          </a:fontRef>
+        </p:style>
+        <p:txBody>
+          <a:bodyPr rtlCol="0" anchor="ctr"/>
+          <a:lstStyle/>
+          <a:p>
+            <a:pPr algn="ctr"/>
+          </a:p>
+        </p:txBody>
+      </p:sp>
+      <p:sp>
+        <p:nvSpPr>
+          <p:cNvPr id="6" name="TextBox 5"/>
+          <p:cNvSpPr txBox="1"/>
+          <p:nvPr/>
+        </p:nvSpPr>
+        <p:spPr>
+          <a:xfrm>
+            <a:off x="5029200" y="2011680"/>
+            <a:ext cx="2103120" cy="1371600"/>
+          </a:xfrm>
+          <a:prstGeom prst="rect">
+            <a:avLst/>
+          </a:prstGeom>
+          <a:noFill/>
+        </p:spPr>
+        <p:txBody>
+          <a:bodyPr wrap="square">
+            <a:spAutoFit/>
+          </a:bodyPr>
+          <a:lstStyle/>
+          <a:p>
+            <a:pPr algn="ctr"/>
+            <a:r>
+              <a:rPr sz="4800" b="0" i="0">
+                <a:solidFill>
+                  <a:srgbClr val="FFFFFF"/>
+                </a:solidFill>
+              </a:rPr>
+              <a:t>🙏</a:t>
+            </a:r>
+          </a:p>
+        </p:txBody>
+      </p:sp>
+      <p:sp>
+        <p:nvSpPr>
+          <p:cNvPr id="7" name="TextBox 6"/>
+          <p:cNvSpPr txBox="1"/>
+          <p:nvPr/>
+        </p:nvSpPr>
+        <p:spPr>
+          <a:xfrm>
+            <a:off x="1371600" y="1280160"/>
+            <a:ext cx="9418320" cy="1097280"/>
+          </a:xfrm>
+          <a:prstGeom prst="rect">
+            <a:avLst/>
+          </a:prstGeom>
+          <a:noFill/>
+        </p:spPr>
+        <p:txBody>
+          <a:bodyPr wrap="square">
+            <a:spAutoFit/>
+          </a:bodyPr>
+          <a:lstStyle/>
+          <a:p>
+            <a:pPr algn="ctr"/>
+            <a:r>
+              <a:rPr sz="4600" b="1" i="0">
+                <a:solidFill>
+                  <a:srgbClr val="FFFFFF"/>
+                </a:solidFill>
+              </a:rPr>
+              <a:t>Merci à Tous !</a:t>
+            </a:r>
+          </a:p>
+        </p:txBody>
+      </p:sp>
+      <p:sp>
+        <p:nvSpPr>
+          <p:cNvPr id="8" name="TextBox 7"/>
+          <p:cNvSpPr txBox="1"/>
+          <p:nvPr/>
+        </p:nvSpPr>
+        <p:spPr>
+          <a:xfrm>
+            <a:off x="1371600" y="2606040"/>
+            <a:ext cx="9418320" cy="548640"/>
+          </a:xfrm>
+          <a:prstGeom prst="rect">
+            <a:avLst/>
+          </a:prstGeom>
+          <a:noFill/>
+        </p:spPr>
+        <p:txBody>
+          <a:bodyPr wrap="square">
+            <a:spAutoFit/>
+          </a:bodyPr>
+          <a:lstStyle/>
+          <a:p>
+            <a:pPr algn="ctr"/>
+            <a:r>
+              <a:rPr sz="1800" b="0" i="1">
+                <a:solidFill>
+                  <a:srgbClr val="CCEEEE"/>
+                </a:solidFill>
+              </a:rPr>
+              <a:t>Votre engagement fait la différence pour les enfants du monde entier.</a:t>
+            </a:r>
+          </a:p>
+        </p:txBody>
+      </p:sp>
+      <p:sp>
+        <p:nvSpPr>
+          <p:cNvPr id="9" name="TextBox 8"/>
+          <p:cNvSpPr txBox="1"/>
+          <p:nvPr/>
+        </p:nvSpPr>
+        <p:spPr>
+          <a:xfrm>
+            <a:off x="1371600" y="3246120"/>
+            <a:ext cx="9418320" cy="347472"/>
+          </a:xfrm>
+          <a:prstGeom prst="rect">
+            <a:avLst/>
+          </a:prstGeom>
+          <a:noFill/>
+        </p:spPr>
+        <p:txBody>
+          <a:bodyPr wrap="square">
+            <a:spAutoFit/>
+          </a:bodyPr>
+          <a:lstStyle/>
+          <a:p>
+            <a:pPr algn="ctr"/>
+            <a:r>
+              <a:rPr sz="1200" b="0" i="0">
+                <a:solidFill>
+                  <a:srgbClr val="88DDDD"/>
+                </a:solidFill>
+              </a:rPr>
+              <a:t>BOOK J5  ·  Journée 5  ·  Certification FIDELIS × UNICEF France × SHY-Performance</a:t>
+            </a:r>
+          </a:p>
+        </p:txBody>
+      </p:sp>
+      <p:sp>
+        <p:nvSpPr>
+          <p:cNvPr id="10" name="TextBox 9"/>
+          <p:cNvSpPr txBox="1"/>
+          <p:nvPr/>
+        </p:nvSpPr>
+        <p:spPr>
+          <a:xfrm>
+            <a:off x="1828800" y="3749039"/>
+            <a:ext cx="8531352" cy="457200"/>
+          </a:xfrm>
+          <a:prstGeom prst="rect">
+            <a:avLst/>
+          </a:prstGeom>
+          <a:noFill/>
+        </p:spPr>
+        <p:txBody>
+          <a:bodyPr wrap="square">
+            <a:spAutoFit/>
+          </a:bodyPr>
+          <a:lstStyle/>
+          <a:p>
+            <a:pPr algn="ctr"/>
+            <a:r>
+              <a:rPr sz="1400" b="0" i="1">
+                <a:solidFill>
+                  <a:srgbClr val="AADDDD"/>
+                </a:solidFill>
+              </a:rPr>
+              <a:t>« Le refus d'aujourd'hui peut être le don de demain »</a:t>
+            </a:r>
+          </a:p>
+        </p:txBody>
+      </p:sp>
+      <p:sp>
+        <p:nvSpPr>
+          <p:cNvPr id="11" name="TextBox 10"/>
+          <p:cNvSpPr txBox="1"/>
+          <p:nvPr/>
+        </p:nvSpPr>
+        <p:spPr>
+          <a:xfrm>
+            <a:off x="0" y="4572000"/>
+            <a:ext cx="12188952" cy="329184"/>
+          </a:xfrm>
+          <a:prstGeom prst="rect">
+            <a:avLst/>
+          </a:prstGeom>
+          <a:noFill/>
+        </p:spPr>
+        <p:txBody>
+          <a:bodyPr wrap="square">
+            <a:spAutoFit/>
+          </a:bodyPr>
+          <a:lstStyle/>
+          <a:p>
+            <a:pPr algn="ctr"/>
+            <a:r>
+              <a:rPr sz="1000" b="0" i="0">
+                <a:solidFill>
+                  <a:srgbClr val="88DDDD"/>
+                </a:solidFill>
+              </a:rPr>
+              <a:t>SHY-Performance  ·  Formation FIM  ·  UNICEF France  ·  V6-01062026SHY-TE</a:t>
+            </a:r>
+          </a:p>
+        </p:txBody>
+      </p:sp>
+      <p:pic>
+        <p:nvPicPr>
+          <p:cNvPr id="12" name="Picture 11" descr="shy_logo_v2.png"/>
+          <p:cNvPicPr>
+            <a:picLocks noChangeAspect="1"/>
+          </p:cNvPicPr>
+          <p:nvPr/>
+        </p:nvPicPr>
+        <p:blipFill>
+          <a:blip r:embed="rId2"/>
+          <a:stretch>
+            <a:fillRect/>
+          </a:stretch>
+        </p:blipFill>
+        <p:spPr>
+          <a:xfrm>
+            <a:off x="5669280" y="5120640"/>
+            <a:ext cx="914400" cy="896112"/>
+          </a:xfrm>
+          <a:prstGeom prst="rect">
+            <a:avLst/>
+          </a:prstGeom>
+        </p:spPr>
+      </p:pic>
+      <p:sp>
+        <p:nvSpPr>
+          <p:cNvPr id="13" name="TextBox 12"/>
+          <p:cNvSpPr txBox="1"/>
+          <p:nvPr/>
+        </p:nvSpPr>
+        <p:spPr>
+          <a:xfrm>
+            <a:off x="0" y="6035040"/>
+            <a:ext cx="12188952" cy="329184"/>
+          </a:xfrm>
+          <a:prstGeom prst="rect">
+            <a:avLst/>
+          </a:prstGeom>
+          <a:noFill/>
+        </p:spPr>
+        <p:txBody>
+          <a:bodyPr wrap="square">
+            <a:spAutoFit/>
+          </a:bodyPr>
+          <a:lstStyle/>
+          <a:p>
+            <a:pPr algn="ctr"/>
+            <a:r>
+              <a:rPr sz="1000" b="1" i="0">
+                <a:solidFill>
+                  <a:srgbClr val="FFFFFF"/>
+                </a:solidFill>
+              </a:rPr>
+              <a:t>SHY-Performance  ×  FIDELIS  ×  UNICEF France</a:t>
             </a:r>
           </a:p>
         </p:txBody>
